--- a/slides/pptx/week13.pptx
+++ b/slides/pptx/week13.pptx
@@ -2124,7 +2124,7 @@
       </p:grpSpPr>
       <p:pic>
         <p:nvPicPr>
-          <p:cNvPr id="2" name="Image 0" descr="/private/tmp/claude-501/-Users-pop7-Library-CloudStorage-OneDrive-MonsterConnectCo--Ltd-Lecture-KOSEN69---software-security/e6d6556f-17de-403d-a9a0-cf2f846149b4/scratchpad/tree/slides/pptx/assets/logo-small.png">    </p:cNvPr>
+          <p:cNvPr id="2" name="Image 0" descr="/private/tmp/claude-501/-Users-pop7-Library-CloudStorage-OneDrive-MonsterConnectCo--Ltd-Lecture-KOSEN69---software-security/f63a82af-e1ad-40ed-89c4-03c6ca776e3f/scratchpad/fix6/KOSEN69 - software-security/slides/pptx/assets/logo-small.png">    </p:cNvPr>
           <p:cNvPicPr>
             <a:picLocks noChangeAspect="1"/>
           </p:cNvPicPr>
@@ -2524,7 +2524,7 @@
       </p:sp>
       <p:pic>
         <p:nvPicPr>
-          <p:cNvPr id="8" name="Image 1" descr="/private/tmp/claude-501/-Users-pop7-Library-CloudStorage-OneDrive-MonsterConnectCo--Ltd-Lecture-KOSEN69---software-security/e6d6556f-17de-403d-a9a0-cf2f846149b4/scratchpad/tree/slides/pptx/assets/logo-small.png">    </p:cNvPr>
+          <p:cNvPr id="8" name="Image 1" descr="/private/tmp/claude-501/-Users-pop7-Library-CloudStorage-OneDrive-MonsterConnectCo--Ltd-Lecture-KOSEN69---software-security/f63a82af-e1ad-40ed-89c4-03c6ca776e3f/scratchpad/fix6/KOSEN69 - software-security/slides/pptx/assets/logo-small.png">    </p:cNvPr>
           <p:cNvPicPr>
             <a:picLocks noChangeAspect="1"/>
           </p:cNvPicPr>
@@ -2733,7 +2733,7 @@
       </p:sp>
       <p:pic>
         <p:nvPicPr>
-          <p:cNvPr id="7" name="Image 2" descr="/private/tmp/claude-501/-Users-pop7-Library-CloudStorage-OneDrive-MonsterConnectCo--Ltd-Lecture-KOSEN69---software-security/e6d6556f-17de-403d-a9a0-cf2f846149b4/scratchpad/tree/slides/pptx/assets/logo-small.png">    </p:cNvPr>
+          <p:cNvPr id="7" name="Image 2" descr="/private/tmp/claude-501/-Users-pop7-Library-CloudStorage-OneDrive-MonsterConnectCo--Ltd-Lecture-KOSEN69---software-security/f63a82af-e1ad-40ed-89c4-03c6ca776e3f/scratchpad/fix6/KOSEN69 - software-security/slides/pptx/assets/logo-small.png">    </p:cNvPr>
           <p:cNvPicPr>
             <a:picLocks noChangeAspect="1"/>
           </p:cNvPicPr>
@@ -3159,7 +3159,7 @@
       </p:sp>
       <p:pic>
         <p:nvPicPr>
-          <p:cNvPr id="13" name="Image 1" descr="/private/tmp/claude-501/-Users-pop7-Library-CloudStorage-OneDrive-MonsterConnectCo--Ltd-Lecture-KOSEN69---software-security/e6d6556f-17de-403d-a9a0-cf2f846149b4/scratchpad/tree/slides/pptx/assets/logo-small.png">    </p:cNvPr>
+          <p:cNvPr id="13" name="Image 1" descr="/private/tmp/claude-501/-Users-pop7-Library-CloudStorage-OneDrive-MonsterConnectCo--Ltd-Lecture-KOSEN69---software-security/f63a82af-e1ad-40ed-89c4-03c6ca776e3f/scratchpad/fix6/KOSEN69 - software-security/slides/pptx/assets/logo-small.png">    </p:cNvPr>
           <p:cNvPicPr>
             <a:picLocks noChangeAspect="1"/>
           </p:cNvPicPr>
@@ -3544,7 +3544,7 @@
       </p:sp>
       <p:pic>
         <p:nvPicPr>
-          <p:cNvPr id="10" name="Image 1" descr="/private/tmp/claude-501/-Users-pop7-Library-CloudStorage-OneDrive-MonsterConnectCo--Ltd-Lecture-KOSEN69---software-security/e6d6556f-17de-403d-a9a0-cf2f846149b4/scratchpad/tree/slides/pptx/assets/logo-small.png">    </p:cNvPr>
+          <p:cNvPr id="10" name="Image 1" descr="/private/tmp/claude-501/-Users-pop7-Library-CloudStorage-OneDrive-MonsterConnectCo--Ltd-Lecture-KOSEN69---software-security/f63a82af-e1ad-40ed-89c4-03c6ca776e3f/scratchpad/fix6/KOSEN69 - software-security/slides/pptx/assets/logo-small.png">    </p:cNvPr>
           <p:cNvPicPr>
             <a:picLocks noChangeAspect="1"/>
           </p:cNvPicPr>
@@ -3845,7 +3845,7 @@
       </p:sp>
       <p:pic>
         <p:nvPicPr>
-          <p:cNvPr id="8" name="Image 1" descr="/private/tmp/claude-501/-Users-pop7-Library-CloudStorage-OneDrive-MonsterConnectCo--Ltd-Lecture-KOSEN69---software-security/e6d6556f-17de-403d-a9a0-cf2f846149b4/scratchpad/tree/slides/pptx/assets/logo-small.png">    </p:cNvPr>
+          <p:cNvPr id="8" name="Image 1" descr="/private/tmp/claude-501/-Users-pop7-Library-CloudStorage-OneDrive-MonsterConnectCo--Ltd-Lecture-KOSEN69---software-security/f63a82af-e1ad-40ed-89c4-03c6ca776e3f/scratchpad/fix6/KOSEN69 - software-security/slides/pptx/assets/logo-small.png">    </p:cNvPr>
           <p:cNvPicPr>
             <a:picLocks noChangeAspect="1"/>
           </p:cNvPicPr>
@@ -3979,7 +3979,7 @@
       </p:sp>
       <p:pic>
         <p:nvPicPr>
-          <p:cNvPr id="4" name="Image 0" descr="/private/tmp/claude-501/-Users-pop7-Library-CloudStorage-OneDrive-MonsterConnectCo--Ltd-Lecture-KOSEN69---software-security/e6d6556f-17de-403d-a9a0-cf2f846149b4/scratchpad/tree/slides/pptx/assets/logo-small.png">    </p:cNvPr>
+          <p:cNvPr id="4" name="Image 0" descr="/private/tmp/claude-501/-Users-pop7-Library-CloudStorage-OneDrive-MonsterConnectCo--Ltd-Lecture-KOSEN69---software-security/f63a82af-e1ad-40ed-89c4-03c6ca776e3f/scratchpad/fix6/KOSEN69 - software-security/slides/pptx/assets/logo-small.png">    </p:cNvPr>
           <p:cNvPicPr>
             <a:picLocks noChangeAspect="1"/>
           </p:cNvPicPr>
@@ -4322,7 +4322,7 @@
       </p:sp>
       <p:pic>
         <p:nvPicPr>
-          <p:cNvPr id="8" name="Image 1" descr="/private/tmp/claude-501/-Users-pop7-Library-CloudStorage-OneDrive-MonsterConnectCo--Ltd-Lecture-KOSEN69---software-security/e6d6556f-17de-403d-a9a0-cf2f846149b4/scratchpad/tree/slides/pptx/assets/logo-small.png">    </p:cNvPr>
+          <p:cNvPr id="8" name="Image 1" descr="/private/tmp/claude-501/-Users-pop7-Library-CloudStorage-OneDrive-MonsterConnectCo--Ltd-Lecture-KOSEN69---software-security/f63a82af-e1ad-40ed-89c4-03c6ca776e3f/scratchpad/fix6/KOSEN69 - software-security/slides/pptx/assets/logo-small.png">    </p:cNvPr>
           <p:cNvPicPr>
             <a:picLocks noChangeAspect="1"/>
           </p:cNvPicPr>
@@ -4623,7 +4623,7 @@
       </p:sp>
       <p:pic>
         <p:nvPicPr>
-          <p:cNvPr id="8" name="Image 1" descr="/private/tmp/claude-501/-Users-pop7-Library-CloudStorage-OneDrive-MonsterConnectCo--Ltd-Lecture-KOSEN69---software-security/e6d6556f-17de-403d-a9a0-cf2f846149b4/scratchpad/tree/slides/pptx/assets/logo-small.png">    </p:cNvPr>
+          <p:cNvPr id="8" name="Image 1" descr="/private/tmp/claude-501/-Users-pop7-Library-CloudStorage-OneDrive-MonsterConnectCo--Ltd-Lecture-KOSEN69---software-security/f63a82af-e1ad-40ed-89c4-03c6ca776e3f/scratchpad/fix6/KOSEN69 - software-security/slides/pptx/assets/logo-small.png">    </p:cNvPr>
           <p:cNvPicPr>
             <a:picLocks noChangeAspect="1"/>
           </p:cNvPicPr>
@@ -4924,7 +4924,7 @@
       </p:sp>
       <p:pic>
         <p:nvPicPr>
-          <p:cNvPr id="8" name="Image 1" descr="/private/tmp/claude-501/-Users-pop7-Library-CloudStorage-OneDrive-MonsterConnectCo--Ltd-Lecture-KOSEN69---software-security/e6d6556f-17de-403d-a9a0-cf2f846149b4/scratchpad/tree/slides/pptx/assets/logo-small.png">    </p:cNvPr>
+          <p:cNvPr id="8" name="Image 1" descr="/private/tmp/claude-501/-Users-pop7-Library-CloudStorage-OneDrive-MonsterConnectCo--Ltd-Lecture-KOSEN69---software-security/f63a82af-e1ad-40ed-89c4-03c6ca776e3f/scratchpad/fix6/KOSEN69 - software-security/slides/pptx/assets/logo-small.png">    </p:cNvPr>
           <p:cNvPicPr>
             <a:picLocks noChangeAspect="1"/>
           </p:cNvPicPr>
@@ -5334,7 +5334,7 @@
       </p:sp>
       <p:pic>
         <p:nvPicPr>
-          <p:cNvPr id="11" name="Image 1" descr="/private/tmp/claude-501/-Users-pop7-Library-CloudStorage-OneDrive-MonsterConnectCo--Ltd-Lecture-KOSEN69---software-security/e6d6556f-17de-403d-a9a0-cf2f846149b4/scratchpad/tree/slides/pptx/assets/logo-small.png">    </p:cNvPr>
+          <p:cNvPr id="11" name="Image 1" descr="/private/tmp/claude-501/-Users-pop7-Library-CloudStorage-OneDrive-MonsterConnectCo--Ltd-Lecture-KOSEN69---software-security/f63a82af-e1ad-40ed-89c4-03c6ca776e3f/scratchpad/fix6/KOSEN69 - software-security/slides/pptx/assets/logo-small.png">    </p:cNvPr>
           <p:cNvPicPr>
             <a:picLocks noChangeAspect="1"/>
           </p:cNvPicPr>
@@ -5635,7 +5635,7 @@
       </p:sp>
       <p:pic>
         <p:nvPicPr>
-          <p:cNvPr id="8" name="Image 1" descr="/private/tmp/claude-501/-Users-pop7-Library-CloudStorage-OneDrive-MonsterConnectCo--Ltd-Lecture-KOSEN69---software-security/e6d6556f-17de-403d-a9a0-cf2f846149b4/scratchpad/tree/slides/pptx/assets/logo-small.png">    </p:cNvPr>
+          <p:cNvPr id="8" name="Image 1" descr="/private/tmp/claude-501/-Users-pop7-Library-CloudStorage-OneDrive-MonsterConnectCo--Ltd-Lecture-KOSEN69---software-security/f63a82af-e1ad-40ed-89c4-03c6ca776e3f/scratchpad/fix6/KOSEN69 - software-security/slides/pptx/assets/logo-small.png">    </p:cNvPr>
           <p:cNvPicPr>
             <a:picLocks noChangeAspect="1"/>
           </p:cNvPicPr>
@@ -5936,7 +5936,7 @@
       </p:sp>
       <p:pic>
         <p:nvPicPr>
-          <p:cNvPr id="8" name="Image 1" descr="/private/tmp/claude-501/-Users-pop7-Library-CloudStorage-OneDrive-MonsterConnectCo--Ltd-Lecture-KOSEN69---software-security/e6d6556f-17de-403d-a9a0-cf2f846149b4/scratchpad/tree/slides/pptx/assets/logo-small.png">    </p:cNvPr>
+          <p:cNvPr id="8" name="Image 1" descr="/private/tmp/claude-501/-Users-pop7-Library-CloudStorage-OneDrive-MonsterConnectCo--Ltd-Lecture-KOSEN69---software-security/f63a82af-e1ad-40ed-89c4-03c6ca776e3f/scratchpad/fix6/KOSEN69 - software-security/slides/pptx/assets/logo-small.png">    </p:cNvPr>
           <p:cNvPicPr>
             <a:picLocks noChangeAspect="1"/>
           </p:cNvPicPr>
@@ -6089,11 +6089,11 @@
         <p:spPr>
           <a:xfrm>
             <a:off x="457200" y="1325880"/>
-            <a:ext cx="8229600" cy="932688"/>
+            <a:ext cx="8229600" cy="1591056"/>
           </a:xfrm>
           <a:prstGeom prst="roundRect">
             <a:avLst>
-              <a:gd name="adj" fmla="val 5882"/>
+              <a:gd name="adj" fmla="val 3448"/>
             </a:avLst>
           </a:prstGeom>
           <a:solidFill>
@@ -6116,7 +6116,7 @@
         <p:spPr>
           <a:xfrm>
             <a:off x="640080" y="1399032"/>
-            <a:ext cx="7863840" cy="786384"/>
+            <a:ext cx="7863840" cy="1444752"/>
           </a:xfrm>
           <a:prstGeom prst="rect">
             <a:avLst/>
@@ -6142,7 +6142,7 @@
                 <a:ea typeface="Courier New" pitchFamily="34" charset="-122"/>
                 <a:cs typeface="Courier New" pitchFamily="34" charset="-120"/>
               </a:rPr>
-              <a:t>docker run --rm -v "$PWD:/src" aquasec/trivy config /src                    # misconfig</a:t>
+              <a:t># misconfig scan (Dockerfiles)</a:t>
             </a:r>
             <a:endParaRPr lang="en-US" sz="1150" dirty="0"/>
           </a:p>
@@ -6159,7 +6159,7 @@
                 <a:ea typeface="Courier New" pitchFamily="34" charset="-122"/>
                 <a:cs typeface="Courier New" pitchFamily="34" charset="-120"/>
               </a:rPr>
-              <a:t>docker run --rm -v /var/run/docker.sock:/var/run/docker.sock \</a:t>
+              <a:t>docker run --rm -v "${PWD}:/src" aquasec/trivy:latest \</a:t>
             </a:r>
             <a:endParaRPr lang="en-US" sz="1150" dirty="0"/>
           </a:p>
@@ -6176,10 +6176,61 @@
                 <a:ea typeface="Courier New" pitchFamily="34" charset="-122"/>
                 <a:cs typeface="Courier New" pitchFamily="34" charset="-120"/>
               </a:rPr>
-              <a:t>  aquasec/trivy image week13-hardened:lab                              # image CVEs</a:t>
+              <a:t>  config --severity MEDIUM,HIGH,CRITICAL /src</a:t>
             </a:r>
             <a:endParaRPr lang="en-US" sz="1150" dirty="0"/>
           </a:p>
+          <a:p>
+            <a:pPr indent="0" marL="0">
+              <a:buNone/>
+            </a:pPr>
+            <a:r>
+              <a:rPr lang="en-US" sz="1150" dirty="0">
+                <a:solidFill>
+                  <a:srgbClr val="9FE7D6"/>
+                </a:solidFill>
+                <a:latin typeface="Courier New" pitchFamily="34" charset="0"/>
+                <a:ea typeface="Courier New" pitchFamily="34" charset="-122"/>
+                <a:cs typeface="Courier New" pitchFamily="34" charset="-120"/>
+              </a:rPr>
+              <a:t># image CVE scan</a:t>
+            </a:r>
+            <a:endParaRPr lang="en-US" sz="1150" dirty="0"/>
+          </a:p>
+          <a:p>
+            <a:pPr indent="0" marL="0">
+              <a:buNone/>
+            </a:pPr>
+            <a:r>
+              <a:rPr lang="en-US" sz="1150" dirty="0">
+                <a:solidFill>
+                  <a:srgbClr val="9FE7D6"/>
+                </a:solidFill>
+                <a:latin typeface="Courier New" pitchFamily="34" charset="0"/>
+                <a:ea typeface="Courier New" pitchFamily="34" charset="-122"/>
+                <a:cs typeface="Courier New" pitchFamily="34" charset="-120"/>
+              </a:rPr>
+              <a:t>docker run --rm -v /var/run/docker.sock:/var/run/docker.sock \</a:t>
+            </a:r>
+            <a:endParaRPr lang="en-US" sz="1150" dirty="0"/>
+          </a:p>
+          <a:p>
+            <a:pPr indent="0" marL="0">
+              <a:buNone/>
+            </a:pPr>
+            <a:r>
+              <a:rPr lang="en-US" sz="1150" dirty="0">
+                <a:solidFill>
+                  <a:srgbClr val="9FE7D6"/>
+                </a:solidFill>
+                <a:latin typeface="Courier New" pitchFamily="34" charset="0"/>
+                <a:ea typeface="Courier New" pitchFamily="34" charset="-122"/>
+                <a:cs typeface="Courier New" pitchFamily="34" charset="-120"/>
+              </a:rPr>
+              <a:t>  aquasec/trivy:latest image --severity HIGH,CRITICAL week13-hardened:lab</a:t>
+            </a:r>
+            <a:endParaRPr lang="en-US" sz="1150" dirty="0"/>
+          </a:p>
         </p:txBody>
       </p:sp>
       <p:sp>
@@ -6190,12 +6241,12 @@
         </p:nvSpPr>
         <p:spPr>
           <a:xfrm>
-            <a:off x="457200" y="2423160"/>
-            <a:ext cx="8229600" cy="1810512"/>
+            <a:off x="457200" y="3081528"/>
+            <a:ext cx="8229600" cy="987552"/>
           </a:xfrm>
           <a:prstGeom prst="roundRect">
             <a:avLst>
-              <a:gd name="adj" fmla="val 4040"/>
+              <a:gd name="adj" fmla="val 7407"/>
             </a:avLst>
           </a:prstGeom>
           <a:solidFill>
@@ -6219,8 +6270,8 @@
         </p:nvSpPr>
         <p:spPr>
           <a:xfrm>
-            <a:off x="731520" y="2532888"/>
-            <a:ext cx="7680960" cy="1591056"/>
+            <a:off x="731520" y="3191256"/>
+            <a:ext cx="7680960" cy="768096"/>
           </a:xfrm>
           <a:prstGeom prst="rect">
             <a:avLst/>
@@ -6254,83 +6305,41 @@
             </a:r>
             <a:endParaRPr lang="en-US" sz="1400" dirty="0"/>
           </a:p>
-          <a:p>
-            <a:pPr marL="342900" indent="-342900">
-              <a:spcAft>
-                <a:spcPts val="600"/>
-              </a:spcAft>
-              <a:buSzPct val="100000"/>
-              <a:buChar char="•"/>
-            </a:pPr>
-            <a:r>
-              <a:rPr lang="en-US" sz="1400" dirty="0">
-                <a:solidFill>
-                  <a:srgbClr val="1F2937"/>
+        </p:txBody>
+      </p:sp>
+      <p:sp>
+        <p:nvSpPr>
+          <p:cNvPr id="9" name="Text 6"/>
+          <p:cNvSpPr/>
+          <p:nvPr/>
+        </p:nvSpPr>
+        <p:spPr>
+          <a:xfrm>
+            <a:off x="457200" y="4800600"/>
+            <a:ext cx="6949440" cy="274320"/>
+          </a:xfrm>
+          <a:prstGeom prst="rect">
+            <a:avLst/>
+          </a:prstGeom>
+          <a:noFill/>
+          <a:ln/>
+        </p:spPr>
+        <p:txBody>
+          <a:bodyPr wrap="square" lIns="0" tIns="0" rIns="0" bIns="0" rtlCol="0" anchor="ctr"/>
+          <a:lstStyle/>
+          <a:p>
+            <a:pPr indent="0" marL="0">
+              <a:buNone/>
+            </a:pPr>
+            <a:r>
+              <a:rPr lang="en-US" sz="900" dirty="0">
+                <a:solidFill>
+                  <a:srgbClr val="64748B"/>
                 </a:solidFill>
                 <a:latin typeface="Calibri" pitchFamily="34" charset="0"/>
                 <a:ea typeface="Calibri" pitchFamily="34" charset="-122"/>
                 <a:cs typeface="Calibri" pitchFamily="34" charset="-120"/>
               </a:rPr>
-              <a:t>@sha256:... digest pins, not just a version tag — a tag can be repointed later, a digest can't</a:t>
-            </a:r>
-            <a:endParaRPr lang="en-US" sz="1400" dirty="0"/>
-          </a:p>
-          <a:p>
-            <a:pPr marL="342900" indent="-342900">
-              <a:spcAft>
-                <a:spcPts val="600"/>
-              </a:spcAft>
-              <a:buSzPct val="100000"/>
-              <a:buChar char="•"/>
-            </a:pPr>
-            <a:r>
-              <a:rPr lang="en-US" sz="1400" dirty="0">
-                <a:solidFill>
-                  <a:srgbClr val="1F2937"/>
-                </a:solidFill>
-                <a:latin typeface="Calibri" pitchFamily="34" charset="0"/>
-                <a:ea typeface="Calibri" pitchFamily="34" charset="-122"/>
-                <a:cs typeface="Calibri" pitchFamily="34" charset="-120"/>
-              </a:rPr>
-              <a:t>Re-scan to prove reduced findings</a:t>
-            </a:r>
-            <a:endParaRPr lang="en-US" sz="1400" dirty="0"/>
-          </a:p>
-        </p:txBody>
-      </p:sp>
-      <p:sp>
-        <p:nvSpPr>
-          <p:cNvPr id="9" name="Text 6"/>
-          <p:cNvSpPr/>
-          <p:nvPr/>
-        </p:nvSpPr>
-        <p:spPr>
-          <a:xfrm>
-            <a:off x="457200" y="4800600"/>
-            <a:ext cx="6949440" cy="274320"/>
-          </a:xfrm>
-          <a:prstGeom prst="rect">
-            <a:avLst/>
-          </a:prstGeom>
-          <a:noFill/>
-          <a:ln/>
-        </p:spPr>
-        <p:txBody>
-          <a:bodyPr wrap="square" lIns="0" tIns="0" rIns="0" bIns="0" rtlCol="0" anchor="ctr"/>
-          <a:lstStyle/>
-          <a:p>
-            <a:pPr indent="0" marL="0">
-              <a:buNone/>
-            </a:pPr>
-            <a:r>
-              <a:rPr lang="en-US" sz="900" dirty="0">
-                <a:solidFill>
-                  <a:srgbClr val="64748B"/>
-                </a:solidFill>
-                <a:latin typeface="Calibri" pitchFamily="34" charset="0"/>
-                <a:ea typeface="Calibri" pitchFamily="34" charset="-122"/>
-                <a:cs typeface="Calibri" pitchFamily="34" charset="-120"/>
-              </a:rPr>
               <a:t>Software Security · Week 13</a:t>
             </a:r>
             <a:endParaRPr lang="en-US" sz="900" dirty="0"/>
@@ -6339,7 +6348,7 @@
       </p:sp>
       <p:pic>
         <p:nvPicPr>
-          <p:cNvPr id="10" name="Image 1" descr="/private/tmp/claude-501/-Users-pop7-Library-CloudStorage-OneDrive-MonsterConnectCo--Ltd-Lecture-KOSEN69---software-security/e6d6556f-17de-403d-a9a0-cf2f846149b4/scratchpad/tree/slides/pptx/assets/logo-small.png">    </p:cNvPr>
+          <p:cNvPr id="10" name="Image 1" descr="/private/tmp/claude-501/-Users-pop7-Library-CloudStorage-OneDrive-MonsterConnectCo--Ltd-Lecture-KOSEN69---software-security/f63a82af-e1ad-40ed-89c4-03c6ca776e3f/scratchpad/fix6/KOSEN69 - software-security/slides/pptx/assets/logo-small.png">    </p:cNvPr>
           <p:cNvPicPr>
             <a:picLocks noChangeAspect="1"/>
           </p:cNvPicPr>
@@ -6492,11 +6501,11 @@
         <p:spPr>
           <a:xfrm>
             <a:off x="457200" y="1325880"/>
-            <a:ext cx="8229600" cy="987552"/>
+            <a:ext cx="8229600" cy="1810512"/>
           </a:xfrm>
           <a:prstGeom prst="roundRect">
             <a:avLst>
-              <a:gd name="adj" fmla="val 7407"/>
+              <a:gd name="adj" fmla="val 4040"/>
             </a:avLst>
           </a:prstGeom>
           <a:solidFill>
@@ -6521,7 +6530,7 @@
         <p:spPr>
           <a:xfrm>
             <a:off x="731520" y="1435608"/>
-            <a:ext cx="7680960" cy="768096"/>
+            <a:ext cx="7680960" cy="1591056"/>
           </a:xfrm>
           <a:prstGeom prst="rect">
             <a:avLst/>
@@ -6551,45 +6560,87 @@
                 <a:ea typeface="Calibri" pitchFamily="34" charset="-122"/>
                 <a:cs typeface="Calibri" pitchFamily="34" charset="-120"/>
               </a:rPr>
-              <a:t>Trivy only catches 3 of 6 planted defects (:latest, root user, secret-in-ENV) — COPY . ., chmod -R 777, and unpinned pip install need manual review, no rule fires</a:t>
+              <a:t>@sha256:... digest pins, not just a version tag — a tag can be repointed later, a digest can't</a:t>
             </a:r>
             <a:endParaRPr lang="en-US" sz="1400" dirty="0"/>
           </a:p>
-        </p:txBody>
-      </p:sp>
-      <p:sp>
-        <p:nvSpPr>
-          <p:cNvPr id="7" name="Text 4"/>
-          <p:cNvSpPr/>
-          <p:nvPr/>
-        </p:nvSpPr>
-        <p:spPr>
-          <a:xfrm>
-            <a:off x="457200" y="4800600"/>
-            <a:ext cx="6949440" cy="274320"/>
-          </a:xfrm>
-          <a:prstGeom prst="rect">
-            <a:avLst/>
-          </a:prstGeom>
-          <a:noFill/>
-          <a:ln/>
-        </p:spPr>
-        <p:txBody>
-          <a:bodyPr wrap="square" lIns="0" tIns="0" rIns="0" bIns="0" rtlCol="0" anchor="ctr"/>
-          <a:lstStyle/>
-          <a:p>
-            <a:pPr indent="0" marL="0">
-              <a:buNone/>
-            </a:pPr>
-            <a:r>
-              <a:rPr lang="en-US" sz="900" dirty="0">
-                <a:solidFill>
-                  <a:srgbClr val="64748B"/>
+          <a:p>
+            <a:pPr marL="342900" indent="-342900">
+              <a:spcAft>
+                <a:spcPts val="600"/>
+              </a:spcAft>
+              <a:buSzPct val="100000"/>
+              <a:buChar char="•"/>
+            </a:pPr>
+            <a:r>
+              <a:rPr lang="en-US" sz="1400" dirty="0">
+                <a:solidFill>
+                  <a:srgbClr val="1F2937"/>
                 </a:solidFill>
                 <a:latin typeface="Calibri" pitchFamily="34" charset="0"/>
                 <a:ea typeface="Calibri" pitchFamily="34" charset="-122"/>
                 <a:cs typeface="Calibri" pitchFamily="34" charset="-120"/>
               </a:rPr>
+              <a:t>Re-scan to prove reduced findings</a:t>
+            </a:r>
+            <a:endParaRPr lang="en-US" sz="1400" dirty="0"/>
+          </a:p>
+          <a:p>
+            <a:pPr marL="342900" indent="-342900">
+              <a:spcAft>
+                <a:spcPts val="600"/>
+              </a:spcAft>
+              <a:buSzPct val="100000"/>
+              <a:buChar char="•"/>
+            </a:pPr>
+            <a:r>
+              <a:rPr lang="en-US" sz="1400" dirty="0">
+                <a:solidFill>
+                  <a:srgbClr val="1F2937"/>
+                </a:solidFill>
+                <a:latin typeface="Calibri" pitchFamily="34" charset="0"/>
+                <a:ea typeface="Calibri" pitchFamily="34" charset="-122"/>
+                <a:cs typeface="Calibri" pitchFamily="34" charset="-120"/>
+              </a:rPr>
+              <a:t>Trivy only catches 3 of 6 planted defects (:latest, root user, secret-in-ENV) — COPY . ., chmod -R 777, and unpinned pip install need manual review, no rule fires</a:t>
+            </a:r>
+            <a:endParaRPr lang="en-US" sz="1400" dirty="0"/>
+          </a:p>
+        </p:txBody>
+      </p:sp>
+      <p:sp>
+        <p:nvSpPr>
+          <p:cNvPr id="7" name="Text 4"/>
+          <p:cNvSpPr/>
+          <p:nvPr/>
+        </p:nvSpPr>
+        <p:spPr>
+          <a:xfrm>
+            <a:off x="457200" y="4800600"/>
+            <a:ext cx="6949440" cy="274320"/>
+          </a:xfrm>
+          <a:prstGeom prst="rect">
+            <a:avLst/>
+          </a:prstGeom>
+          <a:noFill/>
+          <a:ln/>
+        </p:spPr>
+        <p:txBody>
+          <a:bodyPr wrap="square" lIns="0" tIns="0" rIns="0" bIns="0" rtlCol="0" anchor="ctr"/>
+          <a:lstStyle/>
+          <a:p>
+            <a:pPr indent="0" marL="0">
+              <a:buNone/>
+            </a:pPr>
+            <a:r>
+              <a:rPr lang="en-US" sz="900" dirty="0">
+                <a:solidFill>
+                  <a:srgbClr val="64748B"/>
+                </a:solidFill>
+                <a:latin typeface="Calibri" pitchFamily="34" charset="0"/>
+                <a:ea typeface="Calibri" pitchFamily="34" charset="-122"/>
+                <a:cs typeface="Calibri" pitchFamily="34" charset="-120"/>
+              </a:rPr>
               <a:t>Software Security · Week 13</a:t>
             </a:r>
             <a:endParaRPr lang="en-US" sz="900" dirty="0"/>
@@ -6598,7 +6649,7 @@
       </p:sp>
       <p:pic>
         <p:nvPicPr>
-          <p:cNvPr id="8" name="Image 1" descr="/private/tmp/claude-501/-Users-pop7-Library-CloudStorage-OneDrive-MonsterConnectCo--Ltd-Lecture-KOSEN69---software-security/e6d6556f-17de-403d-a9a0-cf2f846149b4/scratchpad/tree/slides/pptx/assets/logo-small.png">    </p:cNvPr>
+          <p:cNvPr id="8" name="Image 1" descr="/private/tmp/claude-501/-Users-pop7-Library-CloudStorage-OneDrive-MonsterConnectCo--Ltd-Lecture-KOSEN69---software-security/f63a82af-e1ad-40ed-89c4-03c6ca776e3f/scratchpad/fix6/KOSEN69 - software-security/slides/pptx/assets/logo-small.png">    </p:cNvPr>
           <p:cNvPicPr>
             <a:picLocks noChangeAspect="1"/>
           </p:cNvPicPr>

--- a/slides/pptx/week13.pptx
+++ b/slides/pptx/week13.pptx
@@ -20,9 +20,14 @@
     <p:sldId id="268" r:id="rId14"/>
     <p:sldId id="269" r:id="rId15"/>
     <p:sldId id="270" r:id="rId16"/>
+    <p:sldId id="271" r:id="rId17"/>
+    <p:sldId id="272" r:id="rId18"/>
+    <p:sldId id="273" r:id="rId19"/>
+    <p:sldId id="274" r:id="rId20"/>
+    <p:sldId id="275" r:id="rId21"/>
   </p:sldIdLst>
   <p:notesMasterIdLst>
-    <p:notesMasterId r:id="rId17"/>
+    <p:notesMasterId r:id="rId22"/>
   </p:notesMasterIdLst>
   <p:sldSz cx="9144000" cy="5143500"/>
   <p:notesSz cx="5143500" cy="9144000"/>
@@ -604,7 +609,7 @@
           <a:p>
             <a:r>
               <a:rPr lang="en-US" dirty="0"/>
-              <a:t>Awareness only (K8s is its own course). Key takeaways: a privileged pod ≈ host root; mounted service-account tokens are a lateral-movement prize. Keep it brief. ~3 min.</a:t>
+              <a:t>Drive it: insecure + "docker history" (still leaks) → "--no-trunc" (Task 3) → "ls -la /app" (Dockerfile.insecure is in the image). Then flip to hardened: no secret row, no build stage, and no ls at all — distroless. Output was captured from real builds, nothing runs live. ~3 min.</a:t>
             </a:r>
             <a:endParaRPr lang="en-US" dirty="0"/>
           </a:p>
@@ -692,8 +697,7 @@
           <a:p>
             <a:r>
               <a:rPr lang="en-US" dirty="0"/>
-              <a:t>The whole lab's argument as one picture — walk it row by row once, landing on the Trivy split at the bottom: 3 rows have a rule ID to cite, 4 don't. That 3-of-7 (or "3 of 6" container-only, per the earlier slide) split is Task 1's actual grading rubric, not trivia. ~5 min.
-Diagram: The same app as two container images side by side, insecure vs hardened, six layers compared: mutable :latest tag vs a pinned digest, a baked-in secret vs runtime injection, root user vs distroless non-root, COPY-everything vs a minimal context, world-writable permissions vs read-only, and an unpinned pip install vs a discarded build stage. Below both, the same argument one layer up: the wildcard IAM policy vs the scoped one. The conclusion: Trivy flags only three of the seven defects shown here — the tag, the root user, and the secret. COPY .., chmod 777, the unpinned install, and the IAM JSON all need manual review; there is no rule for any of them.</a:t>
+              <a:t>The classic trio behind most breaches. `0.0.0.0/0` on a DB port = the internet can reach your database. Default creds = free entry. Principle: deny by default, open deliberately (echoes W6 access control). ~4 min.</a:t>
             </a:r>
             <a:endParaRPr lang="en-US" dirty="0"/>
           </a:p>
@@ -781,7 +785,7 @@
           <a:p>
             <a:r>
               <a:rPr lang="en-US" dirty="0"/>
-              <a:t>Explain before lab: 9 flags total, two categories only — no separate bucket/storage flag, no IaC/localstack target exists in this lab. Find AND explain (why it's a finding, which fix applies) = the flag. Q6 of the quiz asks for one misconfig they explained + the principle it violated. ~3 min.</a:t>
+              <a:t>Hands-on — this is the lab's insecure→hardened Dockerfile, always run dockerized (never a bare local trivy binary), against week13-hardened:lab (not a generic myapp:lab). The Trivy-blind-spot point is the actual lesson of this lab, not an aside — half the graded findings need a human, not a tool. Re-scan to prove improvement. ~5 min.</a:t>
             </a:r>
             <a:endParaRPr lang="en-US" dirty="0"/>
           </a:p>
@@ -869,7 +873,7 @@
           <a:p>
             <a:r>
               <a:rPr lang="en-US" dirty="0"/>
-              <a:t>Before/after artifacts + the trivy delta prove the container-side fix; IAM has no scanner delta to show, it's reasoned/written. Don't let "trivy over Dockerfiles + IAM JSON" stand — that's the exact misconception this lab's own history already fixed once. AI-resilient tasks count.</a:t>
+              <a:t>Hands-on — this is the lab's insecure→hardened Dockerfile, always run dockerized (never a bare local trivy binary), against week13-hardened:lab (not a generic myapp:lab). The Trivy-blind-spot point is the actual lesson of this lab, not an aside — half the graded findings need a human, not a tool. Re-scan to prove improvement. ~5 min.</a:t>
             </a:r>
             <a:endParaRPr lang="en-US" dirty="0"/>
           </a:p>
@@ -957,7 +961,7 @@
           <a:p>
             <a:r>
               <a:rPr lang="en-US" dirty="0"/>
-              <a:t>Recap. Cold-call: "what does a `*:*` IAM policy cost you if the key leaks?" (everything — full blast radius). "Scan in CI" sets up W15. ~2 min.</a:t>
+              <a:t>Press "fix only what Trivy flags": Failures 0, three defects still in the file — a clean scan is not a clean image. Then "a tag, not a digest": DS-0001 passes python:3.11-slim, but harden.md row 1 wants @sha256. Rules checked against real Trivy 0.76.1 on all 96 combinations: 4 → 0 matches scan.sh. ~4 min.</a:t>
             </a:r>
             <a:endParaRPr lang="en-US" dirty="0"/>
           </a:p>
@@ -1045,7 +1049,7 @@
           <a:p>
             <a:r>
               <a:rPr lang="en-US" dirty="0"/>
-              <a:t>Cliffhanger: "Next week — the newest attack surface: make an AI assistant ignore its rules and leak secrets, with nothing but text."</a:t>
+              <a:t>Awareness only (K8s is its own course). Key takeaways: a privileged pod ≈ host root; mounted service-account tokens are a lateral-movement prize. Keep it brief. ~3 min.</a:t>
             </a:r>
             <a:endParaRPr lang="en-US" dirty="0"/>
           </a:p>
@@ -1069,6 +1073,359 @@
             <a:fld id="{F7021451-1387-4CA6-816F-3879F97B5CBC}" type="slidenum">
               <a:rPr lang="en-US"/>
               <a:t>15</a:t>
+            </a:fld>
+            <a:endParaRPr lang="en-US"/>
+          </a:p>
+        </p:txBody>
+      </p:sp>
+    </p:spTree>
+    <p:extLst>
+      <p:ext uri="{BB962C8B-B14F-4D97-AF65-F5344CB8AC3E}">
+        <p14:creationId xmlns:p14="http://schemas.microsoft.com/office/powerpoint/2010/main" val="1024086991"/>
+      </p:ext>
+    </p:extLst>
+  </p:cSld>
+  <p:clrMapOvr>
+    <a:masterClrMapping/>
+  </p:clrMapOvr>
+</p:notes>
+</file>
+
+<file path=ppt/notesSlides/notesSlide16.xml><?xml version="1.0" encoding="utf-8"?>
+<p:notes xmlns:a="http://schemas.openxmlformats.org/drawingml/2006/main" xmlns:r="http://schemas.openxmlformats.org/officeDocument/2006/relationships" xmlns:p="http://schemas.openxmlformats.org/presentationml/2006/main">
+  <p:cSld>
+    <p:spTree>
+      <p:nvGrpSpPr>
+        <p:cNvPr id="1" name=""/>
+        <p:cNvGrpSpPr/>
+        <p:nvPr/>
+      </p:nvGrpSpPr>
+      <p:grpSpPr>
+        <a:xfrm>
+          <a:off x="0" y="0"/>
+          <a:ext cx="0" cy="0"/>
+          <a:chOff x="0" y="0"/>
+          <a:chExt cx="0" cy="0"/>
+        </a:xfrm>
+      </p:grpSpPr>
+      <p:sp>
+        <p:nvSpPr>
+          <p:cNvPr id="2" name="Slide Image Placeholder 1"/>
+          <p:cNvSpPr>
+            <a:spLocks noGrp="1" noRot="1" noChangeAspect="1"/>
+          </p:cNvSpPr>
+          <p:nvPr>
+            <p:ph type="sldImg"/>
+          </p:nvPr>
+        </p:nvSpPr>
+        <p:spPr/>
+      </p:sp>
+      <p:sp>
+        <p:nvSpPr>
+          <p:cNvPr id="3" name="Notes Placeholder 2"/>
+          <p:cNvSpPr>
+            <a:spLocks noGrp="1"/>
+          </p:cNvSpPr>
+          <p:nvPr>
+            <p:ph type="body" idx="1"/>
+          </p:nvPr>
+        </p:nvSpPr>
+        <p:spPr/>
+        <p:txBody>
+          <a:bodyPr/>
+          <a:lstStyle/>
+          <a:p>
+            <a:r>
+              <a:rPr lang="en-US" dirty="0"/>
+              <a:t>The whole lab's argument as one picture — walk it row by row once, landing on the Trivy split at the bottom: 3 rows have a rule ID to cite, 4 don't. That 3-of-7 (or "3 of 6" container-only, per the earlier slide) split is Task 1's actual grading rubric, not trivia. ~5 min.
+Diagram: The same app as two container images side by side, insecure vs hardened, six layers compared: mutable :latest tag vs a pinned digest, a baked-in secret vs runtime injection, root user vs distroless non-root, COPY-everything vs a minimal context, world-writable permissions vs read-only, and an unpinned pip install vs a discarded build stage. Below both, the same argument one layer up: the wildcard IAM policy vs the scoped one. The conclusion: Trivy flags only three of the seven defects shown here — the tag, the root user, and the secret. COPY .., chmod 777, the unpinned install, and the IAM JSON all need manual review; there is no rule for any of them.</a:t>
+            </a:r>
+            <a:endParaRPr lang="en-US" dirty="0"/>
+          </a:p>
+        </p:txBody>
+      </p:sp>
+      <p:sp>
+        <p:nvSpPr>
+          <p:cNvPr id="4" name="Slide Number Placeholder 3"/>
+          <p:cNvSpPr>
+            <a:spLocks noGrp="1"/>
+          </p:cNvSpPr>
+          <p:nvPr>
+            <p:ph type="sldNum" sz="quarter" idx="10"/>
+          </p:nvPr>
+        </p:nvSpPr>
+        <p:spPr/>
+        <p:txBody>
+          <a:bodyPr/>
+          <a:lstStyle/>
+          <a:p>
+            <a:fld id="{F7021451-1387-4CA6-816F-3879F97B5CBC}" type="slidenum">
+              <a:rPr lang="en-US"/>
+              <a:t>16</a:t>
+            </a:fld>
+            <a:endParaRPr lang="en-US"/>
+          </a:p>
+        </p:txBody>
+      </p:sp>
+    </p:spTree>
+    <p:extLst>
+      <p:ext uri="{BB962C8B-B14F-4D97-AF65-F5344CB8AC3E}">
+        <p14:creationId xmlns:p14="http://schemas.microsoft.com/office/powerpoint/2010/main" val="1024086991"/>
+      </p:ext>
+    </p:extLst>
+  </p:cSld>
+  <p:clrMapOvr>
+    <a:masterClrMapping/>
+  </p:clrMapOvr>
+</p:notes>
+</file>
+
+<file path=ppt/notesSlides/notesSlide17.xml><?xml version="1.0" encoding="utf-8"?>
+<p:notes xmlns:a="http://schemas.openxmlformats.org/drawingml/2006/main" xmlns:r="http://schemas.openxmlformats.org/officeDocument/2006/relationships" xmlns:p="http://schemas.openxmlformats.org/presentationml/2006/main">
+  <p:cSld>
+    <p:spTree>
+      <p:nvGrpSpPr>
+        <p:cNvPr id="1" name=""/>
+        <p:cNvGrpSpPr/>
+        <p:nvPr/>
+      </p:nvGrpSpPr>
+      <p:grpSpPr>
+        <a:xfrm>
+          <a:off x="0" y="0"/>
+          <a:ext cx="0" cy="0"/>
+          <a:chOff x="0" y="0"/>
+          <a:chExt cx="0" cy="0"/>
+        </a:xfrm>
+      </p:grpSpPr>
+      <p:sp>
+        <p:nvSpPr>
+          <p:cNvPr id="2" name="Slide Image Placeholder 1"/>
+          <p:cNvSpPr>
+            <a:spLocks noGrp="1" noRot="1" noChangeAspect="1"/>
+          </p:cNvSpPr>
+          <p:nvPr>
+            <p:ph type="sldImg"/>
+          </p:nvPr>
+        </p:nvSpPr>
+        <p:spPr/>
+      </p:sp>
+      <p:sp>
+        <p:nvSpPr>
+          <p:cNvPr id="3" name="Notes Placeholder 2"/>
+          <p:cNvSpPr>
+            <a:spLocks noGrp="1"/>
+          </p:cNvSpPr>
+          <p:nvPr>
+            <p:ph type="body" idx="1"/>
+          </p:nvPr>
+        </p:nvSpPr>
+        <p:spPr/>
+        <p:txBody>
+          <a:bodyPr/>
+          <a:lstStyle/>
+          <a:p>
+            <a:r>
+              <a:rPr lang="en-US" dirty="0"/>
+              <a:t>Explain before lab: 9 flags total, two categories only — no separate bucket/storage flag, no IaC/localstack target exists in this lab. Find AND explain (why it's a finding, which fix applies) = the flag. Q6 of the quiz asks for one misconfig they explained + the principle it violated. ~3 min.</a:t>
+            </a:r>
+            <a:endParaRPr lang="en-US" dirty="0"/>
+          </a:p>
+        </p:txBody>
+      </p:sp>
+      <p:sp>
+        <p:nvSpPr>
+          <p:cNvPr id="4" name="Slide Number Placeholder 3"/>
+          <p:cNvSpPr>
+            <a:spLocks noGrp="1"/>
+          </p:cNvSpPr>
+          <p:nvPr>
+            <p:ph type="sldNum" sz="quarter" idx="10"/>
+          </p:nvPr>
+        </p:nvSpPr>
+        <p:spPr/>
+        <p:txBody>
+          <a:bodyPr/>
+          <a:lstStyle/>
+          <a:p>
+            <a:fld id="{F7021451-1387-4CA6-816F-3879F97B5CBC}" type="slidenum">
+              <a:rPr lang="en-US"/>
+              <a:t>17</a:t>
+            </a:fld>
+            <a:endParaRPr lang="en-US"/>
+          </a:p>
+        </p:txBody>
+      </p:sp>
+    </p:spTree>
+    <p:extLst>
+      <p:ext uri="{BB962C8B-B14F-4D97-AF65-F5344CB8AC3E}">
+        <p14:creationId xmlns:p14="http://schemas.microsoft.com/office/powerpoint/2010/main" val="1024086991"/>
+      </p:ext>
+    </p:extLst>
+  </p:cSld>
+  <p:clrMapOvr>
+    <a:masterClrMapping/>
+  </p:clrMapOvr>
+</p:notes>
+</file>
+
+<file path=ppt/notesSlides/notesSlide18.xml><?xml version="1.0" encoding="utf-8"?>
+<p:notes xmlns:a="http://schemas.openxmlformats.org/drawingml/2006/main" xmlns:r="http://schemas.openxmlformats.org/officeDocument/2006/relationships" xmlns:p="http://schemas.openxmlformats.org/presentationml/2006/main">
+  <p:cSld>
+    <p:spTree>
+      <p:nvGrpSpPr>
+        <p:cNvPr id="1" name=""/>
+        <p:cNvGrpSpPr/>
+        <p:nvPr/>
+      </p:nvGrpSpPr>
+      <p:grpSpPr>
+        <a:xfrm>
+          <a:off x="0" y="0"/>
+          <a:ext cx="0" cy="0"/>
+          <a:chOff x="0" y="0"/>
+          <a:chExt cx="0" cy="0"/>
+        </a:xfrm>
+      </p:grpSpPr>
+      <p:sp>
+        <p:nvSpPr>
+          <p:cNvPr id="2" name="Slide Image Placeholder 1"/>
+          <p:cNvSpPr>
+            <a:spLocks noGrp="1" noRot="1" noChangeAspect="1"/>
+          </p:cNvSpPr>
+          <p:nvPr>
+            <p:ph type="sldImg"/>
+          </p:nvPr>
+        </p:nvSpPr>
+        <p:spPr/>
+      </p:sp>
+      <p:sp>
+        <p:nvSpPr>
+          <p:cNvPr id="3" name="Notes Placeholder 2"/>
+          <p:cNvSpPr>
+            <a:spLocks noGrp="1"/>
+          </p:cNvSpPr>
+          <p:nvPr>
+            <p:ph type="body" idx="1"/>
+          </p:nvPr>
+        </p:nvSpPr>
+        <p:spPr/>
+        <p:txBody>
+          <a:bodyPr/>
+          <a:lstStyle/>
+          <a:p>
+            <a:r>
+              <a:rPr lang="en-US" dirty="0"/>
+              <a:t>Before/after artifacts + the trivy delta prove the container-side fix; IAM has no scanner delta to show, it's reasoned/written. Don't let "trivy over Dockerfiles + IAM JSON" stand — that's the exact misconception this lab's own history already fixed once. AI-resilient tasks count.</a:t>
+            </a:r>
+            <a:endParaRPr lang="en-US" dirty="0"/>
+          </a:p>
+        </p:txBody>
+      </p:sp>
+      <p:sp>
+        <p:nvSpPr>
+          <p:cNvPr id="4" name="Slide Number Placeholder 3"/>
+          <p:cNvSpPr>
+            <a:spLocks noGrp="1"/>
+          </p:cNvSpPr>
+          <p:nvPr>
+            <p:ph type="sldNum" sz="quarter" idx="10"/>
+          </p:nvPr>
+        </p:nvSpPr>
+        <p:spPr/>
+        <p:txBody>
+          <a:bodyPr/>
+          <a:lstStyle/>
+          <a:p>
+            <a:fld id="{F7021451-1387-4CA6-816F-3879F97B5CBC}" type="slidenum">
+              <a:rPr lang="en-US"/>
+              <a:t>18</a:t>
+            </a:fld>
+            <a:endParaRPr lang="en-US"/>
+          </a:p>
+        </p:txBody>
+      </p:sp>
+    </p:spTree>
+    <p:extLst>
+      <p:ext uri="{BB962C8B-B14F-4D97-AF65-F5344CB8AC3E}">
+        <p14:creationId xmlns:p14="http://schemas.microsoft.com/office/powerpoint/2010/main" val="1024086991"/>
+      </p:ext>
+    </p:extLst>
+  </p:cSld>
+  <p:clrMapOvr>
+    <a:masterClrMapping/>
+  </p:clrMapOvr>
+</p:notes>
+</file>
+
+<file path=ppt/notesSlides/notesSlide19.xml><?xml version="1.0" encoding="utf-8"?>
+<p:notes xmlns:a="http://schemas.openxmlformats.org/drawingml/2006/main" xmlns:r="http://schemas.openxmlformats.org/officeDocument/2006/relationships" xmlns:p="http://schemas.openxmlformats.org/presentationml/2006/main">
+  <p:cSld>
+    <p:spTree>
+      <p:nvGrpSpPr>
+        <p:cNvPr id="1" name=""/>
+        <p:cNvGrpSpPr/>
+        <p:nvPr/>
+      </p:nvGrpSpPr>
+      <p:grpSpPr>
+        <a:xfrm>
+          <a:off x="0" y="0"/>
+          <a:ext cx="0" cy="0"/>
+          <a:chOff x="0" y="0"/>
+          <a:chExt cx="0" cy="0"/>
+        </a:xfrm>
+      </p:grpSpPr>
+      <p:sp>
+        <p:nvSpPr>
+          <p:cNvPr id="2" name="Slide Image Placeholder 1"/>
+          <p:cNvSpPr>
+            <a:spLocks noGrp="1" noRot="1" noChangeAspect="1"/>
+          </p:cNvSpPr>
+          <p:nvPr>
+            <p:ph type="sldImg"/>
+          </p:nvPr>
+        </p:nvSpPr>
+        <p:spPr/>
+      </p:sp>
+      <p:sp>
+        <p:nvSpPr>
+          <p:cNvPr id="3" name="Notes Placeholder 2"/>
+          <p:cNvSpPr>
+            <a:spLocks noGrp="1"/>
+          </p:cNvSpPr>
+          <p:nvPr>
+            <p:ph type="body" idx="1"/>
+          </p:nvPr>
+        </p:nvSpPr>
+        <p:spPr/>
+        <p:txBody>
+          <a:bodyPr/>
+          <a:lstStyle/>
+          <a:p>
+            <a:r>
+              <a:rPr lang="en-US" dirty="0"/>
+              <a:t>Recap. Cold-call: "what does a `*:*` IAM policy cost you if the key leaks?" (everything — full blast radius). "Scan in CI" sets up W15. ~2 min.</a:t>
+            </a:r>
+            <a:endParaRPr lang="en-US" dirty="0"/>
+          </a:p>
+        </p:txBody>
+      </p:sp>
+      <p:sp>
+        <p:nvSpPr>
+          <p:cNvPr id="4" name="Slide Number Placeholder 3"/>
+          <p:cNvSpPr>
+            <a:spLocks noGrp="1"/>
+          </p:cNvSpPr>
+          <p:nvPr>
+            <p:ph type="sldNum" sz="quarter" idx="10"/>
+          </p:nvPr>
+        </p:nvSpPr>
+        <p:spPr/>
+        <p:txBody>
+          <a:bodyPr/>
+          <a:lstStyle/>
+          <a:p>
+            <a:fld id="{F7021451-1387-4CA6-816F-3879F97B5CBC}" type="slidenum">
+              <a:rPr lang="en-US"/>
+              <a:t>19</a:t>
             </a:fld>
             <a:endParaRPr lang="en-US"/>
           </a:p>
@@ -1175,6 +1532,94 @@
 </p:notes>
 </file>
 
+<file path=ppt/notesSlides/notesSlide20.xml><?xml version="1.0" encoding="utf-8"?>
+<p:notes xmlns:a="http://schemas.openxmlformats.org/drawingml/2006/main" xmlns:r="http://schemas.openxmlformats.org/officeDocument/2006/relationships" xmlns:p="http://schemas.openxmlformats.org/presentationml/2006/main">
+  <p:cSld>
+    <p:spTree>
+      <p:nvGrpSpPr>
+        <p:cNvPr id="1" name=""/>
+        <p:cNvGrpSpPr/>
+        <p:nvPr/>
+      </p:nvGrpSpPr>
+      <p:grpSpPr>
+        <a:xfrm>
+          <a:off x="0" y="0"/>
+          <a:ext cx="0" cy="0"/>
+          <a:chOff x="0" y="0"/>
+          <a:chExt cx="0" cy="0"/>
+        </a:xfrm>
+      </p:grpSpPr>
+      <p:sp>
+        <p:nvSpPr>
+          <p:cNvPr id="2" name="Slide Image Placeholder 1"/>
+          <p:cNvSpPr>
+            <a:spLocks noGrp="1" noRot="1" noChangeAspect="1"/>
+          </p:cNvSpPr>
+          <p:nvPr>
+            <p:ph type="sldImg"/>
+          </p:nvPr>
+        </p:nvSpPr>
+        <p:spPr/>
+      </p:sp>
+      <p:sp>
+        <p:nvSpPr>
+          <p:cNvPr id="3" name="Notes Placeholder 2"/>
+          <p:cNvSpPr>
+            <a:spLocks noGrp="1"/>
+          </p:cNvSpPr>
+          <p:nvPr>
+            <p:ph type="body" idx="1"/>
+          </p:nvPr>
+        </p:nvSpPr>
+        <p:spPr/>
+        <p:txBody>
+          <a:bodyPr/>
+          <a:lstStyle/>
+          <a:p>
+            <a:r>
+              <a:rPr lang="en-US" dirty="0"/>
+              <a:t>Cliffhanger: "Next week — the newest attack surface: make an AI assistant ignore its rules and leak secrets, with nothing but text."</a:t>
+            </a:r>
+            <a:endParaRPr lang="en-US" dirty="0"/>
+          </a:p>
+        </p:txBody>
+      </p:sp>
+      <p:sp>
+        <p:nvSpPr>
+          <p:cNvPr id="4" name="Slide Number Placeholder 3"/>
+          <p:cNvSpPr>
+            <a:spLocks noGrp="1"/>
+          </p:cNvSpPr>
+          <p:nvPr>
+            <p:ph type="sldNum" sz="quarter" idx="10"/>
+          </p:nvPr>
+        </p:nvSpPr>
+        <p:spPr/>
+        <p:txBody>
+          <a:bodyPr/>
+          <a:lstStyle/>
+          <a:p>
+            <a:fld id="{F7021451-1387-4CA6-816F-3879F97B5CBC}" type="slidenum">
+              <a:rPr lang="en-US"/>
+              <a:t>20</a:t>
+            </a:fld>
+            <a:endParaRPr lang="en-US"/>
+          </a:p>
+        </p:txBody>
+      </p:sp>
+    </p:spTree>
+    <p:extLst>
+      <p:ext uri="{BB962C8B-B14F-4D97-AF65-F5344CB8AC3E}">
+        <p14:creationId xmlns:p14="http://schemas.microsoft.com/office/powerpoint/2010/main" val="1024086991"/>
+      </p:ext>
+    </p:extLst>
+  </p:cSld>
+  <p:clrMapOvr>
+    <a:masterClrMapping/>
+  </p:clrMapOvr>
+</p:notes>
+</file>
+
 <file path=ppt/notesSlides/notesSlide3.xml><?xml version="1.0" encoding="utf-8"?>
 <p:notes xmlns:a="http://schemas.openxmlformats.org/drawingml/2006/main" xmlns:r="http://schemas.openxmlformats.org/officeDocument/2006/relationships" xmlns:p="http://schemas.openxmlformats.org/presentationml/2006/main">
   <p:cSld>
@@ -1397,7 +1842,8 @@
           <a:p>
             <a:r>
               <a:rPr lang="en-US" dirty="0"/>
-              <a:t>The worked example — this `*:*` policy is the Misconfig Hunt round 1 and the quiz. If a credential with this leaks, the attacker owns everything. This is 100% manual review — Trivy's config scanner does not parse standalone IAM JSON at all, say so explicitly so students don't wait for a scanner to flag it. The sim scores Action and Resource independently, live, so "two findings, not one" is something they watch instead of a claim on a slide. Least privilege = smallest possible blast radius. ~6 min.</a:t>
+              <a:t>Point at the line, then at the two pills: every file the students touch today is on the right. Ask "which of the 9 flags could AWS have fixed for you?" — none. ~2 min.
+Diagram: Shared responsibility for this lab's S3-backed app as two panels split by a line. AWS secures OF the cloud: data centres and hardware, the hypervisor and host OS, the S3 and IAM services themselves, the global network. You secure what you put IN it: the IAM policy (iam-policy-insecure.json, 3 flags), the container image (Dockerfile.insecure, 6 flags including the ENV secret), bucket access and encryption, and network rules such as 0.0.0.0/0 on a database port. Conclusion: all 9 Misconfig Hunt flags sit in your half; none is a provider bug.</a:t>
             </a:r>
             <a:endParaRPr lang="en-US" dirty="0"/>
           </a:p>
@@ -1485,7 +1931,7 @@
           <a:p>
             <a:r>
               <a:rPr lang="en-US" dirty="0"/>
-              <a:t>Connect to W2 (Gitleaks) and W12. A secret baked into an image layer is in every copy of that image forever — `docker history` reveals it. Fix = inject at runtime from a vault + rotate. ~4 min.</a:t>
+              <a:t>The worked example — this `*:*` policy is the Misconfig Hunt round 1 and the quiz. If a credential with this leaks, the attacker owns everything. This is 100% manual review — Trivy's config scanner does not parse standalone IAM JSON at all, say so explicitly so students don't wait for a scanner to flag it. The sim scores Action and Resource independently, live, so "two findings, not one" is something they watch instead of a claim on a slide. Least privilege = smallest possible blast radius. ~6 min.</a:t>
             </a:r>
             <a:endParaRPr lang="en-US" dirty="0"/>
           </a:p>
@@ -1573,7 +2019,8 @@
           <a:p>
             <a:r>
               <a:rPr lang="en-US" dirty="0"/>
-              <a:t>The classic trio behind most breaches. `0.0.0.0/0` on a DB port = the internet can reach your database. Default creds = free entry. Principle: deny by default, open deliberately (echoes W6 access control). ~4 min.</a:t>
+              <a:t>The answer to the cold-call "what does *:* cost you if the key leaks?", drawn. Land on iam:CreateAccessKey: rotating the leaked key doesn't evict an attacker who already minted their own. Right side = iam-policy-leastpriv.json, line for line. ~2 min.
+Diagram: The same AWS account drawn twice at the same scale. Left, iam-policy-insecure.json (Action star, Resource star, no Condition): the whole account is allowed, with example actions a leaked key can now run — s3 star on any bucket, iam:CreateAccessKey to mint new keys that survive rotation, ec2:RunInstances on your bill, kms:Decrypt, cloudtrail:StopLogging to turn off the audit trail — equals full admin; Action star is CWE-269, Resource star is CWE-732. Right, iam-policy-leastpriv.json: everything is implicitly denied except a small app/* square inside lab-app-bucket, readable via s3:GetObject on app/* objects, plus s3:ListBucket only under the Condition s3:prefix = app/*. Trivy parses neither file; Task 2 is manual review.</a:t>
             </a:r>
             <a:endParaRPr lang="en-US" dirty="0"/>
           </a:p>
@@ -1661,7 +2108,7 @@
           <a:p>
             <a:r>
               <a:rPr lang="en-US" dirty="0"/>
-              <a:t>Hands-on — this is the lab's insecure→hardened Dockerfile, always run dockerized (never a bare local trivy binary), against week13-hardened:lab (not a generic myapp:lab). The Trivy-blind-spot point is the actual lesson of this lab, not an aside — half the graded findings need a human, not a tool. Re-scan to prove improvement. ~5 min.</a:t>
+              <a:t>Connect to W2 (Gitleaks) and W12. A secret baked into an image layer is in every copy of that image forever — `docker history` reveals it. Fix = inject at runtime from a vault + rotate. ~4 min.</a:t>
             </a:r>
             <a:endParaRPr lang="en-US" dirty="0"/>
           </a:p>
@@ -1749,7 +2196,8 @@
           <a:p>
             <a:r>
               <a:rPr lang="en-US" dirty="0"/>
-              <a:t>Hands-on — this is the lab's insecure→hardened Dockerfile, always run dockerized (never a bare local trivy binary), against week13-hardened:lab (not a generic myapp:lab). The Trivy-blind-spot point is the actual lesson of this lab, not an aside — half the graded findings need a human, not a tool. Re-scan to prove improvement. ~5 min.</a:t>
+              <a:t>Two misconceptions to kill: "truncated history hides it" (it prints 30 of 34 characters) and "delete it in a later layer" (0B — it's config, not a file). Then the bonus leak: COPY . . shipped the Dockerfile itself. ~3 min.
+Diagram: From a real build of week13-insecure:lab, the image history as a stack with the newest layer on top: CMD, EXPOSE, RUN chmod -R 777, RUN pip install, COPY dot dot, WORKDIR, then ENV AWS_SECRET_ACCESS_KEY and ENV API_TOKEN, both 0 bytes because the value lives in the image config, then the python:latest base layers. Arrows to three readouts: plain docker history still prints sk_live_supersecret_DO_NOT_DO_ (30 of 34 characters); docker history --no-trunc prints the whole token (the Task 3 command); docker inspect .Config.Env prints both keys in full. A fourth arrow: COPY dot dot copied Dockerfile.insecure itself into /app, so the secret is in a file too. Fix: never put the secret in the Dockerfile, inject it at run time, and rotate the key because every pushed image keeps the old value.</a:t>
             </a:r>
             <a:endParaRPr lang="en-US" dirty="0"/>
           </a:p>
@@ -2124,7 +2572,7 @@
       </p:grpSpPr>
       <p:pic>
         <p:nvPicPr>
-          <p:cNvPr id="2" name="Image 0" descr="/private/tmp/claude-501/-Users-pop7-Library-CloudStorage-OneDrive-MonsterConnectCo--Ltd-Lecture-KOSEN69---software-security/f63a82af-e1ad-40ed-89c4-03c6ca776e3f/scratchpad/fix6/KOSEN69 - software-security/slides/pptx/assets/logo-small.png">    </p:cNvPr>
+          <p:cNvPr id="2" name="Image 0" descr="/private/tmp/claude-501/-Users-pop7-Library-CloudStorage-OneDrive-MonsterConnectCo--Ltd-Lecture-KOSEN69---software-security/f63a82af-e1ad-40ed-89c4-03c6ca776e3f/scratchpad/vis-w13/slides/pptx/assets/logo-small.png">    </p:cNvPr>
           <p:cNvPicPr>
             <a:picLocks noChangeAspect="1"/>
           </p:cNvPicPr>
@@ -2382,7 +2830,7 @@
                 <a:ea typeface="Arial" pitchFamily="34" charset="-122"/>
                 <a:cs typeface="Arial" pitchFamily="34" charset="-120"/>
               </a:rPr>
-              <a:t>Kubernetes basics (awareness)</a:t>
+              <a:t>Try it — which layer gives it away?</a:t>
             </a:r>
             <a:endParaRPr lang="en-US" sz="2600" dirty="0"/>
           </a:p>
@@ -2390,43 +2838,14 @@
       </p:sp>
       <p:sp>
         <p:nvSpPr>
-          <p:cNvPr id="5" name="Shape 2"/>
-          <p:cNvSpPr/>
-          <p:nvPr/>
-        </p:nvSpPr>
-        <p:spPr>
-          <a:xfrm>
-            <a:off x="457200" y="1325880"/>
-            <a:ext cx="8229600" cy="896112"/>
-          </a:xfrm>
-          <a:prstGeom prst="roundRect">
-            <a:avLst>
-              <a:gd name="adj" fmla="val 8163"/>
-            </a:avLst>
-          </a:prstGeom>
-          <a:solidFill>
-            <a:srgbClr val="F1F5F9"/>
-          </a:solidFill>
-          <a:ln/>
-          <a:effectLst>
-            <a:outerShdw sx="100000" sy="100000" kx="0" ky="0" algn="bl" rotWithShape="0" blurRad="76200" dist="25400" dir="5400000">
-              <a:srgbClr val="000000">
-                <a:alpha val="12000"/>
-              </a:srgbClr>
-            </a:outerShdw>
-          </a:effectLst>
-        </p:spPr>
-      </p:sp>
-      <p:sp>
-        <p:nvSpPr>
-          <p:cNvPr id="6" name="Text 3"/>
-          <p:cNvSpPr/>
-          <p:nvPr/>
-        </p:nvSpPr>
-        <p:spPr>
-          <a:xfrm>
-            <a:off x="731520" y="1435608"/>
-            <a:ext cx="7680960" cy="676656"/>
+          <p:cNvPr id="5" name="Text 2"/>
+          <p:cNvSpPr/>
+          <p:nvPr/>
+        </p:nvSpPr>
+        <p:spPr>
+          <a:xfrm>
+            <a:off x="548640" y="1325880"/>
+            <a:ext cx="8046720" cy="822960"/>
           </a:xfrm>
           <a:prstGeom prst="rect">
             <a:avLst/>
@@ -2440,12 +2859,8 @@
           </a:bodyPr>
           <a:lstStyle/>
           <a:p>
-            <a:pPr marL="342900" indent="-342900">
-              <a:spcAft>
-                <a:spcPts val="600"/>
-              </a:spcAft>
-              <a:buSzPct val="100000"/>
-              <a:buChar char="•"/>
+            <a:pPr indent="0" marL="0">
+              <a:buNone/>
             </a:pPr>
             <a:r>
               <a:rPr lang="en-US" sz="1400" dirty="0">
@@ -2456,17 +2871,13 @@
                 <a:ea typeface="Calibri" pitchFamily="34" charset="-122"/>
                 <a:cs typeface="Calibri" pitchFamily="34" charset="-120"/>
               </a:rPr>
-              <a:t>Pod security, network policies, RBAC</a:t>
+              <a:t>Real docker history / docker inspect output from both lab images. Pick a command.</a:t>
             </a:r>
             <a:endParaRPr lang="en-US" sz="1400" dirty="0"/>
           </a:p>
           <a:p>
-            <a:pPr marL="342900" indent="-342900">
-              <a:spcAft>
-                <a:spcPts val="600"/>
-              </a:spcAft>
-              <a:buSzPct val="100000"/>
-              <a:buChar char="•"/>
+            <a:pPr indent="0" marL="0">
+              <a:buNone/>
             </a:pPr>
             <a:r>
               <a:rPr lang="en-US" sz="1400" dirty="0">
@@ -2477,7 +2888,7 @@
                 <a:ea typeface="Calibri" pitchFamily="34" charset="-122"/>
                 <a:cs typeface="Calibri" pitchFamily="34" charset="-120"/>
               </a:rPr>
-              <a:t>Don't run privileged; limit service-account tokens</a:t>
+              <a:t>Try it live: /sim/image-layers (interactive simulation, web only)</a:t>
             </a:r>
             <a:endParaRPr lang="en-US" sz="1400" dirty="0"/>
           </a:p>
@@ -2485,7 +2896,7 @@
       </p:sp>
       <p:sp>
         <p:nvSpPr>
-          <p:cNvPr id="7" name="Text 4"/>
+          <p:cNvPr id="6" name="Text 3"/>
           <p:cNvSpPr/>
           <p:nvPr/>
         </p:nvSpPr>
@@ -2524,7 +2935,7 @@
       </p:sp>
       <p:pic>
         <p:nvPicPr>
-          <p:cNvPr id="8" name="Image 1" descr="/private/tmp/claude-501/-Users-pop7-Library-CloudStorage-OneDrive-MonsterConnectCo--Ltd-Lecture-KOSEN69---software-security/f63a82af-e1ad-40ed-89c4-03c6ca776e3f/scratchpad/fix6/KOSEN69 - software-security/slides/pptx/assets/logo-small.png">    </p:cNvPr>
+          <p:cNvPr id="7" name="Image 1" descr="/private/tmp/claude-501/-Users-pop7-Library-CloudStorage-OneDrive-MonsterConnectCo--Ltd-Lecture-KOSEN69---software-security/f63a82af-e1ad-40ed-89c4-03c6ca776e3f/scratchpad/vis-w13/slides/pptx/assets/logo-small.png">    </p:cNvPr>
           <p:cNvPicPr>
             <a:picLocks noChangeAspect="1"/>
           </p:cNvPicPr>
@@ -2662,15 +3073,170 @@
                 <a:ea typeface="Arial" pitchFamily="34" charset="-122"/>
                 <a:cs typeface="Arial" pitchFamily="34" charset="-120"/>
               </a:rPr>
-              <a:t>Same app, shipped twice</a:t>
+              <a:t>Storage &amp; network exposure</a:t>
             </a:r>
             <a:endParaRPr lang="en-US" sz="2600" dirty="0"/>
+          </a:p>
+        </p:txBody>
+      </p:sp>
+      <p:sp>
+        <p:nvSpPr>
+          <p:cNvPr id="5" name="Shape 2"/>
+          <p:cNvSpPr/>
+          <p:nvPr/>
+        </p:nvSpPr>
+        <p:spPr>
+          <a:xfrm>
+            <a:off x="457200" y="1325880"/>
+            <a:ext cx="8229600" cy="1207008"/>
+          </a:xfrm>
+          <a:prstGeom prst="roundRect">
+            <a:avLst>
+              <a:gd name="adj" fmla="val 6061"/>
+            </a:avLst>
+          </a:prstGeom>
+          <a:solidFill>
+            <a:srgbClr val="F1F5F9"/>
+          </a:solidFill>
+          <a:ln/>
+          <a:effectLst>
+            <a:outerShdw sx="100000" sy="100000" kx="0" ky="0" algn="bl" rotWithShape="0" blurRad="76200" dist="25400" dir="5400000">
+              <a:srgbClr val="000000">
+                <a:alpha val="12000"/>
+              </a:srgbClr>
+            </a:outerShdw>
+          </a:effectLst>
+        </p:spPr>
+      </p:sp>
+      <p:sp>
+        <p:nvSpPr>
+          <p:cNvPr id="6" name="Text 3"/>
+          <p:cNvSpPr/>
+          <p:nvPr/>
+        </p:nvSpPr>
+        <p:spPr>
+          <a:xfrm>
+            <a:off x="731520" y="1435608"/>
+            <a:ext cx="7680960" cy="987552"/>
+          </a:xfrm>
+          <a:prstGeom prst="rect">
+            <a:avLst/>
+          </a:prstGeom>
+          <a:noFill/>
+          <a:ln/>
+        </p:spPr>
+        <p:txBody>
+          <a:bodyPr wrap="square" lIns="0" tIns="0" rIns="0" bIns="0" rtlCol="0" anchor="t">
+            <a:normAutofit/>
+          </a:bodyPr>
+          <a:lstStyle/>
+          <a:p>
+            <a:pPr marL="342900" indent="-342900">
+              <a:spcAft>
+                <a:spcPts val="600"/>
+              </a:spcAft>
+              <a:buSzPct val="100000"/>
+              <a:buChar char="•"/>
+            </a:pPr>
+            <a:r>
+              <a:rPr lang="en-US" sz="1400" dirty="0">
+                <a:solidFill>
+                  <a:srgbClr val="1F2937"/>
+                </a:solidFill>
+                <a:latin typeface="Calibri" pitchFamily="34" charset="0"/>
+                <a:ea typeface="Calibri" pitchFamily="34" charset="-122"/>
+                <a:cs typeface="Calibri" pitchFamily="34" charset="-120"/>
+              </a:rPr>
+              <a:t>Public buckets, open ports, default creds</a:t>
+            </a:r>
+            <a:endParaRPr lang="en-US" sz="1400" dirty="0"/>
+          </a:p>
+          <a:p>
+            <a:pPr marL="342900" indent="-342900">
+              <a:spcAft>
+                <a:spcPts val="600"/>
+              </a:spcAft>
+              <a:buSzPct val="100000"/>
+              <a:buChar char="•"/>
+            </a:pPr>
+            <a:r>
+              <a:rPr lang="en-US" sz="1400" dirty="0">
+                <a:solidFill>
+                  <a:srgbClr val="1F2937"/>
+                </a:solidFill>
+                <a:latin typeface="Calibri" pitchFamily="34" charset="0"/>
+                <a:ea typeface="Calibri" pitchFamily="34" charset="-122"/>
+                <a:cs typeface="Calibri" pitchFamily="34" charset="-120"/>
+              </a:rPr>
+              <a:t>Encrypt at rest + in transit</a:t>
+            </a:r>
+            <a:endParaRPr lang="en-US" sz="1400" dirty="0"/>
+          </a:p>
+          <a:p>
+            <a:pPr marL="342900" indent="-342900">
+              <a:spcAft>
+                <a:spcPts val="600"/>
+              </a:spcAft>
+              <a:buSzPct val="100000"/>
+              <a:buChar char="•"/>
+            </a:pPr>
+            <a:r>
+              <a:rPr lang="en-US" sz="1400" dirty="0">
+                <a:solidFill>
+                  <a:srgbClr val="1F2937"/>
+                </a:solidFill>
+                <a:latin typeface="Calibri" pitchFamily="34" charset="0"/>
+                <a:ea typeface="Calibri" pitchFamily="34" charset="-122"/>
+                <a:cs typeface="Calibri" pitchFamily="34" charset="-120"/>
+              </a:rPr>
+              <a:t>Private by default; explicit allow</a:t>
+            </a:r>
+            <a:endParaRPr lang="en-US" sz="1400" dirty="0"/>
+          </a:p>
+        </p:txBody>
+      </p:sp>
+      <p:sp>
+        <p:nvSpPr>
+          <p:cNvPr id="7" name="Text 4"/>
+          <p:cNvSpPr/>
+          <p:nvPr/>
+        </p:nvSpPr>
+        <p:spPr>
+          <a:xfrm>
+            <a:off x="457200" y="4800600"/>
+            <a:ext cx="6949440" cy="274320"/>
+          </a:xfrm>
+          <a:prstGeom prst="rect">
+            <a:avLst/>
+          </a:prstGeom>
+          <a:noFill/>
+          <a:ln/>
+        </p:spPr>
+        <p:txBody>
+          <a:bodyPr wrap="square" lIns="0" tIns="0" rIns="0" bIns="0" rtlCol="0" anchor="ctr"/>
+          <a:lstStyle/>
+          <a:p>
+            <a:pPr indent="0" marL="0">
+              <a:buNone/>
+            </a:pPr>
+            <a:r>
+              <a:rPr lang="en-US" sz="900" dirty="0">
+                <a:solidFill>
+                  <a:srgbClr val="64748B"/>
+                </a:solidFill>
+                <a:latin typeface="Calibri" pitchFamily="34" charset="0"/>
+                <a:ea typeface="Calibri" pitchFamily="34" charset="-122"/>
+                <a:cs typeface="Calibri" pitchFamily="34" charset="-120"/>
+              </a:rPr>
+              <a:t>Software Security · Week 13</a:t>
+            </a:r>
+            <a:endParaRPr lang="en-US" sz="900" dirty="0"/>
           </a:p>
         </p:txBody>
       </p:sp>
       <p:pic>
         <p:nvPicPr>
-          <p:cNvPr id="5" name="Image 1" descr="The same app as two container images side by side, insecure vs hardened, six layers compared: mutable :latest tag vs a pinned digest, a baked-in secret vs runtime injection, root user vs distroless non-root, COPY-everything vs a minimal context, world-writable permissions vs read-only, and an unpinned pip install vs a discarded build stage. Below both, the same argument one layer up: the wildcard IAM policy vs the scoped one. The conclusion: Trivy flags only three of the seven defects shown here — the tag, the root user, and the secret. COPY .., chmod 777, the unpinned install, and the IAM JSON all need manual review; there is no rule for any of them.">    </p:cNvPr>
+          <p:cNvPr id="8" name="Image 1" descr="/private/tmp/claude-501/-Users-pop7-Library-CloudStorage-OneDrive-MonsterConnectCo--Ltd-Lecture-KOSEN69---software-security/f63a82af-e1ad-40ed-89c4-03c6ca776e3f/scratchpad/vis-w13/slides/pptx/assets/logo-small.png">    </p:cNvPr>
           <p:cNvPicPr>
             <a:picLocks noChangeAspect="1"/>
           </p:cNvPicPr>
@@ -2678,69 +3244,6 @@
         </p:nvPicPr>
         <p:blipFill>
           <a:blip r:embed="rId2"/>
-          <a:stretch>
-            <a:fillRect/>
-          </a:stretch>
-        </p:blipFill>
-        <p:spPr>
-          <a:xfrm>
-            <a:off x="3036517" y="1097280"/>
-            <a:ext cx="3070967" cy="3566160"/>
-          </a:xfrm>
-          <a:prstGeom prst="rect">
-            <a:avLst/>
-          </a:prstGeom>
-        </p:spPr>
-      </p:pic>
-      <p:sp>
-        <p:nvSpPr>
-          <p:cNvPr id="6" name="Text 2"/>
-          <p:cNvSpPr/>
-          <p:nvPr/>
-        </p:nvSpPr>
-        <p:spPr>
-          <a:xfrm>
-            <a:off x="457200" y="4800600"/>
-            <a:ext cx="6949440" cy="274320"/>
-          </a:xfrm>
-          <a:prstGeom prst="rect">
-            <a:avLst/>
-          </a:prstGeom>
-          <a:noFill/>
-          <a:ln/>
-        </p:spPr>
-        <p:txBody>
-          <a:bodyPr wrap="square" lIns="0" tIns="0" rIns="0" bIns="0" rtlCol="0" anchor="ctr"/>
-          <a:lstStyle/>
-          <a:p>
-            <a:pPr indent="0" marL="0">
-              <a:buNone/>
-            </a:pPr>
-            <a:r>
-              <a:rPr lang="en-US" sz="900" dirty="0">
-                <a:solidFill>
-                  <a:srgbClr val="64748B"/>
-                </a:solidFill>
-                <a:latin typeface="Calibri" pitchFamily="34" charset="0"/>
-                <a:ea typeface="Calibri" pitchFamily="34" charset="-122"/>
-                <a:cs typeface="Calibri" pitchFamily="34" charset="-120"/>
-              </a:rPr>
-              <a:t>Software Security · Week 13</a:t>
-            </a:r>
-            <a:endParaRPr lang="en-US" sz="900" dirty="0"/>
-          </a:p>
-        </p:txBody>
-      </p:sp>
-      <p:pic>
-        <p:nvPicPr>
-          <p:cNvPr id="7" name="Image 2" descr="/private/tmp/claude-501/-Users-pop7-Library-CloudStorage-OneDrive-MonsterConnectCo--Ltd-Lecture-KOSEN69---software-security/f63a82af-e1ad-40ed-89c4-03c6ca776e3f/scratchpad/fix6/KOSEN69 - software-security/slides/pptx/assets/logo-small.png">    </p:cNvPr>
-          <p:cNvPicPr>
-            <a:picLocks noChangeAspect="1"/>
-          </p:cNvPicPr>
-          <p:nvPr/>
-        </p:nvPicPr>
-        <p:blipFill>
-          <a:blip r:embed="rId3"/>
           <a:stretch>
             <a:fillRect/>
           </a:stretch>
@@ -2871,7 +3374,7 @@
                 <a:ea typeface="Arial" pitchFamily="34" charset="-122"/>
                 <a:cs typeface="Arial" pitchFamily="34" charset="-120"/>
               </a:rPr>
-              <a:t>🔍 Game — Misconfig Hunt</a:t>
+              <a:t>Container image hardening</a:t>
             </a:r>
             <a:endParaRPr lang="en-US" sz="2600" dirty="0"/>
           </a:p>
@@ -2879,14 +3382,41 @@
       </p:sp>
       <p:sp>
         <p:nvSpPr>
-          <p:cNvPr id="5" name="Text 2"/>
-          <p:cNvSpPr/>
-          <p:nvPr/>
-        </p:nvSpPr>
-        <p:spPr>
-          <a:xfrm>
-            <a:off x="548640" y="1325880"/>
-            <a:ext cx="8046720" cy="548640"/>
+          <p:cNvPr id="5" name="Shape 2"/>
+          <p:cNvSpPr/>
+          <p:nvPr/>
+        </p:nvSpPr>
+        <p:spPr>
+          <a:xfrm>
+            <a:off x="457200" y="1325880"/>
+            <a:ext cx="8229600" cy="1591056"/>
+          </a:xfrm>
+          <a:prstGeom prst="roundRect">
+            <a:avLst>
+              <a:gd name="adj" fmla="val 3448"/>
+            </a:avLst>
+          </a:prstGeom>
+          <a:solidFill>
+            <a:srgbClr val="0A1020"/>
+          </a:solidFill>
+          <a:ln w="12700">
+            <a:solidFill>
+              <a:srgbClr val="E8EDF3"/>
+            </a:solidFill>
+            <a:prstDash val="solid"/>
+          </a:ln>
+        </p:spPr>
+      </p:sp>
+      <p:sp>
+        <p:nvSpPr>
+          <p:cNvPr id="6" name="Text 3"/>
+          <p:cNvSpPr/>
+          <p:nvPr/>
+        </p:nvSpPr>
+        <p:spPr>
+          <a:xfrm>
+            <a:off x="640080" y="1399032"/>
+            <a:ext cx="7863840" cy="1444752"/>
           </a:xfrm>
           <a:prstGeom prst="rect">
             <a:avLst/>
@@ -2904,6 +3434,165 @@
               <a:buNone/>
             </a:pPr>
             <a:r>
+              <a:rPr lang="en-US" sz="1150" dirty="0">
+                <a:solidFill>
+                  <a:srgbClr val="9FE7D6"/>
+                </a:solidFill>
+                <a:latin typeface="Courier New" pitchFamily="34" charset="0"/>
+                <a:ea typeface="Courier New" pitchFamily="34" charset="-122"/>
+                <a:cs typeface="Courier New" pitchFamily="34" charset="-120"/>
+              </a:rPr>
+              <a:t># misconfig scan (Dockerfiles)</a:t>
+            </a:r>
+            <a:endParaRPr lang="en-US" sz="1150" dirty="0"/>
+          </a:p>
+          <a:p>
+            <a:pPr indent="0" marL="0">
+              <a:buNone/>
+            </a:pPr>
+            <a:r>
+              <a:rPr lang="en-US" sz="1150" dirty="0">
+                <a:solidFill>
+                  <a:srgbClr val="9FE7D6"/>
+                </a:solidFill>
+                <a:latin typeface="Courier New" pitchFamily="34" charset="0"/>
+                <a:ea typeface="Courier New" pitchFamily="34" charset="-122"/>
+                <a:cs typeface="Courier New" pitchFamily="34" charset="-120"/>
+              </a:rPr>
+              <a:t>docker run --rm -v "${PWD}:/src" aquasec/trivy:latest \</a:t>
+            </a:r>
+            <a:endParaRPr lang="en-US" sz="1150" dirty="0"/>
+          </a:p>
+          <a:p>
+            <a:pPr indent="0" marL="0">
+              <a:buNone/>
+            </a:pPr>
+            <a:r>
+              <a:rPr lang="en-US" sz="1150" dirty="0">
+                <a:solidFill>
+                  <a:srgbClr val="9FE7D6"/>
+                </a:solidFill>
+                <a:latin typeface="Courier New" pitchFamily="34" charset="0"/>
+                <a:ea typeface="Courier New" pitchFamily="34" charset="-122"/>
+                <a:cs typeface="Courier New" pitchFamily="34" charset="-120"/>
+              </a:rPr>
+              <a:t>  config --severity MEDIUM,HIGH,CRITICAL /src</a:t>
+            </a:r>
+            <a:endParaRPr lang="en-US" sz="1150" dirty="0"/>
+          </a:p>
+          <a:p>
+            <a:pPr indent="0" marL="0">
+              <a:buNone/>
+            </a:pPr>
+            <a:r>
+              <a:rPr lang="en-US" sz="1150" dirty="0">
+                <a:solidFill>
+                  <a:srgbClr val="9FE7D6"/>
+                </a:solidFill>
+                <a:latin typeface="Courier New" pitchFamily="34" charset="0"/>
+                <a:ea typeface="Courier New" pitchFamily="34" charset="-122"/>
+                <a:cs typeface="Courier New" pitchFamily="34" charset="-120"/>
+              </a:rPr>
+              <a:t># image CVE scan</a:t>
+            </a:r>
+            <a:endParaRPr lang="en-US" sz="1150" dirty="0"/>
+          </a:p>
+          <a:p>
+            <a:pPr indent="0" marL="0">
+              <a:buNone/>
+            </a:pPr>
+            <a:r>
+              <a:rPr lang="en-US" sz="1150" dirty="0">
+                <a:solidFill>
+                  <a:srgbClr val="9FE7D6"/>
+                </a:solidFill>
+                <a:latin typeface="Courier New" pitchFamily="34" charset="0"/>
+                <a:ea typeface="Courier New" pitchFamily="34" charset="-122"/>
+                <a:cs typeface="Courier New" pitchFamily="34" charset="-120"/>
+              </a:rPr>
+              <a:t>docker run --rm -v /var/run/docker.sock:/var/run/docker.sock \</a:t>
+            </a:r>
+            <a:endParaRPr lang="en-US" sz="1150" dirty="0"/>
+          </a:p>
+          <a:p>
+            <a:pPr indent="0" marL="0">
+              <a:buNone/>
+            </a:pPr>
+            <a:r>
+              <a:rPr lang="en-US" sz="1150" dirty="0">
+                <a:solidFill>
+                  <a:srgbClr val="9FE7D6"/>
+                </a:solidFill>
+                <a:latin typeface="Courier New" pitchFamily="34" charset="0"/>
+                <a:ea typeface="Courier New" pitchFamily="34" charset="-122"/>
+                <a:cs typeface="Courier New" pitchFamily="34" charset="-120"/>
+              </a:rPr>
+              <a:t>  aquasec/trivy:latest image --severity HIGH,CRITICAL week13-hardened:lab</a:t>
+            </a:r>
+            <a:endParaRPr lang="en-US" sz="1150" dirty="0"/>
+          </a:p>
+        </p:txBody>
+      </p:sp>
+      <p:sp>
+        <p:nvSpPr>
+          <p:cNvPr id="7" name="Shape 4"/>
+          <p:cNvSpPr/>
+          <p:nvPr/>
+        </p:nvSpPr>
+        <p:spPr>
+          <a:xfrm>
+            <a:off x="457200" y="3081528"/>
+            <a:ext cx="8229600" cy="987552"/>
+          </a:xfrm>
+          <a:prstGeom prst="roundRect">
+            <a:avLst>
+              <a:gd name="adj" fmla="val 7407"/>
+            </a:avLst>
+          </a:prstGeom>
+          <a:solidFill>
+            <a:srgbClr val="F1F5F9"/>
+          </a:solidFill>
+          <a:ln/>
+          <a:effectLst>
+            <a:outerShdw sx="100000" sy="100000" kx="0" ky="0" algn="bl" rotWithShape="0" blurRad="76200" dist="25400" dir="5400000">
+              <a:srgbClr val="000000">
+                <a:alpha val="12000"/>
+              </a:srgbClr>
+            </a:outerShdw>
+          </a:effectLst>
+        </p:spPr>
+      </p:sp>
+      <p:sp>
+        <p:nvSpPr>
+          <p:cNvPr id="8" name="Text 5"/>
+          <p:cNvSpPr/>
+          <p:nvPr/>
+        </p:nvSpPr>
+        <p:spPr>
+          <a:xfrm>
+            <a:off x="731520" y="3191256"/>
+            <a:ext cx="7680960" cy="768096"/>
+          </a:xfrm>
+          <a:prstGeom prst="rect">
+            <a:avLst/>
+          </a:prstGeom>
+          <a:noFill/>
+          <a:ln/>
+        </p:spPr>
+        <p:txBody>
+          <a:bodyPr wrap="square" lIns="0" tIns="0" rIns="0" bIns="0" rtlCol="0" anchor="t">
+            <a:normAutofit/>
+          </a:bodyPr>
+          <a:lstStyle/>
+          <a:p>
+            <a:pPr marL="342900" indent="-342900">
+              <a:spcAft>
+                <a:spcPts val="600"/>
+              </a:spcAft>
+              <a:buSzPct val="100000"/>
+              <a:buChar char="•"/>
+            </a:pPr>
+            <a:r>
               <a:rPr lang="en-US" sz="1400" dirty="0">
                 <a:solidFill>
                   <a:srgbClr val="1F2937"/>
@@ -2912,7 +3601,7 @@
                 <a:ea typeface="Calibri" pitchFamily="34" charset="-122"/>
                 <a:cs typeface="Calibri" pitchFamily="34" charset="-120"/>
               </a:rPr>
-              <a:t>9 flags — each misconfiguration found + explained = a flag:</a:t>
+              <a:t>Multi-stage build: python:3.11-slim@sha256:... (compiles) → distroless gcr.io/distroless/python3-debian12@sha256:... (runs) — a smaller runtime image with no shell/package manager, USER 65532:65532 (non-root)</a:t>
             </a:r>
             <a:endParaRPr lang="en-US" sz="1400" dirty="0"/>
           </a:p>
@@ -2920,34 +3609,14 @@
       </p:sp>
       <p:sp>
         <p:nvSpPr>
-          <p:cNvPr id="6" name="Shape 3"/>
-          <p:cNvSpPr/>
-          <p:nvPr/>
-        </p:nvSpPr>
-        <p:spPr>
-          <a:xfrm>
-            <a:off x="502920" y="1965960"/>
-            <a:ext cx="384048" cy="384048"/>
-          </a:xfrm>
-          <a:prstGeom prst="ellipse">
-            <a:avLst/>
-          </a:prstGeom>
-          <a:solidFill>
-            <a:srgbClr val="E35205"/>
-          </a:solidFill>
-          <a:ln/>
-        </p:spPr>
-      </p:sp>
-      <p:sp>
-        <p:nvSpPr>
-          <p:cNvPr id="7" name="Text 4"/>
-          <p:cNvSpPr/>
-          <p:nvPr/>
-        </p:nvSpPr>
-        <p:spPr>
-          <a:xfrm>
-            <a:off x="502920" y="1965960"/>
-            <a:ext cx="384048" cy="384048"/>
+          <p:cNvPr id="9" name="Text 6"/>
+          <p:cNvSpPr/>
+          <p:nvPr/>
+        </p:nvSpPr>
+        <p:spPr>
+          <a:xfrm>
+            <a:off x="457200" y="4800600"/>
+            <a:ext cx="6949440" cy="274320"/>
           </a:xfrm>
           <a:prstGeom prst="rect">
             <a:avLst/>
@@ -2957,200 +3626,20 @@
         </p:spPr>
         <p:txBody>
           <a:bodyPr wrap="square" lIns="0" tIns="0" rIns="0" bIns="0" rtlCol="0" anchor="ctr"/>
-          <a:lstStyle/>
-          <a:p>
-            <a:pPr algn="ctr" indent="0" marL="0">
-              <a:buNone/>
-            </a:pPr>
-            <a:r>
-              <a:rPr lang="en-US" sz="1500" b="1" dirty="0">
-                <a:solidFill>
-                  <a:srgbClr val="0E1726"/>
-                </a:solidFill>
-                <a:latin typeface="Arial" pitchFamily="34" charset="0"/>
-                <a:ea typeface="Arial" pitchFamily="34" charset="-122"/>
-                <a:cs typeface="Arial" pitchFamily="34" charset="-120"/>
-              </a:rPr>
-              <a:t>1</a:t>
-            </a:r>
-            <a:endParaRPr lang="en-US" sz="1500" dirty="0"/>
-          </a:p>
-        </p:txBody>
-      </p:sp>
-      <p:sp>
-        <p:nvSpPr>
-          <p:cNvPr id="8" name="Text 5"/>
-          <p:cNvSpPr/>
-          <p:nvPr/>
-        </p:nvSpPr>
-        <p:spPr>
-          <a:xfrm>
-            <a:off x="1051560" y="1965960"/>
-            <a:ext cx="7589520" cy="658368"/>
-          </a:xfrm>
-          <a:prstGeom prst="rect">
-            <a:avLst/>
-          </a:prstGeom>
-          <a:noFill/>
-          <a:ln/>
-        </p:spPr>
-        <p:txBody>
-          <a:bodyPr wrap="square" lIns="0" tIns="0" rIns="0" bIns="0" rtlCol="0" anchor="ctr">
-            <a:normAutofit/>
-          </a:bodyPr>
           <a:lstStyle/>
           <a:p>
             <a:pPr indent="0" marL="0">
               <a:buNone/>
             </a:pPr>
             <a:r>
-              <a:rPr lang="en-US" sz="1350" dirty="0">
-                <a:solidFill>
-                  <a:srgbClr val="1F2937"/>
+              <a:rPr lang="en-US" sz="900" dirty="0">
+                <a:solidFill>
+                  <a:srgbClr val="64748B"/>
                 </a:solidFill>
                 <a:latin typeface="Calibri" pitchFamily="34" charset="0"/>
                 <a:ea typeface="Calibri" pitchFamily="34" charset="-122"/>
                 <a:cs typeface="Calibri" pitchFamily="34" charset="-120"/>
               </a:rPr>
-              <a:t>Container (6): :latest tag, root user, secret-in-ENV, COPY . ., chmod -R 777, unpinned pip install</a:t>
-            </a:r>
-            <a:endParaRPr lang="en-US" sz="1350" dirty="0"/>
-          </a:p>
-        </p:txBody>
-      </p:sp>
-      <p:sp>
-        <p:nvSpPr>
-          <p:cNvPr id="9" name="Shape 6"/>
-          <p:cNvSpPr/>
-          <p:nvPr/>
-        </p:nvSpPr>
-        <p:spPr>
-          <a:xfrm>
-            <a:off x="502920" y="2697480"/>
-            <a:ext cx="384048" cy="384048"/>
-          </a:xfrm>
-          <a:prstGeom prst="ellipse">
-            <a:avLst/>
-          </a:prstGeom>
-          <a:solidFill>
-            <a:srgbClr val="E35205"/>
-          </a:solidFill>
-          <a:ln/>
-        </p:spPr>
-      </p:sp>
-      <p:sp>
-        <p:nvSpPr>
-          <p:cNvPr id="10" name="Text 7"/>
-          <p:cNvSpPr/>
-          <p:nvPr/>
-        </p:nvSpPr>
-        <p:spPr>
-          <a:xfrm>
-            <a:off x="502920" y="2697480"/>
-            <a:ext cx="384048" cy="384048"/>
-          </a:xfrm>
-          <a:prstGeom prst="rect">
-            <a:avLst/>
-          </a:prstGeom>
-          <a:noFill/>
-          <a:ln/>
-        </p:spPr>
-        <p:txBody>
-          <a:bodyPr wrap="square" lIns="0" tIns="0" rIns="0" bIns="0" rtlCol="0" anchor="ctr"/>
-          <a:lstStyle/>
-          <a:p>
-            <a:pPr algn="ctr" indent="0" marL="0">
-              <a:buNone/>
-            </a:pPr>
-            <a:r>
-              <a:rPr lang="en-US" sz="1500" b="1" dirty="0">
-                <a:solidFill>
-                  <a:srgbClr val="0E1726"/>
-                </a:solidFill>
-                <a:latin typeface="Arial" pitchFamily="34" charset="0"/>
-                <a:ea typeface="Arial" pitchFamily="34" charset="-122"/>
-                <a:cs typeface="Arial" pitchFamily="34" charset="-120"/>
-              </a:rPr>
-              <a:t>2</a:t>
-            </a:r>
-            <a:endParaRPr lang="en-US" sz="1500" dirty="0"/>
-          </a:p>
-        </p:txBody>
-      </p:sp>
-      <p:sp>
-        <p:nvSpPr>
-          <p:cNvPr id="11" name="Text 8"/>
-          <p:cNvSpPr/>
-          <p:nvPr/>
-        </p:nvSpPr>
-        <p:spPr>
-          <a:xfrm>
-            <a:off x="1051560" y="2697480"/>
-            <a:ext cx="7589520" cy="402336"/>
-          </a:xfrm>
-          <a:prstGeom prst="rect">
-            <a:avLst/>
-          </a:prstGeom>
-          <a:noFill/>
-          <a:ln/>
-        </p:spPr>
-        <p:txBody>
-          <a:bodyPr wrap="square" lIns="0" tIns="0" rIns="0" bIns="0" rtlCol="0" anchor="ctr">
-            <a:normAutofit/>
-          </a:bodyPr>
-          <a:lstStyle/>
-          <a:p>
-            <a:pPr indent="0" marL="0">
-              <a:buNone/>
-            </a:pPr>
-            <a:r>
-              <a:rPr lang="en-US" sz="1350" dirty="0">
-                <a:solidFill>
-                  <a:srgbClr val="1F2937"/>
-                </a:solidFill>
-                <a:latin typeface="Calibri" pitchFamily="34" charset="0"/>
-                <a:ea typeface="Calibri" pitchFamily="34" charset="-122"/>
-                <a:cs typeface="Calibri" pitchFamily="34" charset="-120"/>
-              </a:rPr>
-              <a:t>IAM (3): Resource:"*" (CWE-732), Action:"*" (CWE-269), missing Condition scoping</a:t>
-            </a:r>
-            <a:endParaRPr lang="en-US" sz="1350" dirty="0"/>
-          </a:p>
-        </p:txBody>
-      </p:sp>
-      <p:sp>
-        <p:nvSpPr>
-          <p:cNvPr id="12" name="Text 9"/>
-          <p:cNvSpPr/>
-          <p:nvPr/>
-        </p:nvSpPr>
-        <p:spPr>
-          <a:xfrm>
-            <a:off x="457200" y="4800600"/>
-            <a:ext cx="6949440" cy="274320"/>
-          </a:xfrm>
-          <a:prstGeom prst="rect">
-            <a:avLst/>
-          </a:prstGeom>
-          <a:noFill/>
-          <a:ln/>
-        </p:spPr>
-        <p:txBody>
-          <a:bodyPr wrap="square" lIns="0" tIns="0" rIns="0" bIns="0" rtlCol="0" anchor="ctr"/>
-          <a:lstStyle/>
-          <a:p>
-            <a:pPr indent="0" marL="0">
-              <a:buNone/>
-            </a:pPr>
-            <a:r>
-              <a:rPr lang="en-US" sz="900" dirty="0">
-                <a:solidFill>
-                  <a:srgbClr val="64748B"/>
-                </a:solidFill>
-                <a:latin typeface="Calibri" pitchFamily="34" charset="0"/>
-                <a:ea typeface="Calibri" pitchFamily="34" charset="-122"/>
-                <a:cs typeface="Calibri" pitchFamily="34" charset="-120"/>
-              </a:rPr>
               <a:t>Software Security · Week 13</a:t>
             </a:r>
             <a:endParaRPr lang="en-US" sz="900" dirty="0"/>
@@ -3159,7 +3648,7 @@
       </p:sp>
       <p:pic>
         <p:nvPicPr>
-          <p:cNvPr id="13" name="Image 1" descr="/private/tmp/claude-501/-Users-pop7-Library-CloudStorage-OneDrive-MonsterConnectCo--Ltd-Lecture-KOSEN69---software-security/f63a82af-e1ad-40ed-89c4-03c6ca776e3f/scratchpad/fix6/KOSEN69 - software-security/slides/pptx/assets/logo-small.png">    </p:cNvPr>
+          <p:cNvPr id="10" name="Image 1" descr="/private/tmp/claude-501/-Users-pop7-Library-CloudStorage-OneDrive-MonsterConnectCo--Ltd-Lecture-KOSEN69---software-security/f63a82af-e1ad-40ed-89c4-03c6ca776e3f/scratchpad/vis-w13/slides/pptx/assets/logo-small.png">    </p:cNvPr>
           <p:cNvPicPr>
             <a:picLocks noChangeAspect="1"/>
           </p:cNvPicPr>
@@ -3297,7 +3786,7 @@
                 <a:ea typeface="Arial" pitchFamily="34" charset="-122"/>
                 <a:cs typeface="Arial" pitchFamily="34" charset="-120"/>
               </a:rPr>
-              <a:t>Deliverable</a:t>
+              <a:t>Container image hardening (cont.)</a:t>
             </a:r>
             <a:endParaRPr lang="en-US" sz="2600" dirty="0"/>
           </a:p>
@@ -3312,74 +3801,11 @@
         <p:spPr>
           <a:xfrm>
             <a:off x="457200" y="1325880"/>
-            <a:ext cx="8229600" cy="1097280"/>
+            <a:ext cx="8229600" cy="1810512"/>
           </a:xfrm>
           <a:prstGeom prst="roundRect">
             <a:avLst>
-              <a:gd name="adj" fmla="val 6667"/>
-            </a:avLst>
-          </a:prstGeom>
-          <a:solidFill>
-            <a:srgbClr val="E8EDF3"/>
-          </a:solidFill>
-          <a:ln/>
-        </p:spPr>
-      </p:sp>
-      <p:sp>
-        <p:nvSpPr>
-          <p:cNvPr id="6" name="Text 3"/>
-          <p:cNvSpPr/>
-          <p:nvPr/>
-        </p:nvSpPr>
-        <p:spPr>
-          <a:xfrm>
-            <a:off x="731520" y="1325880"/>
-            <a:ext cx="7680960" cy="1097280"/>
-          </a:xfrm>
-          <a:prstGeom prst="rect">
-            <a:avLst/>
-          </a:prstGeom>
-          <a:noFill/>
-          <a:ln/>
-        </p:spPr>
-        <p:txBody>
-          <a:bodyPr wrap="square" lIns="0" tIns="0" rIns="0" bIns="0" rtlCol="0" anchor="ctr">
-            <a:normAutofit/>
-          </a:bodyPr>
-          <a:lstStyle/>
-          <a:p>
-            <a:pPr indent="0" marL="0">
-              <a:buNone/>
-            </a:pPr>
-            <a:r>
-              <a:rPr lang="en-US" sz="1400" i="1" dirty="0">
-                <a:solidFill>
-                  <a:srgbClr val="E35205"/>
-                </a:solidFill>
-                <a:latin typeface="Calibri" pitchFamily="34" charset="0"/>
-                <a:ea typeface="Calibri" pitchFamily="34" charset="-122"/>
-                <a:cs typeface="Calibri" pitchFamily="34" charset="-120"/>
-              </a:rPr>
-              <a:t>📋 Worksheet 13 — labs/week13-cloud-container/worksheet.md (Parts 1–4) · kickoff: bash scan.sh (trivy config over the Dockerfiles only — IAM JSON is manual review, Trivy doesn't parse it)</a:t>
-            </a:r>
-            <a:endParaRPr lang="en-US" sz="1400" dirty="0"/>
-          </a:p>
-        </p:txBody>
-      </p:sp>
-      <p:sp>
-        <p:nvSpPr>
-          <p:cNvPr id="7" name="Shape 4"/>
-          <p:cNvSpPr/>
-          <p:nvPr/>
-        </p:nvSpPr>
-        <p:spPr>
-          <a:xfrm>
-            <a:off x="457200" y="2587752"/>
-            <a:ext cx="8229600" cy="1517904"/>
-          </a:xfrm>
-          <a:prstGeom prst="roundRect">
-            <a:avLst>
-              <a:gd name="adj" fmla="val 4819"/>
+              <a:gd name="adj" fmla="val 4040"/>
             </a:avLst>
           </a:prstGeom>
           <a:solidFill>
@@ -3397,14 +3823,14 @@
       </p:sp>
       <p:sp>
         <p:nvSpPr>
-          <p:cNvPr id="8" name="Text 5"/>
-          <p:cNvSpPr/>
-          <p:nvPr/>
-        </p:nvSpPr>
-        <p:spPr>
-          <a:xfrm>
-            <a:off x="731520" y="2697480"/>
-            <a:ext cx="7680960" cy="1298448"/>
+          <p:cNvPr id="6" name="Text 3"/>
+          <p:cNvSpPr/>
+          <p:nvPr/>
+        </p:nvSpPr>
+        <p:spPr>
+          <a:xfrm>
+            <a:off x="731520" y="1435608"/>
+            <a:ext cx="7680960" cy="1591056"/>
           </a:xfrm>
           <a:prstGeom prst="rect">
             <a:avLst/>
@@ -3434,7 +3860,7 @@
                 <a:ea typeface="Calibri" pitchFamily="34" charset="-122"/>
                 <a:cs typeface="Calibri" pitchFamily="34" charset="-120"/>
               </a:rPr>
-              <a:t>Before/after IAM policy + Dockerfile, all 9 flags explained</a:t>
+              <a:t>@sha256:... digest pins, not just a version tag — a tag can be repointed later, a digest can't</a:t>
             </a:r>
             <a:endParaRPr lang="en-US" sz="1400" dirty="0"/>
           </a:p>
@@ -3455,7 +3881,7 @@
                 <a:ea typeface="Calibri" pitchFamily="34" charset="-122"/>
                 <a:cs typeface="Calibri" pitchFamily="34" charset="-120"/>
               </a:rPr>
-              <a:t>Trivy reports showing reduced risk (container half only)</a:t>
+              <a:t>Re-scan to prove reduced findings</a:t>
             </a:r>
             <a:endParaRPr lang="en-US" sz="1400" dirty="0"/>
           </a:p>
@@ -3476,66 +3902,45 @@
                 <a:ea typeface="Calibri" pitchFamily="34" charset="-122"/>
                 <a:cs typeface="Calibri" pitchFamily="34" charset="-120"/>
               </a:rPr>
-              <a:t>Note on secrets remediation</a:t>
+              <a:t>Trivy only catches 3 of 6 planted defects (:latest, root user, secret-in-ENV) — COPY . ., chmod -R 777, and unpinned pip install need manual review, no rule fires</a:t>
             </a:r>
             <a:endParaRPr lang="en-US" sz="1400" dirty="0"/>
           </a:p>
-          <a:p>
-            <a:pPr marL="342900" indent="-342900">
-              <a:spcAft>
-                <a:spcPts val="600"/>
-              </a:spcAft>
-              <a:buSzPct val="100000"/>
-              <a:buChar char="•"/>
-            </a:pPr>
-            <a:r>
-              <a:rPr lang="en-US" sz="1400" dirty="0">
-                <a:solidFill>
-                  <a:srgbClr val="1F2937"/>
+        </p:txBody>
+      </p:sp>
+      <p:sp>
+        <p:nvSpPr>
+          <p:cNvPr id="7" name="Text 4"/>
+          <p:cNvSpPr/>
+          <p:nvPr/>
+        </p:nvSpPr>
+        <p:spPr>
+          <a:xfrm>
+            <a:off x="457200" y="4800600"/>
+            <a:ext cx="6949440" cy="274320"/>
+          </a:xfrm>
+          <a:prstGeom prst="rect">
+            <a:avLst/>
+          </a:prstGeom>
+          <a:noFill/>
+          <a:ln/>
+        </p:spPr>
+        <p:txBody>
+          <a:bodyPr wrap="square" lIns="0" tIns="0" rIns="0" bIns="0" rtlCol="0" anchor="ctr"/>
+          <a:lstStyle/>
+          <a:p>
+            <a:pPr indent="0" marL="0">
+              <a:buNone/>
+            </a:pPr>
+            <a:r>
+              <a:rPr lang="en-US" sz="900" dirty="0">
+                <a:solidFill>
+                  <a:srgbClr val="64748B"/>
                 </a:solidFill>
                 <a:latin typeface="Calibri" pitchFamily="34" charset="0"/>
                 <a:ea typeface="Calibri" pitchFamily="34" charset="-122"/>
                 <a:cs typeface="Calibri" pitchFamily="34" charset="-120"/>
               </a:rPr>
-              <a:t>+ Audit the AI / EiPE / Prompt Problem (see worksheet)</a:t>
-            </a:r>
-            <a:endParaRPr lang="en-US" sz="1400" dirty="0"/>
-          </a:p>
-        </p:txBody>
-      </p:sp>
-      <p:sp>
-        <p:nvSpPr>
-          <p:cNvPr id="9" name="Text 6"/>
-          <p:cNvSpPr/>
-          <p:nvPr/>
-        </p:nvSpPr>
-        <p:spPr>
-          <a:xfrm>
-            <a:off x="457200" y="4800600"/>
-            <a:ext cx="6949440" cy="274320"/>
-          </a:xfrm>
-          <a:prstGeom prst="rect">
-            <a:avLst/>
-          </a:prstGeom>
-          <a:noFill/>
-          <a:ln/>
-        </p:spPr>
-        <p:txBody>
-          <a:bodyPr wrap="square" lIns="0" tIns="0" rIns="0" bIns="0" rtlCol="0" anchor="ctr"/>
-          <a:lstStyle/>
-          <a:p>
-            <a:pPr indent="0" marL="0">
-              <a:buNone/>
-            </a:pPr>
-            <a:r>
-              <a:rPr lang="en-US" sz="900" dirty="0">
-                <a:solidFill>
-                  <a:srgbClr val="64748B"/>
-                </a:solidFill>
-                <a:latin typeface="Calibri" pitchFamily="34" charset="0"/>
-                <a:ea typeface="Calibri" pitchFamily="34" charset="-122"/>
-                <a:cs typeface="Calibri" pitchFamily="34" charset="-120"/>
-              </a:rPr>
               <a:t>Software Security · Week 13</a:t>
             </a:r>
             <a:endParaRPr lang="en-US" sz="900" dirty="0"/>
@@ -3544,7 +3949,7 @@
       </p:sp>
       <p:pic>
         <p:nvPicPr>
-          <p:cNvPr id="10" name="Image 1" descr="/private/tmp/claude-501/-Users-pop7-Library-CloudStorage-OneDrive-MonsterConnectCo--Ltd-Lecture-KOSEN69---software-security/f63a82af-e1ad-40ed-89c4-03c6ca776e3f/scratchpad/fix6/KOSEN69 - software-security/slides/pptx/assets/logo-small.png">    </p:cNvPr>
+          <p:cNvPr id="8" name="Image 1" descr="/private/tmp/claude-501/-Users-pop7-Library-CloudStorage-OneDrive-MonsterConnectCo--Ltd-Lecture-KOSEN69---software-security/f63a82af-e1ad-40ed-89c4-03c6ca776e3f/scratchpad/vis-w13/slides/pptx/assets/logo-small.png">    </p:cNvPr>
           <p:cNvPicPr>
             <a:picLocks noChangeAspect="1"/>
           </p:cNvPicPr>
@@ -3682,7 +4087,7 @@
                 <a:ea typeface="Arial" pitchFamily="34" charset="-122"/>
                 <a:cs typeface="Arial" pitchFamily="34" charset="-120"/>
               </a:rPr>
-              <a:t>Key takeaways</a:t>
+              <a:t>Does Trivy see it?</a:t>
             </a:r>
             <a:endParaRPr lang="en-US" sz="2600" dirty="0"/>
           </a:p>
@@ -3690,43 +4095,14 @@
       </p:sp>
       <p:sp>
         <p:nvSpPr>
-          <p:cNvPr id="5" name="Shape 2"/>
-          <p:cNvSpPr/>
-          <p:nvPr/>
-        </p:nvSpPr>
-        <p:spPr>
-          <a:xfrm>
-            <a:off x="457200" y="1325880"/>
-            <a:ext cx="8229600" cy="1207008"/>
-          </a:xfrm>
-          <a:prstGeom prst="roundRect">
-            <a:avLst>
-              <a:gd name="adj" fmla="val 6061"/>
-            </a:avLst>
-          </a:prstGeom>
-          <a:solidFill>
-            <a:srgbClr val="F1F5F9"/>
-          </a:solidFill>
-          <a:ln/>
-          <a:effectLst>
-            <a:outerShdw sx="100000" sy="100000" kx="0" ky="0" algn="bl" rotWithShape="0" blurRad="76200" dist="25400" dir="5400000">
-              <a:srgbClr val="000000">
-                <a:alpha val="12000"/>
-              </a:srgbClr>
-            </a:outerShdw>
-          </a:effectLst>
-        </p:spPr>
-      </p:sp>
-      <p:sp>
-        <p:nvSpPr>
-          <p:cNvPr id="6" name="Text 3"/>
-          <p:cNvSpPr/>
-          <p:nvPr/>
-        </p:nvSpPr>
-        <p:spPr>
-          <a:xfrm>
-            <a:off x="731520" y="1435608"/>
-            <a:ext cx="7680960" cy="987552"/>
+          <p:cNvPr id="5" name="Text 2"/>
+          <p:cNvSpPr/>
+          <p:nvPr/>
+        </p:nvSpPr>
+        <p:spPr>
+          <a:xfrm>
+            <a:off x="548640" y="1325880"/>
+            <a:ext cx="8046720" cy="822960"/>
           </a:xfrm>
           <a:prstGeom prst="rect">
             <a:avLst/>
@@ -3740,12 +4116,8 @@
           </a:bodyPr>
           <a:lstStyle/>
           <a:p>
-            <a:pPr marL="342900" indent="-342900">
-              <a:spcAft>
-                <a:spcPts val="600"/>
-              </a:spcAft>
-              <a:buSzPct val="100000"/>
-              <a:buChar char="•"/>
+            <a:pPr indent="0" marL="0">
+              <a:buNone/>
             </a:pPr>
             <a:r>
               <a:rPr lang="en-US" sz="1400" dirty="0">
@@ -3756,17 +4128,13 @@
                 <a:ea typeface="Calibri" pitchFamily="34" charset="-122"/>
                 <a:cs typeface="Calibri" pitchFamily="34" charset="-120"/>
               </a:rPr>
-              <a:t>Misconfiguration &gt; zero-days as a breach cause</a:t>
+              <a:t>Fix the six defects one at a time and watch trivy config re-score the file.</a:t>
             </a:r>
             <a:endParaRPr lang="en-US" sz="1400" dirty="0"/>
           </a:p>
           <a:p>
-            <a:pPr marL="342900" indent="-342900">
-              <a:spcAft>
-                <a:spcPts val="600"/>
-              </a:spcAft>
-              <a:buSzPct val="100000"/>
-              <a:buChar char="•"/>
+            <a:pPr indent="0" marL="0">
+              <a:buNone/>
             </a:pPr>
             <a:r>
               <a:rPr lang="en-US" sz="1400" dirty="0">
@@ -3777,66 +4145,45 @@
                 <a:ea typeface="Calibri" pitchFamily="34" charset="-122"/>
                 <a:cs typeface="Calibri" pitchFamily="34" charset="-120"/>
               </a:rPr>
-              <a:t>Least privilege, private-by-default, no secrets in code</a:t>
+              <a:t>Try it live: /sim/trivy-blindspot (interactive simulation, web only)</a:t>
             </a:r>
             <a:endParaRPr lang="en-US" sz="1400" dirty="0"/>
           </a:p>
-          <a:p>
-            <a:pPr marL="342900" indent="-342900">
-              <a:spcAft>
-                <a:spcPts val="600"/>
-              </a:spcAft>
-              <a:buSzPct val="100000"/>
-              <a:buChar char="•"/>
-            </a:pPr>
-            <a:r>
-              <a:rPr lang="en-US" sz="1400" dirty="0">
-                <a:solidFill>
-                  <a:srgbClr val="1F2937"/>
+        </p:txBody>
+      </p:sp>
+      <p:sp>
+        <p:nvSpPr>
+          <p:cNvPr id="6" name="Text 3"/>
+          <p:cNvSpPr/>
+          <p:nvPr/>
+        </p:nvSpPr>
+        <p:spPr>
+          <a:xfrm>
+            <a:off x="457200" y="4800600"/>
+            <a:ext cx="6949440" cy="274320"/>
+          </a:xfrm>
+          <a:prstGeom prst="rect">
+            <a:avLst/>
+          </a:prstGeom>
+          <a:noFill/>
+          <a:ln/>
+        </p:spPr>
+        <p:txBody>
+          <a:bodyPr wrap="square" lIns="0" tIns="0" rIns="0" bIns="0" rtlCol="0" anchor="ctr"/>
+          <a:lstStyle/>
+          <a:p>
+            <a:pPr indent="0" marL="0">
+              <a:buNone/>
+            </a:pPr>
+            <a:r>
+              <a:rPr lang="en-US" sz="900" dirty="0">
+                <a:solidFill>
+                  <a:srgbClr val="64748B"/>
                 </a:solidFill>
                 <a:latin typeface="Calibri" pitchFamily="34" charset="0"/>
                 <a:ea typeface="Calibri" pitchFamily="34" charset="-122"/>
                 <a:cs typeface="Calibri" pitchFamily="34" charset="-120"/>
               </a:rPr>
-              <a:t>Scan IaC and images in CI</a:t>
-            </a:r>
-            <a:endParaRPr lang="en-US" sz="1400" dirty="0"/>
-          </a:p>
-        </p:txBody>
-      </p:sp>
-      <p:sp>
-        <p:nvSpPr>
-          <p:cNvPr id="7" name="Text 4"/>
-          <p:cNvSpPr/>
-          <p:nvPr/>
-        </p:nvSpPr>
-        <p:spPr>
-          <a:xfrm>
-            <a:off x="457200" y="4800600"/>
-            <a:ext cx="6949440" cy="274320"/>
-          </a:xfrm>
-          <a:prstGeom prst="rect">
-            <a:avLst/>
-          </a:prstGeom>
-          <a:noFill/>
-          <a:ln/>
-        </p:spPr>
-        <p:txBody>
-          <a:bodyPr wrap="square" lIns="0" tIns="0" rIns="0" bIns="0" rtlCol="0" anchor="ctr"/>
-          <a:lstStyle/>
-          <a:p>
-            <a:pPr indent="0" marL="0">
-              <a:buNone/>
-            </a:pPr>
-            <a:r>
-              <a:rPr lang="en-US" sz="900" dirty="0">
-                <a:solidFill>
-                  <a:srgbClr val="64748B"/>
-                </a:solidFill>
-                <a:latin typeface="Calibri" pitchFamily="34" charset="0"/>
-                <a:ea typeface="Calibri" pitchFamily="34" charset="-122"/>
-                <a:cs typeface="Calibri" pitchFamily="34" charset="-120"/>
-              </a:rPr>
               <a:t>Software Security · Week 13</a:t>
             </a:r>
             <a:endParaRPr lang="en-US" sz="900" dirty="0"/>
@@ -3845,7 +4192,7 @@
       </p:sp>
       <p:pic>
         <p:nvPicPr>
-          <p:cNvPr id="8" name="Image 1" descr="/private/tmp/claude-501/-Users-pop7-Library-CloudStorage-OneDrive-MonsterConnectCo--Ltd-Lecture-KOSEN69---software-security/f63a82af-e1ad-40ed-89c4-03c6ca776e3f/scratchpad/fix6/KOSEN69 - software-security/slides/pptx/assets/logo-small.png">    </p:cNvPr>
+          <p:cNvPr id="7" name="Image 1" descr="/private/tmp/claude-501/-Users-pop7-Library-CloudStorage-OneDrive-MonsterConnectCo--Ltd-Lecture-KOSEN69---software-security/f63a82af-e1ad-40ed-89c4-03c6ca776e3f/scratchpad/vis-w13/slides/pptx/assets/logo-small.png">    </p:cNvPr>
           <p:cNvPicPr>
             <a:picLocks noChangeAspect="1"/>
           </p:cNvPicPr>
@@ -3901,14 +4248,65 @@
       </p:grpSpPr>
       <p:sp>
         <p:nvSpPr>
-          <p:cNvPr id="2" name="Text 0"/>
-          <p:cNvSpPr/>
-          <p:nvPr/>
-        </p:nvSpPr>
-        <p:spPr>
-          <a:xfrm>
-            <a:off x="640080" y="1737360"/>
-            <a:ext cx="7863840" cy="1097280"/>
+          <p:cNvPr id="2" name="Shape 0"/>
+          <p:cNvSpPr/>
+          <p:nvPr/>
+        </p:nvSpPr>
+        <p:spPr>
+          <a:xfrm>
+            <a:off x="457200" y="384048"/>
+            <a:ext cx="530352" cy="530352"/>
+          </a:xfrm>
+          <a:prstGeom prst="ellipse">
+            <a:avLst/>
+          </a:prstGeom>
+          <a:solidFill>
+            <a:srgbClr val="E35205"/>
+          </a:solidFill>
+          <a:ln/>
+          <a:effectLst>
+            <a:outerShdw sx="100000" sy="100000" kx="0" ky="0" algn="bl" rotWithShape="0" blurRad="76200" dist="25400" dir="5400000">
+              <a:srgbClr val="000000">
+                <a:alpha val="12000"/>
+              </a:srgbClr>
+            </a:outerShdw>
+          </a:effectLst>
+        </p:spPr>
+      </p:sp>
+      <p:pic>
+        <p:nvPicPr>
+          <p:cNvPr id="3" name="Image 0" descr="preencoded.png">    </p:cNvPr>
+          <p:cNvPicPr>
+            <a:picLocks noChangeAspect="1"/>
+          </p:cNvPicPr>
+          <p:nvPr/>
+        </p:nvPicPr>
+        <p:blipFill>
+          <a:blip r:embed="rId1"/>
+          <a:stretch>
+            <a:fillRect/>
+          </a:stretch>
+        </p:blipFill>
+        <p:spPr>
+          <a:xfrm>
+            <a:off x="594360" y="521208"/>
+            <a:ext cx="256032" cy="256032"/>
+          </a:xfrm>
+          <a:prstGeom prst="rect">
+            <a:avLst/>
+          </a:prstGeom>
+        </p:spPr>
+      </p:pic>
+      <p:sp>
+        <p:nvSpPr>
+          <p:cNvPr id="4" name="Text 1"/>
+          <p:cNvSpPr/>
+          <p:nvPr/>
+        </p:nvSpPr>
+        <p:spPr>
+          <a:xfrm>
+            <a:off x="1143000" y="329184"/>
+            <a:ext cx="7498080" cy="603504"/>
           </a:xfrm>
           <a:prstGeom prst="rect">
             <a:avLst/>
@@ -3924,7 +4322,7 @@
               <a:buNone/>
             </a:pPr>
             <a:r>
-              <a:rPr lang="en-US" sz="4600" b="1" dirty="0">
+              <a:rPr lang="en-US" sz="2600" b="1" dirty="0">
                 <a:solidFill>
                   <a:srgbClr val="1F2937"/>
                 </a:solidFill>
@@ -3932,22 +4330,51 @@
                 <a:ea typeface="Arial" pitchFamily="34" charset="-122"/>
                 <a:cs typeface="Arial" pitchFamily="34" charset="-120"/>
               </a:rPr>
-              <a:t>Questions?</a:t>
-            </a:r>
-            <a:endParaRPr lang="en-US" sz="4600" dirty="0"/>
-          </a:p>
-        </p:txBody>
-      </p:sp>
-      <p:sp>
-        <p:nvSpPr>
-          <p:cNvPr id="3" name="Text 1"/>
-          <p:cNvSpPr/>
-          <p:nvPr/>
-        </p:nvSpPr>
-        <p:spPr>
-          <a:xfrm>
-            <a:off x="658368" y="2834640"/>
-            <a:ext cx="7863840" cy="731520"/>
+              <a:t>Kubernetes basics (awareness)</a:t>
+            </a:r>
+            <a:endParaRPr lang="en-US" sz="2600" dirty="0"/>
+          </a:p>
+        </p:txBody>
+      </p:sp>
+      <p:sp>
+        <p:nvSpPr>
+          <p:cNvPr id="5" name="Shape 2"/>
+          <p:cNvSpPr/>
+          <p:nvPr/>
+        </p:nvSpPr>
+        <p:spPr>
+          <a:xfrm>
+            <a:off x="457200" y="1325880"/>
+            <a:ext cx="8229600" cy="896112"/>
+          </a:xfrm>
+          <a:prstGeom prst="roundRect">
+            <a:avLst>
+              <a:gd name="adj" fmla="val 8163"/>
+            </a:avLst>
+          </a:prstGeom>
+          <a:solidFill>
+            <a:srgbClr val="F1F5F9"/>
+          </a:solidFill>
+          <a:ln/>
+          <a:effectLst>
+            <a:outerShdw sx="100000" sy="100000" kx="0" ky="0" algn="bl" rotWithShape="0" blurRad="76200" dist="25400" dir="5400000">
+              <a:srgbClr val="000000">
+                <a:alpha val="12000"/>
+              </a:srgbClr>
+            </a:outerShdw>
+          </a:effectLst>
+        </p:spPr>
+      </p:sp>
+      <p:sp>
+        <p:nvSpPr>
+          <p:cNvPr id="6" name="Text 3"/>
+          <p:cNvSpPr/>
+          <p:nvPr/>
+        </p:nvSpPr>
+        <p:spPr>
+          <a:xfrm>
+            <a:off x="731520" y="1435608"/>
+            <a:ext cx="7680960" cy="676656"/>
           </a:xfrm>
           <a:prstGeom prst="rect">
             <a:avLst/>
@@ -3956,37 +4383,1424 @@
           <a:ln/>
         </p:spPr>
         <p:txBody>
-          <a:bodyPr wrap="square" lIns="0" tIns="0" rIns="0" bIns="0" rtlCol="0" anchor="ctr"/>
-          <a:lstStyle/>
-          <a:p>
-            <a:pPr indent="0" marL="0">
-              <a:buNone/>
-            </a:pPr>
-            <a:r>
-              <a:rPr lang="en-US" sz="1800" dirty="0">
-                <a:solidFill>
-                  <a:srgbClr val="E35205"/>
+          <a:bodyPr wrap="square" lIns="0" tIns="0" rIns="0" bIns="0" rtlCol="0" anchor="t">
+            <a:normAutofit/>
+          </a:bodyPr>
+          <a:lstStyle/>
+          <a:p>
+            <a:pPr marL="342900" indent="-342900">
+              <a:spcAft>
+                <a:spcPts val="600"/>
+              </a:spcAft>
+              <a:buSzPct val="100000"/>
+              <a:buChar char="•"/>
+            </a:pPr>
+            <a:r>
+              <a:rPr lang="en-US" sz="1400" dirty="0">
+                <a:solidFill>
+                  <a:srgbClr val="1F2937"/>
                 </a:solidFill>
                 <a:latin typeface="Calibri" pitchFamily="34" charset="0"/>
                 <a:ea typeface="Calibri" pitchFamily="34" charset="-122"/>
                 <a:cs typeface="Calibri" pitchFamily="34" charset="-120"/>
               </a:rPr>
-              <a:t>Next week: AI / LLM application security</a:t>
-            </a:r>
-            <a:endParaRPr lang="en-US" sz="1800" dirty="0"/>
+              <a:t>Pod security, network policies, RBAC</a:t>
+            </a:r>
+            <a:endParaRPr lang="en-US" sz="1400" dirty="0"/>
+          </a:p>
+          <a:p>
+            <a:pPr marL="342900" indent="-342900">
+              <a:spcAft>
+                <a:spcPts val="600"/>
+              </a:spcAft>
+              <a:buSzPct val="100000"/>
+              <a:buChar char="•"/>
+            </a:pPr>
+            <a:r>
+              <a:rPr lang="en-US" sz="1400" dirty="0">
+                <a:solidFill>
+                  <a:srgbClr val="1F2937"/>
+                </a:solidFill>
+                <a:latin typeface="Calibri" pitchFamily="34" charset="0"/>
+                <a:ea typeface="Calibri" pitchFamily="34" charset="-122"/>
+                <a:cs typeface="Calibri" pitchFamily="34" charset="-120"/>
+              </a:rPr>
+              <a:t>Don't run privileged; limit service-account tokens</a:t>
+            </a:r>
+            <a:endParaRPr lang="en-US" sz="1400" dirty="0"/>
+          </a:p>
+        </p:txBody>
+      </p:sp>
+      <p:sp>
+        <p:nvSpPr>
+          <p:cNvPr id="7" name="Text 4"/>
+          <p:cNvSpPr/>
+          <p:nvPr/>
+        </p:nvSpPr>
+        <p:spPr>
+          <a:xfrm>
+            <a:off x="457200" y="4800600"/>
+            <a:ext cx="6949440" cy="274320"/>
+          </a:xfrm>
+          <a:prstGeom prst="rect">
+            <a:avLst/>
+          </a:prstGeom>
+          <a:noFill/>
+          <a:ln/>
+        </p:spPr>
+        <p:txBody>
+          <a:bodyPr wrap="square" lIns="0" tIns="0" rIns="0" bIns="0" rtlCol="0" anchor="ctr"/>
+          <a:lstStyle/>
+          <a:p>
+            <a:pPr indent="0" marL="0">
+              <a:buNone/>
+            </a:pPr>
+            <a:r>
+              <a:rPr lang="en-US" sz="900" dirty="0">
+                <a:solidFill>
+                  <a:srgbClr val="64748B"/>
+                </a:solidFill>
+                <a:latin typeface="Calibri" pitchFamily="34" charset="0"/>
+                <a:ea typeface="Calibri" pitchFamily="34" charset="-122"/>
+                <a:cs typeface="Calibri" pitchFamily="34" charset="-120"/>
+              </a:rPr>
+              <a:t>Software Security · Week 13</a:t>
+            </a:r>
+            <a:endParaRPr lang="en-US" sz="900" dirty="0"/>
           </a:p>
         </p:txBody>
       </p:sp>
       <p:pic>
         <p:nvPicPr>
-          <p:cNvPr id="4" name="Image 0" descr="/private/tmp/claude-501/-Users-pop7-Library-CloudStorage-OneDrive-MonsterConnectCo--Ltd-Lecture-KOSEN69---software-security/f63a82af-e1ad-40ed-89c4-03c6ca776e3f/scratchpad/fix6/KOSEN69 - software-security/slides/pptx/assets/logo-small.png">    </p:cNvPr>
+          <p:cNvPr id="8" name="Image 1" descr="/private/tmp/claude-501/-Users-pop7-Library-CloudStorage-OneDrive-MonsterConnectCo--Ltd-Lecture-KOSEN69---software-security/f63a82af-e1ad-40ed-89c4-03c6ca776e3f/scratchpad/vis-w13/slides/pptx/assets/logo-small.png">    </p:cNvPr>
           <p:cNvPicPr>
             <a:picLocks noChangeAspect="1"/>
           </p:cNvPicPr>
           <p:nvPr/>
         </p:nvPicPr>
         <p:blipFill>
+          <a:blip r:embed="rId2"/>
+          <a:stretch>
+            <a:fillRect/>
+          </a:stretch>
+        </p:blipFill>
+        <p:spPr>
+          <a:xfrm>
+            <a:off x="7882128" y="4700016"/>
+            <a:ext cx="768096" cy="356616"/>
+          </a:xfrm>
+          <a:prstGeom prst="rect">
+            <a:avLst/>
+          </a:prstGeom>
+        </p:spPr>
+      </p:pic>
+    </p:spTree>
+  </p:cSld>
+  <p:clrMapOvr>
+    <a:masterClrMapping/>
+  </p:clrMapOvr>
+</p:sld>
+</file>
+
+<file path=ppt/slides/slide16.xml><?xml version="1.0" encoding="utf-8"?>
+<p:sld xmlns:a="http://schemas.openxmlformats.org/drawingml/2006/main" xmlns:r="http://schemas.openxmlformats.org/officeDocument/2006/relationships" xmlns:p="http://schemas.openxmlformats.org/presentationml/2006/main">
+  <p:cSld name="Slide 16">
+    <p:bg>
+      <p:bgPr>
+        <a:solidFill>
+          <a:srgbClr val="FFFFFF"/>
+        </a:solidFill>
+      </p:bgPr>
+    </p:bg>
+    <p:spTree>
+      <p:nvGrpSpPr>
+        <p:cNvPr id="1" name=""/>
+        <p:cNvGrpSpPr/>
+        <p:nvPr/>
+      </p:nvGrpSpPr>
+      <p:grpSpPr>
+        <a:xfrm>
+          <a:off x="0" y="0"/>
+          <a:ext cx="0" cy="0"/>
+          <a:chOff x="0" y="0"/>
+          <a:chExt cx="0" cy="0"/>
+        </a:xfrm>
+      </p:grpSpPr>
+      <p:sp>
+        <p:nvSpPr>
+          <p:cNvPr id="2" name="Shape 0"/>
+          <p:cNvSpPr/>
+          <p:nvPr/>
+        </p:nvSpPr>
+        <p:spPr>
+          <a:xfrm>
+            <a:off x="457200" y="384048"/>
+            <a:ext cx="530352" cy="530352"/>
+          </a:xfrm>
+          <a:prstGeom prst="ellipse">
+            <a:avLst/>
+          </a:prstGeom>
+          <a:solidFill>
+            <a:srgbClr val="E35205"/>
+          </a:solidFill>
+          <a:ln/>
+          <a:effectLst>
+            <a:outerShdw sx="100000" sy="100000" kx="0" ky="0" algn="bl" rotWithShape="0" blurRad="76200" dist="25400" dir="5400000">
+              <a:srgbClr val="000000">
+                <a:alpha val="12000"/>
+              </a:srgbClr>
+            </a:outerShdw>
+          </a:effectLst>
+        </p:spPr>
+      </p:sp>
+      <p:pic>
+        <p:nvPicPr>
+          <p:cNvPr id="3" name="Image 0" descr="preencoded.png">    </p:cNvPr>
+          <p:cNvPicPr>
+            <a:picLocks noChangeAspect="1"/>
+          </p:cNvPicPr>
+          <p:nvPr/>
+        </p:nvPicPr>
+        <p:blipFill>
           <a:blip r:embed="rId1"/>
+          <a:stretch>
+            <a:fillRect/>
+          </a:stretch>
+        </p:blipFill>
+        <p:spPr>
+          <a:xfrm>
+            <a:off x="594360" y="521208"/>
+            <a:ext cx="256032" cy="256032"/>
+          </a:xfrm>
+          <a:prstGeom prst="rect">
+            <a:avLst/>
+          </a:prstGeom>
+        </p:spPr>
+      </p:pic>
+      <p:sp>
+        <p:nvSpPr>
+          <p:cNvPr id="4" name="Text 1"/>
+          <p:cNvSpPr/>
+          <p:nvPr/>
+        </p:nvSpPr>
+        <p:spPr>
+          <a:xfrm>
+            <a:off x="1143000" y="329184"/>
+            <a:ext cx="7498080" cy="603504"/>
+          </a:xfrm>
+          <a:prstGeom prst="rect">
+            <a:avLst/>
+          </a:prstGeom>
+          <a:noFill/>
+          <a:ln/>
+        </p:spPr>
+        <p:txBody>
+          <a:bodyPr wrap="square" lIns="0" tIns="0" rIns="0" bIns="0" rtlCol="0" anchor="ctr"/>
+          <a:lstStyle/>
+          <a:p>
+            <a:pPr indent="0" marL="0">
+              <a:buNone/>
+            </a:pPr>
+            <a:r>
+              <a:rPr lang="en-US" sz="2600" b="1" dirty="0">
+                <a:solidFill>
+                  <a:srgbClr val="1F2937"/>
+                </a:solidFill>
+                <a:latin typeface="Arial" pitchFamily="34" charset="0"/>
+                <a:ea typeface="Arial" pitchFamily="34" charset="-122"/>
+                <a:cs typeface="Arial" pitchFamily="34" charset="-120"/>
+              </a:rPr>
+              <a:t>Same app, shipped twice</a:t>
+            </a:r>
+            <a:endParaRPr lang="en-US" sz="2600" dirty="0"/>
+          </a:p>
+        </p:txBody>
+      </p:sp>
+      <p:pic>
+        <p:nvPicPr>
+          <p:cNvPr id="5" name="Image 1" descr="The same app as two container images side by side, insecure vs hardened, six layers compared: mutable :latest tag vs a pinned digest, a baked-in secret vs runtime injection, root user vs distroless non-root, COPY-everything vs a minimal context, world-writable permissions vs read-only, and an unpinned pip install vs a discarded build stage. Below both, the same argument one layer up: the wildcard IAM policy vs the scoped one. The conclusion: Trivy flags only three of the seven defects shown here — the tag, the root user, and the secret. COPY .., chmod 777, the unpinned install, and the IAM JSON all need manual review; there is no rule for any of them.">    </p:cNvPr>
+          <p:cNvPicPr>
+            <a:picLocks noChangeAspect="1"/>
+          </p:cNvPicPr>
+          <p:nvPr/>
+        </p:nvPicPr>
+        <p:blipFill>
+          <a:blip r:embed="rId2"/>
+          <a:stretch>
+            <a:fillRect/>
+          </a:stretch>
+        </p:blipFill>
+        <p:spPr>
+          <a:xfrm>
+            <a:off x="3036517" y="1097280"/>
+            <a:ext cx="3070967" cy="3566160"/>
+          </a:xfrm>
+          <a:prstGeom prst="rect">
+            <a:avLst/>
+          </a:prstGeom>
+        </p:spPr>
+      </p:pic>
+      <p:sp>
+        <p:nvSpPr>
+          <p:cNvPr id="6" name="Text 2"/>
+          <p:cNvSpPr/>
+          <p:nvPr/>
+        </p:nvSpPr>
+        <p:spPr>
+          <a:xfrm>
+            <a:off x="457200" y="4800600"/>
+            <a:ext cx="6949440" cy="274320"/>
+          </a:xfrm>
+          <a:prstGeom prst="rect">
+            <a:avLst/>
+          </a:prstGeom>
+          <a:noFill/>
+          <a:ln/>
+        </p:spPr>
+        <p:txBody>
+          <a:bodyPr wrap="square" lIns="0" tIns="0" rIns="0" bIns="0" rtlCol="0" anchor="ctr"/>
+          <a:lstStyle/>
+          <a:p>
+            <a:pPr indent="0" marL="0">
+              <a:buNone/>
+            </a:pPr>
+            <a:r>
+              <a:rPr lang="en-US" sz="900" dirty="0">
+                <a:solidFill>
+                  <a:srgbClr val="64748B"/>
+                </a:solidFill>
+                <a:latin typeface="Calibri" pitchFamily="34" charset="0"/>
+                <a:ea typeface="Calibri" pitchFamily="34" charset="-122"/>
+                <a:cs typeface="Calibri" pitchFamily="34" charset="-120"/>
+              </a:rPr>
+              <a:t>Software Security · Week 13</a:t>
+            </a:r>
+            <a:endParaRPr lang="en-US" sz="900" dirty="0"/>
+          </a:p>
+        </p:txBody>
+      </p:sp>
+      <p:pic>
+        <p:nvPicPr>
+          <p:cNvPr id="7" name="Image 2" descr="/private/tmp/claude-501/-Users-pop7-Library-CloudStorage-OneDrive-MonsterConnectCo--Ltd-Lecture-KOSEN69---software-security/f63a82af-e1ad-40ed-89c4-03c6ca776e3f/scratchpad/vis-w13/slides/pptx/assets/logo-small.png">    </p:cNvPr>
+          <p:cNvPicPr>
+            <a:picLocks noChangeAspect="1"/>
+          </p:cNvPicPr>
+          <p:nvPr/>
+        </p:nvPicPr>
+        <p:blipFill>
+          <a:blip r:embed="rId3"/>
+          <a:stretch>
+            <a:fillRect/>
+          </a:stretch>
+        </p:blipFill>
+        <p:spPr>
+          <a:xfrm>
+            <a:off x="7882128" y="4700016"/>
+            <a:ext cx="768096" cy="356616"/>
+          </a:xfrm>
+          <a:prstGeom prst="rect">
+            <a:avLst/>
+          </a:prstGeom>
+        </p:spPr>
+      </p:pic>
+    </p:spTree>
+  </p:cSld>
+  <p:clrMapOvr>
+    <a:masterClrMapping/>
+  </p:clrMapOvr>
+</p:sld>
+</file>
+
+<file path=ppt/slides/slide17.xml><?xml version="1.0" encoding="utf-8"?>
+<p:sld xmlns:a="http://schemas.openxmlformats.org/drawingml/2006/main" xmlns:r="http://schemas.openxmlformats.org/officeDocument/2006/relationships" xmlns:p="http://schemas.openxmlformats.org/presentationml/2006/main">
+  <p:cSld name="Slide 17">
+    <p:bg>
+      <p:bgPr>
+        <a:solidFill>
+          <a:srgbClr val="FFFFFF"/>
+        </a:solidFill>
+      </p:bgPr>
+    </p:bg>
+    <p:spTree>
+      <p:nvGrpSpPr>
+        <p:cNvPr id="1" name=""/>
+        <p:cNvGrpSpPr/>
+        <p:nvPr/>
+      </p:nvGrpSpPr>
+      <p:grpSpPr>
+        <a:xfrm>
+          <a:off x="0" y="0"/>
+          <a:ext cx="0" cy="0"/>
+          <a:chOff x="0" y="0"/>
+          <a:chExt cx="0" cy="0"/>
+        </a:xfrm>
+      </p:grpSpPr>
+      <p:sp>
+        <p:nvSpPr>
+          <p:cNvPr id="2" name="Shape 0"/>
+          <p:cNvSpPr/>
+          <p:nvPr/>
+        </p:nvSpPr>
+        <p:spPr>
+          <a:xfrm>
+            <a:off x="457200" y="384048"/>
+            <a:ext cx="530352" cy="530352"/>
+          </a:xfrm>
+          <a:prstGeom prst="ellipse">
+            <a:avLst/>
+          </a:prstGeom>
+          <a:solidFill>
+            <a:srgbClr val="E35205"/>
+          </a:solidFill>
+          <a:ln/>
+          <a:effectLst>
+            <a:outerShdw sx="100000" sy="100000" kx="0" ky="0" algn="bl" rotWithShape="0" blurRad="76200" dist="25400" dir="5400000">
+              <a:srgbClr val="000000">
+                <a:alpha val="12000"/>
+              </a:srgbClr>
+            </a:outerShdw>
+          </a:effectLst>
+        </p:spPr>
+      </p:sp>
+      <p:pic>
+        <p:nvPicPr>
+          <p:cNvPr id="3" name="Image 0" descr="preencoded.png">    </p:cNvPr>
+          <p:cNvPicPr>
+            <a:picLocks noChangeAspect="1"/>
+          </p:cNvPicPr>
+          <p:nvPr/>
+        </p:nvPicPr>
+        <p:blipFill>
+          <a:blip r:embed="rId1"/>
+          <a:stretch>
+            <a:fillRect/>
+          </a:stretch>
+        </p:blipFill>
+        <p:spPr>
+          <a:xfrm>
+            <a:off x="594360" y="521208"/>
+            <a:ext cx="256032" cy="256032"/>
+          </a:xfrm>
+          <a:prstGeom prst="rect">
+            <a:avLst/>
+          </a:prstGeom>
+        </p:spPr>
+      </p:pic>
+      <p:sp>
+        <p:nvSpPr>
+          <p:cNvPr id="4" name="Text 1"/>
+          <p:cNvSpPr/>
+          <p:nvPr/>
+        </p:nvSpPr>
+        <p:spPr>
+          <a:xfrm>
+            <a:off x="1143000" y="329184"/>
+            <a:ext cx="7498080" cy="603504"/>
+          </a:xfrm>
+          <a:prstGeom prst="rect">
+            <a:avLst/>
+          </a:prstGeom>
+          <a:noFill/>
+          <a:ln/>
+        </p:spPr>
+        <p:txBody>
+          <a:bodyPr wrap="square" lIns="0" tIns="0" rIns="0" bIns="0" rtlCol="0" anchor="ctr"/>
+          <a:lstStyle/>
+          <a:p>
+            <a:pPr indent="0" marL="0">
+              <a:buNone/>
+            </a:pPr>
+            <a:r>
+              <a:rPr lang="en-US" sz="2600" b="1" dirty="0">
+                <a:solidFill>
+                  <a:srgbClr val="1F2937"/>
+                </a:solidFill>
+                <a:latin typeface="Arial" pitchFamily="34" charset="0"/>
+                <a:ea typeface="Arial" pitchFamily="34" charset="-122"/>
+                <a:cs typeface="Arial" pitchFamily="34" charset="-120"/>
+              </a:rPr>
+              <a:t>🔍 Game — Misconfig Hunt</a:t>
+            </a:r>
+            <a:endParaRPr lang="en-US" sz="2600" dirty="0"/>
+          </a:p>
+        </p:txBody>
+      </p:sp>
+      <p:sp>
+        <p:nvSpPr>
+          <p:cNvPr id="5" name="Text 2"/>
+          <p:cNvSpPr/>
+          <p:nvPr/>
+        </p:nvSpPr>
+        <p:spPr>
+          <a:xfrm>
+            <a:off x="548640" y="1325880"/>
+            <a:ext cx="8046720" cy="548640"/>
+          </a:xfrm>
+          <a:prstGeom prst="rect">
+            <a:avLst/>
+          </a:prstGeom>
+          <a:noFill/>
+          <a:ln/>
+        </p:spPr>
+        <p:txBody>
+          <a:bodyPr wrap="square" lIns="0" tIns="0" rIns="0" bIns="0" rtlCol="0" anchor="t">
+            <a:normAutofit/>
+          </a:bodyPr>
+          <a:lstStyle/>
+          <a:p>
+            <a:pPr indent="0" marL="0">
+              <a:buNone/>
+            </a:pPr>
+            <a:r>
+              <a:rPr lang="en-US" sz="1400" dirty="0">
+                <a:solidFill>
+                  <a:srgbClr val="1F2937"/>
+                </a:solidFill>
+                <a:latin typeface="Calibri" pitchFamily="34" charset="0"/>
+                <a:ea typeface="Calibri" pitchFamily="34" charset="-122"/>
+                <a:cs typeface="Calibri" pitchFamily="34" charset="-120"/>
+              </a:rPr>
+              <a:t>9 flags — each misconfiguration found + explained = a flag:</a:t>
+            </a:r>
+            <a:endParaRPr lang="en-US" sz="1400" dirty="0"/>
+          </a:p>
+        </p:txBody>
+      </p:sp>
+      <p:sp>
+        <p:nvSpPr>
+          <p:cNvPr id="6" name="Shape 3"/>
+          <p:cNvSpPr/>
+          <p:nvPr/>
+        </p:nvSpPr>
+        <p:spPr>
+          <a:xfrm>
+            <a:off x="502920" y="1965960"/>
+            <a:ext cx="384048" cy="384048"/>
+          </a:xfrm>
+          <a:prstGeom prst="ellipse">
+            <a:avLst/>
+          </a:prstGeom>
+          <a:solidFill>
+            <a:srgbClr val="E35205"/>
+          </a:solidFill>
+          <a:ln/>
+        </p:spPr>
+      </p:sp>
+      <p:sp>
+        <p:nvSpPr>
+          <p:cNvPr id="7" name="Text 4"/>
+          <p:cNvSpPr/>
+          <p:nvPr/>
+        </p:nvSpPr>
+        <p:spPr>
+          <a:xfrm>
+            <a:off x="502920" y="1965960"/>
+            <a:ext cx="384048" cy="384048"/>
+          </a:xfrm>
+          <a:prstGeom prst="rect">
+            <a:avLst/>
+          </a:prstGeom>
+          <a:noFill/>
+          <a:ln/>
+        </p:spPr>
+        <p:txBody>
+          <a:bodyPr wrap="square" lIns="0" tIns="0" rIns="0" bIns="0" rtlCol="0" anchor="ctr"/>
+          <a:lstStyle/>
+          <a:p>
+            <a:pPr algn="ctr" indent="0" marL="0">
+              <a:buNone/>
+            </a:pPr>
+            <a:r>
+              <a:rPr lang="en-US" sz="1500" b="1" dirty="0">
+                <a:solidFill>
+                  <a:srgbClr val="0E1726"/>
+                </a:solidFill>
+                <a:latin typeface="Arial" pitchFamily="34" charset="0"/>
+                <a:ea typeface="Arial" pitchFamily="34" charset="-122"/>
+                <a:cs typeface="Arial" pitchFamily="34" charset="-120"/>
+              </a:rPr>
+              <a:t>1</a:t>
+            </a:r>
+            <a:endParaRPr lang="en-US" sz="1500" dirty="0"/>
+          </a:p>
+        </p:txBody>
+      </p:sp>
+      <p:sp>
+        <p:nvSpPr>
+          <p:cNvPr id="8" name="Text 5"/>
+          <p:cNvSpPr/>
+          <p:nvPr/>
+        </p:nvSpPr>
+        <p:spPr>
+          <a:xfrm>
+            <a:off x="1051560" y="1965960"/>
+            <a:ext cx="7589520" cy="658368"/>
+          </a:xfrm>
+          <a:prstGeom prst="rect">
+            <a:avLst/>
+          </a:prstGeom>
+          <a:noFill/>
+          <a:ln/>
+        </p:spPr>
+        <p:txBody>
+          <a:bodyPr wrap="square" lIns="0" tIns="0" rIns="0" bIns="0" rtlCol="0" anchor="ctr">
+            <a:normAutofit/>
+          </a:bodyPr>
+          <a:lstStyle/>
+          <a:p>
+            <a:pPr indent="0" marL="0">
+              <a:buNone/>
+            </a:pPr>
+            <a:r>
+              <a:rPr lang="en-US" sz="1350" dirty="0">
+                <a:solidFill>
+                  <a:srgbClr val="1F2937"/>
+                </a:solidFill>
+                <a:latin typeface="Calibri" pitchFamily="34" charset="0"/>
+                <a:ea typeface="Calibri" pitchFamily="34" charset="-122"/>
+                <a:cs typeface="Calibri" pitchFamily="34" charset="-120"/>
+              </a:rPr>
+              <a:t>Container (6): :latest tag, root user, secret-in-ENV, COPY . ., chmod -R 777, unpinned pip install</a:t>
+            </a:r>
+            <a:endParaRPr lang="en-US" sz="1350" dirty="0"/>
+          </a:p>
+        </p:txBody>
+      </p:sp>
+      <p:sp>
+        <p:nvSpPr>
+          <p:cNvPr id="9" name="Shape 6"/>
+          <p:cNvSpPr/>
+          <p:nvPr/>
+        </p:nvSpPr>
+        <p:spPr>
+          <a:xfrm>
+            <a:off x="502920" y="2697480"/>
+            <a:ext cx="384048" cy="384048"/>
+          </a:xfrm>
+          <a:prstGeom prst="ellipse">
+            <a:avLst/>
+          </a:prstGeom>
+          <a:solidFill>
+            <a:srgbClr val="E35205"/>
+          </a:solidFill>
+          <a:ln/>
+        </p:spPr>
+      </p:sp>
+      <p:sp>
+        <p:nvSpPr>
+          <p:cNvPr id="10" name="Text 7"/>
+          <p:cNvSpPr/>
+          <p:nvPr/>
+        </p:nvSpPr>
+        <p:spPr>
+          <a:xfrm>
+            <a:off x="502920" y="2697480"/>
+            <a:ext cx="384048" cy="384048"/>
+          </a:xfrm>
+          <a:prstGeom prst="rect">
+            <a:avLst/>
+          </a:prstGeom>
+          <a:noFill/>
+          <a:ln/>
+        </p:spPr>
+        <p:txBody>
+          <a:bodyPr wrap="square" lIns="0" tIns="0" rIns="0" bIns="0" rtlCol="0" anchor="ctr"/>
+          <a:lstStyle/>
+          <a:p>
+            <a:pPr algn="ctr" indent="0" marL="0">
+              <a:buNone/>
+            </a:pPr>
+            <a:r>
+              <a:rPr lang="en-US" sz="1500" b="1" dirty="0">
+                <a:solidFill>
+                  <a:srgbClr val="0E1726"/>
+                </a:solidFill>
+                <a:latin typeface="Arial" pitchFamily="34" charset="0"/>
+                <a:ea typeface="Arial" pitchFamily="34" charset="-122"/>
+                <a:cs typeface="Arial" pitchFamily="34" charset="-120"/>
+              </a:rPr>
+              <a:t>2</a:t>
+            </a:r>
+            <a:endParaRPr lang="en-US" sz="1500" dirty="0"/>
+          </a:p>
+        </p:txBody>
+      </p:sp>
+      <p:sp>
+        <p:nvSpPr>
+          <p:cNvPr id="11" name="Text 8"/>
+          <p:cNvSpPr/>
+          <p:nvPr/>
+        </p:nvSpPr>
+        <p:spPr>
+          <a:xfrm>
+            <a:off x="1051560" y="2697480"/>
+            <a:ext cx="7589520" cy="402336"/>
+          </a:xfrm>
+          <a:prstGeom prst="rect">
+            <a:avLst/>
+          </a:prstGeom>
+          <a:noFill/>
+          <a:ln/>
+        </p:spPr>
+        <p:txBody>
+          <a:bodyPr wrap="square" lIns="0" tIns="0" rIns="0" bIns="0" rtlCol="0" anchor="ctr">
+            <a:normAutofit/>
+          </a:bodyPr>
+          <a:lstStyle/>
+          <a:p>
+            <a:pPr indent="0" marL="0">
+              <a:buNone/>
+            </a:pPr>
+            <a:r>
+              <a:rPr lang="en-US" sz="1350" dirty="0">
+                <a:solidFill>
+                  <a:srgbClr val="1F2937"/>
+                </a:solidFill>
+                <a:latin typeface="Calibri" pitchFamily="34" charset="0"/>
+                <a:ea typeface="Calibri" pitchFamily="34" charset="-122"/>
+                <a:cs typeface="Calibri" pitchFamily="34" charset="-120"/>
+              </a:rPr>
+              <a:t>IAM (3): Resource:"*" (CWE-732), Action:"*" (CWE-269), missing Condition scoping</a:t>
+            </a:r>
+            <a:endParaRPr lang="en-US" sz="1350" dirty="0"/>
+          </a:p>
+        </p:txBody>
+      </p:sp>
+      <p:sp>
+        <p:nvSpPr>
+          <p:cNvPr id="12" name="Text 9"/>
+          <p:cNvSpPr/>
+          <p:nvPr/>
+        </p:nvSpPr>
+        <p:spPr>
+          <a:xfrm>
+            <a:off x="457200" y="4800600"/>
+            <a:ext cx="6949440" cy="274320"/>
+          </a:xfrm>
+          <a:prstGeom prst="rect">
+            <a:avLst/>
+          </a:prstGeom>
+          <a:noFill/>
+          <a:ln/>
+        </p:spPr>
+        <p:txBody>
+          <a:bodyPr wrap="square" lIns="0" tIns="0" rIns="0" bIns="0" rtlCol="0" anchor="ctr"/>
+          <a:lstStyle/>
+          <a:p>
+            <a:pPr indent="0" marL="0">
+              <a:buNone/>
+            </a:pPr>
+            <a:r>
+              <a:rPr lang="en-US" sz="900" dirty="0">
+                <a:solidFill>
+                  <a:srgbClr val="64748B"/>
+                </a:solidFill>
+                <a:latin typeface="Calibri" pitchFamily="34" charset="0"/>
+                <a:ea typeface="Calibri" pitchFamily="34" charset="-122"/>
+                <a:cs typeface="Calibri" pitchFamily="34" charset="-120"/>
+              </a:rPr>
+              <a:t>Software Security · Week 13</a:t>
+            </a:r>
+            <a:endParaRPr lang="en-US" sz="900" dirty="0"/>
+          </a:p>
+        </p:txBody>
+      </p:sp>
+      <p:pic>
+        <p:nvPicPr>
+          <p:cNvPr id="13" name="Image 1" descr="/private/tmp/claude-501/-Users-pop7-Library-CloudStorage-OneDrive-MonsterConnectCo--Ltd-Lecture-KOSEN69---software-security/f63a82af-e1ad-40ed-89c4-03c6ca776e3f/scratchpad/vis-w13/slides/pptx/assets/logo-small.png">    </p:cNvPr>
+          <p:cNvPicPr>
+            <a:picLocks noChangeAspect="1"/>
+          </p:cNvPicPr>
+          <p:nvPr/>
+        </p:nvPicPr>
+        <p:blipFill>
+          <a:blip r:embed="rId2"/>
+          <a:stretch>
+            <a:fillRect/>
+          </a:stretch>
+        </p:blipFill>
+        <p:spPr>
+          <a:xfrm>
+            <a:off x="7882128" y="4700016"/>
+            <a:ext cx="768096" cy="356616"/>
+          </a:xfrm>
+          <a:prstGeom prst="rect">
+            <a:avLst/>
+          </a:prstGeom>
+        </p:spPr>
+      </p:pic>
+    </p:spTree>
+  </p:cSld>
+  <p:clrMapOvr>
+    <a:masterClrMapping/>
+  </p:clrMapOvr>
+</p:sld>
+</file>
+
+<file path=ppt/slides/slide18.xml><?xml version="1.0" encoding="utf-8"?>
+<p:sld xmlns:a="http://schemas.openxmlformats.org/drawingml/2006/main" xmlns:r="http://schemas.openxmlformats.org/officeDocument/2006/relationships" xmlns:p="http://schemas.openxmlformats.org/presentationml/2006/main">
+  <p:cSld name="Slide 18">
+    <p:bg>
+      <p:bgPr>
+        <a:solidFill>
+          <a:srgbClr val="FFFFFF"/>
+        </a:solidFill>
+      </p:bgPr>
+    </p:bg>
+    <p:spTree>
+      <p:nvGrpSpPr>
+        <p:cNvPr id="1" name=""/>
+        <p:cNvGrpSpPr/>
+        <p:nvPr/>
+      </p:nvGrpSpPr>
+      <p:grpSpPr>
+        <a:xfrm>
+          <a:off x="0" y="0"/>
+          <a:ext cx="0" cy="0"/>
+          <a:chOff x="0" y="0"/>
+          <a:chExt cx="0" cy="0"/>
+        </a:xfrm>
+      </p:grpSpPr>
+      <p:sp>
+        <p:nvSpPr>
+          <p:cNvPr id="2" name="Shape 0"/>
+          <p:cNvSpPr/>
+          <p:nvPr/>
+        </p:nvSpPr>
+        <p:spPr>
+          <a:xfrm>
+            <a:off x="457200" y="384048"/>
+            <a:ext cx="530352" cy="530352"/>
+          </a:xfrm>
+          <a:prstGeom prst="ellipse">
+            <a:avLst/>
+          </a:prstGeom>
+          <a:solidFill>
+            <a:srgbClr val="E35205"/>
+          </a:solidFill>
+          <a:ln/>
+          <a:effectLst>
+            <a:outerShdw sx="100000" sy="100000" kx="0" ky="0" algn="bl" rotWithShape="0" blurRad="76200" dist="25400" dir="5400000">
+              <a:srgbClr val="000000">
+                <a:alpha val="12000"/>
+              </a:srgbClr>
+            </a:outerShdw>
+          </a:effectLst>
+        </p:spPr>
+      </p:sp>
+      <p:pic>
+        <p:nvPicPr>
+          <p:cNvPr id="3" name="Image 0" descr="preencoded.png">    </p:cNvPr>
+          <p:cNvPicPr>
+            <a:picLocks noChangeAspect="1"/>
+          </p:cNvPicPr>
+          <p:nvPr/>
+        </p:nvPicPr>
+        <p:blipFill>
+          <a:blip r:embed="rId1"/>
+          <a:stretch>
+            <a:fillRect/>
+          </a:stretch>
+        </p:blipFill>
+        <p:spPr>
+          <a:xfrm>
+            <a:off x="594360" y="521208"/>
+            <a:ext cx="256032" cy="256032"/>
+          </a:xfrm>
+          <a:prstGeom prst="rect">
+            <a:avLst/>
+          </a:prstGeom>
+        </p:spPr>
+      </p:pic>
+      <p:sp>
+        <p:nvSpPr>
+          <p:cNvPr id="4" name="Text 1"/>
+          <p:cNvSpPr/>
+          <p:nvPr/>
+        </p:nvSpPr>
+        <p:spPr>
+          <a:xfrm>
+            <a:off x="1143000" y="329184"/>
+            <a:ext cx="7498080" cy="603504"/>
+          </a:xfrm>
+          <a:prstGeom prst="rect">
+            <a:avLst/>
+          </a:prstGeom>
+          <a:noFill/>
+          <a:ln/>
+        </p:spPr>
+        <p:txBody>
+          <a:bodyPr wrap="square" lIns="0" tIns="0" rIns="0" bIns="0" rtlCol="0" anchor="ctr"/>
+          <a:lstStyle/>
+          <a:p>
+            <a:pPr indent="0" marL="0">
+              <a:buNone/>
+            </a:pPr>
+            <a:r>
+              <a:rPr lang="en-US" sz="2600" b="1" dirty="0">
+                <a:solidFill>
+                  <a:srgbClr val="1F2937"/>
+                </a:solidFill>
+                <a:latin typeface="Arial" pitchFamily="34" charset="0"/>
+                <a:ea typeface="Arial" pitchFamily="34" charset="-122"/>
+                <a:cs typeface="Arial" pitchFamily="34" charset="-120"/>
+              </a:rPr>
+              <a:t>Deliverable</a:t>
+            </a:r>
+            <a:endParaRPr lang="en-US" sz="2600" dirty="0"/>
+          </a:p>
+        </p:txBody>
+      </p:sp>
+      <p:sp>
+        <p:nvSpPr>
+          <p:cNvPr id="5" name="Shape 2"/>
+          <p:cNvSpPr/>
+          <p:nvPr/>
+        </p:nvSpPr>
+        <p:spPr>
+          <a:xfrm>
+            <a:off x="457200" y="1325880"/>
+            <a:ext cx="8229600" cy="1097280"/>
+          </a:xfrm>
+          <a:prstGeom prst="roundRect">
+            <a:avLst>
+              <a:gd name="adj" fmla="val 6667"/>
+            </a:avLst>
+          </a:prstGeom>
+          <a:solidFill>
+            <a:srgbClr val="E8EDF3"/>
+          </a:solidFill>
+          <a:ln/>
+        </p:spPr>
+      </p:sp>
+      <p:sp>
+        <p:nvSpPr>
+          <p:cNvPr id="6" name="Text 3"/>
+          <p:cNvSpPr/>
+          <p:nvPr/>
+        </p:nvSpPr>
+        <p:spPr>
+          <a:xfrm>
+            <a:off x="731520" y="1325880"/>
+            <a:ext cx="7680960" cy="1097280"/>
+          </a:xfrm>
+          <a:prstGeom prst="rect">
+            <a:avLst/>
+          </a:prstGeom>
+          <a:noFill/>
+          <a:ln/>
+        </p:spPr>
+        <p:txBody>
+          <a:bodyPr wrap="square" lIns="0" tIns="0" rIns="0" bIns="0" rtlCol="0" anchor="ctr">
+            <a:normAutofit/>
+          </a:bodyPr>
+          <a:lstStyle/>
+          <a:p>
+            <a:pPr indent="0" marL="0">
+              <a:buNone/>
+            </a:pPr>
+            <a:r>
+              <a:rPr lang="en-US" sz="1400" i="1" dirty="0">
+                <a:solidFill>
+                  <a:srgbClr val="E35205"/>
+                </a:solidFill>
+                <a:latin typeface="Calibri" pitchFamily="34" charset="0"/>
+                <a:ea typeface="Calibri" pitchFamily="34" charset="-122"/>
+                <a:cs typeface="Calibri" pitchFamily="34" charset="-120"/>
+              </a:rPr>
+              <a:t>📋 Worksheet 13 — labs/week13-cloud-container/worksheet.md (Parts 1–4) · kickoff: bash scan.sh (trivy config over the Dockerfiles only — IAM JSON is manual review, Trivy doesn't parse it)</a:t>
+            </a:r>
+            <a:endParaRPr lang="en-US" sz="1400" dirty="0"/>
+          </a:p>
+        </p:txBody>
+      </p:sp>
+      <p:sp>
+        <p:nvSpPr>
+          <p:cNvPr id="7" name="Shape 4"/>
+          <p:cNvSpPr/>
+          <p:nvPr/>
+        </p:nvSpPr>
+        <p:spPr>
+          <a:xfrm>
+            <a:off x="457200" y="2587752"/>
+            <a:ext cx="8229600" cy="1517904"/>
+          </a:xfrm>
+          <a:prstGeom prst="roundRect">
+            <a:avLst>
+              <a:gd name="adj" fmla="val 4819"/>
+            </a:avLst>
+          </a:prstGeom>
+          <a:solidFill>
+            <a:srgbClr val="F1F5F9"/>
+          </a:solidFill>
+          <a:ln/>
+          <a:effectLst>
+            <a:outerShdw sx="100000" sy="100000" kx="0" ky="0" algn="bl" rotWithShape="0" blurRad="76200" dist="25400" dir="5400000">
+              <a:srgbClr val="000000">
+                <a:alpha val="12000"/>
+              </a:srgbClr>
+            </a:outerShdw>
+          </a:effectLst>
+        </p:spPr>
+      </p:sp>
+      <p:sp>
+        <p:nvSpPr>
+          <p:cNvPr id="8" name="Text 5"/>
+          <p:cNvSpPr/>
+          <p:nvPr/>
+        </p:nvSpPr>
+        <p:spPr>
+          <a:xfrm>
+            <a:off x="731520" y="2697480"/>
+            <a:ext cx="7680960" cy="1298448"/>
+          </a:xfrm>
+          <a:prstGeom prst="rect">
+            <a:avLst/>
+          </a:prstGeom>
+          <a:noFill/>
+          <a:ln/>
+        </p:spPr>
+        <p:txBody>
+          <a:bodyPr wrap="square" lIns="0" tIns="0" rIns="0" bIns="0" rtlCol="0" anchor="t">
+            <a:normAutofit/>
+          </a:bodyPr>
+          <a:lstStyle/>
+          <a:p>
+            <a:pPr marL="342900" indent="-342900">
+              <a:spcAft>
+                <a:spcPts val="600"/>
+              </a:spcAft>
+              <a:buSzPct val="100000"/>
+              <a:buChar char="•"/>
+            </a:pPr>
+            <a:r>
+              <a:rPr lang="en-US" sz="1400" dirty="0">
+                <a:solidFill>
+                  <a:srgbClr val="1F2937"/>
+                </a:solidFill>
+                <a:latin typeface="Calibri" pitchFamily="34" charset="0"/>
+                <a:ea typeface="Calibri" pitchFamily="34" charset="-122"/>
+                <a:cs typeface="Calibri" pitchFamily="34" charset="-120"/>
+              </a:rPr>
+              <a:t>Before/after IAM policy + Dockerfile, all 9 flags explained</a:t>
+            </a:r>
+            <a:endParaRPr lang="en-US" sz="1400" dirty="0"/>
+          </a:p>
+          <a:p>
+            <a:pPr marL="342900" indent="-342900">
+              <a:spcAft>
+                <a:spcPts val="600"/>
+              </a:spcAft>
+              <a:buSzPct val="100000"/>
+              <a:buChar char="•"/>
+            </a:pPr>
+            <a:r>
+              <a:rPr lang="en-US" sz="1400" dirty="0">
+                <a:solidFill>
+                  <a:srgbClr val="1F2937"/>
+                </a:solidFill>
+                <a:latin typeface="Calibri" pitchFamily="34" charset="0"/>
+                <a:ea typeface="Calibri" pitchFamily="34" charset="-122"/>
+                <a:cs typeface="Calibri" pitchFamily="34" charset="-120"/>
+              </a:rPr>
+              <a:t>Trivy reports showing reduced risk (container half only)</a:t>
+            </a:r>
+            <a:endParaRPr lang="en-US" sz="1400" dirty="0"/>
+          </a:p>
+          <a:p>
+            <a:pPr marL="342900" indent="-342900">
+              <a:spcAft>
+                <a:spcPts val="600"/>
+              </a:spcAft>
+              <a:buSzPct val="100000"/>
+              <a:buChar char="•"/>
+            </a:pPr>
+            <a:r>
+              <a:rPr lang="en-US" sz="1400" dirty="0">
+                <a:solidFill>
+                  <a:srgbClr val="1F2937"/>
+                </a:solidFill>
+                <a:latin typeface="Calibri" pitchFamily="34" charset="0"/>
+                <a:ea typeface="Calibri" pitchFamily="34" charset="-122"/>
+                <a:cs typeface="Calibri" pitchFamily="34" charset="-120"/>
+              </a:rPr>
+              <a:t>Note on secrets remediation</a:t>
+            </a:r>
+            <a:endParaRPr lang="en-US" sz="1400" dirty="0"/>
+          </a:p>
+          <a:p>
+            <a:pPr marL="342900" indent="-342900">
+              <a:spcAft>
+                <a:spcPts val="600"/>
+              </a:spcAft>
+              <a:buSzPct val="100000"/>
+              <a:buChar char="•"/>
+            </a:pPr>
+            <a:r>
+              <a:rPr lang="en-US" sz="1400" dirty="0">
+                <a:solidFill>
+                  <a:srgbClr val="1F2937"/>
+                </a:solidFill>
+                <a:latin typeface="Calibri" pitchFamily="34" charset="0"/>
+                <a:ea typeface="Calibri" pitchFamily="34" charset="-122"/>
+                <a:cs typeface="Calibri" pitchFamily="34" charset="-120"/>
+              </a:rPr>
+              <a:t>+ Audit the AI / EiPE / Prompt Problem (see worksheet)</a:t>
+            </a:r>
+            <a:endParaRPr lang="en-US" sz="1400" dirty="0"/>
+          </a:p>
+        </p:txBody>
+      </p:sp>
+      <p:sp>
+        <p:nvSpPr>
+          <p:cNvPr id="9" name="Text 6"/>
+          <p:cNvSpPr/>
+          <p:nvPr/>
+        </p:nvSpPr>
+        <p:spPr>
+          <a:xfrm>
+            <a:off x="457200" y="4800600"/>
+            <a:ext cx="6949440" cy="274320"/>
+          </a:xfrm>
+          <a:prstGeom prst="rect">
+            <a:avLst/>
+          </a:prstGeom>
+          <a:noFill/>
+          <a:ln/>
+        </p:spPr>
+        <p:txBody>
+          <a:bodyPr wrap="square" lIns="0" tIns="0" rIns="0" bIns="0" rtlCol="0" anchor="ctr"/>
+          <a:lstStyle/>
+          <a:p>
+            <a:pPr indent="0" marL="0">
+              <a:buNone/>
+            </a:pPr>
+            <a:r>
+              <a:rPr lang="en-US" sz="900" dirty="0">
+                <a:solidFill>
+                  <a:srgbClr val="64748B"/>
+                </a:solidFill>
+                <a:latin typeface="Calibri" pitchFamily="34" charset="0"/>
+                <a:ea typeface="Calibri" pitchFamily="34" charset="-122"/>
+                <a:cs typeface="Calibri" pitchFamily="34" charset="-120"/>
+              </a:rPr>
+              <a:t>Software Security · Week 13</a:t>
+            </a:r>
+            <a:endParaRPr lang="en-US" sz="900" dirty="0"/>
+          </a:p>
+        </p:txBody>
+      </p:sp>
+      <p:pic>
+        <p:nvPicPr>
+          <p:cNvPr id="10" name="Image 1" descr="/private/tmp/claude-501/-Users-pop7-Library-CloudStorage-OneDrive-MonsterConnectCo--Ltd-Lecture-KOSEN69---software-security/f63a82af-e1ad-40ed-89c4-03c6ca776e3f/scratchpad/vis-w13/slides/pptx/assets/logo-small.png">    </p:cNvPr>
+          <p:cNvPicPr>
+            <a:picLocks noChangeAspect="1"/>
+          </p:cNvPicPr>
+          <p:nvPr/>
+        </p:nvPicPr>
+        <p:blipFill>
+          <a:blip r:embed="rId2"/>
+          <a:stretch>
+            <a:fillRect/>
+          </a:stretch>
+        </p:blipFill>
+        <p:spPr>
+          <a:xfrm>
+            <a:off x="7882128" y="4700016"/>
+            <a:ext cx="768096" cy="356616"/>
+          </a:xfrm>
+          <a:prstGeom prst="rect">
+            <a:avLst/>
+          </a:prstGeom>
+        </p:spPr>
+      </p:pic>
+    </p:spTree>
+  </p:cSld>
+  <p:clrMapOvr>
+    <a:masterClrMapping/>
+  </p:clrMapOvr>
+</p:sld>
+</file>
+
+<file path=ppt/slides/slide19.xml><?xml version="1.0" encoding="utf-8"?>
+<p:sld xmlns:a="http://schemas.openxmlformats.org/drawingml/2006/main" xmlns:r="http://schemas.openxmlformats.org/officeDocument/2006/relationships" xmlns:p="http://schemas.openxmlformats.org/presentationml/2006/main">
+  <p:cSld name="Slide 19">
+    <p:bg>
+      <p:bgPr>
+        <a:solidFill>
+          <a:srgbClr val="FFFFFF"/>
+        </a:solidFill>
+      </p:bgPr>
+    </p:bg>
+    <p:spTree>
+      <p:nvGrpSpPr>
+        <p:cNvPr id="1" name=""/>
+        <p:cNvGrpSpPr/>
+        <p:nvPr/>
+      </p:nvGrpSpPr>
+      <p:grpSpPr>
+        <a:xfrm>
+          <a:off x="0" y="0"/>
+          <a:ext cx="0" cy="0"/>
+          <a:chOff x="0" y="0"/>
+          <a:chExt cx="0" cy="0"/>
+        </a:xfrm>
+      </p:grpSpPr>
+      <p:sp>
+        <p:nvSpPr>
+          <p:cNvPr id="2" name="Shape 0"/>
+          <p:cNvSpPr/>
+          <p:nvPr/>
+        </p:nvSpPr>
+        <p:spPr>
+          <a:xfrm>
+            <a:off x="457200" y="384048"/>
+            <a:ext cx="530352" cy="530352"/>
+          </a:xfrm>
+          <a:prstGeom prst="ellipse">
+            <a:avLst/>
+          </a:prstGeom>
+          <a:solidFill>
+            <a:srgbClr val="E35205"/>
+          </a:solidFill>
+          <a:ln/>
+          <a:effectLst>
+            <a:outerShdw sx="100000" sy="100000" kx="0" ky="0" algn="bl" rotWithShape="0" blurRad="76200" dist="25400" dir="5400000">
+              <a:srgbClr val="000000">
+                <a:alpha val="12000"/>
+              </a:srgbClr>
+            </a:outerShdw>
+          </a:effectLst>
+        </p:spPr>
+      </p:sp>
+      <p:pic>
+        <p:nvPicPr>
+          <p:cNvPr id="3" name="Image 0" descr="preencoded.png">    </p:cNvPr>
+          <p:cNvPicPr>
+            <a:picLocks noChangeAspect="1"/>
+          </p:cNvPicPr>
+          <p:nvPr/>
+        </p:nvPicPr>
+        <p:blipFill>
+          <a:blip r:embed="rId1"/>
+          <a:stretch>
+            <a:fillRect/>
+          </a:stretch>
+        </p:blipFill>
+        <p:spPr>
+          <a:xfrm>
+            <a:off x="594360" y="521208"/>
+            <a:ext cx="256032" cy="256032"/>
+          </a:xfrm>
+          <a:prstGeom prst="rect">
+            <a:avLst/>
+          </a:prstGeom>
+        </p:spPr>
+      </p:pic>
+      <p:sp>
+        <p:nvSpPr>
+          <p:cNvPr id="4" name="Text 1"/>
+          <p:cNvSpPr/>
+          <p:nvPr/>
+        </p:nvSpPr>
+        <p:spPr>
+          <a:xfrm>
+            <a:off x="1143000" y="329184"/>
+            <a:ext cx="7498080" cy="603504"/>
+          </a:xfrm>
+          <a:prstGeom prst="rect">
+            <a:avLst/>
+          </a:prstGeom>
+          <a:noFill/>
+          <a:ln/>
+        </p:spPr>
+        <p:txBody>
+          <a:bodyPr wrap="square" lIns="0" tIns="0" rIns="0" bIns="0" rtlCol="0" anchor="ctr"/>
+          <a:lstStyle/>
+          <a:p>
+            <a:pPr indent="0" marL="0">
+              <a:buNone/>
+            </a:pPr>
+            <a:r>
+              <a:rPr lang="en-US" sz="2600" b="1" dirty="0">
+                <a:solidFill>
+                  <a:srgbClr val="1F2937"/>
+                </a:solidFill>
+                <a:latin typeface="Arial" pitchFamily="34" charset="0"/>
+                <a:ea typeface="Arial" pitchFamily="34" charset="-122"/>
+                <a:cs typeface="Arial" pitchFamily="34" charset="-120"/>
+              </a:rPr>
+              <a:t>Key takeaways</a:t>
+            </a:r>
+            <a:endParaRPr lang="en-US" sz="2600" dirty="0"/>
+          </a:p>
+        </p:txBody>
+      </p:sp>
+      <p:sp>
+        <p:nvSpPr>
+          <p:cNvPr id="5" name="Shape 2"/>
+          <p:cNvSpPr/>
+          <p:nvPr/>
+        </p:nvSpPr>
+        <p:spPr>
+          <a:xfrm>
+            <a:off x="457200" y="1325880"/>
+            <a:ext cx="8229600" cy="1207008"/>
+          </a:xfrm>
+          <a:prstGeom prst="roundRect">
+            <a:avLst>
+              <a:gd name="adj" fmla="val 6061"/>
+            </a:avLst>
+          </a:prstGeom>
+          <a:solidFill>
+            <a:srgbClr val="F1F5F9"/>
+          </a:solidFill>
+          <a:ln/>
+          <a:effectLst>
+            <a:outerShdw sx="100000" sy="100000" kx="0" ky="0" algn="bl" rotWithShape="0" blurRad="76200" dist="25400" dir="5400000">
+              <a:srgbClr val="000000">
+                <a:alpha val="12000"/>
+              </a:srgbClr>
+            </a:outerShdw>
+          </a:effectLst>
+        </p:spPr>
+      </p:sp>
+      <p:sp>
+        <p:nvSpPr>
+          <p:cNvPr id="6" name="Text 3"/>
+          <p:cNvSpPr/>
+          <p:nvPr/>
+        </p:nvSpPr>
+        <p:spPr>
+          <a:xfrm>
+            <a:off x="731520" y="1435608"/>
+            <a:ext cx="7680960" cy="987552"/>
+          </a:xfrm>
+          <a:prstGeom prst="rect">
+            <a:avLst/>
+          </a:prstGeom>
+          <a:noFill/>
+          <a:ln/>
+        </p:spPr>
+        <p:txBody>
+          <a:bodyPr wrap="square" lIns="0" tIns="0" rIns="0" bIns="0" rtlCol="0" anchor="t">
+            <a:normAutofit/>
+          </a:bodyPr>
+          <a:lstStyle/>
+          <a:p>
+            <a:pPr marL="342900" indent="-342900">
+              <a:spcAft>
+                <a:spcPts val="600"/>
+              </a:spcAft>
+              <a:buSzPct val="100000"/>
+              <a:buChar char="•"/>
+            </a:pPr>
+            <a:r>
+              <a:rPr lang="en-US" sz="1400" dirty="0">
+                <a:solidFill>
+                  <a:srgbClr val="1F2937"/>
+                </a:solidFill>
+                <a:latin typeface="Calibri" pitchFamily="34" charset="0"/>
+                <a:ea typeface="Calibri" pitchFamily="34" charset="-122"/>
+                <a:cs typeface="Calibri" pitchFamily="34" charset="-120"/>
+              </a:rPr>
+              <a:t>Misconfiguration &gt; zero-days as a breach cause</a:t>
+            </a:r>
+            <a:endParaRPr lang="en-US" sz="1400" dirty="0"/>
+          </a:p>
+          <a:p>
+            <a:pPr marL="342900" indent="-342900">
+              <a:spcAft>
+                <a:spcPts val="600"/>
+              </a:spcAft>
+              <a:buSzPct val="100000"/>
+              <a:buChar char="•"/>
+            </a:pPr>
+            <a:r>
+              <a:rPr lang="en-US" sz="1400" dirty="0">
+                <a:solidFill>
+                  <a:srgbClr val="1F2937"/>
+                </a:solidFill>
+                <a:latin typeface="Calibri" pitchFamily="34" charset="0"/>
+                <a:ea typeface="Calibri" pitchFamily="34" charset="-122"/>
+                <a:cs typeface="Calibri" pitchFamily="34" charset="-120"/>
+              </a:rPr>
+              <a:t>Least privilege, private-by-default, no secrets in code</a:t>
+            </a:r>
+            <a:endParaRPr lang="en-US" sz="1400" dirty="0"/>
+          </a:p>
+          <a:p>
+            <a:pPr marL="342900" indent="-342900">
+              <a:spcAft>
+                <a:spcPts val="600"/>
+              </a:spcAft>
+              <a:buSzPct val="100000"/>
+              <a:buChar char="•"/>
+            </a:pPr>
+            <a:r>
+              <a:rPr lang="en-US" sz="1400" dirty="0">
+                <a:solidFill>
+                  <a:srgbClr val="1F2937"/>
+                </a:solidFill>
+                <a:latin typeface="Calibri" pitchFamily="34" charset="0"/>
+                <a:ea typeface="Calibri" pitchFamily="34" charset="-122"/>
+                <a:cs typeface="Calibri" pitchFamily="34" charset="-120"/>
+              </a:rPr>
+              <a:t>Scan IaC and images in CI</a:t>
+            </a:r>
+            <a:endParaRPr lang="en-US" sz="1400" dirty="0"/>
+          </a:p>
+        </p:txBody>
+      </p:sp>
+      <p:sp>
+        <p:nvSpPr>
+          <p:cNvPr id="7" name="Text 4"/>
+          <p:cNvSpPr/>
+          <p:nvPr/>
+        </p:nvSpPr>
+        <p:spPr>
+          <a:xfrm>
+            <a:off x="457200" y="4800600"/>
+            <a:ext cx="6949440" cy="274320"/>
+          </a:xfrm>
+          <a:prstGeom prst="rect">
+            <a:avLst/>
+          </a:prstGeom>
+          <a:noFill/>
+          <a:ln/>
+        </p:spPr>
+        <p:txBody>
+          <a:bodyPr wrap="square" lIns="0" tIns="0" rIns="0" bIns="0" rtlCol="0" anchor="ctr"/>
+          <a:lstStyle/>
+          <a:p>
+            <a:pPr indent="0" marL="0">
+              <a:buNone/>
+            </a:pPr>
+            <a:r>
+              <a:rPr lang="en-US" sz="900" dirty="0">
+                <a:solidFill>
+                  <a:srgbClr val="64748B"/>
+                </a:solidFill>
+                <a:latin typeface="Calibri" pitchFamily="34" charset="0"/>
+                <a:ea typeface="Calibri" pitchFamily="34" charset="-122"/>
+                <a:cs typeface="Calibri" pitchFamily="34" charset="-120"/>
+              </a:rPr>
+              <a:t>Software Security · Week 13</a:t>
+            </a:r>
+            <a:endParaRPr lang="en-US" sz="900" dirty="0"/>
+          </a:p>
+        </p:txBody>
+      </p:sp>
+      <p:pic>
+        <p:nvPicPr>
+          <p:cNvPr id="8" name="Image 1" descr="/private/tmp/claude-501/-Users-pop7-Library-CloudStorage-OneDrive-MonsterConnectCo--Ltd-Lecture-KOSEN69---software-security/f63a82af-e1ad-40ed-89c4-03c6ca776e3f/scratchpad/vis-w13/slides/pptx/assets/logo-small.png">    </p:cNvPr>
+          <p:cNvPicPr>
+            <a:picLocks noChangeAspect="1"/>
+          </p:cNvPicPr>
+          <p:nvPr/>
+        </p:nvPicPr>
+        <p:blipFill>
+          <a:blip r:embed="rId2"/>
           <a:stretch>
             <a:fillRect/>
           </a:stretch>
@@ -4322,7 +6136,7 @@
       </p:sp>
       <p:pic>
         <p:nvPicPr>
-          <p:cNvPr id="8" name="Image 1" descr="/private/tmp/claude-501/-Users-pop7-Library-CloudStorage-OneDrive-MonsterConnectCo--Ltd-Lecture-KOSEN69---software-security/f63a82af-e1ad-40ed-89c4-03c6ca776e3f/scratchpad/fix6/KOSEN69 - software-security/slides/pptx/assets/logo-small.png">    </p:cNvPr>
+          <p:cNvPr id="8" name="Image 1" descr="/private/tmp/claude-501/-Users-pop7-Library-CloudStorage-OneDrive-MonsterConnectCo--Ltd-Lecture-KOSEN69---software-security/f63a82af-e1ad-40ed-89c4-03c6ca776e3f/scratchpad/vis-w13/slides/pptx/assets/logo-small.png">    </p:cNvPr>
           <p:cNvPicPr>
             <a:picLocks noChangeAspect="1"/>
           </p:cNvPicPr>
@@ -4330,6 +6144,140 @@
         </p:nvPicPr>
         <p:blipFill>
           <a:blip r:embed="rId2"/>
+          <a:stretch>
+            <a:fillRect/>
+          </a:stretch>
+        </p:blipFill>
+        <p:spPr>
+          <a:xfrm>
+            <a:off x="7882128" y="4700016"/>
+            <a:ext cx="768096" cy="356616"/>
+          </a:xfrm>
+          <a:prstGeom prst="rect">
+            <a:avLst/>
+          </a:prstGeom>
+        </p:spPr>
+      </p:pic>
+    </p:spTree>
+  </p:cSld>
+  <p:clrMapOvr>
+    <a:masterClrMapping/>
+  </p:clrMapOvr>
+</p:sld>
+</file>
+
+<file path=ppt/slides/slide20.xml><?xml version="1.0" encoding="utf-8"?>
+<p:sld xmlns:a="http://schemas.openxmlformats.org/drawingml/2006/main" xmlns:r="http://schemas.openxmlformats.org/officeDocument/2006/relationships" xmlns:p="http://schemas.openxmlformats.org/presentationml/2006/main">
+  <p:cSld name="Slide 20">
+    <p:bg>
+      <p:bgPr>
+        <a:solidFill>
+          <a:srgbClr val="FFFFFF"/>
+        </a:solidFill>
+      </p:bgPr>
+    </p:bg>
+    <p:spTree>
+      <p:nvGrpSpPr>
+        <p:cNvPr id="1" name=""/>
+        <p:cNvGrpSpPr/>
+        <p:nvPr/>
+      </p:nvGrpSpPr>
+      <p:grpSpPr>
+        <a:xfrm>
+          <a:off x="0" y="0"/>
+          <a:ext cx="0" cy="0"/>
+          <a:chOff x="0" y="0"/>
+          <a:chExt cx="0" cy="0"/>
+        </a:xfrm>
+      </p:grpSpPr>
+      <p:sp>
+        <p:nvSpPr>
+          <p:cNvPr id="2" name="Text 0"/>
+          <p:cNvSpPr/>
+          <p:nvPr/>
+        </p:nvSpPr>
+        <p:spPr>
+          <a:xfrm>
+            <a:off x="640080" y="1737360"/>
+            <a:ext cx="7863840" cy="1097280"/>
+          </a:xfrm>
+          <a:prstGeom prst="rect">
+            <a:avLst/>
+          </a:prstGeom>
+          <a:noFill/>
+          <a:ln/>
+        </p:spPr>
+        <p:txBody>
+          <a:bodyPr wrap="square" lIns="0" tIns="0" rIns="0" bIns="0" rtlCol="0" anchor="ctr"/>
+          <a:lstStyle/>
+          <a:p>
+            <a:pPr indent="0" marL="0">
+              <a:buNone/>
+            </a:pPr>
+            <a:r>
+              <a:rPr lang="en-US" sz="4600" b="1" dirty="0">
+                <a:solidFill>
+                  <a:srgbClr val="1F2937"/>
+                </a:solidFill>
+                <a:latin typeface="Arial" pitchFamily="34" charset="0"/>
+                <a:ea typeface="Arial" pitchFamily="34" charset="-122"/>
+                <a:cs typeface="Arial" pitchFamily="34" charset="-120"/>
+              </a:rPr>
+              <a:t>Questions?</a:t>
+            </a:r>
+            <a:endParaRPr lang="en-US" sz="4600" dirty="0"/>
+          </a:p>
+        </p:txBody>
+      </p:sp>
+      <p:sp>
+        <p:nvSpPr>
+          <p:cNvPr id="3" name="Text 1"/>
+          <p:cNvSpPr/>
+          <p:nvPr/>
+        </p:nvSpPr>
+        <p:spPr>
+          <a:xfrm>
+            <a:off x="658368" y="2834640"/>
+            <a:ext cx="7863840" cy="731520"/>
+          </a:xfrm>
+          <a:prstGeom prst="rect">
+            <a:avLst/>
+          </a:prstGeom>
+          <a:noFill/>
+          <a:ln/>
+        </p:spPr>
+        <p:txBody>
+          <a:bodyPr wrap="square" lIns="0" tIns="0" rIns="0" bIns="0" rtlCol="0" anchor="ctr"/>
+          <a:lstStyle/>
+          <a:p>
+            <a:pPr indent="0" marL="0">
+              <a:buNone/>
+            </a:pPr>
+            <a:r>
+              <a:rPr lang="en-US" sz="1800" dirty="0">
+                <a:solidFill>
+                  <a:srgbClr val="E35205"/>
+                </a:solidFill>
+                <a:latin typeface="Calibri" pitchFamily="34" charset="0"/>
+                <a:ea typeface="Calibri" pitchFamily="34" charset="-122"/>
+                <a:cs typeface="Calibri" pitchFamily="34" charset="-120"/>
+              </a:rPr>
+              <a:t>Next week: AI / LLM application security</a:t>
+            </a:r>
+            <a:endParaRPr lang="en-US" sz="1800" dirty="0"/>
+          </a:p>
+        </p:txBody>
+      </p:sp>
+      <p:pic>
+        <p:nvPicPr>
+          <p:cNvPr id="4" name="Image 0" descr="/private/tmp/claude-501/-Users-pop7-Library-CloudStorage-OneDrive-MonsterConnectCo--Ltd-Lecture-KOSEN69---software-security/f63a82af-e1ad-40ed-89c4-03c6ca776e3f/scratchpad/vis-w13/slides/pptx/assets/logo-small.png">    </p:cNvPr>
+          <p:cNvPicPr>
+            <a:picLocks noChangeAspect="1"/>
+          </p:cNvPicPr>
+          <p:nvPr/>
+        </p:nvPicPr>
+        <p:blipFill>
+          <a:blip r:embed="rId1"/>
           <a:stretch>
             <a:fillRect/>
           </a:stretch>
@@ -4623,7 +6571,7 @@
       </p:sp>
       <p:pic>
         <p:nvPicPr>
-          <p:cNvPr id="8" name="Image 1" descr="/private/tmp/claude-501/-Users-pop7-Library-CloudStorage-OneDrive-MonsterConnectCo--Ltd-Lecture-KOSEN69---software-security/f63a82af-e1ad-40ed-89c4-03c6ca776e3f/scratchpad/fix6/KOSEN69 - software-security/slides/pptx/assets/logo-small.png">    </p:cNvPr>
+          <p:cNvPr id="8" name="Image 1" descr="/private/tmp/claude-501/-Users-pop7-Library-CloudStorage-OneDrive-MonsterConnectCo--Ltd-Lecture-KOSEN69---software-security/f63a82af-e1ad-40ed-89c4-03c6ca776e3f/scratchpad/vis-w13/slides/pptx/assets/logo-small.png">    </p:cNvPr>
           <p:cNvPicPr>
             <a:picLocks noChangeAspect="1"/>
           </p:cNvPicPr>
@@ -4924,7 +6872,7 @@
       </p:sp>
       <p:pic>
         <p:nvPicPr>
-          <p:cNvPr id="8" name="Image 1" descr="/private/tmp/claude-501/-Users-pop7-Library-CloudStorage-OneDrive-MonsterConnectCo--Ltd-Lecture-KOSEN69---software-security/f63a82af-e1ad-40ed-89c4-03c6ca776e3f/scratchpad/fix6/KOSEN69 - software-security/slides/pptx/assets/logo-small.png">    </p:cNvPr>
+          <p:cNvPr id="8" name="Image 1" descr="/private/tmp/claude-501/-Users-pop7-Library-CloudStorage-OneDrive-MonsterConnectCo--Ltd-Lecture-KOSEN69---software-security/f63a82af-e1ad-40ed-89c4-03c6ca776e3f/scratchpad/vis-w13/slides/pptx/assets/logo-small.png">    </p:cNvPr>
           <p:cNvPicPr>
             <a:picLocks noChangeAspect="1"/>
           </p:cNvPicPr>
@@ -5062,49 +7010,46 @@
                 <a:ea typeface="Arial" pitchFamily="34" charset="-122"/>
                 <a:cs typeface="Arial" pitchFamily="34" charset="-120"/>
               </a:rPr>
-              <a:t>IAM &amp; least privilege</a:t>
+              <a:t>Whose job is it?</a:t>
             </a:r>
             <a:endParaRPr lang="en-US" sz="2600" dirty="0"/>
           </a:p>
         </p:txBody>
       </p:sp>
-      <p:sp>
-        <p:nvSpPr>
-          <p:cNvPr id="5" name="Shape 2"/>
-          <p:cNvSpPr/>
-          <p:nvPr/>
-        </p:nvSpPr>
-        <p:spPr>
-          <a:xfrm>
-            <a:off x="457200" y="1325880"/>
-            <a:ext cx="8229600" cy="493776"/>
-          </a:xfrm>
-          <a:prstGeom prst="roundRect">
-            <a:avLst>
-              <a:gd name="adj" fmla="val 11111"/>
-            </a:avLst>
-          </a:prstGeom>
-          <a:solidFill>
-            <a:srgbClr val="0A1020"/>
-          </a:solidFill>
-          <a:ln w="12700">
-            <a:solidFill>
-              <a:srgbClr val="E8EDF3"/>
-            </a:solidFill>
-            <a:prstDash val="solid"/>
-          </a:ln>
-        </p:spPr>
-      </p:sp>
-      <p:sp>
-        <p:nvSpPr>
-          <p:cNvPr id="6" name="Text 3"/>
-          <p:cNvSpPr/>
-          <p:nvPr/>
-        </p:nvSpPr>
-        <p:spPr>
-          <a:xfrm>
-            <a:off x="640080" y="1399032"/>
-            <a:ext cx="7863840" cy="347472"/>
+      <p:pic>
+        <p:nvPicPr>
+          <p:cNvPr id="5" name="Image 1" descr="Shared responsibility for this lab's S3-backed app as two panels split by a line. AWS secures OF the cloud: data centres and hardware, the hypervisor and host OS, the S3 and IAM services themselves, the global network. You secure what you put IN it: the IAM policy (iam-policy-insecure.json, 3 flags), the container image (Dockerfile.insecure, 6 flags including the ENV secret), bucket access and encryption, and network rules such as 0.0.0.0/0 on a database port. Conclusion: all 9 Misconfig Hunt flags sit in your half; none is a provider bug.">    </p:cNvPr>
+          <p:cNvPicPr>
+            <a:picLocks noChangeAspect="1"/>
+          </p:cNvPicPr>
+          <p:nvPr/>
+        </p:nvPicPr>
+        <p:blipFill>
+          <a:blip r:embed="rId2"/>
+          <a:stretch>
+            <a:fillRect/>
+          </a:stretch>
+        </p:blipFill>
+        <p:spPr>
+          <a:xfrm>
+            <a:off x="559443" y="1097280"/>
+            <a:ext cx="8025114" cy="3566160"/>
+          </a:xfrm>
+          <a:prstGeom prst="rect">
+            <a:avLst/>
+          </a:prstGeom>
+        </p:spPr>
+      </p:pic>
+      <p:sp>
+        <p:nvSpPr>
+          <p:cNvPr id="6" name="Text 2"/>
+          <p:cNvSpPr/>
+          <p:nvPr/>
+        </p:nvSpPr>
+        <p:spPr>
+          <a:xfrm>
+            <a:off x="457200" y="4800600"/>
+            <a:ext cx="6949440" cy="274320"/>
           </a:xfrm>
           <a:prstGeom prst="rect">
             <a:avLst/>
@@ -5113,219 +7058,21 @@
           <a:ln/>
         </p:spPr>
         <p:txBody>
-          <a:bodyPr wrap="square" lIns="0" tIns="0" rIns="0" bIns="0" rtlCol="0" anchor="t">
-            <a:normAutofit/>
-          </a:bodyPr>
+          <a:bodyPr wrap="square" lIns="0" tIns="0" rIns="0" bIns="0" rtlCol="0" anchor="ctr"/>
           <a:lstStyle/>
           <a:p>
             <a:pPr indent="0" marL="0">
               <a:buNone/>
             </a:pPr>
             <a:r>
-              <a:rPr lang="en-US" sz="1150" dirty="0">
-                <a:solidFill>
-                  <a:srgbClr val="9FE7D6"/>
-                </a:solidFill>
-                <a:latin typeface="Courier New" pitchFamily="34" charset="0"/>
-                <a:ea typeface="Courier New" pitchFamily="34" charset="-122"/>
-                <a:cs typeface="Courier New" pitchFamily="34" charset="-120"/>
-              </a:rPr>
-              <a:t>{ "Effect":"Allow", "Action":"*", "Resource":"*" }   // 🚩</a:t>
-            </a:r>
-            <a:endParaRPr lang="en-US" sz="1150" dirty="0"/>
-          </a:p>
-        </p:txBody>
-      </p:sp>
-      <p:sp>
-        <p:nvSpPr>
-          <p:cNvPr id="7" name="Shape 4"/>
-          <p:cNvSpPr/>
-          <p:nvPr/>
-        </p:nvSpPr>
-        <p:spPr>
-          <a:xfrm>
-            <a:off x="457200" y="1984248"/>
-            <a:ext cx="8229600" cy="1810512"/>
-          </a:xfrm>
-          <a:prstGeom prst="roundRect">
-            <a:avLst>
-              <a:gd name="adj" fmla="val 4040"/>
-            </a:avLst>
-          </a:prstGeom>
-          <a:solidFill>
-            <a:srgbClr val="F1F5F9"/>
-          </a:solidFill>
-          <a:ln/>
-          <a:effectLst>
-            <a:outerShdw sx="100000" sy="100000" kx="0" ky="0" algn="bl" rotWithShape="0" blurRad="76200" dist="25400" dir="5400000">
-              <a:srgbClr val="000000">
-                <a:alpha val="12000"/>
-              </a:srgbClr>
-            </a:outerShdw>
-          </a:effectLst>
-        </p:spPr>
-      </p:sp>
-      <p:sp>
-        <p:nvSpPr>
-          <p:cNvPr id="8" name="Text 5"/>
-          <p:cNvSpPr/>
-          <p:nvPr/>
-        </p:nvSpPr>
-        <p:spPr>
-          <a:xfrm>
-            <a:off x="731520" y="2093976"/>
-            <a:ext cx="7680960" cy="1591056"/>
-          </a:xfrm>
-          <a:prstGeom prst="rect">
-            <a:avLst/>
-          </a:prstGeom>
-          <a:noFill/>
-          <a:ln/>
-        </p:spPr>
-        <p:txBody>
-          <a:bodyPr wrap="square" lIns="0" tIns="0" rIns="0" bIns="0" rtlCol="0" anchor="t">
-            <a:normAutofit/>
-          </a:bodyPr>
-          <a:lstStyle/>
-          <a:p>
-            <a:pPr marL="342900" indent="-342900">
-              <a:spcAft>
-                <a:spcPts val="600"/>
-              </a:spcAft>
-              <a:buSzPct val="100000"/>
-              <a:buChar char="•"/>
-            </a:pPr>
-            <a:r>
-              <a:rPr lang="en-US" sz="1400" dirty="0">
-                <a:solidFill>
-                  <a:srgbClr val="1F2937"/>
+              <a:rPr lang="en-US" sz="900" dirty="0">
+                <a:solidFill>
+                  <a:srgbClr val="64748B"/>
                 </a:solidFill>
                 <a:latin typeface="Calibri" pitchFamily="34" charset="0"/>
                 <a:ea typeface="Calibri" pitchFamily="34" charset="-122"/>
                 <a:cs typeface="Calibri" pitchFamily="34" charset="-120"/>
               </a:rPr>
-              <a:t>Over-broad policies = blast radius</a:t>
-            </a:r>
-            <a:endParaRPr lang="en-US" sz="1400" dirty="0"/>
-          </a:p>
-          <a:p>
-            <a:pPr marL="342900" indent="-342900">
-              <a:spcAft>
-                <a:spcPts val="600"/>
-              </a:spcAft>
-              <a:buSzPct val="100000"/>
-              <a:buChar char="•"/>
-            </a:pPr>
-            <a:r>
-              <a:rPr lang="en-US" sz="1400" dirty="0">
-                <a:solidFill>
-                  <a:srgbClr val="1F2937"/>
-                </a:solidFill>
-                <a:latin typeface="Calibri" pitchFamily="34" charset="0"/>
-                <a:ea typeface="Calibri" pitchFamily="34" charset="-122"/>
-                <a:cs typeface="Calibri" pitchFamily="34" charset="-120"/>
-              </a:rPr>
-              <a:t>Resource:"*" → CWE-732 (incorrect permission assignment); Action:"*" → CWE-269 (improper privilege management) — they're graded as two distinct findings on the same policy, not one</a:t>
-            </a:r>
-            <a:endParaRPr lang="en-US" sz="1400" dirty="0"/>
-          </a:p>
-          <a:p>
-            <a:pPr marL="342900" indent="-342900">
-              <a:spcAft>
-                <a:spcPts val="600"/>
-              </a:spcAft>
-              <a:buSzPct val="100000"/>
-              <a:buChar char="•"/>
-            </a:pPr>
-            <a:r>
-              <a:rPr lang="en-US" sz="1400" dirty="0">
-                <a:solidFill>
-                  <a:srgbClr val="1F2937"/>
-                </a:solidFill>
-                <a:latin typeface="Calibri" pitchFamily="34" charset="0"/>
-                <a:ea typeface="Calibri" pitchFamily="34" charset="-122"/>
-                <a:cs typeface="Calibri" pitchFamily="34" charset="-120"/>
-              </a:rPr>
-              <a:t>Fix: scope to one bucket + one action, add a Condition (e.g. s3:prefix) — not just a narrower ARN</a:t>
-            </a:r>
-            <a:endParaRPr lang="en-US" sz="1400" dirty="0"/>
-          </a:p>
-        </p:txBody>
-      </p:sp>
-      <p:sp>
-        <p:nvSpPr>
-          <p:cNvPr id="9" name="Text 6"/>
-          <p:cNvSpPr/>
-          <p:nvPr/>
-        </p:nvSpPr>
-        <p:spPr>
-          <a:xfrm>
-            <a:off x="548640" y="3959352"/>
-            <a:ext cx="8046720" cy="548640"/>
-          </a:xfrm>
-          <a:prstGeom prst="rect">
-            <a:avLst/>
-          </a:prstGeom>
-          <a:noFill/>
-          <a:ln/>
-        </p:spPr>
-        <p:txBody>
-          <a:bodyPr wrap="square" lIns="0" tIns="0" rIns="0" bIns="0" rtlCol="0" anchor="t">
-            <a:normAutofit/>
-          </a:bodyPr>
-          <a:lstStyle/>
-          <a:p>
-            <a:pPr indent="0" marL="0">
-              <a:buNone/>
-            </a:pPr>
-            <a:r>
-              <a:rPr lang="en-US" sz="1400" dirty="0">
-                <a:solidFill>
-                  <a:srgbClr val="1F2937"/>
-                </a:solidFill>
-                <a:latin typeface="Calibri" pitchFamily="34" charset="0"/>
-                <a:ea typeface="Calibri" pitchFamily="34" charset="-122"/>
-                <a:cs typeface="Calibri" pitchFamily="34" charset="-120"/>
-              </a:rPr>
-              <a:t>Try it live: /sim/iam-scope (interactive simulation, web only)</a:t>
-            </a:r>
-            <a:endParaRPr lang="en-US" sz="1400" dirty="0"/>
-          </a:p>
-        </p:txBody>
-      </p:sp>
-      <p:sp>
-        <p:nvSpPr>
-          <p:cNvPr id="10" name="Text 7"/>
-          <p:cNvSpPr/>
-          <p:nvPr/>
-        </p:nvSpPr>
-        <p:spPr>
-          <a:xfrm>
-            <a:off x="457200" y="4800600"/>
-            <a:ext cx="6949440" cy="274320"/>
-          </a:xfrm>
-          <a:prstGeom prst="rect">
-            <a:avLst/>
-          </a:prstGeom>
-          <a:noFill/>
-          <a:ln/>
-        </p:spPr>
-        <p:txBody>
-          <a:bodyPr wrap="square" lIns="0" tIns="0" rIns="0" bIns="0" rtlCol="0" anchor="ctr"/>
-          <a:lstStyle/>
-          <a:p>
-            <a:pPr indent="0" marL="0">
-              <a:buNone/>
-            </a:pPr>
-            <a:r>
-              <a:rPr lang="en-US" sz="900" dirty="0">
-                <a:solidFill>
-                  <a:srgbClr val="64748B"/>
-                </a:solidFill>
-                <a:latin typeface="Calibri" pitchFamily="34" charset="0"/>
-                <a:ea typeface="Calibri" pitchFamily="34" charset="-122"/>
-                <a:cs typeface="Calibri" pitchFamily="34" charset="-120"/>
-              </a:rPr>
               <a:t>Software Security · Week 13</a:t>
             </a:r>
             <a:endParaRPr lang="en-US" sz="900" dirty="0"/>
@@ -5334,14 +7081,14 @@
       </p:sp>
       <p:pic>
         <p:nvPicPr>
-          <p:cNvPr id="11" name="Image 1" descr="/private/tmp/claude-501/-Users-pop7-Library-CloudStorage-OneDrive-MonsterConnectCo--Ltd-Lecture-KOSEN69---software-security/f63a82af-e1ad-40ed-89c4-03c6ca776e3f/scratchpad/fix6/KOSEN69 - software-security/slides/pptx/assets/logo-small.png">    </p:cNvPr>
+          <p:cNvPr id="7" name="Image 2" descr="/private/tmp/claude-501/-Users-pop7-Library-CloudStorage-OneDrive-MonsterConnectCo--Ltd-Lecture-KOSEN69---software-security/f63a82af-e1ad-40ed-89c4-03c6ca776e3f/scratchpad/vis-w13/slides/pptx/assets/logo-small.png">    </p:cNvPr>
           <p:cNvPicPr>
             <a:picLocks noChangeAspect="1"/>
           </p:cNvPicPr>
           <p:nvPr/>
         </p:nvPicPr>
         <p:blipFill>
-          <a:blip r:embed="rId2"/>
+          <a:blip r:embed="rId3"/>
           <a:stretch>
             <a:fillRect/>
           </a:stretch>
@@ -5472,7 +7219,7 @@
                 <a:ea typeface="Arial" pitchFamily="34" charset="-122"/>
                 <a:cs typeface="Arial" pitchFamily="34" charset="-120"/>
               </a:rPr>
-              <a:t>Secrets management</a:t>
+              <a:t>IAM &amp; least privilege</a:t>
             </a:r>
             <a:endParaRPr lang="en-US" sz="2600" dirty="0"/>
           </a:p>
@@ -5487,11 +7234,79 @@
         <p:spPr>
           <a:xfrm>
             <a:off x="457200" y="1325880"/>
-            <a:ext cx="8229600" cy="1207008"/>
+            <a:ext cx="8229600" cy="493776"/>
           </a:xfrm>
           <a:prstGeom prst="roundRect">
             <a:avLst>
-              <a:gd name="adj" fmla="val 6061"/>
+              <a:gd name="adj" fmla="val 11111"/>
+            </a:avLst>
+          </a:prstGeom>
+          <a:solidFill>
+            <a:srgbClr val="0A1020"/>
+          </a:solidFill>
+          <a:ln w="12700">
+            <a:solidFill>
+              <a:srgbClr val="E8EDF3"/>
+            </a:solidFill>
+            <a:prstDash val="solid"/>
+          </a:ln>
+        </p:spPr>
+      </p:sp>
+      <p:sp>
+        <p:nvSpPr>
+          <p:cNvPr id="6" name="Text 3"/>
+          <p:cNvSpPr/>
+          <p:nvPr/>
+        </p:nvSpPr>
+        <p:spPr>
+          <a:xfrm>
+            <a:off x="640080" y="1399032"/>
+            <a:ext cx="7863840" cy="347472"/>
+          </a:xfrm>
+          <a:prstGeom prst="rect">
+            <a:avLst/>
+          </a:prstGeom>
+          <a:noFill/>
+          <a:ln/>
+        </p:spPr>
+        <p:txBody>
+          <a:bodyPr wrap="square" lIns="0" tIns="0" rIns="0" bIns="0" rtlCol="0" anchor="t">
+            <a:normAutofit/>
+          </a:bodyPr>
+          <a:lstStyle/>
+          <a:p>
+            <a:pPr indent="0" marL="0">
+              <a:buNone/>
+            </a:pPr>
+            <a:r>
+              <a:rPr lang="en-US" sz="1150" dirty="0">
+                <a:solidFill>
+                  <a:srgbClr val="9FE7D6"/>
+                </a:solidFill>
+                <a:latin typeface="Courier New" pitchFamily="34" charset="0"/>
+                <a:ea typeface="Courier New" pitchFamily="34" charset="-122"/>
+                <a:cs typeface="Courier New" pitchFamily="34" charset="-120"/>
+              </a:rPr>
+              <a:t>{ "Effect":"Allow", "Action":"*", "Resource":"*" }   // 🚩</a:t>
+            </a:r>
+            <a:endParaRPr lang="en-US" sz="1150" dirty="0"/>
+          </a:p>
+        </p:txBody>
+      </p:sp>
+      <p:sp>
+        <p:nvSpPr>
+          <p:cNvPr id="7" name="Shape 4"/>
+          <p:cNvSpPr/>
+          <p:nvPr/>
+        </p:nvSpPr>
+        <p:spPr>
+          <a:xfrm>
+            <a:off x="457200" y="1984248"/>
+            <a:ext cx="8229600" cy="1810512"/>
+          </a:xfrm>
+          <a:prstGeom prst="roundRect">
+            <a:avLst>
+              <a:gd name="adj" fmla="val 4040"/>
             </a:avLst>
           </a:prstGeom>
           <a:solidFill>
@@ -5509,14 +7324,14 @@
       </p:sp>
       <p:sp>
         <p:nvSpPr>
-          <p:cNvPr id="6" name="Text 3"/>
-          <p:cNvSpPr/>
-          <p:nvPr/>
-        </p:nvSpPr>
-        <p:spPr>
-          <a:xfrm>
-            <a:off x="731520" y="1435608"/>
-            <a:ext cx="7680960" cy="987552"/>
+          <p:cNvPr id="8" name="Text 5"/>
+          <p:cNvSpPr/>
+          <p:nvPr/>
+        </p:nvSpPr>
+        <p:spPr>
+          <a:xfrm>
+            <a:off x="731520" y="2093976"/>
+            <a:ext cx="7680960" cy="1591056"/>
           </a:xfrm>
           <a:prstGeom prst="rect">
             <a:avLst/>
@@ -5546,7 +7361,7 @@
                 <a:ea typeface="Calibri" pitchFamily="34" charset="-122"/>
                 <a:cs typeface="Calibri" pitchFamily="34" charset="-120"/>
               </a:rPr>
-              <a:t>Secrets in env vars / Dockerfile / git = leaked</a:t>
+              <a:t>Over-broad policies = blast radius</a:t>
             </a:r>
             <a:endParaRPr lang="en-US" sz="1400" dirty="0"/>
           </a:p>
@@ -5567,7 +7382,7 @@
                 <a:ea typeface="Calibri" pitchFamily="34" charset="-122"/>
                 <a:cs typeface="Calibri" pitchFamily="34" charset="-120"/>
               </a:rPr>
-              <a:t>Use a secrets manager / vault; rotate</a:t>
+              <a:t>Resource:"*" → CWE-732 (incorrect permission assignment); Action:"*" → CWE-269 (improper privilege management) — they're graded as two distinct findings on the same policy, not one</a:t>
             </a:r>
             <a:endParaRPr lang="en-US" sz="1400" dirty="0"/>
           </a:p>
@@ -5588,7 +7403,7 @@
                 <a:ea typeface="Calibri" pitchFamily="34" charset="-122"/>
                 <a:cs typeface="Calibri" pitchFamily="34" charset="-120"/>
               </a:rPr>
-              <a:t>Scan history (Gitleaks) — recall Week 2</a:t>
+              <a:t>Fix: scope to one bucket + one action, add a Condition (e.g. s3:prefix) — not just a narrower ARN</a:t>
             </a:r>
             <a:endParaRPr lang="en-US" sz="1400" dirty="0"/>
           </a:p>
@@ -5596,14 +7411,14 @@
       </p:sp>
       <p:sp>
         <p:nvSpPr>
-          <p:cNvPr id="7" name="Text 4"/>
-          <p:cNvSpPr/>
-          <p:nvPr/>
-        </p:nvSpPr>
-        <p:spPr>
-          <a:xfrm>
-            <a:off x="457200" y="4800600"/>
-            <a:ext cx="6949440" cy="274320"/>
+          <p:cNvPr id="9" name="Text 6"/>
+          <p:cNvSpPr/>
+          <p:nvPr/>
+        </p:nvSpPr>
+        <p:spPr>
+          <a:xfrm>
+            <a:off x="548640" y="3959352"/>
+            <a:ext cx="8046720" cy="548640"/>
           </a:xfrm>
           <a:prstGeom prst="rect">
             <a:avLst/>
@@ -5612,21 +7427,62 @@
           <a:ln/>
         </p:spPr>
         <p:txBody>
-          <a:bodyPr wrap="square" lIns="0" tIns="0" rIns="0" bIns="0" rtlCol="0" anchor="ctr"/>
+          <a:bodyPr wrap="square" lIns="0" tIns="0" rIns="0" bIns="0" rtlCol="0" anchor="t">
+            <a:normAutofit/>
+          </a:bodyPr>
           <a:lstStyle/>
           <a:p>
             <a:pPr indent="0" marL="0">
               <a:buNone/>
             </a:pPr>
             <a:r>
-              <a:rPr lang="en-US" sz="900" dirty="0">
-                <a:solidFill>
-                  <a:srgbClr val="64748B"/>
+              <a:rPr lang="en-US" sz="1400" dirty="0">
+                <a:solidFill>
+                  <a:srgbClr val="1F2937"/>
                 </a:solidFill>
                 <a:latin typeface="Calibri" pitchFamily="34" charset="0"/>
                 <a:ea typeface="Calibri" pitchFamily="34" charset="-122"/>
                 <a:cs typeface="Calibri" pitchFamily="34" charset="-120"/>
               </a:rPr>
+              <a:t>Try it live: /sim/iam-scope (interactive simulation, web only)</a:t>
+            </a:r>
+            <a:endParaRPr lang="en-US" sz="1400" dirty="0"/>
+          </a:p>
+        </p:txBody>
+      </p:sp>
+      <p:sp>
+        <p:nvSpPr>
+          <p:cNvPr id="10" name="Text 7"/>
+          <p:cNvSpPr/>
+          <p:nvPr/>
+        </p:nvSpPr>
+        <p:spPr>
+          <a:xfrm>
+            <a:off x="457200" y="4800600"/>
+            <a:ext cx="6949440" cy="274320"/>
+          </a:xfrm>
+          <a:prstGeom prst="rect">
+            <a:avLst/>
+          </a:prstGeom>
+          <a:noFill/>
+          <a:ln/>
+        </p:spPr>
+        <p:txBody>
+          <a:bodyPr wrap="square" lIns="0" tIns="0" rIns="0" bIns="0" rtlCol="0" anchor="ctr"/>
+          <a:lstStyle/>
+          <a:p>
+            <a:pPr indent="0" marL="0">
+              <a:buNone/>
+            </a:pPr>
+            <a:r>
+              <a:rPr lang="en-US" sz="900" dirty="0">
+                <a:solidFill>
+                  <a:srgbClr val="64748B"/>
+                </a:solidFill>
+                <a:latin typeface="Calibri" pitchFamily="34" charset="0"/>
+                <a:ea typeface="Calibri" pitchFamily="34" charset="-122"/>
+                <a:cs typeface="Calibri" pitchFamily="34" charset="-120"/>
+              </a:rPr>
               <a:t>Software Security · Week 13</a:t>
             </a:r>
             <a:endParaRPr lang="en-US" sz="900" dirty="0"/>
@@ -5635,7 +7491,7 @@
       </p:sp>
       <p:pic>
         <p:nvPicPr>
-          <p:cNvPr id="8" name="Image 1" descr="/private/tmp/claude-501/-Users-pop7-Library-CloudStorage-OneDrive-MonsterConnectCo--Ltd-Lecture-KOSEN69---software-security/f63a82af-e1ad-40ed-89c4-03c6ca776e3f/scratchpad/fix6/KOSEN69 - software-security/slides/pptx/assets/logo-small.png">    </p:cNvPr>
+          <p:cNvPr id="11" name="Image 1" descr="/private/tmp/claude-501/-Users-pop7-Library-CloudStorage-OneDrive-MonsterConnectCo--Ltd-Lecture-KOSEN69---software-security/f63a82af-e1ad-40ed-89c4-03c6ca776e3f/scratchpad/vis-w13/slides/pptx/assets/logo-small.png">    </p:cNvPr>
           <p:cNvPicPr>
             <a:picLocks noChangeAspect="1"/>
           </p:cNvPicPr>
@@ -5773,51 +7629,46 @@
                 <a:ea typeface="Arial" pitchFamily="34" charset="-122"/>
                 <a:cs typeface="Arial" pitchFamily="34" charset="-120"/>
               </a:rPr>
-              <a:t>Storage &amp; network exposure</a:t>
+              <a:t>If the key leaks — blast radius</a:t>
             </a:r>
             <a:endParaRPr lang="en-US" sz="2600" dirty="0"/>
           </a:p>
         </p:txBody>
       </p:sp>
-      <p:sp>
-        <p:nvSpPr>
-          <p:cNvPr id="5" name="Shape 2"/>
-          <p:cNvSpPr/>
-          <p:nvPr/>
-        </p:nvSpPr>
-        <p:spPr>
-          <a:xfrm>
-            <a:off x="457200" y="1325880"/>
-            <a:ext cx="8229600" cy="1207008"/>
-          </a:xfrm>
-          <a:prstGeom prst="roundRect">
-            <a:avLst>
-              <a:gd name="adj" fmla="val 6061"/>
-            </a:avLst>
-          </a:prstGeom>
-          <a:solidFill>
-            <a:srgbClr val="F1F5F9"/>
-          </a:solidFill>
-          <a:ln/>
-          <a:effectLst>
-            <a:outerShdw sx="100000" sy="100000" kx="0" ky="0" algn="bl" rotWithShape="0" blurRad="76200" dist="25400" dir="5400000">
-              <a:srgbClr val="000000">
-                <a:alpha val="12000"/>
-              </a:srgbClr>
-            </a:outerShdw>
-          </a:effectLst>
-        </p:spPr>
-      </p:sp>
-      <p:sp>
-        <p:nvSpPr>
-          <p:cNvPr id="6" name="Text 3"/>
-          <p:cNvSpPr/>
-          <p:nvPr/>
-        </p:nvSpPr>
-        <p:spPr>
-          <a:xfrm>
-            <a:off x="731520" y="1435608"/>
-            <a:ext cx="7680960" cy="987552"/>
+      <p:pic>
+        <p:nvPicPr>
+          <p:cNvPr id="5" name="Image 1" descr="The same AWS account drawn twice at the same scale. Left, iam-policy-insecure.json (Action star, Resource star, no Condition): the whole account is allowed, with example actions a leaked key can now run — s3 star on any bucket, iam:CreateAccessKey to mint new keys that survive rotation, ec2:RunInstances on your bill, kms:Decrypt, cloudtrail:StopLogging to turn off the audit trail — equals full admin; Action star is CWE-269, Resource star is CWE-732. Right, iam-policy-leastpriv.json: everything is implicitly denied except a small app/* square inside lab-app-bucket, readable via s3:GetObject on app/* objects, plus s3:ListBucket only under the Condition s3:prefix = app/*. Trivy parses neither file; Task 2 is manual review.">    </p:cNvPr>
+          <p:cNvPicPr>
+            <a:picLocks noChangeAspect="1"/>
+          </p:cNvPicPr>
+          <p:nvPr/>
+        </p:nvPicPr>
+        <p:blipFill>
+          <a:blip r:embed="rId2"/>
+          <a:stretch>
+            <a:fillRect/>
+          </a:stretch>
+        </p:blipFill>
+        <p:spPr>
+          <a:xfrm>
+            <a:off x="559443" y="1097280"/>
+            <a:ext cx="8025114" cy="3566160"/>
+          </a:xfrm>
+          <a:prstGeom prst="rect">
+            <a:avLst/>
+          </a:prstGeom>
+        </p:spPr>
+      </p:pic>
+      <p:sp>
+        <p:nvSpPr>
+          <p:cNvPr id="6" name="Text 2"/>
+          <p:cNvSpPr/>
+          <p:nvPr/>
+        </p:nvSpPr>
+        <p:spPr>
+          <a:xfrm>
+            <a:off x="457200" y="4800600"/>
+            <a:ext cx="6949440" cy="274320"/>
           </a:xfrm>
           <a:prstGeom prst="rect">
             <a:avLst/>
@@ -5826,108 +7677,21 @@
           <a:ln/>
         </p:spPr>
         <p:txBody>
-          <a:bodyPr wrap="square" lIns="0" tIns="0" rIns="0" bIns="0" rtlCol="0" anchor="t">
-            <a:normAutofit/>
-          </a:bodyPr>
-          <a:lstStyle/>
-          <a:p>
-            <a:pPr marL="342900" indent="-342900">
-              <a:spcAft>
-                <a:spcPts val="600"/>
-              </a:spcAft>
-              <a:buSzPct val="100000"/>
-              <a:buChar char="•"/>
-            </a:pPr>
-            <a:r>
-              <a:rPr lang="en-US" sz="1400" dirty="0">
-                <a:solidFill>
-                  <a:srgbClr val="1F2937"/>
+          <a:bodyPr wrap="square" lIns="0" tIns="0" rIns="0" bIns="0" rtlCol="0" anchor="ctr"/>
+          <a:lstStyle/>
+          <a:p>
+            <a:pPr indent="0" marL="0">
+              <a:buNone/>
+            </a:pPr>
+            <a:r>
+              <a:rPr lang="en-US" sz="900" dirty="0">
+                <a:solidFill>
+                  <a:srgbClr val="64748B"/>
                 </a:solidFill>
                 <a:latin typeface="Calibri" pitchFamily="34" charset="0"/>
                 <a:ea typeface="Calibri" pitchFamily="34" charset="-122"/>
                 <a:cs typeface="Calibri" pitchFamily="34" charset="-120"/>
               </a:rPr>
-              <a:t>Public buckets, open ports, default creds</a:t>
-            </a:r>
-            <a:endParaRPr lang="en-US" sz="1400" dirty="0"/>
-          </a:p>
-          <a:p>
-            <a:pPr marL="342900" indent="-342900">
-              <a:spcAft>
-                <a:spcPts val="600"/>
-              </a:spcAft>
-              <a:buSzPct val="100000"/>
-              <a:buChar char="•"/>
-            </a:pPr>
-            <a:r>
-              <a:rPr lang="en-US" sz="1400" dirty="0">
-                <a:solidFill>
-                  <a:srgbClr val="1F2937"/>
-                </a:solidFill>
-                <a:latin typeface="Calibri" pitchFamily="34" charset="0"/>
-                <a:ea typeface="Calibri" pitchFamily="34" charset="-122"/>
-                <a:cs typeface="Calibri" pitchFamily="34" charset="-120"/>
-              </a:rPr>
-              <a:t>Encrypt at rest + in transit</a:t>
-            </a:r>
-            <a:endParaRPr lang="en-US" sz="1400" dirty="0"/>
-          </a:p>
-          <a:p>
-            <a:pPr marL="342900" indent="-342900">
-              <a:spcAft>
-                <a:spcPts val="600"/>
-              </a:spcAft>
-              <a:buSzPct val="100000"/>
-              <a:buChar char="•"/>
-            </a:pPr>
-            <a:r>
-              <a:rPr lang="en-US" sz="1400" dirty="0">
-                <a:solidFill>
-                  <a:srgbClr val="1F2937"/>
-                </a:solidFill>
-                <a:latin typeface="Calibri" pitchFamily="34" charset="0"/>
-                <a:ea typeface="Calibri" pitchFamily="34" charset="-122"/>
-                <a:cs typeface="Calibri" pitchFamily="34" charset="-120"/>
-              </a:rPr>
-              <a:t>Private by default; explicit allow</a:t>
-            </a:r>
-            <a:endParaRPr lang="en-US" sz="1400" dirty="0"/>
-          </a:p>
-        </p:txBody>
-      </p:sp>
-      <p:sp>
-        <p:nvSpPr>
-          <p:cNvPr id="7" name="Text 4"/>
-          <p:cNvSpPr/>
-          <p:nvPr/>
-        </p:nvSpPr>
-        <p:spPr>
-          <a:xfrm>
-            <a:off x="457200" y="4800600"/>
-            <a:ext cx="6949440" cy="274320"/>
-          </a:xfrm>
-          <a:prstGeom prst="rect">
-            <a:avLst/>
-          </a:prstGeom>
-          <a:noFill/>
-          <a:ln/>
-        </p:spPr>
-        <p:txBody>
-          <a:bodyPr wrap="square" lIns="0" tIns="0" rIns="0" bIns="0" rtlCol="0" anchor="ctr"/>
-          <a:lstStyle/>
-          <a:p>
-            <a:pPr indent="0" marL="0">
-              <a:buNone/>
-            </a:pPr>
-            <a:r>
-              <a:rPr lang="en-US" sz="900" dirty="0">
-                <a:solidFill>
-                  <a:srgbClr val="64748B"/>
-                </a:solidFill>
-                <a:latin typeface="Calibri" pitchFamily="34" charset="0"/>
-                <a:ea typeface="Calibri" pitchFamily="34" charset="-122"/>
-                <a:cs typeface="Calibri" pitchFamily="34" charset="-120"/>
-              </a:rPr>
               <a:t>Software Security · Week 13</a:t>
             </a:r>
             <a:endParaRPr lang="en-US" sz="900" dirty="0"/>
@@ -5936,14 +7700,14 @@
       </p:sp>
       <p:pic>
         <p:nvPicPr>
-          <p:cNvPr id="8" name="Image 1" descr="/private/tmp/claude-501/-Users-pop7-Library-CloudStorage-OneDrive-MonsterConnectCo--Ltd-Lecture-KOSEN69---software-security/f63a82af-e1ad-40ed-89c4-03c6ca776e3f/scratchpad/fix6/KOSEN69 - software-security/slides/pptx/assets/logo-small.png">    </p:cNvPr>
+          <p:cNvPr id="7" name="Image 2" descr="/private/tmp/claude-501/-Users-pop7-Library-CloudStorage-OneDrive-MonsterConnectCo--Ltd-Lecture-KOSEN69---software-security/f63a82af-e1ad-40ed-89c4-03c6ca776e3f/scratchpad/vis-w13/slides/pptx/assets/logo-small.png">    </p:cNvPr>
           <p:cNvPicPr>
             <a:picLocks noChangeAspect="1"/>
           </p:cNvPicPr>
           <p:nvPr/>
         </p:nvPicPr>
         <p:blipFill>
-          <a:blip r:embed="rId2"/>
+          <a:blip r:embed="rId3"/>
           <a:stretch>
             <a:fillRect/>
           </a:stretch>
@@ -6074,7 +7838,7 @@
                 <a:ea typeface="Arial" pitchFamily="34" charset="-122"/>
                 <a:cs typeface="Arial" pitchFamily="34" charset="-120"/>
               </a:rPr>
-              <a:t>Container image hardening</a:t>
+              <a:t>Secrets management</a:t>
             </a:r>
             <a:endParaRPr lang="en-US" sz="2600" dirty="0"/>
           </a:p>
@@ -6089,164 +7853,11 @@
         <p:spPr>
           <a:xfrm>
             <a:off x="457200" y="1325880"/>
-            <a:ext cx="8229600" cy="1591056"/>
+            <a:ext cx="8229600" cy="1207008"/>
           </a:xfrm>
           <a:prstGeom prst="roundRect">
             <a:avLst>
-              <a:gd name="adj" fmla="val 3448"/>
-            </a:avLst>
-          </a:prstGeom>
-          <a:solidFill>
-            <a:srgbClr val="0A1020"/>
-          </a:solidFill>
-          <a:ln w="12700">
-            <a:solidFill>
-              <a:srgbClr val="E8EDF3"/>
-            </a:solidFill>
-            <a:prstDash val="solid"/>
-          </a:ln>
-        </p:spPr>
-      </p:sp>
-      <p:sp>
-        <p:nvSpPr>
-          <p:cNvPr id="6" name="Text 3"/>
-          <p:cNvSpPr/>
-          <p:nvPr/>
-        </p:nvSpPr>
-        <p:spPr>
-          <a:xfrm>
-            <a:off x="640080" y="1399032"/>
-            <a:ext cx="7863840" cy="1444752"/>
-          </a:xfrm>
-          <a:prstGeom prst="rect">
-            <a:avLst/>
-          </a:prstGeom>
-          <a:noFill/>
-          <a:ln/>
-        </p:spPr>
-        <p:txBody>
-          <a:bodyPr wrap="square" lIns="0" tIns="0" rIns="0" bIns="0" rtlCol="0" anchor="t">
-            <a:normAutofit/>
-          </a:bodyPr>
-          <a:lstStyle/>
-          <a:p>
-            <a:pPr indent="0" marL="0">
-              <a:buNone/>
-            </a:pPr>
-            <a:r>
-              <a:rPr lang="en-US" sz="1150" dirty="0">
-                <a:solidFill>
-                  <a:srgbClr val="9FE7D6"/>
-                </a:solidFill>
-                <a:latin typeface="Courier New" pitchFamily="34" charset="0"/>
-                <a:ea typeface="Courier New" pitchFamily="34" charset="-122"/>
-                <a:cs typeface="Courier New" pitchFamily="34" charset="-120"/>
-              </a:rPr>
-              <a:t># misconfig scan (Dockerfiles)</a:t>
-            </a:r>
-            <a:endParaRPr lang="en-US" sz="1150" dirty="0"/>
-          </a:p>
-          <a:p>
-            <a:pPr indent="0" marL="0">
-              <a:buNone/>
-            </a:pPr>
-            <a:r>
-              <a:rPr lang="en-US" sz="1150" dirty="0">
-                <a:solidFill>
-                  <a:srgbClr val="9FE7D6"/>
-                </a:solidFill>
-                <a:latin typeface="Courier New" pitchFamily="34" charset="0"/>
-                <a:ea typeface="Courier New" pitchFamily="34" charset="-122"/>
-                <a:cs typeface="Courier New" pitchFamily="34" charset="-120"/>
-              </a:rPr>
-              <a:t>docker run --rm -v "${PWD}:/src" aquasec/trivy:latest \</a:t>
-            </a:r>
-            <a:endParaRPr lang="en-US" sz="1150" dirty="0"/>
-          </a:p>
-          <a:p>
-            <a:pPr indent="0" marL="0">
-              <a:buNone/>
-            </a:pPr>
-            <a:r>
-              <a:rPr lang="en-US" sz="1150" dirty="0">
-                <a:solidFill>
-                  <a:srgbClr val="9FE7D6"/>
-                </a:solidFill>
-                <a:latin typeface="Courier New" pitchFamily="34" charset="0"/>
-                <a:ea typeface="Courier New" pitchFamily="34" charset="-122"/>
-                <a:cs typeface="Courier New" pitchFamily="34" charset="-120"/>
-              </a:rPr>
-              <a:t>  config --severity MEDIUM,HIGH,CRITICAL /src</a:t>
-            </a:r>
-            <a:endParaRPr lang="en-US" sz="1150" dirty="0"/>
-          </a:p>
-          <a:p>
-            <a:pPr indent="0" marL="0">
-              <a:buNone/>
-            </a:pPr>
-            <a:r>
-              <a:rPr lang="en-US" sz="1150" dirty="0">
-                <a:solidFill>
-                  <a:srgbClr val="9FE7D6"/>
-                </a:solidFill>
-                <a:latin typeface="Courier New" pitchFamily="34" charset="0"/>
-                <a:ea typeface="Courier New" pitchFamily="34" charset="-122"/>
-                <a:cs typeface="Courier New" pitchFamily="34" charset="-120"/>
-              </a:rPr>
-              <a:t># image CVE scan</a:t>
-            </a:r>
-            <a:endParaRPr lang="en-US" sz="1150" dirty="0"/>
-          </a:p>
-          <a:p>
-            <a:pPr indent="0" marL="0">
-              <a:buNone/>
-            </a:pPr>
-            <a:r>
-              <a:rPr lang="en-US" sz="1150" dirty="0">
-                <a:solidFill>
-                  <a:srgbClr val="9FE7D6"/>
-                </a:solidFill>
-                <a:latin typeface="Courier New" pitchFamily="34" charset="0"/>
-                <a:ea typeface="Courier New" pitchFamily="34" charset="-122"/>
-                <a:cs typeface="Courier New" pitchFamily="34" charset="-120"/>
-              </a:rPr>
-              <a:t>docker run --rm -v /var/run/docker.sock:/var/run/docker.sock \</a:t>
-            </a:r>
-            <a:endParaRPr lang="en-US" sz="1150" dirty="0"/>
-          </a:p>
-          <a:p>
-            <a:pPr indent="0" marL="0">
-              <a:buNone/>
-            </a:pPr>
-            <a:r>
-              <a:rPr lang="en-US" sz="1150" dirty="0">
-                <a:solidFill>
-                  <a:srgbClr val="9FE7D6"/>
-                </a:solidFill>
-                <a:latin typeface="Courier New" pitchFamily="34" charset="0"/>
-                <a:ea typeface="Courier New" pitchFamily="34" charset="-122"/>
-                <a:cs typeface="Courier New" pitchFamily="34" charset="-120"/>
-              </a:rPr>
-              <a:t>  aquasec/trivy:latest image --severity HIGH,CRITICAL week13-hardened:lab</a:t>
-            </a:r>
-            <a:endParaRPr lang="en-US" sz="1150" dirty="0"/>
-          </a:p>
-        </p:txBody>
-      </p:sp>
-      <p:sp>
-        <p:nvSpPr>
-          <p:cNvPr id="7" name="Shape 4"/>
-          <p:cNvSpPr/>
-          <p:nvPr/>
-        </p:nvSpPr>
-        <p:spPr>
-          <a:xfrm>
-            <a:off x="457200" y="3081528"/>
-            <a:ext cx="8229600" cy="987552"/>
-          </a:xfrm>
-          <a:prstGeom prst="roundRect">
-            <a:avLst>
-              <a:gd name="adj" fmla="val 7407"/>
+              <a:gd name="adj" fmla="val 6061"/>
             </a:avLst>
           </a:prstGeom>
           <a:solidFill>
@@ -6264,14 +7875,14 @@
       </p:sp>
       <p:sp>
         <p:nvSpPr>
-          <p:cNvPr id="8" name="Text 5"/>
-          <p:cNvSpPr/>
-          <p:nvPr/>
-        </p:nvSpPr>
-        <p:spPr>
-          <a:xfrm>
-            <a:off x="731520" y="3191256"/>
-            <a:ext cx="7680960" cy="768096"/>
+          <p:cNvPr id="6" name="Text 3"/>
+          <p:cNvSpPr/>
+          <p:nvPr/>
+        </p:nvSpPr>
+        <p:spPr>
+          <a:xfrm>
+            <a:off x="731520" y="1435608"/>
+            <a:ext cx="7680960" cy="987552"/>
           </a:xfrm>
           <a:prstGeom prst="rect">
             <a:avLst/>
@@ -6301,45 +7912,87 @@
                 <a:ea typeface="Calibri" pitchFamily="34" charset="-122"/>
                 <a:cs typeface="Calibri" pitchFamily="34" charset="-120"/>
               </a:rPr>
-              <a:t>Multi-stage build: python:3.11-slim@sha256:... (compiles) → distroless gcr.io/distroless/python3-debian12@sha256:... (runs) — a smaller runtime image with no shell/package manager, USER 65532:65532 (non-root)</a:t>
+              <a:t>Secrets in env vars / Dockerfile / git = leaked</a:t>
             </a:r>
             <a:endParaRPr lang="en-US" sz="1400" dirty="0"/>
           </a:p>
-        </p:txBody>
-      </p:sp>
-      <p:sp>
-        <p:nvSpPr>
-          <p:cNvPr id="9" name="Text 6"/>
-          <p:cNvSpPr/>
-          <p:nvPr/>
-        </p:nvSpPr>
-        <p:spPr>
-          <a:xfrm>
-            <a:off x="457200" y="4800600"/>
-            <a:ext cx="6949440" cy="274320"/>
-          </a:xfrm>
-          <a:prstGeom prst="rect">
-            <a:avLst/>
-          </a:prstGeom>
-          <a:noFill/>
-          <a:ln/>
-        </p:spPr>
-        <p:txBody>
-          <a:bodyPr wrap="square" lIns="0" tIns="0" rIns="0" bIns="0" rtlCol="0" anchor="ctr"/>
-          <a:lstStyle/>
-          <a:p>
-            <a:pPr indent="0" marL="0">
-              <a:buNone/>
-            </a:pPr>
-            <a:r>
-              <a:rPr lang="en-US" sz="900" dirty="0">
-                <a:solidFill>
-                  <a:srgbClr val="64748B"/>
+          <a:p>
+            <a:pPr marL="342900" indent="-342900">
+              <a:spcAft>
+                <a:spcPts val="600"/>
+              </a:spcAft>
+              <a:buSzPct val="100000"/>
+              <a:buChar char="•"/>
+            </a:pPr>
+            <a:r>
+              <a:rPr lang="en-US" sz="1400" dirty="0">
+                <a:solidFill>
+                  <a:srgbClr val="1F2937"/>
                 </a:solidFill>
                 <a:latin typeface="Calibri" pitchFamily="34" charset="0"/>
                 <a:ea typeface="Calibri" pitchFamily="34" charset="-122"/>
                 <a:cs typeface="Calibri" pitchFamily="34" charset="-120"/>
               </a:rPr>
+              <a:t>Use a secrets manager / vault; rotate</a:t>
+            </a:r>
+            <a:endParaRPr lang="en-US" sz="1400" dirty="0"/>
+          </a:p>
+          <a:p>
+            <a:pPr marL="342900" indent="-342900">
+              <a:spcAft>
+                <a:spcPts val="600"/>
+              </a:spcAft>
+              <a:buSzPct val="100000"/>
+              <a:buChar char="•"/>
+            </a:pPr>
+            <a:r>
+              <a:rPr lang="en-US" sz="1400" dirty="0">
+                <a:solidFill>
+                  <a:srgbClr val="1F2937"/>
+                </a:solidFill>
+                <a:latin typeface="Calibri" pitchFamily="34" charset="0"/>
+                <a:ea typeface="Calibri" pitchFamily="34" charset="-122"/>
+                <a:cs typeface="Calibri" pitchFamily="34" charset="-120"/>
+              </a:rPr>
+              <a:t>Scan history (Gitleaks) — recall Week 2</a:t>
+            </a:r>
+            <a:endParaRPr lang="en-US" sz="1400" dirty="0"/>
+          </a:p>
+        </p:txBody>
+      </p:sp>
+      <p:sp>
+        <p:nvSpPr>
+          <p:cNvPr id="7" name="Text 4"/>
+          <p:cNvSpPr/>
+          <p:nvPr/>
+        </p:nvSpPr>
+        <p:spPr>
+          <a:xfrm>
+            <a:off x="457200" y="4800600"/>
+            <a:ext cx="6949440" cy="274320"/>
+          </a:xfrm>
+          <a:prstGeom prst="rect">
+            <a:avLst/>
+          </a:prstGeom>
+          <a:noFill/>
+          <a:ln/>
+        </p:spPr>
+        <p:txBody>
+          <a:bodyPr wrap="square" lIns="0" tIns="0" rIns="0" bIns="0" rtlCol="0" anchor="ctr"/>
+          <a:lstStyle/>
+          <a:p>
+            <a:pPr indent="0" marL="0">
+              <a:buNone/>
+            </a:pPr>
+            <a:r>
+              <a:rPr lang="en-US" sz="900" dirty="0">
+                <a:solidFill>
+                  <a:srgbClr val="64748B"/>
+                </a:solidFill>
+                <a:latin typeface="Calibri" pitchFamily="34" charset="0"/>
+                <a:ea typeface="Calibri" pitchFamily="34" charset="-122"/>
+                <a:cs typeface="Calibri" pitchFamily="34" charset="-120"/>
+              </a:rPr>
               <a:t>Software Security · Week 13</a:t>
             </a:r>
             <a:endParaRPr lang="en-US" sz="900" dirty="0"/>
@@ -6348,7 +8001,7 @@
       </p:sp>
       <p:pic>
         <p:nvPicPr>
-          <p:cNvPr id="10" name="Image 1" descr="/private/tmp/claude-501/-Users-pop7-Library-CloudStorage-OneDrive-MonsterConnectCo--Ltd-Lecture-KOSEN69---software-security/f63a82af-e1ad-40ed-89c4-03c6ca776e3f/scratchpad/fix6/KOSEN69 - software-security/slides/pptx/assets/logo-small.png">    </p:cNvPr>
+          <p:cNvPr id="8" name="Image 1" descr="/private/tmp/claude-501/-Users-pop7-Library-CloudStorage-OneDrive-MonsterConnectCo--Ltd-Lecture-KOSEN69---software-security/f63a82af-e1ad-40ed-89c4-03c6ca776e3f/scratchpad/vis-w13/slides/pptx/assets/logo-small.png">    </p:cNvPr>
           <p:cNvPicPr>
             <a:picLocks noChangeAspect="1"/>
           </p:cNvPicPr>
@@ -6486,51 +8139,46 @@
                 <a:ea typeface="Arial" pitchFamily="34" charset="-122"/>
                 <a:cs typeface="Arial" pitchFamily="34" charset="-120"/>
               </a:rPr>
-              <a:t>Container image hardening (cont.)</a:t>
+              <a:t>Where the ENV secret ends up</a:t>
             </a:r>
             <a:endParaRPr lang="en-US" sz="2600" dirty="0"/>
           </a:p>
         </p:txBody>
       </p:sp>
-      <p:sp>
-        <p:nvSpPr>
-          <p:cNvPr id="5" name="Shape 2"/>
-          <p:cNvSpPr/>
-          <p:nvPr/>
-        </p:nvSpPr>
-        <p:spPr>
-          <a:xfrm>
-            <a:off x="457200" y="1325880"/>
-            <a:ext cx="8229600" cy="1810512"/>
-          </a:xfrm>
-          <a:prstGeom prst="roundRect">
-            <a:avLst>
-              <a:gd name="adj" fmla="val 4040"/>
-            </a:avLst>
-          </a:prstGeom>
-          <a:solidFill>
-            <a:srgbClr val="F1F5F9"/>
-          </a:solidFill>
-          <a:ln/>
-          <a:effectLst>
-            <a:outerShdw sx="100000" sy="100000" kx="0" ky="0" algn="bl" rotWithShape="0" blurRad="76200" dist="25400" dir="5400000">
-              <a:srgbClr val="000000">
-                <a:alpha val="12000"/>
-              </a:srgbClr>
-            </a:outerShdw>
-          </a:effectLst>
-        </p:spPr>
-      </p:sp>
-      <p:sp>
-        <p:nvSpPr>
-          <p:cNvPr id="6" name="Text 3"/>
-          <p:cNvSpPr/>
-          <p:nvPr/>
-        </p:nvSpPr>
-        <p:spPr>
-          <a:xfrm>
-            <a:off x="731520" y="1435608"/>
-            <a:ext cx="7680960" cy="1591056"/>
+      <p:pic>
+        <p:nvPicPr>
+          <p:cNvPr id="5" name="Image 1" descr="From a real build of week13-insecure:lab, the image history as a stack with the newest layer on top: CMD, EXPOSE, RUN chmod -R 777, RUN pip install, COPY dot dot, WORKDIR, then ENV AWS_SECRET_ACCESS_KEY and ENV API_TOKEN, both 0 bytes because the value lives in the image config, then the python:latest base layers. Arrows to three readouts: plain docker history still prints sk_live_supersecret_DO_NOT_DO_ (30 of 34 characters); docker history --no-trunc prints the whole token (the Task 3 command); docker inspect .Config.Env prints both keys in full. A fourth arrow: COPY dot dot copied Dockerfile.insecure itself into /app, so the secret is in a file too. Fix: never put the secret in the Dockerfile, inject it at run time, and rotate the key because every pushed image keeps the old value.">    </p:cNvPr>
+          <p:cNvPicPr>
+            <a:picLocks noChangeAspect="1"/>
+          </p:cNvPicPr>
+          <p:nvPr/>
+        </p:nvPicPr>
+        <p:blipFill>
+          <a:blip r:embed="rId2"/>
+          <a:stretch>
+            <a:fillRect/>
+          </a:stretch>
+        </p:blipFill>
+        <p:spPr>
+          <a:xfrm>
+            <a:off x="559443" y="1097280"/>
+            <a:ext cx="8025114" cy="3566160"/>
+          </a:xfrm>
+          <a:prstGeom prst="rect">
+            <a:avLst/>
+          </a:prstGeom>
+        </p:spPr>
+      </p:pic>
+      <p:sp>
+        <p:nvSpPr>
+          <p:cNvPr id="6" name="Text 2"/>
+          <p:cNvSpPr/>
+          <p:nvPr/>
+        </p:nvSpPr>
+        <p:spPr>
+          <a:xfrm>
+            <a:off x="457200" y="4800600"/>
+            <a:ext cx="6949440" cy="274320"/>
           </a:xfrm>
           <a:prstGeom prst="rect">
             <a:avLst/>
@@ -6539,108 +8187,21 @@
           <a:ln/>
         </p:spPr>
         <p:txBody>
-          <a:bodyPr wrap="square" lIns="0" tIns="0" rIns="0" bIns="0" rtlCol="0" anchor="t">
-            <a:normAutofit/>
-          </a:bodyPr>
-          <a:lstStyle/>
-          <a:p>
-            <a:pPr marL="342900" indent="-342900">
-              <a:spcAft>
-                <a:spcPts val="600"/>
-              </a:spcAft>
-              <a:buSzPct val="100000"/>
-              <a:buChar char="•"/>
-            </a:pPr>
-            <a:r>
-              <a:rPr lang="en-US" sz="1400" dirty="0">
-                <a:solidFill>
-                  <a:srgbClr val="1F2937"/>
+          <a:bodyPr wrap="square" lIns="0" tIns="0" rIns="0" bIns="0" rtlCol="0" anchor="ctr"/>
+          <a:lstStyle/>
+          <a:p>
+            <a:pPr indent="0" marL="0">
+              <a:buNone/>
+            </a:pPr>
+            <a:r>
+              <a:rPr lang="en-US" sz="900" dirty="0">
+                <a:solidFill>
+                  <a:srgbClr val="64748B"/>
                 </a:solidFill>
                 <a:latin typeface="Calibri" pitchFamily="34" charset="0"/>
                 <a:ea typeface="Calibri" pitchFamily="34" charset="-122"/>
                 <a:cs typeface="Calibri" pitchFamily="34" charset="-120"/>
               </a:rPr>
-              <a:t>@sha256:... digest pins, not just a version tag — a tag can be repointed later, a digest can't</a:t>
-            </a:r>
-            <a:endParaRPr lang="en-US" sz="1400" dirty="0"/>
-          </a:p>
-          <a:p>
-            <a:pPr marL="342900" indent="-342900">
-              <a:spcAft>
-                <a:spcPts val="600"/>
-              </a:spcAft>
-              <a:buSzPct val="100000"/>
-              <a:buChar char="•"/>
-            </a:pPr>
-            <a:r>
-              <a:rPr lang="en-US" sz="1400" dirty="0">
-                <a:solidFill>
-                  <a:srgbClr val="1F2937"/>
-                </a:solidFill>
-                <a:latin typeface="Calibri" pitchFamily="34" charset="0"/>
-                <a:ea typeface="Calibri" pitchFamily="34" charset="-122"/>
-                <a:cs typeface="Calibri" pitchFamily="34" charset="-120"/>
-              </a:rPr>
-              <a:t>Re-scan to prove reduced findings</a:t>
-            </a:r>
-            <a:endParaRPr lang="en-US" sz="1400" dirty="0"/>
-          </a:p>
-          <a:p>
-            <a:pPr marL="342900" indent="-342900">
-              <a:spcAft>
-                <a:spcPts val="600"/>
-              </a:spcAft>
-              <a:buSzPct val="100000"/>
-              <a:buChar char="•"/>
-            </a:pPr>
-            <a:r>
-              <a:rPr lang="en-US" sz="1400" dirty="0">
-                <a:solidFill>
-                  <a:srgbClr val="1F2937"/>
-                </a:solidFill>
-                <a:latin typeface="Calibri" pitchFamily="34" charset="0"/>
-                <a:ea typeface="Calibri" pitchFamily="34" charset="-122"/>
-                <a:cs typeface="Calibri" pitchFamily="34" charset="-120"/>
-              </a:rPr>
-              <a:t>Trivy only catches 3 of 6 planted defects (:latest, root user, secret-in-ENV) — COPY . ., chmod -R 777, and unpinned pip install need manual review, no rule fires</a:t>
-            </a:r>
-            <a:endParaRPr lang="en-US" sz="1400" dirty="0"/>
-          </a:p>
-        </p:txBody>
-      </p:sp>
-      <p:sp>
-        <p:nvSpPr>
-          <p:cNvPr id="7" name="Text 4"/>
-          <p:cNvSpPr/>
-          <p:nvPr/>
-        </p:nvSpPr>
-        <p:spPr>
-          <a:xfrm>
-            <a:off x="457200" y="4800600"/>
-            <a:ext cx="6949440" cy="274320"/>
-          </a:xfrm>
-          <a:prstGeom prst="rect">
-            <a:avLst/>
-          </a:prstGeom>
-          <a:noFill/>
-          <a:ln/>
-        </p:spPr>
-        <p:txBody>
-          <a:bodyPr wrap="square" lIns="0" tIns="0" rIns="0" bIns="0" rtlCol="0" anchor="ctr"/>
-          <a:lstStyle/>
-          <a:p>
-            <a:pPr indent="0" marL="0">
-              <a:buNone/>
-            </a:pPr>
-            <a:r>
-              <a:rPr lang="en-US" sz="900" dirty="0">
-                <a:solidFill>
-                  <a:srgbClr val="64748B"/>
-                </a:solidFill>
-                <a:latin typeface="Calibri" pitchFamily="34" charset="0"/>
-                <a:ea typeface="Calibri" pitchFamily="34" charset="-122"/>
-                <a:cs typeface="Calibri" pitchFamily="34" charset="-120"/>
-              </a:rPr>
               <a:t>Software Security · Week 13</a:t>
             </a:r>
             <a:endParaRPr lang="en-US" sz="900" dirty="0"/>
@@ -6649,14 +8210,14 @@
       </p:sp>
       <p:pic>
         <p:nvPicPr>
-          <p:cNvPr id="8" name="Image 1" descr="/private/tmp/claude-501/-Users-pop7-Library-CloudStorage-OneDrive-MonsterConnectCo--Ltd-Lecture-KOSEN69---software-security/f63a82af-e1ad-40ed-89c4-03c6ca776e3f/scratchpad/fix6/KOSEN69 - software-security/slides/pptx/assets/logo-small.png">    </p:cNvPr>
+          <p:cNvPr id="7" name="Image 2" descr="/private/tmp/claude-501/-Users-pop7-Library-CloudStorage-OneDrive-MonsterConnectCo--Ltd-Lecture-KOSEN69---software-security/f63a82af-e1ad-40ed-89c4-03c6ca776e3f/scratchpad/vis-w13/slides/pptx/assets/logo-small.png">    </p:cNvPr>
           <p:cNvPicPr>
             <a:picLocks noChangeAspect="1"/>
           </p:cNvPicPr>
           <p:nvPr/>
         </p:nvPicPr>
         <p:blipFill>
-          <a:blip r:embed="rId2"/>
+          <a:blip r:embed="rId3"/>
           <a:stretch>
             <a:fillRect/>
           </a:stretch>

--- a/slides/pptx/week13.pptx
+++ b/slides/pptx/week13.pptx
@@ -25,9 +25,10 @@
     <p:sldId id="273" r:id="rId19"/>
     <p:sldId id="274" r:id="rId20"/>
     <p:sldId id="275" r:id="rId21"/>
+    <p:sldId id="276" r:id="rId22"/>
   </p:sldIdLst>
   <p:notesMasterIdLst>
-    <p:notesMasterId r:id="rId22"/>
+    <p:notesMasterId r:id="rId23"/>
   </p:notesMasterIdLst>
   <p:sldSz cx="9144000" cy="5143500"/>
   <p:notesSz cx="5143500" cy="9144000"/>
@@ -609,7 +610,8 @@
           <a:p>
             <a:r>
               <a:rPr lang="en-US" dirty="0"/>
-              <a:t>Drive it: insecure + "docker history" (still leaks) → "--no-trunc" (Task 3) → "ls -la /app" (Dockerfile.insecure is in the image). Then flip to hardened: no secret row, no build stage, and no ls at all — distroless. Output was captured from real builds, nothing runs live. ~3 min.</a:t>
+              <a:t>Two misconceptions to kill: "truncated history hides it" (it prints 30 of 34 characters) and "delete it in a later layer" (0B — it's config, not a file). Then the bonus leak: COPY . . shipped the Dockerfile itself. ~3 min.
+Diagram: From a real build of week13-insecure:lab, the image history as a stack with the newest layer on top: CMD, EXPOSE, RUN chmod -R 777, RUN pip install, COPY dot dot, WORKDIR, then ENV AWS_SECRET_ACCESS_KEY and ENV API_TOKEN, both 0 bytes because the value lives in the image config, then the python:latest base layers. Arrows to three readouts: plain docker history still prints sk_live_supersecret_DO_NOT_DO_ (30 of 34 characters); docker history --no-trunc prints the whole token (the Task 3 command); docker inspect .Config.Env prints both keys in full. A fourth arrow: COPY dot dot copied Dockerfile.insecure itself into /app, so the secret is in a file too. Fix: never put the secret in the Dockerfile, inject it at run time, and rotate the key because every pushed image keeps the old value.</a:t>
             </a:r>
             <a:endParaRPr lang="en-US" dirty="0"/>
           </a:p>
@@ -697,7 +699,7 @@
           <a:p>
             <a:r>
               <a:rPr lang="en-US" dirty="0"/>
-              <a:t>The classic trio behind most breaches. `0.0.0.0/0` on a DB port = the internet can reach your database. Default creds = free entry. Principle: deny by default, open deliberately (echoes W6 access control). ~4 min.</a:t>
+              <a:t>Drive it: insecure + "docker history" (still leaks) → "--no-trunc" (Task 3) → "ls -la /app" (Dockerfile.insecure is in the image). Then flip to hardened: no secret row, no build stage, and no ls at all — distroless. Output was captured from real builds, nothing runs live. ~3 min.</a:t>
             </a:r>
             <a:endParaRPr lang="en-US" dirty="0"/>
           </a:p>
@@ -785,7 +787,7 @@
           <a:p>
             <a:r>
               <a:rPr lang="en-US" dirty="0"/>
-              <a:t>Hands-on — this is the lab's insecure→hardened Dockerfile, always run dockerized (never a bare local trivy binary), against week13-hardened:lab (not a generic myapp:lab). The Trivy-blind-spot point is the actual lesson of this lab, not an aside — half the graded findings need a human, not a tool. Re-scan to prove improvement. ~5 min.</a:t>
+              <a:t>The classic trio behind most breaches. `0.0.0.0/0` on a DB port = the internet can reach your database. Default creds = free entry. Principle: deny by default, open deliberately (echoes W6 access control). ~4 min.</a:t>
             </a:r>
             <a:endParaRPr lang="en-US" dirty="0"/>
           </a:p>
@@ -961,7 +963,7 @@
           <a:p>
             <a:r>
               <a:rPr lang="en-US" dirty="0"/>
-              <a:t>Press "fix only what Trivy flags": Failures 0, three defects still in the file — a clean scan is not a clean image. Then "a tag, not a digest": DS-0001 passes python:3.11-slim, but harden.md row 1 wants @sha256. Rules checked against real Trivy 0.76.1 on all 96 combinations: 4 → 0 matches scan.sh. ~4 min.</a:t>
+              <a:t>Hands-on — this is the lab's insecure→hardened Dockerfile, always run dockerized (never a bare local trivy binary), against week13-hardened:lab (not a generic myapp:lab). The Trivy-blind-spot point is the actual lesson of this lab, not an aside — half the graded findings need a human, not a tool. Re-scan to prove improvement. ~5 min.</a:t>
             </a:r>
             <a:endParaRPr lang="en-US" dirty="0"/>
           </a:p>
@@ -1049,7 +1051,7 @@
           <a:p>
             <a:r>
               <a:rPr lang="en-US" dirty="0"/>
-              <a:t>Awareness only (K8s is its own course). Key takeaways: a privileged pod ≈ host root; mounted service-account tokens are a lateral-movement prize. Keep it brief. ~3 min.</a:t>
+              <a:t>Press "fix only what Trivy flags": Failures 0, three defects still in the file — a clean scan is not a clean image. Then "a tag, not a digest": DS-0001 passes python:3.11-slim, but harden.md row 1 wants @sha256. Rules checked against real Trivy 0.76.1 on all 96 combinations: 4 → 0 matches scan.sh. ~4 min.</a:t>
             </a:r>
             <a:endParaRPr lang="en-US" dirty="0"/>
           </a:p>
@@ -1137,8 +1139,7 @@
           <a:p>
             <a:r>
               <a:rPr lang="en-US" dirty="0"/>
-              <a:t>The whole lab's argument as one picture — walk it row by row once, landing on the Trivy split at the bottom: 3 rows have a rule ID to cite, 4 don't. That 3-of-7 (or "3 of 6" container-only, per the earlier slide) split is Task 1's actual grading rubric, not trivia. ~5 min.
-Diagram: The same app as two container images side by side, insecure vs hardened, six layers compared: mutable :latest tag vs a pinned digest, a baked-in secret vs runtime injection, root user vs distroless non-root, COPY-everything vs a minimal context, world-writable permissions vs read-only, and an unpinned pip install vs a discarded build stage. Below both, the same argument one layer up: the wildcard IAM policy vs the scoped one. The conclusion: Trivy flags only three of the seven defects shown here — the tag, the root user, and the secret. COPY .., chmod 777, the unpinned install, and the IAM JSON all need manual review; there is no rule for any of them.</a:t>
+              <a:t>Awareness only (K8s is its own course). Key takeaways: a privileged pod ≈ host root; mounted service-account tokens are a lateral-movement prize. Keep it brief. ~3 min.</a:t>
             </a:r>
             <a:endParaRPr lang="en-US" dirty="0"/>
           </a:p>
@@ -1226,7 +1227,8 @@
           <a:p>
             <a:r>
               <a:rPr lang="en-US" dirty="0"/>
-              <a:t>Explain before lab: 9 flags total, two categories only — no separate bucket/storage flag, no IaC/localstack target exists in this lab. Find AND explain (why it's a finding, which fix applies) = the flag. Q6 of the quiz asks for one misconfig they explained + the principle it violated. ~3 min.</a:t>
+              <a:t>The whole lab's argument as one picture — walk it row by row once, landing on the Trivy split at the bottom: 3 rows have a rule ID to cite, 4 don't. That 3-of-7 (or "3 of 6" container-only, per the earlier slide) split is Task 1's actual grading rubric, not trivia. ~5 min.
+Diagram: The same app as two container images side by side, insecure vs hardened, six layers compared: mutable :latest tag vs a pinned digest, a baked-in secret vs runtime injection, root user vs distroless non-root, COPY-everything vs a minimal context, world-writable permissions vs read-only, and an unpinned pip install vs a discarded build stage. Below both, the same argument one layer up: the wildcard IAM policy vs the scoped one. The conclusion: Trivy flags only three of the seven defects shown here — the tag, the root user, and the secret. COPY .., chmod 777, the unpinned install, and the IAM JSON all need manual review; there is no rule for any of them.</a:t>
             </a:r>
             <a:endParaRPr lang="en-US" dirty="0"/>
           </a:p>
@@ -1314,7 +1316,7 @@
           <a:p>
             <a:r>
               <a:rPr lang="en-US" dirty="0"/>
-              <a:t>Before/after artifacts + the trivy delta prove the container-side fix; IAM has no scanner delta to show, it's reasoned/written. Don't let "trivy over Dockerfiles + IAM JSON" stand — that's the exact misconception this lab's own history already fixed once. AI-resilient tasks count.</a:t>
+              <a:t>Explain before lab: 9 flags total, two categories only — no separate bucket/storage flag, no IaC/localstack target exists in this lab. Find AND explain (why it's a finding, which fix applies) = the flag. Q6 of the quiz asks for one misconfig they explained + the principle it violated. ~3 min.</a:t>
             </a:r>
             <a:endParaRPr lang="en-US" dirty="0"/>
           </a:p>
@@ -1402,7 +1404,7 @@
           <a:p>
             <a:r>
               <a:rPr lang="en-US" dirty="0"/>
-              <a:t>Recap. Cold-call: "what does a `*:*` IAM policy cost you if the key leaks?" (everything — full blast radius). "Scan in CI" sets up W15. ~2 min.</a:t>
+              <a:t>Before/after artifacts + the trivy delta prove the container-side fix; IAM has no scanner delta to show, it's reasoned/written. Don't let "trivy over Dockerfiles + IAM JSON" stand — that's the exact misconception this lab's own history already fixed once. AI-resilient tasks count.</a:t>
             </a:r>
             <a:endParaRPr lang="en-US" dirty="0"/>
           </a:p>
@@ -1578,7 +1580,7 @@
           <a:p>
             <a:r>
               <a:rPr lang="en-US" dirty="0"/>
-              <a:t>Cliffhanger: "Next week — the newest attack surface: make an AI assistant ignore its rules and leak secrets, with nothing but text."</a:t>
+              <a:t>Recap. Cold-call: "what does a `*:*` IAM policy cost you if the key leaks?" (everything — full blast radius). "Scan in CI" sets up W15. ~2 min.</a:t>
             </a:r>
             <a:endParaRPr lang="en-US" dirty="0"/>
           </a:p>
@@ -1602,6 +1604,94 @@
             <a:fld id="{F7021451-1387-4CA6-816F-3879F97B5CBC}" type="slidenum">
               <a:rPr lang="en-US"/>
               <a:t>20</a:t>
+            </a:fld>
+            <a:endParaRPr lang="en-US"/>
+          </a:p>
+        </p:txBody>
+      </p:sp>
+    </p:spTree>
+    <p:extLst>
+      <p:ext uri="{BB962C8B-B14F-4D97-AF65-F5344CB8AC3E}">
+        <p14:creationId xmlns:p14="http://schemas.microsoft.com/office/powerpoint/2010/main" val="1024086991"/>
+      </p:ext>
+    </p:extLst>
+  </p:cSld>
+  <p:clrMapOvr>
+    <a:masterClrMapping/>
+  </p:clrMapOvr>
+</p:notes>
+</file>
+
+<file path=ppt/notesSlides/notesSlide21.xml><?xml version="1.0" encoding="utf-8"?>
+<p:notes xmlns:a="http://schemas.openxmlformats.org/drawingml/2006/main" xmlns:r="http://schemas.openxmlformats.org/officeDocument/2006/relationships" xmlns:p="http://schemas.openxmlformats.org/presentationml/2006/main">
+  <p:cSld>
+    <p:spTree>
+      <p:nvGrpSpPr>
+        <p:cNvPr id="1" name=""/>
+        <p:cNvGrpSpPr/>
+        <p:nvPr/>
+      </p:nvGrpSpPr>
+      <p:grpSpPr>
+        <a:xfrm>
+          <a:off x="0" y="0"/>
+          <a:ext cx="0" cy="0"/>
+          <a:chOff x="0" y="0"/>
+          <a:chExt cx="0" cy="0"/>
+        </a:xfrm>
+      </p:grpSpPr>
+      <p:sp>
+        <p:nvSpPr>
+          <p:cNvPr id="2" name="Slide Image Placeholder 1"/>
+          <p:cNvSpPr>
+            <a:spLocks noGrp="1" noRot="1" noChangeAspect="1"/>
+          </p:cNvSpPr>
+          <p:nvPr>
+            <p:ph type="sldImg"/>
+          </p:nvPr>
+        </p:nvSpPr>
+        <p:spPr/>
+      </p:sp>
+      <p:sp>
+        <p:nvSpPr>
+          <p:cNvPr id="3" name="Notes Placeholder 2"/>
+          <p:cNvSpPr>
+            <a:spLocks noGrp="1"/>
+          </p:cNvSpPr>
+          <p:nvPr>
+            <p:ph type="body" idx="1"/>
+          </p:nvPr>
+        </p:nvSpPr>
+        <p:spPr/>
+        <p:txBody>
+          <a:bodyPr/>
+          <a:lstStyle/>
+          <a:p>
+            <a:r>
+              <a:rPr lang="en-US" dirty="0"/>
+              <a:t>Cliffhanger: "Next week — the newest attack surface: make an AI assistant ignore its rules and leak secrets, with nothing but text."</a:t>
+            </a:r>
+            <a:endParaRPr lang="en-US" dirty="0"/>
+          </a:p>
+        </p:txBody>
+      </p:sp>
+      <p:sp>
+        <p:nvSpPr>
+          <p:cNvPr id="4" name="Slide Number Placeholder 3"/>
+          <p:cNvSpPr>
+            <a:spLocks noGrp="1"/>
+          </p:cNvSpPr>
+          <p:nvPr>
+            <p:ph type="sldNum" sz="quarter" idx="10"/>
+          </p:nvPr>
+        </p:nvSpPr>
+        <p:spPr/>
+        <p:txBody>
+          <a:bodyPr/>
+          <a:lstStyle/>
+          <a:p>
+            <a:fld id="{F7021451-1387-4CA6-816F-3879F97B5CBC}" type="slidenum">
+              <a:rPr lang="en-US"/>
+              <a:t>21</a:t>
             </a:fld>
             <a:endParaRPr lang="en-US"/>
           </a:p>
@@ -1666,7 +1756,8 @@
           <a:p>
             <a:r>
               <a:rPr lang="en-US" dirty="0"/>
-              <a:t>1-min bridge. Misconfiguration jumped to A02 in 2025 — it's not a footnote, it's the second most critical web risk. ~2 min.</a:t>
+              <a:t>1-min bridge. Misconfiguration jumped to A02 in 2025 — it's not a footnote, it's the second most critical web risk. Then the story spine: one app, three layers — today we package it and give it cloud permissions (W13), next we add an AI chatbot to it (W14), last we put a pipeline in front of all of it (W15). Same root mistake all day: trusting input and defaults nobody checked. ~2 min.
+Diagram: One app, three layers. You are here: W13. W13, where it runs: a secret baked into an image layer and an IAM policy with Action * on Resource *; fix with a hardened image and least privilege. W14, what it says: the app gets a chatbot; typed text overrides its rules (prompt injection) and its reply goes into the page unescaped (XSS); fix with guardrails, secret redaction and output escaping. W15, how it ships: Semgrep, Trivy and Gitleaks check every push, a red gate fails the PR, and the app denies on error.</a:t>
             </a:r>
             <a:endParaRPr lang="en-US" dirty="0"/>
           </a:p>
@@ -1754,7 +1845,8 @@
           <a:p>
             <a:r>
               <a:rPr lang="en-US" dirty="0"/>
-              <a:t>The mental model students most misunderstand: AWS secures the hardware/hypervisor; YOU secure your buckets, IAM, security groups. Almost every headline cloud breach is the customer's config, not the provider. ~4 min.</a:t>
+              <a:t>1-min bridge. Misconfiguration jumped to A02 in 2025 — it's not a footnote, it's the second most critical web risk. Then the story spine: one app, three layers — today we package it and give it cloud permissions (W13), next we add an AI chatbot to it (W14), last we put a pipeline in front of all of it (W15). Same root mistake all day: trusting input and defaults nobody checked. ~2 min.
+Diagram: One app, three layers. You are here: W13. W13, where it runs: a secret baked into an image layer and an IAM policy with Action * on Resource *; fix with a hardened image and least privilege. W14, what it says: the app gets a chatbot; typed text overrides its rules (prompt injection) and its reply goes into the page unescaped (XSS); fix with guardrails, secret redaction and output escaping. W15, how it ships: Semgrep, Trivy and Gitleaks check every push, a red gate fails the PR, and the app denies on error.</a:t>
             </a:r>
             <a:endParaRPr lang="en-US" dirty="0"/>
           </a:p>
@@ -1842,8 +1934,7 @@
           <a:p>
             <a:r>
               <a:rPr lang="en-US" dirty="0"/>
-              <a:t>Point at the line, then at the two pills: every file the students touch today is on the right. Ask "which of the 9 flags could AWS have fixed for you?" — none. ~2 min.
-Diagram: Shared responsibility for this lab's S3-backed app as two panels split by a line. AWS secures OF the cloud: data centres and hardware, the hypervisor and host OS, the S3 and IAM services themselves, the global network. You secure what you put IN it: the IAM policy (iam-policy-insecure.json, 3 flags), the container image (Dockerfile.insecure, 6 flags including the ENV secret), bucket access and encryption, and network rules such as 0.0.0.0/0 on a database port. Conclusion: all 9 Misconfig Hunt flags sit in your half; none is a provider bug.</a:t>
+              <a:t>The mental model students most misunderstand: AWS secures the hardware/hypervisor; YOU secure your buckets, IAM, security groups. Almost every headline cloud breach is the customer's config, not the provider. ~4 min.</a:t>
             </a:r>
             <a:endParaRPr lang="en-US" dirty="0"/>
           </a:p>
@@ -1931,7 +2022,8 @@
           <a:p>
             <a:r>
               <a:rPr lang="en-US" dirty="0"/>
-              <a:t>The worked example — this `*:*` policy is the Misconfig Hunt round 1 and the quiz. If a credential with this leaks, the attacker owns everything. This is 100% manual review — Trivy's config scanner does not parse standalone IAM JSON at all, say so explicitly so students don't wait for a scanner to flag it. The sim scores Action and Resource independently, live, so "two findings, not one" is something they watch instead of a claim on a slide. Least privilege = smallest possible blast radius. ~6 min.</a:t>
+              <a:t>Point at the line, then at the two pills: every file the students touch today is on the right. Ask "which of the 9 flags could AWS have fixed for you?" — none. ~2 min.
+Diagram: Shared responsibility for this lab's S3-backed app as two panels split by a line. AWS secures OF the cloud: data centres and hardware, the hypervisor and host OS, the S3 and IAM services themselves, the global network. You secure what you put IN it: the IAM policy (iam-policy-insecure.json, 3 flags), the container image (Dockerfile.insecure, 6 flags including the ENV secret), bucket access and encryption, and network rules such as 0.0.0.0/0 on a database port. Conclusion: all 9 Misconfig Hunt flags sit in your half; none is a provider bug.</a:t>
             </a:r>
             <a:endParaRPr lang="en-US" dirty="0"/>
           </a:p>
@@ -2019,8 +2111,7 @@
           <a:p>
             <a:r>
               <a:rPr lang="en-US" dirty="0"/>
-              <a:t>The answer to the cold-call "what does *:* cost you if the key leaks?", drawn. Land on iam:CreateAccessKey: rotating the leaked key doesn't evict an attacker who already minted their own. Right side = iam-policy-leastpriv.json, line for line. ~2 min.
-Diagram: The same AWS account drawn twice at the same scale. Left, iam-policy-insecure.json (Action star, Resource star, no Condition): the whole account is allowed, with example actions a leaked key can now run — s3 star on any bucket, iam:CreateAccessKey to mint new keys that survive rotation, ec2:RunInstances on your bill, kms:Decrypt, cloudtrail:StopLogging to turn off the audit trail — equals full admin; Action star is CWE-269, Resource star is CWE-732. Right, iam-policy-leastpriv.json: everything is implicitly denied except a small app/* square inside lab-app-bucket, readable via s3:GetObject on app/* objects, plus s3:ListBucket only under the Condition s3:prefix = app/*. Trivy parses neither file; Task 2 is manual review.</a:t>
+              <a:t>The worked example — this `*:*` policy is the Misconfig Hunt round 1 and the quiz. If a credential with this leaks, the attacker owns everything. This is 100% manual review — Trivy's config scanner does not parse standalone IAM JSON at all, say so explicitly so students don't wait for a scanner to flag it. The sim scores Action and Resource independently, live, so "two findings, not one" is something they watch instead of a claim on a slide. Least privilege = smallest possible blast radius. ~6 min.</a:t>
             </a:r>
             <a:endParaRPr lang="en-US" dirty="0"/>
           </a:p>
@@ -2108,7 +2199,8 @@
           <a:p>
             <a:r>
               <a:rPr lang="en-US" dirty="0"/>
-              <a:t>Connect to W2 (Gitleaks) and W12. A secret baked into an image layer is in every copy of that image forever — `docker history` reveals it. Fix = inject at runtime from a vault + rotate. ~4 min.</a:t>
+              <a:t>The answer to the cold-call "what does *:* cost you if the key leaks?", drawn. Land on iam:CreateAccessKey: rotating the leaked key doesn't evict an attacker who already minted their own. Right side = iam-policy-leastpriv.json, line for line. ~2 min.
+Diagram: The same AWS account drawn twice at the same scale. Left, iam-policy-insecure.json (Action star, Resource star, no Condition): the whole account is allowed, with example actions a leaked key can now run — s3 star on any bucket, iam:CreateAccessKey to mint new keys that survive rotation, ec2:RunInstances on your bill, kms:Decrypt, cloudtrail:StopLogging to turn off the audit trail — equals full admin; Action star is CWE-269, Resource star is CWE-732. Right, iam-policy-leastpriv.json: everything is implicitly denied except a small app/* square inside lab-app-bucket, readable via s3:GetObject on app/* objects, plus s3:ListBucket only under the Condition s3:prefix = app/*. Trivy parses neither file; Task 2 is manual review.</a:t>
             </a:r>
             <a:endParaRPr lang="en-US" dirty="0"/>
           </a:p>
@@ -2196,8 +2288,7 @@
           <a:p>
             <a:r>
               <a:rPr lang="en-US" dirty="0"/>
-              <a:t>Two misconceptions to kill: "truncated history hides it" (it prints 30 of 34 characters) and "delete it in a later layer" (0B — it's config, not a file). Then the bonus leak: COPY . . shipped the Dockerfile itself. ~3 min.
-Diagram: From a real build of week13-insecure:lab, the image history as a stack with the newest layer on top: CMD, EXPOSE, RUN chmod -R 777, RUN pip install, COPY dot dot, WORKDIR, then ENV AWS_SECRET_ACCESS_KEY and ENV API_TOKEN, both 0 bytes because the value lives in the image config, then the python:latest base layers. Arrows to three readouts: plain docker history still prints sk_live_supersecret_DO_NOT_DO_ (30 of 34 characters); docker history --no-trunc prints the whole token (the Task 3 command); docker inspect .Config.Env prints both keys in full. A fourth arrow: COPY dot dot copied Dockerfile.insecure itself into /app, so the secret is in a file too. Fix: never put the secret in the Dockerfile, inject it at run time, and rotate the key because every pushed image keeps the old value.</a:t>
+              <a:t>Connect to W2 (Gitleaks) and W12. A secret baked into an image layer is in every copy of that image forever — `docker history` reveals it. Fix = inject at runtime from a vault + rotate. ~4 min.</a:t>
             </a:r>
             <a:endParaRPr lang="en-US" dirty="0"/>
           </a:p>
@@ -2572,7 +2663,7 @@
       </p:grpSpPr>
       <p:pic>
         <p:nvPicPr>
-          <p:cNvPr id="2" name="Image 0" descr="/private/tmp/claude-501/-Users-pop7-Library-CloudStorage-OneDrive-MonsterConnectCo--Ltd-Lecture-KOSEN69---software-security/f63a82af-e1ad-40ed-89c4-03c6ca776e3f/scratchpad/vis-w13/slides/pptx/assets/logo-small.png">    </p:cNvPr>
+          <p:cNvPr id="2" name="Image 0" descr="/private/tmp/claude-501/-Users-pop7-Library-CloudStorage-OneDrive-MonsterConnectCo--Ltd-Lecture-KOSEN69---software-security/f63a82af-e1ad-40ed-89c4-03c6ca776e3f/scratchpad/lq-anim/slides/pptx/assets/logo-small.png">    </p:cNvPr>
           <p:cNvPicPr>
             <a:picLocks noChangeAspect="1"/>
           </p:cNvPicPr>
@@ -2830,22 +2921,46 @@
                 <a:ea typeface="Arial" pitchFamily="34" charset="-122"/>
                 <a:cs typeface="Arial" pitchFamily="34" charset="-120"/>
               </a:rPr>
-              <a:t>Try it — which layer gives it away?</a:t>
+              <a:t>Where the ENV secret ends up</a:t>
             </a:r>
             <a:endParaRPr lang="en-US" sz="2600" dirty="0"/>
           </a:p>
         </p:txBody>
       </p:sp>
-      <p:sp>
-        <p:nvSpPr>
-          <p:cNvPr id="5" name="Text 2"/>
-          <p:cNvSpPr/>
-          <p:nvPr/>
-        </p:nvSpPr>
-        <p:spPr>
-          <a:xfrm>
-            <a:off x="548640" y="1325880"/>
-            <a:ext cx="8046720" cy="822960"/>
+      <p:pic>
+        <p:nvPicPr>
+          <p:cNvPr id="5" name="Image 1" descr="From a real build of week13-insecure:lab, the image history as a stack with the newest layer on top: CMD, EXPOSE, RUN chmod -R 777, RUN pip install, COPY dot dot, WORKDIR, then ENV AWS_SECRET_ACCESS_KEY and ENV API_TOKEN, both 0 bytes because the value lives in the image config, then the python:latest base layers. Arrows to three readouts: plain docker history still prints sk_live_supersecret_DO_NOT_DO_ (30 of 34 characters); docker history --no-trunc prints the whole token (the Task 3 command); docker inspect .Config.Env prints both keys in full. A fourth arrow: COPY dot dot copied Dockerfile.insecure itself into /app, so the secret is in a file too. Fix: never put the secret in the Dockerfile, inject it at run time, and rotate the key because every pushed image keeps the old value.">    </p:cNvPr>
+          <p:cNvPicPr>
+            <a:picLocks noChangeAspect="1"/>
+          </p:cNvPicPr>
+          <p:nvPr/>
+        </p:nvPicPr>
+        <p:blipFill>
+          <a:blip r:embed="rId2"/>
+          <a:stretch>
+            <a:fillRect/>
+          </a:stretch>
+        </p:blipFill>
+        <p:spPr>
+          <a:xfrm>
+            <a:off x="559443" y="1097280"/>
+            <a:ext cx="8025114" cy="3566160"/>
+          </a:xfrm>
+          <a:prstGeom prst="rect">
+            <a:avLst/>
+          </a:prstGeom>
+        </p:spPr>
+      </p:pic>
+      <p:sp>
+        <p:nvSpPr>
+          <p:cNvPr id="6" name="Text 2"/>
+          <p:cNvSpPr/>
+          <p:nvPr/>
+        </p:nvSpPr>
+        <p:spPr>
+          <a:xfrm>
+            <a:off x="457200" y="4800600"/>
+            <a:ext cx="6949440" cy="274320"/>
           </a:xfrm>
           <a:prstGeom prst="rect">
             <a:avLst/>
@@ -2854,79 +2969,21 @@
           <a:ln/>
         </p:spPr>
         <p:txBody>
-          <a:bodyPr wrap="square" lIns="0" tIns="0" rIns="0" bIns="0" rtlCol="0" anchor="t">
-            <a:normAutofit/>
-          </a:bodyPr>
+          <a:bodyPr wrap="square" lIns="0" tIns="0" rIns="0" bIns="0" rtlCol="0" anchor="ctr"/>
           <a:lstStyle/>
           <a:p>
             <a:pPr indent="0" marL="0">
               <a:buNone/>
             </a:pPr>
             <a:r>
-              <a:rPr lang="en-US" sz="1400" dirty="0">
-                <a:solidFill>
-                  <a:srgbClr val="1F2937"/>
+              <a:rPr lang="en-US" sz="900" dirty="0">
+                <a:solidFill>
+                  <a:srgbClr val="64748B"/>
                 </a:solidFill>
                 <a:latin typeface="Calibri" pitchFamily="34" charset="0"/>
                 <a:ea typeface="Calibri" pitchFamily="34" charset="-122"/>
                 <a:cs typeface="Calibri" pitchFamily="34" charset="-120"/>
               </a:rPr>
-              <a:t>Real docker history / docker inspect output from both lab images. Pick a command.</a:t>
-            </a:r>
-            <a:endParaRPr lang="en-US" sz="1400" dirty="0"/>
-          </a:p>
-          <a:p>
-            <a:pPr indent="0" marL="0">
-              <a:buNone/>
-            </a:pPr>
-            <a:r>
-              <a:rPr lang="en-US" sz="1400" dirty="0">
-                <a:solidFill>
-                  <a:srgbClr val="1F2937"/>
-                </a:solidFill>
-                <a:latin typeface="Calibri" pitchFamily="34" charset="0"/>
-                <a:ea typeface="Calibri" pitchFamily="34" charset="-122"/>
-                <a:cs typeface="Calibri" pitchFamily="34" charset="-120"/>
-              </a:rPr>
-              <a:t>Try it live: /sim/image-layers (interactive simulation, web only)</a:t>
-            </a:r>
-            <a:endParaRPr lang="en-US" sz="1400" dirty="0"/>
-          </a:p>
-        </p:txBody>
-      </p:sp>
-      <p:sp>
-        <p:nvSpPr>
-          <p:cNvPr id="6" name="Text 3"/>
-          <p:cNvSpPr/>
-          <p:nvPr/>
-        </p:nvSpPr>
-        <p:spPr>
-          <a:xfrm>
-            <a:off x="457200" y="4800600"/>
-            <a:ext cx="6949440" cy="274320"/>
-          </a:xfrm>
-          <a:prstGeom prst="rect">
-            <a:avLst/>
-          </a:prstGeom>
-          <a:noFill/>
-          <a:ln/>
-        </p:spPr>
-        <p:txBody>
-          <a:bodyPr wrap="square" lIns="0" tIns="0" rIns="0" bIns="0" rtlCol="0" anchor="ctr"/>
-          <a:lstStyle/>
-          <a:p>
-            <a:pPr indent="0" marL="0">
-              <a:buNone/>
-            </a:pPr>
-            <a:r>
-              <a:rPr lang="en-US" sz="900" dirty="0">
-                <a:solidFill>
-                  <a:srgbClr val="64748B"/>
-                </a:solidFill>
-                <a:latin typeface="Calibri" pitchFamily="34" charset="0"/>
-                <a:ea typeface="Calibri" pitchFamily="34" charset="-122"/>
-                <a:cs typeface="Calibri" pitchFamily="34" charset="-120"/>
-              </a:rPr>
               <a:t>Software Security · Week 13</a:t>
             </a:r>
             <a:endParaRPr lang="en-US" sz="900" dirty="0"/>
@@ -2935,14 +2992,14 @@
       </p:sp>
       <p:pic>
         <p:nvPicPr>
-          <p:cNvPr id="7" name="Image 1" descr="/private/tmp/claude-501/-Users-pop7-Library-CloudStorage-OneDrive-MonsterConnectCo--Ltd-Lecture-KOSEN69---software-security/f63a82af-e1ad-40ed-89c4-03c6ca776e3f/scratchpad/vis-w13/slides/pptx/assets/logo-small.png">    </p:cNvPr>
+          <p:cNvPr id="7" name="Image 2" descr="/private/tmp/claude-501/-Users-pop7-Library-CloudStorage-OneDrive-MonsterConnectCo--Ltd-Lecture-KOSEN69---software-security/f63a82af-e1ad-40ed-89c4-03c6ca776e3f/scratchpad/lq-anim/slides/pptx/assets/logo-small.png">    </p:cNvPr>
           <p:cNvPicPr>
             <a:picLocks noChangeAspect="1"/>
           </p:cNvPicPr>
           <p:nvPr/>
         </p:nvPicPr>
         <p:blipFill>
-          <a:blip r:embed="rId2"/>
+          <a:blip r:embed="rId3"/>
           <a:stretch>
             <a:fillRect/>
           </a:stretch>
@@ -3073,7 +3130,7 @@
                 <a:ea typeface="Arial" pitchFamily="34" charset="-122"/>
                 <a:cs typeface="Arial" pitchFamily="34" charset="-120"/>
               </a:rPr>
-              <a:t>Storage &amp; network exposure</a:t>
+              <a:t>Try it — which layer gives it away?</a:t>
             </a:r>
             <a:endParaRPr lang="en-US" sz="2600" dirty="0"/>
           </a:p>
@@ -3081,43 +3138,14 @@
       </p:sp>
       <p:sp>
         <p:nvSpPr>
-          <p:cNvPr id="5" name="Shape 2"/>
-          <p:cNvSpPr/>
-          <p:nvPr/>
-        </p:nvSpPr>
-        <p:spPr>
-          <a:xfrm>
-            <a:off x="457200" y="1325880"/>
-            <a:ext cx="8229600" cy="1207008"/>
-          </a:xfrm>
-          <a:prstGeom prst="roundRect">
-            <a:avLst>
-              <a:gd name="adj" fmla="val 6061"/>
-            </a:avLst>
-          </a:prstGeom>
-          <a:solidFill>
-            <a:srgbClr val="F1F5F9"/>
-          </a:solidFill>
-          <a:ln/>
-          <a:effectLst>
-            <a:outerShdw sx="100000" sy="100000" kx="0" ky="0" algn="bl" rotWithShape="0" blurRad="76200" dist="25400" dir="5400000">
-              <a:srgbClr val="000000">
-                <a:alpha val="12000"/>
-              </a:srgbClr>
-            </a:outerShdw>
-          </a:effectLst>
-        </p:spPr>
-      </p:sp>
-      <p:sp>
-        <p:nvSpPr>
-          <p:cNvPr id="6" name="Text 3"/>
-          <p:cNvSpPr/>
-          <p:nvPr/>
-        </p:nvSpPr>
-        <p:spPr>
-          <a:xfrm>
-            <a:off x="731520" y="1435608"/>
-            <a:ext cx="7680960" cy="987552"/>
+          <p:cNvPr id="5" name="Text 2"/>
+          <p:cNvSpPr/>
+          <p:nvPr/>
+        </p:nvSpPr>
+        <p:spPr>
+          <a:xfrm>
+            <a:off x="548640" y="1325880"/>
+            <a:ext cx="8046720" cy="822960"/>
           </a:xfrm>
           <a:prstGeom prst="rect">
             <a:avLst/>
@@ -3131,12 +3159,8 @@
           </a:bodyPr>
           <a:lstStyle/>
           <a:p>
-            <a:pPr marL="342900" indent="-342900">
-              <a:spcAft>
-                <a:spcPts val="600"/>
-              </a:spcAft>
-              <a:buSzPct val="100000"/>
-              <a:buChar char="•"/>
+            <a:pPr indent="0" marL="0">
+              <a:buNone/>
             </a:pPr>
             <a:r>
               <a:rPr lang="en-US" sz="1400" dirty="0">
@@ -3147,17 +3171,13 @@
                 <a:ea typeface="Calibri" pitchFamily="34" charset="-122"/>
                 <a:cs typeface="Calibri" pitchFamily="34" charset="-120"/>
               </a:rPr>
-              <a:t>Public buckets, open ports, default creds</a:t>
+              <a:t>Real docker history / docker inspect output from both lab images. Pick a command.</a:t>
             </a:r>
             <a:endParaRPr lang="en-US" sz="1400" dirty="0"/>
           </a:p>
           <a:p>
-            <a:pPr marL="342900" indent="-342900">
-              <a:spcAft>
-                <a:spcPts val="600"/>
-              </a:spcAft>
-              <a:buSzPct val="100000"/>
-              <a:buChar char="•"/>
+            <a:pPr indent="0" marL="0">
+              <a:buNone/>
             </a:pPr>
             <a:r>
               <a:rPr lang="en-US" sz="1400" dirty="0">
@@ -3168,66 +3188,45 @@
                 <a:ea typeface="Calibri" pitchFamily="34" charset="-122"/>
                 <a:cs typeface="Calibri" pitchFamily="34" charset="-120"/>
               </a:rPr>
-              <a:t>Encrypt at rest + in transit</a:t>
+              <a:t>Try it live: /sim/image-layers (interactive simulation, web only)</a:t>
             </a:r>
             <a:endParaRPr lang="en-US" sz="1400" dirty="0"/>
           </a:p>
-          <a:p>
-            <a:pPr marL="342900" indent="-342900">
-              <a:spcAft>
-                <a:spcPts val="600"/>
-              </a:spcAft>
-              <a:buSzPct val="100000"/>
-              <a:buChar char="•"/>
-            </a:pPr>
-            <a:r>
-              <a:rPr lang="en-US" sz="1400" dirty="0">
-                <a:solidFill>
-                  <a:srgbClr val="1F2937"/>
+        </p:txBody>
+      </p:sp>
+      <p:sp>
+        <p:nvSpPr>
+          <p:cNvPr id="6" name="Text 3"/>
+          <p:cNvSpPr/>
+          <p:nvPr/>
+        </p:nvSpPr>
+        <p:spPr>
+          <a:xfrm>
+            <a:off x="457200" y="4800600"/>
+            <a:ext cx="6949440" cy="274320"/>
+          </a:xfrm>
+          <a:prstGeom prst="rect">
+            <a:avLst/>
+          </a:prstGeom>
+          <a:noFill/>
+          <a:ln/>
+        </p:spPr>
+        <p:txBody>
+          <a:bodyPr wrap="square" lIns="0" tIns="0" rIns="0" bIns="0" rtlCol="0" anchor="ctr"/>
+          <a:lstStyle/>
+          <a:p>
+            <a:pPr indent="0" marL="0">
+              <a:buNone/>
+            </a:pPr>
+            <a:r>
+              <a:rPr lang="en-US" sz="900" dirty="0">
+                <a:solidFill>
+                  <a:srgbClr val="64748B"/>
                 </a:solidFill>
                 <a:latin typeface="Calibri" pitchFamily="34" charset="0"/>
                 <a:ea typeface="Calibri" pitchFamily="34" charset="-122"/>
                 <a:cs typeface="Calibri" pitchFamily="34" charset="-120"/>
               </a:rPr>
-              <a:t>Private by default; explicit allow</a:t>
-            </a:r>
-            <a:endParaRPr lang="en-US" sz="1400" dirty="0"/>
-          </a:p>
-        </p:txBody>
-      </p:sp>
-      <p:sp>
-        <p:nvSpPr>
-          <p:cNvPr id="7" name="Text 4"/>
-          <p:cNvSpPr/>
-          <p:nvPr/>
-        </p:nvSpPr>
-        <p:spPr>
-          <a:xfrm>
-            <a:off x="457200" y="4800600"/>
-            <a:ext cx="6949440" cy="274320"/>
-          </a:xfrm>
-          <a:prstGeom prst="rect">
-            <a:avLst/>
-          </a:prstGeom>
-          <a:noFill/>
-          <a:ln/>
-        </p:spPr>
-        <p:txBody>
-          <a:bodyPr wrap="square" lIns="0" tIns="0" rIns="0" bIns="0" rtlCol="0" anchor="ctr"/>
-          <a:lstStyle/>
-          <a:p>
-            <a:pPr indent="0" marL="0">
-              <a:buNone/>
-            </a:pPr>
-            <a:r>
-              <a:rPr lang="en-US" sz="900" dirty="0">
-                <a:solidFill>
-                  <a:srgbClr val="64748B"/>
-                </a:solidFill>
-                <a:latin typeface="Calibri" pitchFamily="34" charset="0"/>
-                <a:ea typeface="Calibri" pitchFamily="34" charset="-122"/>
-                <a:cs typeface="Calibri" pitchFamily="34" charset="-120"/>
-              </a:rPr>
               <a:t>Software Security · Week 13</a:t>
             </a:r>
             <a:endParaRPr lang="en-US" sz="900" dirty="0"/>
@@ -3236,7 +3235,7 @@
       </p:sp>
       <p:pic>
         <p:nvPicPr>
-          <p:cNvPr id="8" name="Image 1" descr="/private/tmp/claude-501/-Users-pop7-Library-CloudStorage-OneDrive-MonsterConnectCo--Ltd-Lecture-KOSEN69---software-security/f63a82af-e1ad-40ed-89c4-03c6ca776e3f/scratchpad/vis-w13/slides/pptx/assets/logo-small.png">    </p:cNvPr>
+          <p:cNvPr id="7" name="Image 1" descr="/private/tmp/claude-501/-Users-pop7-Library-CloudStorage-OneDrive-MonsterConnectCo--Ltd-Lecture-KOSEN69---software-security/f63a82af-e1ad-40ed-89c4-03c6ca776e3f/scratchpad/lq-anim/slides/pptx/assets/logo-small.png">    </p:cNvPr>
           <p:cNvPicPr>
             <a:picLocks noChangeAspect="1"/>
           </p:cNvPicPr>
@@ -3374,7 +3373,7 @@
                 <a:ea typeface="Arial" pitchFamily="34" charset="-122"/>
                 <a:cs typeface="Arial" pitchFamily="34" charset="-120"/>
               </a:rPr>
-              <a:t>Container image hardening</a:t>
+              <a:t>Storage &amp; network exposure</a:t>
             </a:r>
             <a:endParaRPr lang="en-US" sz="2600" dirty="0"/>
           </a:p>
@@ -3389,164 +3388,11 @@
         <p:spPr>
           <a:xfrm>
             <a:off x="457200" y="1325880"/>
-            <a:ext cx="8229600" cy="1591056"/>
+            <a:ext cx="8229600" cy="1207008"/>
           </a:xfrm>
           <a:prstGeom prst="roundRect">
             <a:avLst>
-              <a:gd name="adj" fmla="val 3448"/>
-            </a:avLst>
-          </a:prstGeom>
-          <a:solidFill>
-            <a:srgbClr val="0A1020"/>
-          </a:solidFill>
-          <a:ln w="12700">
-            <a:solidFill>
-              <a:srgbClr val="E8EDF3"/>
-            </a:solidFill>
-            <a:prstDash val="solid"/>
-          </a:ln>
-        </p:spPr>
-      </p:sp>
-      <p:sp>
-        <p:nvSpPr>
-          <p:cNvPr id="6" name="Text 3"/>
-          <p:cNvSpPr/>
-          <p:nvPr/>
-        </p:nvSpPr>
-        <p:spPr>
-          <a:xfrm>
-            <a:off x="640080" y="1399032"/>
-            <a:ext cx="7863840" cy="1444752"/>
-          </a:xfrm>
-          <a:prstGeom prst="rect">
-            <a:avLst/>
-          </a:prstGeom>
-          <a:noFill/>
-          <a:ln/>
-        </p:spPr>
-        <p:txBody>
-          <a:bodyPr wrap="square" lIns="0" tIns="0" rIns="0" bIns="0" rtlCol="0" anchor="t">
-            <a:normAutofit/>
-          </a:bodyPr>
-          <a:lstStyle/>
-          <a:p>
-            <a:pPr indent="0" marL="0">
-              <a:buNone/>
-            </a:pPr>
-            <a:r>
-              <a:rPr lang="en-US" sz="1150" dirty="0">
-                <a:solidFill>
-                  <a:srgbClr val="9FE7D6"/>
-                </a:solidFill>
-                <a:latin typeface="Courier New" pitchFamily="34" charset="0"/>
-                <a:ea typeface="Courier New" pitchFamily="34" charset="-122"/>
-                <a:cs typeface="Courier New" pitchFamily="34" charset="-120"/>
-              </a:rPr>
-              <a:t># misconfig scan (Dockerfiles)</a:t>
-            </a:r>
-            <a:endParaRPr lang="en-US" sz="1150" dirty="0"/>
-          </a:p>
-          <a:p>
-            <a:pPr indent="0" marL="0">
-              <a:buNone/>
-            </a:pPr>
-            <a:r>
-              <a:rPr lang="en-US" sz="1150" dirty="0">
-                <a:solidFill>
-                  <a:srgbClr val="9FE7D6"/>
-                </a:solidFill>
-                <a:latin typeface="Courier New" pitchFamily="34" charset="0"/>
-                <a:ea typeface="Courier New" pitchFamily="34" charset="-122"/>
-                <a:cs typeface="Courier New" pitchFamily="34" charset="-120"/>
-              </a:rPr>
-              <a:t>docker run --rm -v "${PWD}:/src" aquasec/trivy:latest \</a:t>
-            </a:r>
-            <a:endParaRPr lang="en-US" sz="1150" dirty="0"/>
-          </a:p>
-          <a:p>
-            <a:pPr indent="0" marL="0">
-              <a:buNone/>
-            </a:pPr>
-            <a:r>
-              <a:rPr lang="en-US" sz="1150" dirty="0">
-                <a:solidFill>
-                  <a:srgbClr val="9FE7D6"/>
-                </a:solidFill>
-                <a:latin typeface="Courier New" pitchFamily="34" charset="0"/>
-                <a:ea typeface="Courier New" pitchFamily="34" charset="-122"/>
-                <a:cs typeface="Courier New" pitchFamily="34" charset="-120"/>
-              </a:rPr>
-              <a:t>  config --severity MEDIUM,HIGH,CRITICAL /src</a:t>
-            </a:r>
-            <a:endParaRPr lang="en-US" sz="1150" dirty="0"/>
-          </a:p>
-          <a:p>
-            <a:pPr indent="0" marL="0">
-              <a:buNone/>
-            </a:pPr>
-            <a:r>
-              <a:rPr lang="en-US" sz="1150" dirty="0">
-                <a:solidFill>
-                  <a:srgbClr val="9FE7D6"/>
-                </a:solidFill>
-                <a:latin typeface="Courier New" pitchFamily="34" charset="0"/>
-                <a:ea typeface="Courier New" pitchFamily="34" charset="-122"/>
-                <a:cs typeface="Courier New" pitchFamily="34" charset="-120"/>
-              </a:rPr>
-              <a:t># image CVE scan</a:t>
-            </a:r>
-            <a:endParaRPr lang="en-US" sz="1150" dirty="0"/>
-          </a:p>
-          <a:p>
-            <a:pPr indent="0" marL="0">
-              <a:buNone/>
-            </a:pPr>
-            <a:r>
-              <a:rPr lang="en-US" sz="1150" dirty="0">
-                <a:solidFill>
-                  <a:srgbClr val="9FE7D6"/>
-                </a:solidFill>
-                <a:latin typeface="Courier New" pitchFamily="34" charset="0"/>
-                <a:ea typeface="Courier New" pitchFamily="34" charset="-122"/>
-                <a:cs typeface="Courier New" pitchFamily="34" charset="-120"/>
-              </a:rPr>
-              <a:t>docker run --rm -v /var/run/docker.sock:/var/run/docker.sock \</a:t>
-            </a:r>
-            <a:endParaRPr lang="en-US" sz="1150" dirty="0"/>
-          </a:p>
-          <a:p>
-            <a:pPr indent="0" marL="0">
-              <a:buNone/>
-            </a:pPr>
-            <a:r>
-              <a:rPr lang="en-US" sz="1150" dirty="0">
-                <a:solidFill>
-                  <a:srgbClr val="9FE7D6"/>
-                </a:solidFill>
-                <a:latin typeface="Courier New" pitchFamily="34" charset="0"/>
-                <a:ea typeface="Courier New" pitchFamily="34" charset="-122"/>
-                <a:cs typeface="Courier New" pitchFamily="34" charset="-120"/>
-              </a:rPr>
-              <a:t>  aquasec/trivy:latest image --severity HIGH,CRITICAL week13-hardened:lab</a:t>
-            </a:r>
-            <a:endParaRPr lang="en-US" sz="1150" dirty="0"/>
-          </a:p>
-        </p:txBody>
-      </p:sp>
-      <p:sp>
-        <p:nvSpPr>
-          <p:cNvPr id="7" name="Shape 4"/>
-          <p:cNvSpPr/>
-          <p:nvPr/>
-        </p:nvSpPr>
-        <p:spPr>
-          <a:xfrm>
-            <a:off x="457200" y="3081528"/>
-            <a:ext cx="8229600" cy="987552"/>
-          </a:xfrm>
-          <a:prstGeom prst="roundRect">
-            <a:avLst>
-              <a:gd name="adj" fmla="val 7407"/>
+              <a:gd name="adj" fmla="val 6061"/>
             </a:avLst>
           </a:prstGeom>
           <a:solidFill>
@@ -3564,14 +3410,14 @@
       </p:sp>
       <p:sp>
         <p:nvSpPr>
-          <p:cNvPr id="8" name="Text 5"/>
-          <p:cNvSpPr/>
-          <p:nvPr/>
-        </p:nvSpPr>
-        <p:spPr>
-          <a:xfrm>
-            <a:off x="731520" y="3191256"/>
-            <a:ext cx="7680960" cy="768096"/>
+          <p:cNvPr id="6" name="Text 3"/>
+          <p:cNvSpPr/>
+          <p:nvPr/>
+        </p:nvSpPr>
+        <p:spPr>
+          <a:xfrm>
+            <a:off x="731520" y="1435608"/>
+            <a:ext cx="7680960" cy="987552"/>
           </a:xfrm>
           <a:prstGeom prst="rect">
             <a:avLst/>
@@ -3601,45 +3447,87 @@
                 <a:ea typeface="Calibri" pitchFamily="34" charset="-122"/>
                 <a:cs typeface="Calibri" pitchFamily="34" charset="-120"/>
               </a:rPr>
-              <a:t>Multi-stage build: python:3.11-slim@sha256:... (compiles) → distroless gcr.io/distroless/python3-debian12@sha256:... (runs) — a smaller runtime image with no shell/package manager, USER 65532:65532 (non-root)</a:t>
+              <a:t>Public buckets, open ports, default creds</a:t>
             </a:r>
             <a:endParaRPr lang="en-US" sz="1400" dirty="0"/>
           </a:p>
-        </p:txBody>
-      </p:sp>
-      <p:sp>
-        <p:nvSpPr>
-          <p:cNvPr id="9" name="Text 6"/>
-          <p:cNvSpPr/>
-          <p:nvPr/>
-        </p:nvSpPr>
-        <p:spPr>
-          <a:xfrm>
-            <a:off x="457200" y="4800600"/>
-            <a:ext cx="6949440" cy="274320"/>
-          </a:xfrm>
-          <a:prstGeom prst="rect">
-            <a:avLst/>
-          </a:prstGeom>
-          <a:noFill/>
-          <a:ln/>
-        </p:spPr>
-        <p:txBody>
-          <a:bodyPr wrap="square" lIns="0" tIns="0" rIns="0" bIns="0" rtlCol="0" anchor="ctr"/>
-          <a:lstStyle/>
-          <a:p>
-            <a:pPr indent="0" marL="0">
-              <a:buNone/>
-            </a:pPr>
-            <a:r>
-              <a:rPr lang="en-US" sz="900" dirty="0">
-                <a:solidFill>
-                  <a:srgbClr val="64748B"/>
+          <a:p>
+            <a:pPr marL="342900" indent="-342900">
+              <a:spcAft>
+                <a:spcPts val="600"/>
+              </a:spcAft>
+              <a:buSzPct val="100000"/>
+              <a:buChar char="•"/>
+            </a:pPr>
+            <a:r>
+              <a:rPr lang="en-US" sz="1400" dirty="0">
+                <a:solidFill>
+                  <a:srgbClr val="1F2937"/>
                 </a:solidFill>
                 <a:latin typeface="Calibri" pitchFamily="34" charset="0"/>
                 <a:ea typeface="Calibri" pitchFamily="34" charset="-122"/>
                 <a:cs typeface="Calibri" pitchFamily="34" charset="-120"/>
               </a:rPr>
+              <a:t>Encrypt at rest + in transit</a:t>
+            </a:r>
+            <a:endParaRPr lang="en-US" sz="1400" dirty="0"/>
+          </a:p>
+          <a:p>
+            <a:pPr marL="342900" indent="-342900">
+              <a:spcAft>
+                <a:spcPts val="600"/>
+              </a:spcAft>
+              <a:buSzPct val="100000"/>
+              <a:buChar char="•"/>
+            </a:pPr>
+            <a:r>
+              <a:rPr lang="en-US" sz="1400" dirty="0">
+                <a:solidFill>
+                  <a:srgbClr val="1F2937"/>
+                </a:solidFill>
+                <a:latin typeface="Calibri" pitchFamily="34" charset="0"/>
+                <a:ea typeface="Calibri" pitchFamily="34" charset="-122"/>
+                <a:cs typeface="Calibri" pitchFamily="34" charset="-120"/>
+              </a:rPr>
+              <a:t>Private by default; explicit allow</a:t>
+            </a:r>
+            <a:endParaRPr lang="en-US" sz="1400" dirty="0"/>
+          </a:p>
+        </p:txBody>
+      </p:sp>
+      <p:sp>
+        <p:nvSpPr>
+          <p:cNvPr id="7" name="Text 4"/>
+          <p:cNvSpPr/>
+          <p:nvPr/>
+        </p:nvSpPr>
+        <p:spPr>
+          <a:xfrm>
+            <a:off x="457200" y="4800600"/>
+            <a:ext cx="6949440" cy="274320"/>
+          </a:xfrm>
+          <a:prstGeom prst="rect">
+            <a:avLst/>
+          </a:prstGeom>
+          <a:noFill/>
+          <a:ln/>
+        </p:spPr>
+        <p:txBody>
+          <a:bodyPr wrap="square" lIns="0" tIns="0" rIns="0" bIns="0" rtlCol="0" anchor="ctr"/>
+          <a:lstStyle/>
+          <a:p>
+            <a:pPr indent="0" marL="0">
+              <a:buNone/>
+            </a:pPr>
+            <a:r>
+              <a:rPr lang="en-US" sz="900" dirty="0">
+                <a:solidFill>
+                  <a:srgbClr val="64748B"/>
+                </a:solidFill>
+                <a:latin typeface="Calibri" pitchFamily="34" charset="0"/>
+                <a:ea typeface="Calibri" pitchFamily="34" charset="-122"/>
+                <a:cs typeface="Calibri" pitchFamily="34" charset="-120"/>
+              </a:rPr>
               <a:t>Software Security · Week 13</a:t>
             </a:r>
             <a:endParaRPr lang="en-US" sz="900" dirty="0"/>
@@ -3648,7 +3536,7 @@
       </p:sp>
       <p:pic>
         <p:nvPicPr>
-          <p:cNvPr id="10" name="Image 1" descr="/private/tmp/claude-501/-Users-pop7-Library-CloudStorage-OneDrive-MonsterConnectCo--Ltd-Lecture-KOSEN69---software-security/f63a82af-e1ad-40ed-89c4-03c6ca776e3f/scratchpad/vis-w13/slides/pptx/assets/logo-small.png">    </p:cNvPr>
+          <p:cNvPr id="8" name="Image 1" descr="/private/tmp/claude-501/-Users-pop7-Library-CloudStorage-OneDrive-MonsterConnectCo--Ltd-Lecture-KOSEN69---software-security/f63a82af-e1ad-40ed-89c4-03c6ca776e3f/scratchpad/lq-anim/slides/pptx/assets/logo-small.png">    </p:cNvPr>
           <p:cNvPicPr>
             <a:picLocks noChangeAspect="1"/>
           </p:cNvPicPr>
@@ -3786,7 +3674,7 @@
                 <a:ea typeface="Arial" pitchFamily="34" charset="-122"/>
                 <a:cs typeface="Arial" pitchFamily="34" charset="-120"/>
               </a:rPr>
-              <a:t>Container image hardening (cont.)</a:t>
+              <a:t>Container image hardening</a:t>
             </a:r>
             <a:endParaRPr lang="en-US" sz="2600" dirty="0"/>
           </a:p>
@@ -3801,11 +3689,164 @@
         <p:spPr>
           <a:xfrm>
             <a:off x="457200" y="1325880"/>
-            <a:ext cx="8229600" cy="1810512"/>
+            <a:ext cx="8229600" cy="1591056"/>
           </a:xfrm>
           <a:prstGeom prst="roundRect">
             <a:avLst>
-              <a:gd name="adj" fmla="val 4040"/>
+              <a:gd name="adj" fmla="val 3448"/>
+            </a:avLst>
+          </a:prstGeom>
+          <a:solidFill>
+            <a:srgbClr val="0A1020"/>
+          </a:solidFill>
+          <a:ln w="12700">
+            <a:solidFill>
+              <a:srgbClr val="E8EDF3"/>
+            </a:solidFill>
+            <a:prstDash val="solid"/>
+          </a:ln>
+        </p:spPr>
+      </p:sp>
+      <p:sp>
+        <p:nvSpPr>
+          <p:cNvPr id="6" name="Text 3"/>
+          <p:cNvSpPr/>
+          <p:nvPr/>
+        </p:nvSpPr>
+        <p:spPr>
+          <a:xfrm>
+            <a:off x="640080" y="1399032"/>
+            <a:ext cx="7863840" cy="1444752"/>
+          </a:xfrm>
+          <a:prstGeom prst="rect">
+            <a:avLst/>
+          </a:prstGeom>
+          <a:noFill/>
+          <a:ln/>
+        </p:spPr>
+        <p:txBody>
+          <a:bodyPr wrap="square" lIns="0" tIns="0" rIns="0" bIns="0" rtlCol="0" anchor="t">
+            <a:normAutofit/>
+          </a:bodyPr>
+          <a:lstStyle/>
+          <a:p>
+            <a:pPr indent="0" marL="0">
+              <a:buNone/>
+            </a:pPr>
+            <a:r>
+              <a:rPr lang="en-US" sz="1150" dirty="0">
+                <a:solidFill>
+                  <a:srgbClr val="9FE7D6"/>
+                </a:solidFill>
+                <a:latin typeface="Courier New" pitchFamily="34" charset="0"/>
+                <a:ea typeface="Courier New" pitchFamily="34" charset="-122"/>
+                <a:cs typeface="Courier New" pitchFamily="34" charset="-120"/>
+              </a:rPr>
+              <a:t># misconfig scan (Dockerfiles)</a:t>
+            </a:r>
+            <a:endParaRPr lang="en-US" sz="1150" dirty="0"/>
+          </a:p>
+          <a:p>
+            <a:pPr indent="0" marL="0">
+              <a:buNone/>
+            </a:pPr>
+            <a:r>
+              <a:rPr lang="en-US" sz="1150" dirty="0">
+                <a:solidFill>
+                  <a:srgbClr val="9FE7D6"/>
+                </a:solidFill>
+                <a:latin typeface="Courier New" pitchFamily="34" charset="0"/>
+                <a:ea typeface="Courier New" pitchFamily="34" charset="-122"/>
+                <a:cs typeface="Courier New" pitchFamily="34" charset="-120"/>
+              </a:rPr>
+              <a:t>docker run --rm -v "${PWD}:/src" aquasec/trivy:latest \</a:t>
+            </a:r>
+            <a:endParaRPr lang="en-US" sz="1150" dirty="0"/>
+          </a:p>
+          <a:p>
+            <a:pPr indent="0" marL="0">
+              <a:buNone/>
+            </a:pPr>
+            <a:r>
+              <a:rPr lang="en-US" sz="1150" dirty="0">
+                <a:solidFill>
+                  <a:srgbClr val="9FE7D6"/>
+                </a:solidFill>
+                <a:latin typeface="Courier New" pitchFamily="34" charset="0"/>
+                <a:ea typeface="Courier New" pitchFamily="34" charset="-122"/>
+                <a:cs typeface="Courier New" pitchFamily="34" charset="-120"/>
+              </a:rPr>
+              <a:t>  config --severity MEDIUM,HIGH,CRITICAL /src</a:t>
+            </a:r>
+            <a:endParaRPr lang="en-US" sz="1150" dirty="0"/>
+          </a:p>
+          <a:p>
+            <a:pPr indent="0" marL="0">
+              <a:buNone/>
+            </a:pPr>
+            <a:r>
+              <a:rPr lang="en-US" sz="1150" dirty="0">
+                <a:solidFill>
+                  <a:srgbClr val="9FE7D6"/>
+                </a:solidFill>
+                <a:latin typeface="Courier New" pitchFamily="34" charset="0"/>
+                <a:ea typeface="Courier New" pitchFamily="34" charset="-122"/>
+                <a:cs typeface="Courier New" pitchFamily="34" charset="-120"/>
+              </a:rPr>
+              <a:t># image CVE scan</a:t>
+            </a:r>
+            <a:endParaRPr lang="en-US" sz="1150" dirty="0"/>
+          </a:p>
+          <a:p>
+            <a:pPr indent="0" marL="0">
+              <a:buNone/>
+            </a:pPr>
+            <a:r>
+              <a:rPr lang="en-US" sz="1150" dirty="0">
+                <a:solidFill>
+                  <a:srgbClr val="9FE7D6"/>
+                </a:solidFill>
+                <a:latin typeface="Courier New" pitchFamily="34" charset="0"/>
+                <a:ea typeface="Courier New" pitchFamily="34" charset="-122"/>
+                <a:cs typeface="Courier New" pitchFamily="34" charset="-120"/>
+              </a:rPr>
+              <a:t>docker run --rm -v /var/run/docker.sock:/var/run/docker.sock \</a:t>
+            </a:r>
+            <a:endParaRPr lang="en-US" sz="1150" dirty="0"/>
+          </a:p>
+          <a:p>
+            <a:pPr indent="0" marL="0">
+              <a:buNone/>
+            </a:pPr>
+            <a:r>
+              <a:rPr lang="en-US" sz="1150" dirty="0">
+                <a:solidFill>
+                  <a:srgbClr val="9FE7D6"/>
+                </a:solidFill>
+                <a:latin typeface="Courier New" pitchFamily="34" charset="0"/>
+                <a:ea typeface="Courier New" pitchFamily="34" charset="-122"/>
+                <a:cs typeface="Courier New" pitchFamily="34" charset="-120"/>
+              </a:rPr>
+              <a:t>  aquasec/trivy:latest image --severity HIGH,CRITICAL week13-hardened:lab</a:t>
+            </a:r>
+            <a:endParaRPr lang="en-US" sz="1150" dirty="0"/>
+          </a:p>
+        </p:txBody>
+      </p:sp>
+      <p:sp>
+        <p:nvSpPr>
+          <p:cNvPr id="7" name="Shape 4"/>
+          <p:cNvSpPr/>
+          <p:nvPr/>
+        </p:nvSpPr>
+        <p:spPr>
+          <a:xfrm>
+            <a:off x="457200" y="3081528"/>
+            <a:ext cx="8229600" cy="987552"/>
+          </a:xfrm>
+          <a:prstGeom prst="roundRect">
+            <a:avLst>
+              <a:gd name="adj" fmla="val 7407"/>
             </a:avLst>
           </a:prstGeom>
           <a:solidFill>
@@ -3823,14 +3864,14 @@
       </p:sp>
       <p:sp>
         <p:nvSpPr>
-          <p:cNvPr id="6" name="Text 3"/>
-          <p:cNvSpPr/>
-          <p:nvPr/>
-        </p:nvSpPr>
-        <p:spPr>
-          <a:xfrm>
-            <a:off x="731520" y="1435608"/>
-            <a:ext cx="7680960" cy="1591056"/>
+          <p:cNvPr id="8" name="Text 5"/>
+          <p:cNvSpPr/>
+          <p:nvPr/>
+        </p:nvSpPr>
+        <p:spPr>
+          <a:xfrm>
+            <a:off x="731520" y="3191256"/>
+            <a:ext cx="7680960" cy="768096"/>
           </a:xfrm>
           <a:prstGeom prst="rect">
             <a:avLst/>
@@ -3860,87 +3901,45 @@
                 <a:ea typeface="Calibri" pitchFamily="34" charset="-122"/>
                 <a:cs typeface="Calibri" pitchFamily="34" charset="-120"/>
               </a:rPr>
-              <a:t>@sha256:... digest pins, not just a version tag — a tag can be repointed later, a digest can't</a:t>
+              <a:t>Multi-stage build: python:3.11-slim@sha256:... (compiles) → distroless gcr.io/distroless/python3-debian12@sha256:... (runs) — a smaller runtime image with no shell/package manager, USER 65532:65532 (non-root)</a:t>
             </a:r>
             <a:endParaRPr lang="en-US" sz="1400" dirty="0"/>
           </a:p>
-          <a:p>
-            <a:pPr marL="342900" indent="-342900">
-              <a:spcAft>
-                <a:spcPts val="600"/>
-              </a:spcAft>
-              <a:buSzPct val="100000"/>
-              <a:buChar char="•"/>
-            </a:pPr>
-            <a:r>
-              <a:rPr lang="en-US" sz="1400" dirty="0">
-                <a:solidFill>
-                  <a:srgbClr val="1F2937"/>
+        </p:txBody>
+      </p:sp>
+      <p:sp>
+        <p:nvSpPr>
+          <p:cNvPr id="9" name="Text 6"/>
+          <p:cNvSpPr/>
+          <p:nvPr/>
+        </p:nvSpPr>
+        <p:spPr>
+          <a:xfrm>
+            <a:off x="457200" y="4800600"/>
+            <a:ext cx="6949440" cy="274320"/>
+          </a:xfrm>
+          <a:prstGeom prst="rect">
+            <a:avLst/>
+          </a:prstGeom>
+          <a:noFill/>
+          <a:ln/>
+        </p:spPr>
+        <p:txBody>
+          <a:bodyPr wrap="square" lIns="0" tIns="0" rIns="0" bIns="0" rtlCol="0" anchor="ctr"/>
+          <a:lstStyle/>
+          <a:p>
+            <a:pPr indent="0" marL="0">
+              <a:buNone/>
+            </a:pPr>
+            <a:r>
+              <a:rPr lang="en-US" sz="900" dirty="0">
+                <a:solidFill>
+                  <a:srgbClr val="64748B"/>
                 </a:solidFill>
                 <a:latin typeface="Calibri" pitchFamily="34" charset="0"/>
                 <a:ea typeface="Calibri" pitchFamily="34" charset="-122"/>
                 <a:cs typeface="Calibri" pitchFamily="34" charset="-120"/>
               </a:rPr>
-              <a:t>Re-scan to prove reduced findings</a:t>
-            </a:r>
-            <a:endParaRPr lang="en-US" sz="1400" dirty="0"/>
-          </a:p>
-          <a:p>
-            <a:pPr marL="342900" indent="-342900">
-              <a:spcAft>
-                <a:spcPts val="600"/>
-              </a:spcAft>
-              <a:buSzPct val="100000"/>
-              <a:buChar char="•"/>
-            </a:pPr>
-            <a:r>
-              <a:rPr lang="en-US" sz="1400" dirty="0">
-                <a:solidFill>
-                  <a:srgbClr val="1F2937"/>
-                </a:solidFill>
-                <a:latin typeface="Calibri" pitchFamily="34" charset="0"/>
-                <a:ea typeface="Calibri" pitchFamily="34" charset="-122"/>
-                <a:cs typeface="Calibri" pitchFamily="34" charset="-120"/>
-              </a:rPr>
-              <a:t>Trivy only catches 3 of 6 planted defects (:latest, root user, secret-in-ENV) — COPY . ., chmod -R 777, and unpinned pip install need manual review, no rule fires</a:t>
-            </a:r>
-            <a:endParaRPr lang="en-US" sz="1400" dirty="0"/>
-          </a:p>
-        </p:txBody>
-      </p:sp>
-      <p:sp>
-        <p:nvSpPr>
-          <p:cNvPr id="7" name="Text 4"/>
-          <p:cNvSpPr/>
-          <p:nvPr/>
-        </p:nvSpPr>
-        <p:spPr>
-          <a:xfrm>
-            <a:off x="457200" y="4800600"/>
-            <a:ext cx="6949440" cy="274320"/>
-          </a:xfrm>
-          <a:prstGeom prst="rect">
-            <a:avLst/>
-          </a:prstGeom>
-          <a:noFill/>
-          <a:ln/>
-        </p:spPr>
-        <p:txBody>
-          <a:bodyPr wrap="square" lIns="0" tIns="0" rIns="0" bIns="0" rtlCol="0" anchor="ctr"/>
-          <a:lstStyle/>
-          <a:p>
-            <a:pPr indent="0" marL="0">
-              <a:buNone/>
-            </a:pPr>
-            <a:r>
-              <a:rPr lang="en-US" sz="900" dirty="0">
-                <a:solidFill>
-                  <a:srgbClr val="64748B"/>
-                </a:solidFill>
-                <a:latin typeface="Calibri" pitchFamily="34" charset="0"/>
-                <a:ea typeface="Calibri" pitchFamily="34" charset="-122"/>
-                <a:cs typeface="Calibri" pitchFamily="34" charset="-120"/>
-              </a:rPr>
               <a:t>Software Security · Week 13</a:t>
             </a:r>
             <a:endParaRPr lang="en-US" sz="900" dirty="0"/>
@@ -3949,7 +3948,7 @@
       </p:sp>
       <p:pic>
         <p:nvPicPr>
-          <p:cNvPr id="8" name="Image 1" descr="/private/tmp/claude-501/-Users-pop7-Library-CloudStorage-OneDrive-MonsterConnectCo--Ltd-Lecture-KOSEN69---software-security/f63a82af-e1ad-40ed-89c4-03c6ca776e3f/scratchpad/vis-w13/slides/pptx/assets/logo-small.png">    </p:cNvPr>
+          <p:cNvPr id="10" name="Image 1" descr="/private/tmp/claude-501/-Users-pop7-Library-CloudStorage-OneDrive-MonsterConnectCo--Ltd-Lecture-KOSEN69---software-security/f63a82af-e1ad-40ed-89c4-03c6ca776e3f/scratchpad/lq-anim/slides/pptx/assets/logo-small.png">    </p:cNvPr>
           <p:cNvPicPr>
             <a:picLocks noChangeAspect="1"/>
           </p:cNvPicPr>
@@ -4087,7 +4086,7 @@
                 <a:ea typeface="Arial" pitchFamily="34" charset="-122"/>
                 <a:cs typeface="Arial" pitchFamily="34" charset="-120"/>
               </a:rPr>
-              <a:t>Does Trivy see it?</a:t>
+              <a:t>Container image hardening (cont.)</a:t>
             </a:r>
             <a:endParaRPr lang="en-US" sz="2600" dirty="0"/>
           </a:p>
@@ -4095,14 +4094,43 @@
       </p:sp>
       <p:sp>
         <p:nvSpPr>
-          <p:cNvPr id="5" name="Text 2"/>
-          <p:cNvSpPr/>
-          <p:nvPr/>
-        </p:nvSpPr>
-        <p:spPr>
-          <a:xfrm>
-            <a:off x="548640" y="1325880"/>
-            <a:ext cx="8046720" cy="822960"/>
+          <p:cNvPr id="5" name="Shape 2"/>
+          <p:cNvSpPr/>
+          <p:nvPr/>
+        </p:nvSpPr>
+        <p:spPr>
+          <a:xfrm>
+            <a:off x="457200" y="1325880"/>
+            <a:ext cx="8229600" cy="1810512"/>
+          </a:xfrm>
+          <a:prstGeom prst="roundRect">
+            <a:avLst>
+              <a:gd name="adj" fmla="val 4040"/>
+            </a:avLst>
+          </a:prstGeom>
+          <a:solidFill>
+            <a:srgbClr val="F1F5F9"/>
+          </a:solidFill>
+          <a:ln/>
+          <a:effectLst>
+            <a:outerShdw sx="100000" sy="100000" kx="0" ky="0" algn="bl" rotWithShape="0" blurRad="76200" dist="25400" dir="5400000">
+              <a:srgbClr val="000000">
+                <a:alpha val="12000"/>
+              </a:srgbClr>
+            </a:outerShdw>
+          </a:effectLst>
+        </p:spPr>
+      </p:sp>
+      <p:sp>
+        <p:nvSpPr>
+          <p:cNvPr id="6" name="Text 3"/>
+          <p:cNvSpPr/>
+          <p:nvPr/>
+        </p:nvSpPr>
+        <p:spPr>
+          <a:xfrm>
+            <a:off x="731520" y="1435608"/>
+            <a:ext cx="7680960" cy="1591056"/>
           </a:xfrm>
           <a:prstGeom prst="rect">
             <a:avLst/>
@@ -4116,8 +4144,12 @@
           </a:bodyPr>
           <a:lstStyle/>
           <a:p>
-            <a:pPr indent="0" marL="0">
-              <a:buNone/>
+            <a:pPr marL="342900" indent="-342900">
+              <a:spcAft>
+                <a:spcPts val="600"/>
+              </a:spcAft>
+              <a:buSzPct val="100000"/>
+              <a:buChar char="•"/>
             </a:pPr>
             <a:r>
               <a:rPr lang="en-US" sz="1400" dirty="0">
@@ -4128,13 +4160,17 @@
                 <a:ea typeface="Calibri" pitchFamily="34" charset="-122"/>
                 <a:cs typeface="Calibri" pitchFamily="34" charset="-120"/>
               </a:rPr>
-              <a:t>Fix the six defects one at a time and watch trivy config re-score the file.</a:t>
+              <a:t>@sha256:... digest pins, not just a version tag — a tag can be repointed later, a digest can't</a:t>
             </a:r>
             <a:endParaRPr lang="en-US" sz="1400" dirty="0"/>
           </a:p>
           <a:p>
-            <a:pPr indent="0" marL="0">
-              <a:buNone/>
+            <a:pPr marL="342900" indent="-342900">
+              <a:spcAft>
+                <a:spcPts val="600"/>
+              </a:spcAft>
+              <a:buSzPct val="100000"/>
+              <a:buChar char="•"/>
             </a:pPr>
             <a:r>
               <a:rPr lang="en-US" sz="1400" dirty="0">
@@ -4145,45 +4181,66 @@
                 <a:ea typeface="Calibri" pitchFamily="34" charset="-122"/>
                 <a:cs typeface="Calibri" pitchFamily="34" charset="-120"/>
               </a:rPr>
-              <a:t>Try it live: /sim/trivy-blindspot (interactive simulation, web only)</a:t>
+              <a:t>Re-scan to prove reduced findings</a:t>
             </a:r>
             <a:endParaRPr lang="en-US" sz="1400" dirty="0"/>
           </a:p>
-        </p:txBody>
-      </p:sp>
-      <p:sp>
-        <p:nvSpPr>
-          <p:cNvPr id="6" name="Text 3"/>
-          <p:cNvSpPr/>
-          <p:nvPr/>
-        </p:nvSpPr>
-        <p:spPr>
-          <a:xfrm>
-            <a:off x="457200" y="4800600"/>
-            <a:ext cx="6949440" cy="274320"/>
-          </a:xfrm>
-          <a:prstGeom prst="rect">
-            <a:avLst/>
-          </a:prstGeom>
-          <a:noFill/>
-          <a:ln/>
-        </p:spPr>
-        <p:txBody>
-          <a:bodyPr wrap="square" lIns="0" tIns="0" rIns="0" bIns="0" rtlCol="0" anchor="ctr"/>
-          <a:lstStyle/>
-          <a:p>
-            <a:pPr indent="0" marL="0">
-              <a:buNone/>
-            </a:pPr>
-            <a:r>
-              <a:rPr lang="en-US" sz="900" dirty="0">
-                <a:solidFill>
-                  <a:srgbClr val="64748B"/>
+          <a:p>
+            <a:pPr marL="342900" indent="-342900">
+              <a:spcAft>
+                <a:spcPts val="600"/>
+              </a:spcAft>
+              <a:buSzPct val="100000"/>
+              <a:buChar char="•"/>
+            </a:pPr>
+            <a:r>
+              <a:rPr lang="en-US" sz="1400" dirty="0">
+                <a:solidFill>
+                  <a:srgbClr val="1F2937"/>
                 </a:solidFill>
                 <a:latin typeface="Calibri" pitchFamily="34" charset="0"/>
                 <a:ea typeface="Calibri" pitchFamily="34" charset="-122"/>
                 <a:cs typeface="Calibri" pitchFamily="34" charset="-120"/>
               </a:rPr>
+              <a:t>Trivy only catches 3 of 6 planted defects (:latest, root user, secret-in-ENV) — COPY . ., chmod -R 777, and unpinned pip install need manual review, no rule fires</a:t>
+            </a:r>
+            <a:endParaRPr lang="en-US" sz="1400" dirty="0"/>
+          </a:p>
+        </p:txBody>
+      </p:sp>
+      <p:sp>
+        <p:nvSpPr>
+          <p:cNvPr id="7" name="Text 4"/>
+          <p:cNvSpPr/>
+          <p:nvPr/>
+        </p:nvSpPr>
+        <p:spPr>
+          <a:xfrm>
+            <a:off x="457200" y="4800600"/>
+            <a:ext cx="6949440" cy="274320"/>
+          </a:xfrm>
+          <a:prstGeom prst="rect">
+            <a:avLst/>
+          </a:prstGeom>
+          <a:noFill/>
+          <a:ln/>
+        </p:spPr>
+        <p:txBody>
+          <a:bodyPr wrap="square" lIns="0" tIns="0" rIns="0" bIns="0" rtlCol="0" anchor="ctr"/>
+          <a:lstStyle/>
+          <a:p>
+            <a:pPr indent="0" marL="0">
+              <a:buNone/>
+            </a:pPr>
+            <a:r>
+              <a:rPr lang="en-US" sz="900" dirty="0">
+                <a:solidFill>
+                  <a:srgbClr val="64748B"/>
+                </a:solidFill>
+                <a:latin typeface="Calibri" pitchFamily="34" charset="0"/>
+                <a:ea typeface="Calibri" pitchFamily="34" charset="-122"/>
+                <a:cs typeface="Calibri" pitchFamily="34" charset="-120"/>
+              </a:rPr>
               <a:t>Software Security · Week 13</a:t>
             </a:r>
             <a:endParaRPr lang="en-US" sz="900" dirty="0"/>
@@ -4192,7 +4249,7 @@
       </p:sp>
       <p:pic>
         <p:nvPicPr>
-          <p:cNvPr id="7" name="Image 1" descr="/private/tmp/claude-501/-Users-pop7-Library-CloudStorage-OneDrive-MonsterConnectCo--Ltd-Lecture-KOSEN69---software-security/f63a82af-e1ad-40ed-89c4-03c6ca776e3f/scratchpad/vis-w13/slides/pptx/assets/logo-small.png">    </p:cNvPr>
+          <p:cNvPr id="8" name="Image 1" descr="/private/tmp/claude-501/-Users-pop7-Library-CloudStorage-OneDrive-MonsterConnectCo--Ltd-Lecture-KOSEN69---software-security/f63a82af-e1ad-40ed-89c4-03c6ca776e3f/scratchpad/lq-anim/slides/pptx/assets/logo-small.png">    </p:cNvPr>
           <p:cNvPicPr>
             <a:picLocks noChangeAspect="1"/>
           </p:cNvPicPr>
@@ -4330,7 +4387,7 @@
                 <a:ea typeface="Arial" pitchFamily="34" charset="-122"/>
                 <a:cs typeface="Arial" pitchFamily="34" charset="-120"/>
               </a:rPr>
-              <a:t>Kubernetes basics (awareness)</a:t>
+              <a:t>Does Trivy see it?</a:t>
             </a:r>
             <a:endParaRPr lang="en-US" sz="2600" dirty="0"/>
           </a:p>
@@ -4338,43 +4395,14 @@
       </p:sp>
       <p:sp>
         <p:nvSpPr>
-          <p:cNvPr id="5" name="Shape 2"/>
-          <p:cNvSpPr/>
-          <p:nvPr/>
-        </p:nvSpPr>
-        <p:spPr>
-          <a:xfrm>
-            <a:off x="457200" y="1325880"/>
-            <a:ext cx="8229600" cy="896112"/>
-          </a:xfrm>
-          <a:prstGeom prst="roundRect">
-            <a:avLst>
-              <a:gd name="adj" fmla="val 8163"/>
-            </a:avLst>
-          </a:prstGeom>
-          <a:solidFill>
-            <a:srgbClr val="F1F5F9"/>
-          </a:solidFill>
-          <a:ln/>
-          <a:effectLst>
-            <a:outerShdw sx="100000" sy="100000" kx="0" ky="0" algn="bl" rotWithShape="0" blurRad="76200" dist="25400" dir="5400000">
-              <a:srgbClr val="000000">
-                <a:alpha val="12000"/>
-              </a:srgbClr>
-            </a:outerShdw>
-          </a:effectLst>
-        </p:spPr>
-      </p:sp>
-      <p:sp>
-        <p:nvSpPr>
-          <p:cNvPr id="6" name="Text 3"/>
-          <p:cNvSpPr/>
-          <p:nvPr/>
-        </p:nvSpPr>
-        <p:spPr>
-          <a:xfrm>
-            <a:off x="731520" y="1435608"/>
-            <a:ext cx="7680960" cy="676656"/>
+          <p:cNvPr id="5" name="Text 2"/>
+          <p:cNvSpPr/>
+          <p:nvPr/>
+        </p:nvSpPr>
+        <p:spPr>
+          <a:xfrm>
+            <a:off x="548640" y="1325880"/>
+            <a:ext cx="8046720" cy="822960"/>
           </a:xfrm>
           <a:prstGeom prst="rect">
             <a:avLst/>
@@ -4388,12 +4416,8 @@
           </a:bodyPr>
           <a:lstStyle/>
           <a:p>
-            <a:pPr marL="342900" indent="-342900">
-              <a:spcAft>
-                <a:spcPts val="600"/>
-              </a:spcAft>
-              <a:buSzPct val="100000"/>
-              <a:buChar char="•"/>
+            <a:pPr indent="0" marL="0">
+              <a:buNone/>
             </a:pPr>
             <a:r>
               <a:rPr lang="en-US" sz="1400" dirty="0">
@@ -4404,17 +4428,13 @@
                 <a:ea typeface="Calibri" pitchFamily="34" charset="-122"/>
                 <a:cs typeface="Calibri" pitchFamily="34" charset="-120"/>
               </a:rPr>
-              <a:t>Pod security, network policies, RBAC</a:t>
+              <a:t>Fix the six defects one at a time and watch trivy config re-score the file.</a:t>
             </a:r>
             <a:endParaRPr lang="en-US" sz="1400" dirty="0"/>
           </a:p>
           <a:p>
-            <a:pPr marL="342900" indent="-342900">
-              <a:spcAft>
-                <a:spcPts val="600"/>
-              </a:spcAft>
-              <a:buSzPct val="100000"/>
-              <a:buChar char="•"/>
+            <a:pPr indent="0" marL="0">
+              <a:buNone/>
             </a:pPr>
             <a:r>
               <a:rPr lang="en-US" sz="1400" dirty="0">
@@ -4425,7 +4445,7 @@
                 <a:ea typeface="Calibri" pitchFamily="34" charset="-122"/>
                 <a:cs typeface="Calibri" pitchFamily="34" charset="-120"/>
               </a:rPr>
-              <a:t>Don't run privileged; limit service-account tokens</a:t>
+              <a:t>Try it live: /sim/trivy-blindspot (interactive simulation, web only)</a:t>
             </a:r>
             <a:endParaRPr lang="en-US" sz="1400" dirty="0"/>
           </a:p>
@@ -4433,7 +4453,7 @@
       </p:sp>
       <p:sp>
         <p:nvSpPr>
-          <p:cNvPr id="7" name="Text 4"/>
+          <p:cNvPr id="6" name="Text 3"/>
           <p:cNvSpPr/>
           <p:nvPr/>
         </p:nvSpPr>
@@ -4472,7 +4492,7 @@
       </p:sp>
       <p:pic>
         <p:nvPicPr>
-          <p:cNvPr id="8" name="Image 1" descr="/private/tmp/claude-501/-Users-pop7-Library-CloudStorage-OneDrive-MonsterConnectCo--Ltd-Lecture-KOSEN69---software-security/f63a82af-e1ad-40ed-89c4-03c6ca776e3f/scratchpad/vis-w13/slides/pptx/assets/logo-small.png">    </p:cNvPr>
+          <p:cNvPr id="7" name="Image 1" descr="/private/tmp/claude-501/-Users-pop7-Library-CloudStorage-OneDrive-MonsterConnectCo--Ltd-Lecture-KOSEN69---software-security/f63a82af-e1ad-40ed-89c4-03c6ca776e3f/scratchpad/lq-anim/slides/pptx/assets/logo-small.png">    </p:cNvPr>
           <p:cNvPicPr>
             <a:picLocks noChangeAspect="1"/>
           </p:cNvPicPr>
@@ -4610,15 +4630,149 @@
                 <a:ea typeface="Arial" pitchFamily="34" charset="-122"/>
                 <a:cs typeface="Arial" pitchFamily="34" charset="-120"/>
               </a:rPr>
-              <a:t>Same app, shipped twice</a:t>
+              <a:t>Kubernetes basics (awareness)</a:t>
             </a:r>
             <a:endParaRPr lang="en-US" sz="2600" dirty="0"/>
+          </a:p>
+        </p:txBody>
+      </p:sp>
+      <p:sp>
+        <p:nvSpPr>
+          <p:cNvPr id="5" name="Shape 2"/>
+          <p:cNvSpPr/>
+          <p:nvPr/>
+        </p:nvSpPr>
+        <p:spPr>
+          <a:xfrm>
+            <a:off x="457200" y="1325880"/>
+            <a:ext cx="8229600" cy="896112"/>
+          </a:xfrm>
+          <a:prstGeom prst="roundRect">
+            <a:avLst>
+              <a:gd name="adj" fmla="val 8163"/>
+            </a:avLst>
+          </a:prstGeom>
+          <a:solidFill>
+            <a:srgbClr val="F1F5F9"/>
+          </a:solidFill>
+          <a:ln/>
+          <a:effectLst>
+            <a:outerShdw sx="100000" sy="100000" kx="0" ky="0" algn="bl" rotWithShape="0" blurRad="76200" dist="25400" dir="5400000">
+              <a:srgbClr val="000000">
+                <a:alpha val="12000"/>
+              </a:srgbClr>
+            </a:outerShdw>
+          </a:effectLst>
+        </p:spPr>
+      </p:sp>
+      <p:sp>
+        <p:nvSpPr>
+          <p:cNvPr id="6" name="Text 3"/>
+          <p:cNvSpPr/>
+          <p:nvPr/>
+        </p:nvSpPr>
+        <p:spPr>
+          <a:xfrm>
+            <a:off x="731520" y="1435608"/>
+            <a:ext cx="7680960" cy="676656"/>
+          </a:xfrm>
+          <a:prstGeom prst="rect">
+            <a:avLst/>
+          </a:prstGeom>
+          <a:noFill/>
+          <a:ln/>
+        </p:spPr>
+        <p:txBody>
+          <a:bodyPr wrap="square" lIns="0" tIns="0" rIns="0" bIns="0" rtlCol="0" anchor="t">
+            <a:normAutofit/>
+          </a:bodyPr>
+          <a:lstStyle/>
+          <a:p>
+            <a:pPr marL="342900" indent="-342900">
+              <a:spcAft>
+                <a:spcPts val="600"/>
+              </a:spcAft>
+              <a:buSzPct val="100000"/>
+              <a:buChar char="•"/>
+            </a:pPr>
+            <a:r>
+              <a:rPr lang="en-US" sz="1400" dirty="0">
+                <a:solidFill>
+                  <a:srgbClr val="1F2937"/>
+                </a:solidFill>
+                <a:latin typeface="Calibri" pitchFamily="34" charset="0"/>
+                <a:ea typeface="Calibri" pitchFamily="34" charset="-122"/>
+                <a:cs typeface="Calibri" pitchFamily="34" charset="-120"/>
+              </a:rPr>
+              <a:t>Pod security, network policies, RBAC</a:t>
+            </a:r>
+            <a:endParaRPr lang="en-US" sz="1400" dirty="0"/>
+          </a:p>
+          <a:p>
+            <a:pPr marL="342900" indent="-342900">
+              <a:spcAft>
+                <a:spcPts val="600"/>
+              </a:spcAft>
+              <a:buSzPct val="100000"/>
+              <a:buChar char="•"/>
+            </a:pPr>
+            <a:r>
+              <a:rPr lang="en-US" sz="1400" dirty="0">
+                <a:solidFill>
+                  <a:srgbClr val="1F2937"/>
+                </a:solidFill>
+                <a:latin typeface="Calibri" pitchFamily="34" charset="0"/>
+                <a:ea typeface="Calibri" pitchFamily="34" charset="-122"/>
+                <a:cs typeface="Calibri" pitchFamily="34" charset="-120"/>
+              </a:rPr>
+              <a:t>Don't run privileged; limit service-account tokens</a:t>
+            </a:r>
+            <a:endParaRPr lang="en-US" sz="1400" dirty="0"/>
+          </a:p>
+        </p:txBody>
+      </p:sp>
+      <p:sp>
+        <p:nvSpPr>
+          <p:cNvPr id="7" name="Text 4"/>
+          <p:cNvSpPr/>
+          <p:nvPr/>
+        </p:nvSpPr>
+        <p:spPr>
+          <a:xfrm>
+            <a:off x="457200" y="4800600"/>
+            <a:ext cx="6949440" cy="274320"/>
+          </a:xfrm>
+          <a:prstGeom prst="rect">
+            <a:avLst/>
+          </a:prstGeom>
+          <a:noFill/>
+          <a:ln/>
+        </p:spPr>
+        <p:txBody>
+          <a:bodyPr wrap="square" lIns="0" tIns="0" rIns="0" bIns="0" rtlCol="0" anchor="ctr"/>
+          <a:lstStyle/>
+          <a:p>
+            <a:pPr indent="0" marL="0">
+              <a:buNone/>
+            </a:pPr>
+            <a:r>
+              <a:rPr lang="en-US" sz="900" dirty="0">
+                <a:solidFill>
+                  <a:srgbClr val="64748B"/>
+                </a:solidFill>
+                <a:latin typeface="Calibri" pitchFamily="34" charset="0"/>
+                <a:ea typeface="Calibri" pitchFamily="34" charset="-122"/>
+                <a:cs typeface="Calibri" pitchFamily="34" charset="-120"/>
+              </a:rPr>
+              <a:t>Software Security · Week 13</a:t>
+            </a:r>
+            <a:endParaRPr lang="en-US" sz="900" dirty="0"/>
           </a:p>
         </p:txBody>
       </p:sp>
       <p:pic>
         <p:nvPicPr>
-          <p:cNvPr id="5" name="Image 1" descr="The same app as two container images side by side, insecure vs hardened, six layers compared: mutable :latest tag vs a pinned digest, a baked-in secret vs runtime injection, root user vs distroless non-root, COPY-everything vs a minimal context, world-writable permissions vs read-only, and an unpinned pip install vs a discarded build stage. Below both, the same argument one layer up: the wildcard IAM policy vs the scoped one. The conclusion: Trivy flags only three of the seven defects shown here — the tag, the root user, and the secret. COPY .., chmod 777, the unpinned install, and the IAM JSON all need manual review; there is no rule for any of them.">    </p:cNvPr>
+          <p:cNvPr id="8" name="Image 1" descr="/private/tmp/claude-501/-Users-pop7-Library-CloudStorage-OneDrive-MonsterConnectCo--Ltd-Lecture-KOSEN69---software-security/f63a82af-e1ad-40ed-89c4-03c6ca776e3f/scratchpad/lq-anim/slides/pptx/assets/logo-small.png">    </p:cNvPr>
           <p:cNvPicPr>
             <a:picLocks noChangeAspect="1"/>
           </p:cNvPicPr>
@@ -4626,69 +4780,6 @@
         </p:nvPicPr>
         <p:blipFill>
           <a:blip r:embed="rId2"/>
-          <a:stretch>
-            <a:fillRect/>
-          </a:stretch>
-        </p:blipFill>
-        <p:spPr>
-          <a:xfrm>
-            <a:off x="3036517" y="1097280"/>
-            <a:ext cx="3070967" cy="3566160"/>
-          </a:xfrm>
-          <a:prstGeom prst="rect">
-            <a:avLst/>
-          </a:prstGeom>
-        </p:spPr>
-      </p:pic>
-      <p:sp>
-        <p:nvSpPr>
-          <p:cNvPr id="6" name="Text 2"/>
-          <p:cNvSpPr/>
-          <p:nvPr/>
-        </p:nvSpPr>
-        <p:spPr>
-          <a:xfrm>
-            <a:off x="457200" y="4800600"/>
-            <a:ext cx="6949440" cy="274320"/>
-          </a:xfrm>
-          <a:prstGeom prst="rect">
-            <a:avLst/>
-          </a:prstGeom>
-          <a:noFill/>
-          <a:ln/>
-        </p:spPr>
-        <p:txBody>
-          <a:bodyPr wrap="square" lIns="0" tIns="0" rIns="0" bIns="0" rtlCol="0" anchor="ctr"/>
-          <a:lstStyle/>
-          <a:p>
-            <a:pPr indent="0" marL="0">
-              <a:buNone/>
-            </a:pPr>
-            <a:r>
-              <a:rPr lang="en-US" sz="900" dirty="0">
-                <a:solidFill>
-                  <a:srgbClr val="64748B"/>
-                </a:solidFill>
-                <a:latin typeface="Calibri" pitchFamily="34" charset="0"/>
-                <a:ea typeface="Calibri" pitchFamily="34" charset="-122"/>
-                <a:cs typeface="Calibri" pitchFamily="34" charset="-120"/>
-              </a:rPr>
-              <a:t>Software Security · Week 13</a:t>
-            </a:r>
-            <a:endParaRPr lang="en-US" sz="900" dirty="0"/>
-          </a:p>
-        </p:txBody>
-      </p:sp>
-      <p:pic>
-        <p:nvPicPr>
-          <p:cNvPr id="7" name="Image 2" descr="/private/tmp/claude-501/-Users-pop7-Library-CloudStorage-OneDrive-MonsterConnectCo--Ltd-Lecture-KOSEN69---software-security/f63a82af-e1ad-40ed-89c4-03c6ca776e3f/scratchpad/vis-w13/slides/pptx/assets/logo-small.png">    </p:cNvPr>
-          <p:cNvPicPr>
-            <a:picLocks noChangeAspect="1"/>
-          </p:cNvPicPr>
-          <p:nvPr/>
-        </p:nvPicPr>
-        <p:blipFill>
-          <a:blip r:embed="rId3"/>
           <a:stretch>
             <a:fillRect/>
           </a:stretch>
@@ -4819,22 +4910,46 @@
                 <a:ea typeface="Arial" pitchFamily="34" charset="-122"/>
                 <a:cs typeface="Arial" pitchFamily="34" charset="-120"/>
               </a:rPr>
-              <a:t>🔍 Game — Misconfig Hunt</a:t>
+              <a:t>Same app, shipped twice</a:t>
             </a:r>
             <a:endParaRPr lang="en-US" sz="2600" dirty="0"/>
           </a:p>
         </p:txBody>
       </p:sp>
-      <p:sp>
-        <p:nvSpPr>
-          <p:cNvPr id="5" name="Text 2"/>
-          <p:cNvSpPr/>
-          <p:nvPr/>
-        </p:nvSpPr>
-        <p:spPr>
-          <a:xfrm>
-            <a:off x="548640" y="1325880"/>
-            <a:ext cx="8046720" cy="548640"/>
+      <p:pic>
+        <p:nvPicPr>
+          <p:cNvPr id="5" name="Image 1" descr="The same app as two container images side by side, insecure vs hardened, six layers compared: mutable :latest tag vs a pinned digest, a baked-in secret vs runtime injection, root user vs distroless non-root, COPY-everything vs a minimal context, world-writable permissions vs read-only, and an unpinned pip install vs a discarded build stage. Below both, the same argument one layer up: the wildcard IAM policy vs the scoped one. The conclusion: Trivy flags only three of the seven defects shown here — the tag, the root user, and the secret. COPY .., chmod 777, the unpinned install, and the IAM JSON all need manual review; there is no rule for any of them.">    </p:cNvPr>
+          <p:cNvPicPr>
+            <a:picLocks noChangeAspect="1"/>
+          </p:cNvPicPr>
+          <p:nvPr/>
+        </p:nvPicPr>
+        <p:blipFill>
+          <a:blip r:embed="rId2"/>
+          <a:stretch>
+            <a:fillRect/>
+          </a:stretch>
+        </p:blipFill>
+        <p:spPr>
+          <a:xfrm>
+            <a:off x="3036517" y="1097280"/>
+            <a:ext cx="3070967" cy="3566160"/>
+          </a:xfrm>
+          <a:prstGeom prst="rect">
+            <a:avLst/>
+          </a:prstGeom>
+        </p:spPr>
+      </p:pic>
+      <p:sp>
+        <p:nvSpPr>
+          <p:cNvPr id="6" name="Text 2"/>
+          <p:cNvSpPr/>
+          <p:nvPr/>
+        </p:nvSpPr>
+        <p:spPr>
+          <a:xfrm>
+            <a:off x="457200" y="4800600"/>
+            <a:ext cx="6949440" cy="274320"/>
           </a:xfrm>
           <a:prstGeom prst="rect">
             <a:avLst/>
@@ -4843,262 +4958,21 @@
           <a:ln/>
         </p:spPr>
         <p:txBody>
-          <a:bodyPr wrap="square" lIns="0" tIns="0" rIns="0" bIns="0" rtlCol="0" anchor="t">
-            <a:normAutofit/>
-          </a:bodyPr>
+          <a:bodyPr wrap="square" lIns="0" tIns="0" rIns="0" bIns="0" rtlCol="0" anchor="ctr"/>
           <a:lstStyle/>
           <a:p>
             <a:pPr indent="0" marL="0">
               <a:buNone/>
             </a:pPr>
             <a:r>
-              <a:rPr lang="en-US" sz="1400" dirty="0">
-                <a:solidFill>
-                  <a:srgbClr val="1F2937"/>
+              <a:rPr lang="en-US" sz="900" dirty="0">
+                <a:solidFill>
+                  <a:srgbClr val="64748B"/>
                 </a:solidFill>
                 <a:latin typeface="Calibri" pitchFamily="34" charset="0"/>
                 <a:ea typeface="Calibri" pitchFamily="34" charset="-122"/>
                 <a:cs typeface="Calibri" pitchFamily="34" charset="-120"/>
               </a:rPr>
-              <a:t>9 flags — each misconfiguration found + explained = a flag:</a:t>
-            </a:r>
-            <a:endParaRPr lang="en-US" sz="1400" dirty="0"/>
-          </a:p>
-        </p:txBody>
-      </p:sp>
-      <p:sp>
-        <p:nvSpPr>
-          <p:cNvPr id="6" name="Shape 3"/>
-          <p:cNvSpPr/>
-          <p:nvPr/>
-        </p:nvSpPr>
-        <p:spPr>
-          <a:xfrm>
-            <a:off x="502920" y="1965960"/>
-            <a:ext cx="384048" cy="384048"/>
-          </a:xfrm>
-          <a:prstGeom prst="ellipse">
-            <a:avLst/>
-          </a:prstGeom>
-          <a:solidFill>
-            <a:srgbClr val="E35205"/>
-          </a:solidFill>
-          <a:ln/>
-        </p:spPr>
-      </p:sp>
-      <p:sp>
-        <p:nvSpPr>
-          <p:cNvPr id="7" name="Text 4"/>
-          <p:cNvSpPr/>
-          <p:nvPr/>
-        </p:nvSpPr>
-        <p:spPr>
-          <a:xfrm>
-            <a:off x="502920" y="1965960"/>
-            <a:ext cx="384048" cy="384048"/>
-          </a:xfrm>
-          <a:prstGeom prst="rect">
-            <a:avLst/>
-          </a:prstGeom>
-          <a:noFill/>
-          <a:ln/>
-        </p:spPr>
-        <p:txBody>
-          <a:bodyPr wrap="square" lIns="0" tIns="0" rIns="0" bIns="0" rtlCol="0" anchor="ctr"/>
-          <a:lstStyle/>
-          <a:p>
-            <a:pPr algn="ctr" indent="0" marL="0">
-              <a:buNone/>
-            </a:pPr>
-            <a:r>
-              <a:rPr lang="en-US" sz="1500" b="1" dirty="0">
-                <a:solidFill>
-                  <a:srgbClr val="0E1726"/>
-                </a:solidFill>
-                <a:latin typeface="Arial" pitchFamily="34" charset="0"/>
-                <a:ea typeface="Arial" pitchFamily="34" charset="-122"/>
-                <a:cs typeface="Arial" pitchFamily="34" charset="-120"/>
-              </a:rPr>
-              <a:t>1</a:t>
-            </a:r>
-            <a:endParaRPr lang="en-US" sz="1500" dirty="0"/>
-          </a:p>
-        </p:txBody>
-      </p:sp>
-      <p:sp>
-        <p:nvSpPr>
-          <p:cNvPr id="8" name="Text 5"/>
-          <p:cNvSpPr/>
-          <p:nvPr/>
-        </p:nvSpPr>
-        <p:spPr>
-          <a:xfrm>
-            <a:off x="1051560" y="1965960"/>
-            <a:ext cx="7589520" cy="658368"/>
-          </a:xfrm>
-          <a:prstGeom prst="rect">
-            <a:avLst/>
-          </a:prstGeom>
-          <a:noFill/>
-          <a:ln/>
-        </p:spPr>
-        <p:txBody>
-          <a:bodyPr wrap="square" lIns="0" tIns="0" rIns="0" bIns="0" rtlCol="0" anchor="ctr">
-            <a:normAutofit/>
-          </a:bodyPr>
-          <a:lstStyle/>
-          <a:p>
-            <a:pPr indent="0" marL="0">
-              <a:buNone/>
-            </a:pPr>
-            <a:r>
-              <a:rPr lang="en-US" sz="1350" dirty="0">
-                <a:solidFill>
-                  <a:srgbClr val="1F2937"/>
-                </a:solidFill>
-                <a:latin typeface="Calibri" pitchFamily="34" charset="0"/>
-                <a:ea typeface="Calibri" pitchFamily="34" charset="-122"/>
-                <a:cs typeface="Calibri" pitchFamily="34" charset="-120"/>
-              </a:rPr>
-              <a:t>Container (6): :latest tag, root user, secret-in-ENV, COPY . ., chmod -R 777, unpinned pip install</a:t>
-            </a:r>
-            <a:endParaRPr lang="en-US" sz="1350" dirty="0"/>
-          </a:p>
-        </p:txBody>
-      </p:sp>
-      <p:sp>
-        <p:nvSpPr>
-          <p:cNvPr id="9" name="Shape 6"/>
-          <p:cNvSpPr/>
-          <p:nvPr/>
-        </p:nvSpPr>
-        <p:spPr>
-          <a:xfrm>
-            <a:off x="502920" y="2697480"/>
-            <a:ext cx="384048" cy="384048"/>
-          </a:xfrm>
-          <a:prstGeom prst="ellipse">
-            <a:avLst/>
-          </a:prstGeom>
-          <a:solidFill>
-            <a:srgbClr val="E35205"/>
-          </a:solidFill>
-          <a:ln/>
-        </p:spPr>
-      </p:sp>
-      <p:sp>
-        <p:nvSpPr>
-          <p:cNvPr id="10" name="Text 7"/>
-          <p:cNvSpPr/>
-          <p:nvPr/>
-        </p:nvSpPr>
-        <p:spPr>
-          <a:xfrm>
-            <a:off x="502920" y="2697480"/>
-            <a:ext cx="384048" cy="384048"/>
-          </a:xfrm>
-          <a:prstGeom prst="rect">
-            <a:avLst/>
-          </a:prstGeom>
-          <a:noFill/>
-          <a:ln/>
-        </p:spPr>
-        <p:txBody>
-          <a:bodyPr wrap="square" lIns="0" tIns="0" rIns="0" bIns="0" rtlCol="0" anchor="ctr"/>
-          <a:lstStyle/>
-          <a:p>
-            <a:pPr algn="ctr" indent="0" marL="0">
-              <a:buNone/>
-            </a:pPr>
-            <a:r>
-              <a:rPr lang="en-US" sz="1500" b="1" dirty="0">
-                <a:solidFill>
-                  <a:srgbClr val="0E1726"/>
-                </a:solidFill>
-                <a:latin typeface="Arial" pitchFamily="34" charset="0"/>
-                <a:ea typeface="Arial" pitchFamily="34" charset="-122"/>
-                <a:cs typeface="Arial" pitchFamily="34" charset="-120"/>
-              </a:rPr>
-              <a:t>2</a:t>
-            </a:r>
-            <a:endParaRPr lang="en-US" sz="1500" dirty="0"/>
-          </a:p>
-        </p:txBody>
-      </p:sp>
-      <p:sp>
-        <p:nvSpPr>
-          <p:cNvPr id="11" name="Text 8"/>
-          <p:cNvSpPr/>
-          <p:nvPr/>
-        </p:nvSpPr>
-        <p:spPr>
-          <a:xfrm>
-            <a:off x="1051560" y="2697480"/>
-            <a:ext cx="7589520" cy="402336"/>
-          </a:xfrm>
-          <a:prstGeom prst="rect">
-            <a:avLst/>
-          </a:prstGeom>
-          <a:noFill/>
-          <a:ln/>
-        </p:spPr>
-        <p:txBody>
-          <a:bodyPr wrap="square" lIns="0" tIns="0" rIns="0" bIns="0" rtlCol="0" anchor="ctr">
-            <a:normAutofit/>
-          </a:bodyPr>
-          <a:lstStyle/>
-          <a:p>
-            <a:pPr indent="0" marL="0">
-              <a:buNone/>
-            </a:pPr>
-            <a:r>
-              <a:rPr lang="en-US" sz="1350" dirty="0">
-                <a:solidFill>
-                  <a:srgbClr val="1F2937"/>
-                </a:solidFill>
-                <a:latin typeface="Calibri" pitchFamily="34" charset="0"/>
-                <a:ea typeface="Calibri" pitchFamily="34" charset="-122"/>
-                <a:cs typeface="Calibri" pitchFamily="34" charset="-120"/>
-              </a:rPr>
-              <a:t>IAM (3): Resource:"*" (CWE-732), Action:"*" (CWE-269), missing Condition scoping</a:t>
-            </a:r>
-            <a:endParaRPr lang="en-US" sz="1350" dirty="0"/>
-          </a:p>
-        </p:txBody>
-      </p:sp>
-      <p:sp>
-        <p:nvSpPr>
-          <p:cNvPr id="12" name="Text 9"/>
-          <p:cNvSpPr/>
-          <p:nvPr/>
-        </p:nvSpPr>
-        <p:spPr>
-          <a:xfrm>
-            <a:off x="457200" y="4800600"/>
-            <a:ext cx="6949440" cy="274320"/>
-          </a:xfrm>
-          <a:prstGeom prst="rect">
-            <a:avLst/>
-          </a:prstGeom>
-          <a:noFill/>
-          <a:ln/>
-        </p:spPr>
-        <p:txBody>
-          <a:bodyPr wrap="square" lIns="0" tIns="0" rIns="0" bIns="0" rtlCol="0" anchor="ctr"/>
-          <a:lstStyle/>
-          <a:p>
-            <a:pPr indent="0" marL="0">
-              <a:buNone/>
-            </a:pPr>
-            <a:r>
-              <a:rPr lang="en-US" sz="900" dirty="0">
-                <a:solidFill>
-                  <a:srgbClr val="64748B"/>
-                </a:solidFill>
-                <a:latin typeface="Calibri" pitchFamily="34" charset="0"/>
-                <a:ea typeface="Calibri" pitchFamily="34" charset="-122"/>
-                <a:cs typeface="Calibri" pitchFamily="34" charset="-120"/>
-              </a:rPr>
               <a:t>Software Security · Week 13</a:t>
             </a:r>
             <a:endParaRPr lang="en-US" sz="900" dirty="0"/>
@@ -5107,14 +4981,14 @@
       </p:sp>
       <p:pic>
         <p:nvPicPr>
-          <p:cNvPr id="13" name="Image 1" descr="/private/tmp/claude-501/-Users-pop7-Library-CloudStorage-OneDrive-MonsterConnectCo--Ltd-Lecture-KOSEN69---software-security/f63a82af-e1ad-40ed-89c4-03c6ca776e3f/scratchpad/vis-w13/slides/pptx/assets/logo-small.png">    </p:cNvPr>
+          <p:cNvPr id="7" name="Image 2" descr="/private/tmp/claude-501/-Users-pop7-Library-CloudStorage-OneDrive-MonsterConnectCo--Ltd-Lecture-KOSEN69---software-security/f63a82af-e1ad-40ed-89c4-03c6ca776e3f/scratchpad/lq-anim/slides/pptx/assets/logo-small.png">    </p:cNvPr>
           <p:cNvPicPr>
             <a:picLocks noChangeAspect="1"/>
           </p:cNvPicPr>
           <p:nvPr/>
         </p:nvPicPr>
         <p:blipFill>
-          <a:blip r:embed="rId2"/>
+          <a:blip r:embed="rId3"/>
           <a:stretch>
             <a:fillRect/>
           </a:stretch>
@@ -5245,7 +5119,7 @@
                 <a:ea typeface="Arial" pitchFamily="34" charset="-122"/>
                 <a:cs typeface="Arial" pitchFamily="34" charset="-120"/>
               </a:rPr>
-              <a:t>Deliverable</a:t>
+              <a:t>🔍 Game — Misconfig Hunt</a:t>
             </a:r>
             <a:endParaRPr lang="en-US" sz="2600" dirty="0"/>
           </a:p>
@@ -5253,36 +5127,114 @@
       </p:sp>
       <p:sp>
         <p:nvSpPr>
-          <p:cNvPr id="5" name="Shape 2"/>
-          <p:cNvSpPr/>
-          <p:nvPr/>
-        </p:nvSpPr>
-        <p:spPr>
-          <a:xfrm>
-            <a:off x="457200" y="1325880"/>
-            <a:ext cx="8229600" cy="1097280"/>
-          </a:xfrm>
-          <a:prstGeom prst="roundRect">
-            <a:avLst>
-              <a:gd name="adj" fmla="val 6667"/>
-            </a:avLst>
+          <p:cNvPr id="5" name="Text 2"/>
+          <p:cNvSpPr/>
+          <p:nvPr/>
+        </p:nvSpPr>
+        <p:spPr>
+          <a:xfrm>
+            <a:off x="548640" y="1325880"/>
+            <a:ext cx="8046720" cy="548640"/>
+          </a:xfrm>
+          <a:prstGeom prst="rect">
+            <a:avLst/>
+          </a:prstGeom>
+          <a:noFill/>
+          <a:ln/>
+        </p:spPr>
+        <p:txBody>
+          <a:bodyPr wrap="square" lIns="0" tIns="0" rIns="0" bIns="0" rtlCol="0" anchor="t">
+            <a:normAutofit/>
+          </a:bodyPr>
+          <a:lstStyle/>
+          <a:p>
+            <a:pPr indent="0" marL="0">
+              <a:buNone/>
+            </a:pPr>
+            <a:r>
+              <a:rPr lang="en-US" sz="1400" dirty="0">
+                <a:solidFill>
+                  <a:srgbClr val="1F2937"/>
+                </a:solidFill>
+                <a:latin typeface="Calibri" pitchFamily="34" charset="0"/>
+                <a:ea typeface="Calibri" pitchFamily="34" charset="-122"/>
+                <a:cs typeface="Calibri" pitchFamily="34" charset="-120"/>
+              </a:rPr>
+              <a:t>9 flags — each misconfiguration found + explained = a flag:</a:t>
+            </a:r>
+            <a:endParaRPr lang="en-US" sz="1400" dirty="0"/>
+          </a:p>
+        </p:txBody>
+      </p:sp>
+      <p:sp>
+        <p:nvSpPr>
+          <p:cNvPr id="6" name="Shape 3"/>
+          <p:cNvSpPr/>
+          <p:nvPr/>
+        </p:nvSpPr>
+        <p:spPr>
+          <a:xfrm>
+            <a:off x="502920" y="1965960"/>
+            <a:ext cx="384048" cy="384048"/>
+          </a:xfrm>
+          <a:prstGeom prst="ellipse">
+            <a:avLst/>
           </a:prstGeom>
           <a:solidFill>
-            <a:srgbClr val="E8EDF3"/>
+            <a:srgbClr val="E35205"/>
           </a:solidFill>
           <a:ln/>
         </p:spPr>
       </p:sp>
       <p:sp>
         <p:nvSpPr>
-          <p:cNvPr id="6" name="Text 3"/>
-          <p:cNvSpPr/>
-          <p:nvPr/>
-        </p:nvSpPr>
-        <p:spPr>
-          <a:xfrm>
-            <a:off x="731520" y="1325880"/>
-            <a:ext cx="7680960" cy="1097280"/>
+          <p:cNvPr id="7" name="Text 4"/>
+          <p:cNvSpPr/>
+          <p:nvPr/>
+        </p:nvSpPr>
+        <p:spPr>
+          <a:xfrm>
+            <a:off x="502920" y="1965960"/>
+            <a:ext cx="384048" cy="384048"/>
+          </a:xfrm>
+          <a:prstGeom prst="rect">
+            <a:avLst/>
+          </a:prstGeom>
+          <a:noFill/>
+          <a:ln/>
+        </p:spPr>
+        <p:txBody>
+          <a:bodyPr wrap="square" lIns="0" tIns="0" rIns="0" bIns="0" rtlCol="0" anchor="ctr"/>
+          <a:lstStyle/>
+          <a:p>
+            <a:pPr algn="ctr" indent="0" marL="0">
+              <a:buNone/>
+            </a:pPr>
+            <a:r>
+              <a:rPr lang="en-US" sz="1500" b="1" dirty="0">
+                <a:solidFill>
+                  <a:srgbClr val="0E1726"/>
+                </a:solidFill>
+                <a:latin typeface="Arial" pitchFamily="34" charset="0"/>
+                <a:ea typeface="Arial" pitchFamily="34" charset="-122"/>
+                <a:cs typeface="Arial" pitchFamily="34" charset="-120"/>
+              </a:rPr>
+              <a:t>1</a:t>
+            </a:r>
+            <a:endParaRPr lang="en-US" sz="1500" dirty="0"/>
+          </a:p>
+        </p:txBody>
+      </p:sp>
+      <p:sp>
+        <p:nvSpPr>
+          <p:cNvPr id="8" name="Text 5"/>
+          <p:cNvSpPr/>
+          <p:nvPr/>
+        </p:nvSpPr>
+        <p:spPr>
+          <a:xfrm>
+            <a:off x="1051560" y="1965960"/>
+            <a:ext cx="7589520" cy="658368"/>
           </a:xfrm>
           <a:prstGeom prst="rect">
             <a:avLst/>
@@ -5300,59 +5252,50 @@
               <a:buNone/>
             </a:pPr>
             <a:r>
-              <a:rPr lang="en-US" sz="1400" i="1" dirty="0">
-                <a:solidFill>
-                  <a:srgbClr val="E35205"/>
+              <a:rPr lang="en-US" sz="1350" dirty="0">
+                <a:solidFill>
+                  <a:srgbClr val="1F2937"/>
                 </a:solidFill>
                 <a:latin typeface="Calibri" pitchFamily="34" charset="0"/>
                 <a:ea typeface="Calibri" pitchFamily="34" charset="-122"/>
                 <a:cs typeface="Calibri" pitchFamily="34" charset="-120"/>
               </a:rPr>
-              <a:t>📋 Worksheet 13 — labs/week13-cloud-container/worksheet.md (Parts 1–4) · kickoff: bash scan.sh (trivy config over the Dockerfiles only — IAM JSON is manual review, Trivy doesn't parse it)</a:t>
-            </a:r>
-            <a:endParaRPr lang="en-US" sz="1400" dirty="0"/>
-          </a:p>
-        </p:txBody>
-      </p:sp>
-      <p:sp>
-        <p:nvSpPr>
-          <p:cNvPr id="7" name="Shape 4"/>
-          <p:cNvSpPr/>
-          <p:nvPr/>
-        </p:nvSpPr>
-        <p:spPr>
-          <a:xfrm>
-            <a:off x="457200" y="2587752"/>
-            <a:ext cx="8229600" cy="1517904"/>
-          </a:xfrm>
-          <a:prstGeom prst="roundRect">
-            <a:avLst>
-              <a:gd name="adj" fmla="val 4819"/>
-            </a:avLst>
+              <a:t>Container (6): :latest tag, root user, secret-in-ENV, COPY . ., chmod -R 777, unpinned pip install</a:t>
+            </a:r>
+            <a:endParaRPr lang="en-US" sz="1350" dirty="0"/>
+          </a:p>
+        </p:txBody>
+      </p:sp>
+      <p:sp>
+        <p:nvSpPr>
+          <p:cNvPr id="9" name="Shape 6"/>
+          <p:cNvSpPr/>
+          <p:nvPr/>
+        </p:nvSpPr>
+        <p:spPr>
+          <a:xfrm>
+            <a:off x="502920" y="2697480"/>
+            <a:ext cx="384048" cy="384048"/>
+          </a:xfrm>
+          <a:prstGeom prst="ellipse">
+            <a:avLst/>
           </a:prstGeom>
           <a:solidFill>
-            <a:srgbClr val="F1F5F9"/>
+            <a:srgbClr val="E35205"/>
           </a:solidFill>
           <a:ln/>
-          <a:effectLst>
-            <a:outerShdw sx="100000" sy="100000" kx="0" ky="0" algn="bl" rotWithShape="0" blurRad="76200" dist="25400" dir="5400000">
-              <a:srgbClr val="000000">
-                <a:alpha val="12000"/>
-              </a:srgbClr>
-            </a:outerShdw>
-          </a:effectLst>
-        </p:spPr>
-      </p:sp>
-      <p:sp>
-        <p:nvSpPr>
-          <p:cNvPr id="8" name="Text 5"/>
-          <p:cNvSpPr/>
-          <p:nvPr/>
-        </p:nvSpPr>
-        <p:spPr>
-          <a:xfrm>
-            <a:off x="731520" y="2697480"/>
-            <a:ext cx="7680960" cy="1298448"/>
+        </p:spPr>
+      </p:sp>
+      <p:sp>
+        <p:nvSpPr>
+          <p:cNvPr id="10" name="Text 7"/>
+          <p:cNvSpPr/>
+          <p:nvPr/>
+        </p:nvSpPr>
+        <p:spPr>
+          <a:xfrm>
+            <a:off x="502920" y="2697480"/>
+            <a:ext cx="384048" cy="384048"/>
           </a:xfrm>
           <a:prstGeom prst="rect">
             <a:avLst/>
@@ -5361,20 +5304,55 @@
           <a:ln/>
         </p:spPr>
         <p:txBody>
-          <a:bodyPr wrap="square" lIns="0" tIns="0" rIns="0" bIns="0" rtlCol="0" anchor="t">
+          <a:bodyPr wrap="square" lIns="0" tIns="0" rIns="0" bIns="0" rtlCol="0" anchor="ctr"/>
+          <a:lstStyle/>
+          <a:p>
+            <a:pPr algn="ctr" indent="0" marL="0">
+              <a:buNone/>
+            </a:pPr>
+            <a:r>
+              <a:rPr lang="en-US" sz="1500" b="1" dirty="0">
+                <a:solidFill>
+                  <a:srgbClr val="0E1726"/>
+                </a:solidFill>
+                <a:latin typeface="Arial" pitchFamily="34" charset="0"/>
+                <a:ea typeface="Arial" pitchFamily="34" charset="-122"/>
+                <a:cs typeface="Arial" pitchFamily="34" charset="-120"/>
+              </a:rPr>
+              <a:t>2</a:t>
+            </a:r>
+            <a:endParaRPr lang="en-US" sz="1500" dirty="0"/>
+          </a:p>
+        </p:txBody>
+      </p:sp>
+      <p:sp>
+        <p:nvSpPr>
+          <p:cNvPr id="11" name="Text 8"/>
+          <p:cNvSpPr/>
+          <p:nvPr/>
+        </p:nvSpPr>
+        <p:spPr>
+          <a:xfrm>
+            <a:off x="1051560" y="2697480"/>
+            <a:ext cx="7589520" cy="402336"/>
+          </a:xfrm>
+          <a:prstGeom prst="rect">
+            <a:avLst/>
+          </a:prstGeom>
+          <a:noFill/>
+          <a:ln/>
+        </p:spPr>
+        <p:txBody>
+          <a:bodyPr wrap="square" lIns="0" tIns="0" rIns="0" bIns="0" rtlCol="0" anchor="ctr">
             <a:normAutofit/>
           </a:bodyPr>
           <a:lstStyle/>
           <a:p>
-            <a:pPr marL="342900" indent="-342900">
-              <a:spcAft>
-                <a:spcPts val="600"/>
-              </a:spcAft>
-              <a:buSzPct val="100000"/>
-              <a:buChar char="•"/>
-            </a:pPr>
-            <a:r>
-              <a:rPr lang="en-US" sz="1400" dirty="0">
+            <a:pPr indent="0" marL="0">
+              <a:buNone/>
+            </a:pPr>
+            <a:r>
+              <a:rPr lang="en-US" sz="1350" dirty="0">
                 <a:solidFill>
                   <a:srgbClr val="1F2937"/>
                 </a:solidFill>
@@ -5382,108 +5360,45 @@
                 <a:ea typeface="Calibri" pitchFamily="34" charset="-122"/>
                 <a:cs typeface="Calibri" pitchFamily="34" charset="-120"/>
               </a:rPr>
-              <a:t>Before/after IAM policy + Dockerfile, all 9 flags explained</a:t>
-            </a:r>
-            <a:endParaRPr lang="en-US" sz="1400" dirty="0"/>
-          </a:p>
-          <a:p>
-            <a:pPr marL="342900" indent="-342900">
-              <a:spcAft>
-                <a:spcPts val="600"/>
-              </a:spcAft>
-              <a:buSzPct val="100000"/>
-              <a:buChar char="•"/>
-            </a:pPr>
-            <a:r>
-              <a:rPr lang="en-US" sz="1400" dirty="0">
-                <a:solidFill>
-                  <a:srgbClr val="1F2937"/>
+              <a:t>IAM (3): Resource:"*" (CWE-732), Action:"*" (CWE-269), missing Condition scoping</a:t>
+            </a:r>
+            <a:endParaRPr lang="en-US" sz="1350" dirty="0"/>
+          </a:p>
+        </p:txBody>
+      </p:sp>
+      <p:sp>
+        <p:nvSpPr>
+          <p:cNvPr id="12" name="Text 9"/>
+          <p:cNvSpPr/>
+          <p:nvPr/>
+        </p:nvSpPr>
+        <p:spPr>
+          <a:xfrm>
+            <a:off x="457200" y="4800600"/>
+            <a:ext cx="6949440" cy="274320"/>
+          </a:xfrm>
+          <a:prstGeom prst="rect">
+            <a:avLst/>
+          </a:prstGeom>
+          <a:noFill/>
+          <a:ln/>
+        </p:spPr>
+        <p:txBody>
+          <a:bodyPr wrap="square" lIns="0" tIns="0" rIns="0" bIns="0" rtlCol="0" anchor="ctr"/>
+          <a:lstStyle/>
+          <a:p>
+            <a:pPr indent="0" marL="0">
+              <a:buNone/>
+            </a:pPr>
+            <a:r>
+              <a:rPr lang="en-US" sz="900" dirty="0">
+                <a:solidFill>
+                  <a:srgbClr val="64748B"/>
                 </a:solidFill>
                 <a:latin typeface="Calibri" pitchFamily="34" charset="0"/>
                 <a:ea typeface="Calibri" pitchFamily="34" charset="-122"/>
                 <a:cs typeface="Calibri" pitchFamily="34" charset="-120"/>
               </a:rPr>
-              <a:t>Trivy reports showing reduced risk (container half only)</a:t>
-            </a:r>
-            <a:endParaRPr lang="en-US" sz="1400" dirty="0"/>
-          </a:p>
-          <a:p>
-            <a:pPr marL="342900" indent="-342900">
-              <a:spcAft>
-                <a:spcPts val="600"/>
-              </a:spcAft>
-              <a:buSzPct val="100000"/>
-              <a:buChar char="•"/>
-            </a:pPr>
-            <a:r>
-              <a:rPr lang="en-US" sz="1400" dirty="0">
-                <a:solidFill>
-                  <a:srgbClr val="1F2937"/>
-                </a:solidFill>
-                <a:latin typeface="Calibri" pitchFamily="34" charset="0"/>
-                <a:ea typeface="Calibri" pitchFamily="34" charset="-122"/>
-                <a:cs typeface="Calibri" pitchFamily="34" charset="-120"/>
-              </a:rPr>
-              <a:t>Note on secrets remediation</a:t>
-            </a:r>
-            <a:endParaRPr lang="en-US" sz="1400" dirty="0"/>
-          </a:p>
-          <a:p>
-            <a:pPr marL="342900" indent="-342900">
-              <a:spcAft>
-                <a:spcPts val="600"/>
-              </a:spcAft>
-              <a:buSzPct val="100000"/>
-              <a:buChar char="•"/>
-            </a:pPr>
-            <a:r>
-              <a:rPr lang="en-US" sz="1400" dirty="0">
-                <a:solidFill>
-                  <a:srgbClr val="1F2937"/>
-                </a:solidFill>
-                <a:latin typeface="Calibri" pitchFamily="34" charset="0"/>
-                <a:ea typeface="Calibri" pitchFamily="34" charset="-122"/>
-                <a:cs typeface="Calibri" pitchFamily="34" charset="-120"/>
-              </a:rPr>
-              <a:t>+ Audit the AI / EiPE / Prompt Problem (see worksheet)</a:t>
-            </a:r>
-            <a:endParaRPr lang="en-US" sz="1400" dirty="0"/>
-          </a:p>
-        </p:txBody>
-      </p:sp>
-      <p:sp>
-        <p:nvSpPr>
-          <p:cNvPr id="9" name="Text 6"/>
-          <p:cNvSpPr/>
-          <p:nvPr/>
-        </p:nvSpPr>
-        <p:spPr>
-          <a:xfrm>
-            <a:off x="457200" y="4800600"/>
-            <a:ext cx="6949440" cy="274320"/>
-          </a:xfrm>
-          <a:prstGeom prst="rect">
-            <a:avLst/>
-          </a:prstGeom>
-          <a:noFill/>
-          <a:ln/>
-        </p:spPr>
-        <p:txBody>
-          <a:bodyPr wrap="square" lIns="0" tIns="0" rIns="0" bIns="0" rtlCol="0" anchor="ctr"/>
-          <a:lstStyle/>
-          <a:p>
-            <a:pPr indent="0" marL="0">
-              <a:buNone/>
-            </a:pPr>
-            <a:r>
-              <a:rPr lang="en-US" sz="900" dirty="0">
-                <a:solidFill>
-                  <a:srgbClr val="64748B"/>
-                </a:solidFill>
-                <a:latin typeface="Calibri" pitchFamily="34" charset="0"/>
-                <a:ea typeface="Calibri" pitchFamily="34" charset="-122"/>
-                <a:cs typeface="Calibri" pitchFamily="34" charset="-120"/>
-              </a:rPr>
               <a:t>Software Security · Week 13</a:t>
             </a:r>
             <a:endParaRPr lang="en-US" sz="900" dirty="0"/>
@@ -5492,7 +5407,7 @@
       </p:sp>
       <p:pic>
         <p:nvPicPr>
-          <p:cNvPr id="10" name="Image 1" descr="/private/tmp/claude-501/-Users-pop7-Library-CloudStorage-OneDrive-MonsterConnectCo--Ltd-Lecture-KOSEN69---software-security/f63a82af-e1ad-40ed-89c4-03c6ca776e3f/scratchpad/vis-w13/slides/pptx/assets/logo-small.png">    </p:cNvPr>
+          <p:cNvPr id="13" name="Image 1" descr="/private/tmp/claude-501/-Users-pop7-Library-CloudStorage-OneDrive-MonsterConnectCo--Ltd-Lecture-KOSEN69---software-security/f63a82af-e1ad-40ed-89c4-03c6ca776e3f/scratchpad/lq-anim/slides/pptx/assets/logo-small.png">    </p:cNvPr>
           <p:cNvPicPr>
             <a:picLocks noChangeAspect="1"/>
           </p:cNvPicPr>
@@ -5630,7 +5545,7 @@
                 <a:ea typeface="Arial" pitchFamily="34" charset="-122"/>
                 <a:cs typeface="Arial" pitchFamily="34" charset="-120"/>
               </a:rPr>
-              <a:t>Key takeaways</a:t>
+              <a:t>Deliverable</a:t>
             </a:r>
             <a:endParaRPr lang="en-US" sz="2600" dirty="0"/>
           </a:p>
@@ -5645,11 +5560,74 @@
         <p:spPr>
           <a:xfrm>
             <a:off x="457200" y="1325880"/>
-            <a:ext cx="8229600" cy="1207008"/>
+            <a:ext cx="8229600" cy="1097280"/>
           </a:xfrm>
           <a:prstGeom prst="roundRect">
             <a:avLst>
-              <a:gd name="adj" fmla="val 6061"/>
+              <a:gd name="adj" fmla="val 6667"/>
+            </a:avLst>
+          </a:prstGeom>
+          <a:solidFill>
+            <a:srgbClr val="E8EDF3"/>
+          </a:solidFill>
+          <a:ln/>
+        </p:spPr>
+      </p:sp>
+      <p:sp>
+        <p:nvSpPr>
+          <p:cNvPr id="6" name="Text 3"/>
+          <p:cNvSpPr/>
+          <p:nvPr/>
+        </p:nvSpPr>
+        <p:spPr>
+          <a:xfrm>
+            <a:off x="731520" y="1325880"/>
+            <a:ext cx="7680960" cy="1097280"/>
+          </a:xfrm>
+          <a:prstGeom prst="rect">
+            <a:avLst/>
+          </a:prstGeom>
+          <a:noFill/>
+          <a:ln/>
+        </p:spPr>
+        <p:txBody>
+          <a:bodyPr wrap="square" lIns="0" tIns="0" rIns="0" bIns="0" rtlCol="0" anchor="ctr">
+            <a:normAutofit/>
+          </a:bodyPr>
+          <a:lstStyle/>
+          <a:p>
+            <a:pPr indent="0" marL="0">
+              <a:buNone/>
+            </a:pPr>
+            <a:r>
+              <a:rPr lang="en-US" sz="1400" i="1" dirty="0">
+                <a:solidFill>
+                  <a:srgbClr val="E35205"/>
+                </a:solidFill>
+                <a:latin typeface="Calibri" pitchFamily="34" charset="0"/>
+                <a:ea typeface="Calibri" pitchFamily="34" charset="-122"/>
+                <a:cs typeface="Calibri" pitchFamily="34" charset="-120"/>
+              </a:rPr>
+              <a:t>📋 Worksheet 13 — labs/week13-cloud-container/worksheet.md (Parts 1–4) · kickoff: bash scan.sh (trivy config over the Dockerfiles only — IAM JSON is manual review, Trivy doesn't parse it)</a:t>
+            </a:r>
+            <a:endParaRPr lang="en-US" sz="1400" dirty="0"/>
+          </a:p>
+        </p:txBody>
+      </p:sp>
+      <p:sp>
+        <p:nvSpPr>
+          <p:cNvPr id="7" name="Shape 4"/>
+          <p:cNvSpPr/>
+          <p:nvPr/>
+        </p:nvSpPr>
+        <p:spPr>
+          <a:xfrm>
+            <a:off x="457200" y="2587752"/>
+            <a:ext cx="8229600" cy="1517904"/>
+          </a:xfrm>
+          <a:prstGeom prst="roundRect">
+            <a:avLst>
+              <a:gd name="adj" fmla="val 4819"/>
             </a:avLst>
           </a:prstGeom>
           <a:solidFill>
@@ -5667,14 +5645,14 @@
       </p:sp>
       <p:sp>
         <p:nvSpPr>
-          <p:cNvPr id="6" name="Text 3"/>
-          <p:cNvSpPr/>
-          <p:nvPr/>
-        </p:nvSpPr>
-        <p:spPr>
-          <a:xfrm>
-            <a:off x="731520" y="1435608"/>
-            <a:ext cx="7680960" cy="987552"/>
+          <p:cNvPr id="8" name="Text 5"/>
+          <p:cNvSpPr/>
+          <p:nvPr/>
+        </p:nvSpPr>
+        <p:spPr>
+          <a:xfrm>
+            <a:off x="731520" y="2697480"/>
+            <a:ext cx="7680960" cy="1298448"/>
           </a:xfrm>
           <a:prstGeom prst="rect">
             <a:avLst/>
@@ -5704,7 +5682,7 @@
                 <a:ea typeface="Calibri" pitchFamily="34" charset="-122"/>
                 <a:cs typeface="Calibri" pitchFamily="34" charset="-120"/>
               </a:rPr>
-              <a:t>Misconfiguration &gt; zero-days as a breach cause</a:t>
+              <a:t>Before/after IAM policy + Dockerfile, all 9 flags explained</a:t>
             </a:r>
             <a:endParaRPr lang="en-US" sz="1400" dirty="0"/>
           </a:p>
@@ -5725,7 +5703,7 @@
                 <a:ea typeface="Calibri" pitchFamily="34" charset="-122"/>
                 <a:cs typeface="Calibri" pitchFamily="34" charset="-120"/>
               </a:rPr>
-              <a:t>Least privilege, private-by-default, no secrets in code</a:t>
+              <a:t>Trivy reports showing reduced risk (container half only)</a:t>
             </a:r>
             <a:endParaRPr lang="en-US" sz="1400" dirty="0"/>
           </a:p>
@@ -5746,45 +5724,66 @@
                 <a:ea typeface="Calibri" pitchFamily="34" charset="-122"/>
                 <a:cs typeface="Calibri" pitchFamily="34" charset="-120"/>
               </a:rPr>
-              <a:t>Scan IaC and images in CI</a:t>
+              <a:t>Note on secrets remediation</a:t>
             </a:r>
             <a:endParaRPr lang="en-US" sz="1400" dirty="0"/>
           </a:p>
-        </p:txBody>
-      </p:sp>
-      <p:sp>
-        <p:nvSpPr>
-          <p:cNvPr id="7" name="Text 4"/>
-          <p:cNvSpPr/>
-          <p:nvPr/>
-        </p:nvSpPr>
-        <p:spPr>
-          <a:xfrm>
-            <a:off x="457200" y="4800600"/>
-            <a:ext cx="6949440" cy="274320"/>
-          </a:xfrm>
-          <a:prstGeom prst="rect">
-            <a:avLst/>
-          </a:prstGeom>
-          <a:noFill/>
-          <a:ln/>
-        </p:spPr>
-        <p:txBody>
-          <a:bodyPr wrap="square" lIns="0" tIns="0" rIns="0" bIns="0" rtlCol="0" anchor="ctr"/>
-          <a:lstStyle/>
-          <a:p>
-            <a:pPr indent="0" marL="0">
-              <a:buNone/>
-            </a:pPr>
-            <a:r>
-              <a:rPr lang="en-US" sz="900" dirty="0">
-                <a:solidFill>
-                  <a:srgbClr val="64748B"/>
+          <a:p>
+            <a:pPr marL="342900" indent="-342900">
+              <a:spcAft>
+                <a:spcPts val="600"/>
+              </a:spcAft>
+              <a:buSzPct val="100000"/>
+              <a:buChar char="•"/>
+            </a:pPr>
+            <a:r>
+              <a:rPr lang="en-US" sz="1400" dirty="0">
+                <a:solidFill>
+                  <a:srgbClr val="1F2937"/>
                 </a:solidFill>
                 <a:latin typeface="Calibri" pitchFamily="34" charset="0"/>
                 <a:ea typeface="Calibri" pitchFamily="34" charset="-122"/>
                 <a:cs typeface="Calibri" pitchFamily="34" charset="-120"/>
               </a:rPr>
+              <a:t>+ Audit the AI / EiPE / Prompt Problem (see worksheet)</a:t>
+            </a:r>
+            <a:endParaRPr lang="en-US" sz="1400" dirty="0"/>
+          </a:p>
+        </p:txBody>
+      </p:sp>
+      <p:sp>
+        <p:nvSpPr>
+          <p:cNvPr id="9" name="Text 6"/>
+          <p:cNvSpPr/>
+          <p:nvPr/>
+        </p:nvSpPr>
+        <p:spPr>
+          <a:xfrm>
+            <a:off x="457200" y="4800600"/>
+            <a:ext cx="6949440" cy="274320"/>
+          </a:xfrm>
+          <a:prstGeom prst="rect">
+            <a:avLst/>
+          </a:prstGeom>
+          <a:noFill/>
+          <a:ln/>
+        </p:spPr>
+        <p:txBody>
+          <a:bodyPr wrap="square" lIns="0" tIns="0" rIns="0" bIns="0" rtlCol="0" anchor="ctr"/>
+          <a:lstStyle/>
+          <a:p>
+            <a:pPr indent="0" marL="0">
+              <a:buNone/>
+            </a:pPr>
+            <a:r>
+              <a:rPr lang="en-US" sz="900" dirty="0">
+                <a:solidFill>
+                  <a:srgbClr val="64748B"/>
+                </a:solidFill>
+                <a:latin typeface="Calibri" pitchFamily="34" charset="0"/>
+                <a:ea typeface="Calibri" pitchFamily="34" charset="-122"/>
+                <a:cs typeface="Calibri" pitchFamily="34" charset="-120"/>
+              </a:rPr>
               <a:t>Software Security · Week 13</a:t>
             </a:r>
             <a:endParaRPr lang="en-US" sz="900" dirty="0"/>
@@ -5793,7 +5792,7 @@
       </p:sp>
       <p:pic>
         <p:nvPicPr>
-          <p:cNvPr id="8" name="Image 1" descr="/private/tmp/claude-501/-Users-pop7-Library-CloudStorage-OneDrive-MonsterConnectCo--Ltd-Lecture-KOSEN69---software-security/f63a82af-e1ad-40ed-89c4-03c6ca776e3f/scratchpad/vis-w13/slides/pptx/assets/logo-small.png">    </p:cNvPr>
+          <p:cNvPr id="10" name="Image 1" descr="/private/tmp/claude-501/-Users-pop7-Library-CloudStorage-OneDrive-MonsterConnectCo--Ltd-Lecture-KOSEN69---software-security/f63a82af-e1ad-40ed-89c4-03c6ca776e3f/scratchpad/lq-anim/slides/pptx/assets/logo-small.png">    </p:cNvPr>
           <p:cNvPicPr>
             <a:picLocks noChangeAspect="1"/>
           </p:cNvPicPr>
@@ -6136,7 +6135,7 @@
       </p:sp>
       <p:pic>
         <p:nvPicPr>
-          <p:cNvPr id="8" name="Image 1" descr="/private/tmp/claude-501/-Users-pop7-Library-CloudStorage-OneDrive-MonsterConnectCo--Ltd-Lecture-KOSEN69---software-security/f63a82af-e1ad-40ed-89c4-03c6ca776e3f/scratchpad/vis-w13/slides/pptx/assets/logo-small.png">    </p:cNvPr>
+          <p:cNvPr id="8" name="Image 1" descr="/private/tmp/claude-501/-Users-pop7-Library-CloudStorage-OneDrive-MonsterConnectCo--Ltd-Lecture-KOSEN69---software-security/f63a82af-e1ad-40ed-89c4-03c6ca776e3f/scratchpad/lq-anim/slides/pptx/assets/logo-small.png">    </p:cNvPr>
           <p:cNvPicPr>
             <a:picLocks noChangeAspect="1"/>
           </p:cNvPicPr>
@@ -6192,14 +6191,65 @@
       </p:grpSpPr>
       <p:sp>
         <p:nvSpPr>
-          <p:cNvPr id="2" name="Text 0"/>
-          <p:cNvSpPr/>
-          <p:nvPr/>
-        </p:nvSpPr>
-        <p:spPr>
-          <a:xfrm>
-            <a:off x="640080" y="1737360"/>
-            <a:ext cx="7863840" cy="1097280"/>
+          <p:cNvPr id="2" name="Shape 0"/>
+          <p:cNvSpPr/>
+          <p:nvPr/>
+        </p:nvSpPr>
+        <p:spPr>
+          <a:xfrm>
+            <a:off x="457200" y="384048"/>
+            <a:ext cx="530352" cy="530352"/>
+          </a:xfrm>
+          <a:prstGeom prst="ellipse">
+            <a:avLst/>
+          </a:prstGeom>
+          <a:solidFill>
+            <a:srgbClr val="E35205"/>
+          </a:solidFill>
+          <a:ln/>
+          <a:effectLst>
+            <a:outerShdw sx="100000" sy="100000" kx="0" ky="0" algn="bl" rotWithShape="0" blurRad="76200" dist="25400" dir="5400000">
+              <a:srgbClr val="000000">
+                <a:alpha val="12000"/>
+              </a:srgbClr>
+            </a:outerShdw>
+          </a:effectLst>
+        </p:spPr>
+      </p:sp>
+      <p:pic>
+        <p:nvPicPr>
+          <p:cNvPr id="3" name="Image 0" descr="preencoded.png">    </p:cNvPr>
+          <p:cNvPicPr>
+            <a:picLocks noChangeAspect="1"/>
+          </p:cNvPicPr>
+          <p:nvPr/>
+        </p:nvPicPr>
+        <p:blipFill>
+          <a:blip r:embed="rId1"/>
+          <a:stretch>
+            <a:fillRect/>
+          </a:stretch>
+        </p:blipFill>
+        <p:spPr>
+          <a:xfrm>
+            <a:off x="594360" y="521208"/>
+            <a:ext cx="256032" cy="256032"/>
+          </a:xfrm>
+          <a:prstGeom prst="rect">
+            <a:avLst/>
+          </a:prstGeom>
+        </p:spPr>
+      </p:pic>
+      <p:sp>
+        <p:nvSpPr>
+          <p:cNvPr id="4" name="Text 1"/>
+          <p:cNvSpPr/>
+          <p:nvPr/>
+        </p:nvSpPr>
+        <p:spPr>
+          <a:xfrm>
+            <a:off x="1143000" y="329184"/>
+            <a:ext cx="7498080" cy="603504"/>
           </a:xfrm>
           <a:prstGeom prst="rect">
             <a:avLst/>
@@ -6215,7 +6265,7 @@
               <a:buNone/>
             </a:pPr>
             <a:r>
-              <a:rPr lang="en-US" sz="4600" b="1" dirty="0">
+              <a:rPr lang="en-US" sz="2600" b="1" dirty="0">
                 <a:solidFill>
                   <a:srgbClr val="1F2937"/>
                 </a:solidFill>
@@ -6223,22 +6273,51 @@
                 <a:ea typeface="Arial" pitchFamily="34" charset="-122"/>
                 <a:cs typeface="Arial" pitchFamily="34" charset="-120"/>
               </a:rPr>
-              <a:t>Questions?</a:t>
-            </a:r>
-            <a:endParaRPr lang="en-US" sz="4600" dirty="0"/>
-          </a:p>
-        </p:txBody>
-      </p:sp>
-      <p:sp>
-        <p:nvSpPr>
-          <p:cNvPr id="3" name="Text 1"/>
-          <p:cNvSpPr/>
-          <p:nvPr/>
-        </p:nvSpPr>
-        <p:spPr>
-          <a:xfrm>
-            <a:off x="658368" y="2834640"/>
-            <a:ext cx="7863840" cy="731520"/>
+              <a:t>Key takeaways</a:t>
+            </a:r>
+            <a:endParaRPr lang="en-US" sz="2600" dirty="0"/>
+          </a:p>
+        </p:txBody>
+      </p:sp>
+      <p:sp>
+        <p:nvSpPr>
+          <p:cNvPr id="5" name="Shape 2"/>
+          <p:cNvSpPr/>
+          <p:nvPr/>
+        </p:nvSpPr>
+        <p:spPr>
+          <a:xfrm>
+            <a:off x="457200" y="1325880"/>
+            <a:ext cx="8229600" cy="1207008"/>
+          </a:xfrm>
+          <a:prstGeom prst="roundRect">
+            <a:avLst>
+              <a:gd name="adj" fmla="val 6061"/>
+            </a:avLst>
+          </a:prstGeom>
+          <a:solidFill>
+            <a:srgbClr val="F1F5F9"/>
+          </a:solidFill>
+          <a:ln/>
+          <a:effectLst>
+            <a:outerShdw sx="100000" sy="100000" kx="0" ky="0" algn="bl" rotWithShape="0" blurRad="76200" dist="25400" dir="5400000">
+              <a:srgbClr val="000000">
+                <a:alpha val="12000"/>
+              </a:srgbClr>
+            </a:outerShdw>
+          </a:effectLst>
+        </p:spPr>
+      </p:sp>
+      <p:sp>
+        <p:nvSpPr>
+          <p:cNvPr id="6" name="Text 3"/>
+          <p:cNvSpPr/>
+          <p:nvPr/>
+        </p:nvSpPr>
+        <p:spPr>
+          <a:xfrm>
+            <a:off x="731520" y="1435608"/>
+            <a:ext cx="7680960" cy="987552"/>
           </a:xfrm>
           <a:prstGeom prst="rect">
             <a:avLst/>
@@ -6247,30 +6326,251 @@
           <a:ln/>
         </p:spPr>
         <p:txBody>
-          <a:bodyPr wrap="square" lIns="0" tIns="0" rIns="0" bIns="0" rtlCol="0" anchor="ctr"/>
-          <a:lstStyle/>
-          <a:p>
-            <a:pPr indent="0" marL="0">
-              <a:buNone/>
-            </a:pPr>
-            <a:r>
-              <a:rPr lang="en-US" sz="1800" dirty="0">
-                <a:solidFill>
-                  <a:srgbClr val="E35205"/>
+          <a:bodyPr wrap="square" lIns="0" tIns="0" rIns="0" bIns="0" rtlCol="0" anchor="t">
+            <a:normAutofit/>
+          </a:bodyPr>
+          <a:lstStyle/>
+          <a:p>
+            <a:pPr marL="342900" indent="-342900">
+              <a:spcAft>
+                <a:spcPts val="600"/>
+              </a:spcAft>
+              <a:buSzPct val="100000"/>
+              <a:buChar char="•"/>
+            </a:pPr>
+            <a:r>
+              <a:rPr lang="en-US" sz="1400" dirty="0">
+                <a:solidFill>
+                  <a:srgbClr val="1F2937"/>
                 </a:solidFill>
                 <a:latin typeface="Calibri" pitchFamily="34" charset="0"/>
                 <a:ea typeface="Calibri" pitchFamily="34" charset="-122"/>
                 <a:cs typeface="Calibri" pitchFamily="34" charset="-120"/>
               </a:rPr>
-              <a:t>Next week: AI / LLM application security</a:t>
-            </a:r>
-            <a:endParaRPr lang="en-US" sz="1800" dirty="0"/>
+              <a:t>Misconfiguration &gt; zero-days as a breach cause</a:t>
+            </a:r>
+            <a:endParaRPr lang="en-US" sz="1400" dirty="0"/>
+          </a:p>
+          <a:p>
+            <a:pPr marL="342900" indent="-342900">
+              <a:spcAft>
+                <a:spcPts val="600"/>
+              </a:spcAft>
+              <a:buSzPct val="100000"/>
+              <a:buChar char="•"/>
+            </a:pPr>
+            <a:r>
+              <a:rPr lang="en-US" sz="1400" dirty="0">
+                <a:solidFill>
+                  <a:srgbClr val="1F2937"/>
+                </a:solidFill>
+                <a:latin typeface="Calibri" pitchFamily="34" charset="0"/>
+                <a:ea typeface="Calibri" pitchFamily="34" charset="-122"/>
+                <a:cs typeface="Calibri" pitchFamily="34" charset="-120"/>
+              </a:rPr>
+              <a:t>Least privilege, private-by-default, no secrets in code</a:t>
+            </a:r>
+            <a:endParaRPr lang="en-US" sz="1400" dirty="0"/>
+          </a:p>
+          <a:p>
+            <a:pPr marL="342900" indent="-342900">
+              <a:spcAft>
+                <a:spcPts val="600"/>
+              </a:spcAft>
+              <a:buSzPct val="100000"/>
+              <a:buChar char="•"/>
+            </a:pPr>
+            <a:r>
+              <a:rPr lang="en-US" sz="1400" dirty="0">
+                <a:solidFill>
+                  <a:srgbClr val="1F2937"/>
+                </a:solidFill>
+                <a:latin typeface="Calibri" pitchFamily="34" charset="0"/>
+                <a:ea typeface="Calibri" pitchFamily="34" charset="-122"/>
+                <a:cs typeface="Calibri" pitchFamily="34" charset="-120"/>
+              </a:rPr>
+              <a:t>Scan IaC and images in CI</a:t>
+            </a:r>
+            <a:endParaRPr lang="en-US" sz="1400" dirty="0"/>
+          </a:p>
+        </p:txBody>
+      </p:sp>
+      <p:sp>
+        <p:nvSpPr>
+          <p:cNvPr id="7" name="Text 4"/>
+          <p:cNvSpPr/>
+          <p:nvPr/>
+        </p:nvSpPr>
+        <p:spPr>
+          <a:xfrm>
+            <a:off x="457200" y="4800600"/>
+            <a:ext cx="6949440" cy="274320"/>
+          </a:xfrm>
+          <a:prstGeom prst="rect">
+            <a:avLst/>
+          </a:prstGeom>
+          <a:noFill/>
+          <a:ln/>
+        </p:spPr>
+        <p:txBody>
+          <a:bodyPr wrap="square" lIns="0" tIns="0" rIns="0" bIns="0" rtlCol="0" anchor="ctr"/>
+          <a:lstStyle/>
+          <a:p>
+            <a:pPr indent="0" marL="0">
+              <a:buNone/>
+            </a:pPr>
+            <a:r>
+              <a:rPr lang="en-US" sz="900" dirty="0">
+                <a:solidFill>
+                  <a:srgbClr val="64748B"/>
+                </a:solidFill>
+                <a:latin typeface="Calibri" pitchFamily="34" charset="0"/>
+                <a:ea typeface="Calibri" pitchFamily="34" charset="-122"/>
+                <a:cs typeface="Calibri" pitchFamily="34" charset="-120"/>
+              </a:rPr>
+              <a:t>Software Security · Week 13</a:t>
+            </a:r>
+            <a:endParaRPr lang="en-US" sz="900" dirty="0"/>
           </a:p>
         </p:txBody>
       </p:sp>
       <p:pic>
         <p:nvPicPr>
-          <p:cNvPr id="4" name="Image 0" descr="/private/tmp/claude-501/-Users-pop7-Library-CloudStorage-OneDrive-MonsterConnectCo--Ltd-Lecture-KOSEN69---software-security/f63a82af-e1ad-40ed-89c4-03c6ca776e3f/scratchpad/vis-w13/slides/pptx/assets/logo-small.png">    </p:cNvPr>
+          <p:cNvPr id="8" name="Image 1" descr="/private/tmp/claude-501/-Users-pop7-Library-CloudStorage-OneDrive-MonsterConnectCo--Ltd-Lecture-KOSEN69---software-security/f63a82af-e1ad-40ed-89c4-03c6ca776e3f/scratchpad/lq-anim/slides/pptx/assets/logo-small.png">    </p:cNvPr>
+          <p:cNvPicPr>
+            <a:picLocks noChangeAspect="1"/>
+          </p:cNvPicPr>
+          <p:nvPr/>
+        </p:nvPicPr>
+        <p:blipFill>
+          <a:blip r:embed="rId2"/>
+          <a:stretch>
+            <a:fillRect/>
+          </a:stretch>
+        </p:blipFill>
+        <p:spPr>
+          <a:xfrm>
+            <a:off x="7882128" y="4700016"/>
+            <a:ext cx="768096" cy="356616"/>
+          </a:xfrm>
+          <a:prstGeom prst="rect">
+            <a:avLst/>
+          </a:prstGeom>
+        </p:spPr>
+      </p:pic>
+    </p:spTree>
+  </p:cSld>
+  <p:clrMapOvr>
+    <a:masterClrMapping/>
+  </p:clrMapOvr>
+</p:sld>
+</file>
+
+<file path=ppt/slides/slide21.xml><?xml version="1.0" encoding="utf-8"?>
+<p:sld xmlns:a="http://schemas.openxmlformats.org/drawingml/2006/main" xmlns:r="http://schemas.openxmlformats.org/officeDocument/2006/relationships" xmlns:p="http://schemas.openxmlformats.org/presentationml/2006/main">
+  <p:cSld name="Slide 21">
+    <p:bg>
+      <p:bgPr>
+        <a:solidFill>
+          <a:srgbClr val="FFFFFF"/>
+        </a:solidFill>
+      </p:bgPr>
+    </p:bg>
+    <p:spTree>
+      <p:nvGrpSpPr>
+        <p:cNvPr id="1" name=""/>
+        <p:cNvGrpSpPr/>
+        <p:nvPr/>
+      </p:nvGrpSpPr>
+      <p:grpSpPr>
+        <a:xfrm>
+          <a:off x="0" y="0"/>
+          <a:ext cx="0" cy="0"/>
+          <a:chOff x="0" y="0"/>
+          <a:chExt cx="0" cy="0"/>
+        </a:xfrm>
+      </p:grpSpPr>
+      <p:sp>
+        <p:nvSpPr>
+          <p:cNvPr id="2" name="Text 0"/>
+          <p:cNvSpPr/>
+          <p:nvPr/>
+        </p:nvSpPr>
+        <p:spPr>
+          <a:xfrm>
+            <a:off x="640080" y="1737360"/>
+            <a:ext cx="7863840" cy="1097280"/>
+          </a:xfrm>
+          <a:prstGeom prst="rect">
+            <a:avLst/>
+          </a:prstGeom>
+          <a:noFill/>
+          <a:ln/>
+        </p:spPr>
+        <p:txBody>
+          <a:bodyPr wrap="square" lIns="0" tIns="0" rIns="0" bIns="0" rtlCol="0" anchor="ctr"/>
+          <a:lstStyle/>
+          <a:p>
+            <a:pPr indent="0" marL="0">
+              <a:buNone/>
+            </a:pPr>
+            <a:r>
+              <a:rPr lang="en-US" sz="4600" b="1" dirty="0">
+                <a:solidFill>
+                  <a:srgbClr val="1F2937"/>
+                </a:solidFill>
+                <a:latin typeface="Arial" pitchFamily="34" charset="0"/>
+                <a:ea typeface="Arial" pitchFamily="34" charset="-122"/>
+                <a:cs typeface="Arial" pitchFamily="34" charset="-120"/>
+              </a:rPr>
+              <a:t>Questions?</a:t>
+            </a:r>
+            <a:endParaRPr lang="en-US" sz="4600" dirty="0"/>
+          </a:p>
+        </p:txBody>
+      </p:sp>
+      <p:sp>
+        <p:nvSpPr>
+          <p:cNvPr id="3" name="Text 1"/>
+          <p:cNvSpPr/>
+          <p:nvPr/>
+        </p:nvSpPr>
+        <p:spPr>
+          <a:xfrm>
+            <a:off x="658368" y="2834640"/>
+            <a:ext cx="7863840" cy="731520"/>
+          </a:xfrm>
+          <a:prstGeom prst="rect">
+            <a:avLst/>
+          </a:prstGeom>
+          <a:noFill/>
+          <a:ln/>
+        </p:spPr>
+        <p:txBody>
+          <a:bodyPr wrap="square" lIns="0" tIns="0" rIns="0" bIns="0" rtlCol="0" anchor="ctr"/>
+          <a:lstStyle/>
+          <a:p>
+            <a:pPr indent="0" marL="0">
+              <a:buNone/>
+            </a:pPr>
+            <a:r>
+              <a:rPr lang="en-US" sz="1800" dirty="0">
+                <a:solidFill>
+                  <a:srgbClr val="E35205"/>
+                </a:solidFill>
+                <a:latin typeface="Calibri" pitchFamily="34" charset="0"/>
+                <a:ea typeface="Calibri" pitchFamily="34" charset="-122"/>
+                <a:cs typeface="Calibri" pitchFamily="34" charset="-120"/>
+              </a:rPr>
+              <a:t>Next week: AI / LLM application security</a:t>
+            </a:r>
+            <a:endParaRPr lang="en-US" sz="1800" dirty="0"/>
+          </a:p>
+        </p:txBody>
+      </p:sp>
+      <p:pic>
+        <p:nvPicPr>
+          <p:cNvPr id="4" name="Image 0" descr="/private/tmp/claude-501/-Users-pop7-Library-CloudStorage-OneDrive-MonsterConnectCo--Ltd-Lecture-KOSEN69---software-security/f63a82af-e1ad-40ed-89c4-03c6ca776e3f/scratchpad/lq-anim/slides/pptx/assets/logo-small.png">    </p:cNvPr>
           <p:cNvPicPr>
             <a:picLocks noChangeAspect="1"/>
           </p:cNvPicPr>
@@ -6571,7 +6871,7 @@
       </p:sp>
       <p:pic>
         <p:nvPicPr>
-          <p:cNvPr id="8" name="Image 1" descr="/private/tmp/claude-501/-Users-pop7-Library-CloudStorage-OneDrive-MonsterConnectCo--Ltd-Lecture-KOSEN69---software-security/f63a82af-e1ad-40ed-89c4-03c6ca776e3f/scratchpad/vis-w13/slides/pptx/assets/logo-small.png">    </p:cNvPr>
+          <p:cNvPr id="8" name="Image 1" descr="/private/tmp/claude-501/-Users-pop7-Library-CloudStorage-OneDrive-MonsterConnectCo--Ltd-Lecture-KOSEN69---software-security/f63a82af-e1ad-40ed-89c4-03c6ca776e3f/scratchpad/lq-anim/slides/pptx/assets/logo-small.png">    </p:cNvPr>
           <p:cNvPicPr>
             <a:picLocks noChangeAspect="1"/>
           </p:cNvPicPr>
@@ -6709,51 +7009,46 @@
                 <a:ea typeface="Arial" pitchFamily="34" charset="-122"/>
                 <a:cs typeface="Arial" pitchFamily="34" charset="-120"/>
               </a:rPr>
-              <a:t>Shared responsibility</a:t>
+              <a:t>Recap &amp; framing (cont.)</a:t>
             </a:r>
             <a:endParaRPr lang="en-US" sz="2600" dirty="0"/>
           </a:p>
         </p:txBody>
       </p:sp>
-      <p:sp>
-        <p:nvSpPr>
-          <p:cNvPr id="5" name="Shape 2"/>
-          <p:cNvSpPr/>
-          <p:nvPr/>
-        </p:nvSpPr>
-        <p:spPr>
-          <a:xfrm>
-            <a:off x="457200" y="1325880"/>
-            <a:ext cx="8229600" cy="1207008"/>
-          </a:xfrm>
-          <a:prstGeom prst="roundRect">
-            <a:avLst>
-              <a:gd name="adj" fmla="val 6061"/>
-            </a:avLst>
-          </a:prstGeom>
-          <a:solidFill>
-            <a:srgbClr val="F1F5F9"/>
-          </a:solidFill>
-          <a:ln/>
-          <a:effectLst>
-            <a:outerShdw sx="100000" sy="100000" kx="0" ky="0" algn="bl" rotWithShape="0" blurRad="76200" dist="25400" dir="5400000">
-              <a:srgbClr val="000000">
-                <a:alpha val="12000"/>
-              </a:srgbClr>
-            </a:outerShdw>
-          </a:effectLst>
-        </p:spPr>
-      </p:sp>
-      <p:sp>
-        <p:nvSpPr>
-          <p:cNvPr id="6" name="Text 3"/>
-          <p:cNvSpPr/>
-          <p:nvPr/>
-        </p:nvSpPr>
-        <p:spPr>
-          <a:xfrm>
-            <a:off x="731520" y="1435608"/>
-            <a:ext cx="7680960" cy="987552"/>
+      <p:pic>
+        <p:nvPicPr>
+          <p:cNvPr id="5" name="Image 1" descr="One app, three layers. You are here: W13. W13, where it runs: a secret baked into an image layer and an IAM policy with Action * on Resource *; fix with a hardened image and least privilege. W14, what it says: the app gets a chatbot; typed text overrides its rules (prompt injection) and its reply goes into the page unescaped (XSS); fix with guardrails, secret redaction and output escaping. W15, how it ships: Semgrep, Trivy and Gitleaks check every push, a red gate fails the PR, and the app denies on error.">    </p:cNvPr>
+          <p:cNvPicPr>
+            <a:picLocks noChangeAspect="1"/>
+          </p:cNvPicPr>
+          <p:nvPr/>
+        </p:nvPicPr>
+        <p:blipFill>
+          <a:blip r:embed="rId2"/>
+          <a:stretch>
+            <a:fillRect/>
+          </a:stretch>
+        </p:blipFill>
+        <p:spPr>
+          <a:xfrm>
+            <a:off x="457200" y="1097280"/>
+            <a:ext cx="8229600" cy="2607754"/>
+          </a:xfrm>
+          <a:prstGeom prst="rect">
+            <a:avLst/>
+          </a:prstGeom>
+        </p:spPr>
+      </p:pic>
+      <p:sp>
+        <p:nvSpPr>
+          <p:cNvPr id="6" name="Text 2"/>
+          <p:cNvSpPr/>
+          <p:nvPr/>
+        </p:nvSpPr>
+        <p:spPr>
+          <a:xfrm>
+            <a:off x="457200" y="4800600"/>
+            <a:ext cx="6949440" cy="274320"/>
           </a:xfrm>
           <a:prstGeom prst="rect">
             <a:avLst/>
@@ -6762,108 +7057,21 @@
           <a:ln/>
         </p:spPr>
         <p:txBody>
-          <a:bodyPr wrap="square" lIns="0" tIns="0" rIns="0" bIns="0" rtlCol="0" anchor="t">
-            <a:normAutofit/>
-          </a:bodyPr>
-          <a:lstStyle/>
-          <a:p>
-            <a:pPr marL="342900" indent="-342900">
-              <a:spcAft>
-                <a:spcPts val="600"/>
-              </a:spcAft>
-              <a:buSzPct val="100000"/>
-              <a:buChar char="•"/>
-            </a:pPr>
-            <a:r>
-              <a:rPr lang="en-US" sz="1400" dirty="0">
-                <a:solidFill>
-                  <a:srgbClr val="1F2937"/>
+          <a:bodyPr wrap="square" lIns="0" tIns="0" rIns="0" bIns="0" rtlCol="0" anchor="ctr"/>
+          <a:lstStyle/>
+          <a:p>
+            <a:pPr indent="0" marL="0">
+              <a:buNone/>
+            </a:pPr>
+            <a:r>
+              <a:rPr lang="en-US" sz="900" dirty="0">
+                <a:solidFill>
+                  <a:srgbClr val="64748B"/>
                 </a:solidFill>
                 <a:latin typeface="Calibri" pitchFamily="34" charset="0"/>
                 <a:ea typeface="Calibri" pitchFamily="34" charset="-122"/>
                 <a:cs typeface="Calibri" pitchFamily="34" charset="-120"/>
               </a:rPr>
-              <a:t>Cloud secures of the cloud; you secure in the cloud</a:t>
-            </a:r>
-            <a:endParaRPr lang="en-US" sz="1400" dirty="0"/>
-          </a:p>
-          <a:p>
-            <a:pPr marL="342900" indent="-342900">
-              <a:spcAft>
-                <a:spcPts val="600"/>
-              </a:spcAft>
-              <a:buSzPct val="100000"/>
-              <a:buChar char="•"/>
-            </a:pPr>
-            <a:r>
-              <a:rPr lang="en-US" sz="1400" dirty="0">
-                <a:solidFill>
-                  <a:srgbClr val="1F2937"/>
-                </a:solidFill>
-                <a:latin typeface="Calibri" pitchFamily="34" charset="0"/>
-                <a:ea typeface="Calibri" pitchFamily="34" charset="-122"/>
-                <a:cs typeface="Calibri" pitchFamily="34" charset="-120"/>
-              </a:rPr>
-              <a:t>Misconfig — not provider bugs — causes most breaches</a:t>
-            </a:r>
-            <a:endParaRPr lang="en-US" sz="1400" dirty="0"/>
-          </a:p>
-          <a:p>
-            <a:pPr marL="342900" indent="-342900">
-              <a:spcAft>
-                <a:spcPts val="600"/>
-              </a:spcAft>
-              <a:buSzPct val="100000"/>
-              <a:buChar char="•"/>
-            </a:pPr>
-            <a:r>
-              <a:rPr lang="en-US" sz="1400" dirty="0">
-                <a:solidFill>
-                  <a:srgbClr val="1F2937"/>
-                </a:solidFill>
-                <a:latin typeface="Calibri" pitchFamily="34" charset="0"/>
-                <a:ea typeface="Calibri" pitchFamily="34" charset="-122"/>
-                <a:cs typeface="Calibri" pitchFamily="34" charset="-120"/>
-              </a:rPr>
-              <a:t>Defaults are rarely safe</a:t>
-            </a:r>
-            <a:endParaRPr lang="en-US" sz="1400" dirty="0"/>
-          </a:p>
-        </p:txBody>
-      </p:sp>
-      <p:sp>
-        <p:nvSpPr>
-          <p:cNvPr id="7" name="Text 4"/>
-          <p:cNvSpPr/>
-          <p:nvPr/>
-        </p:nvSpPr>
-        <p:spPr>
-          <a:xfrm>
-            <a:off x="457200" y="4800600"/>
-            <a:ext cx="6949440" cy="274320"/>
-          </a:xfrm>
-          <a:prstGeom prst="rect">
-            <a:avLst/>
-          </a:prstGeom>
-          <a:noFill/>
-          <a:ln/>
-        </p:spPr>
-        <p:txBody>
-          <a:bodyPr wrap="square" lIns="0" tIns="0" rIns="0" bIns="0" rtlCol="0" anchor="ctr"/>
-          <a:lstStyle/>
-          <a:p>
-            <a:pPr indent="0" marL="0">
-              <a:buNone/>
-            </a:pPr>
-            <a:r>
-              <a:rPr lang="en-US" sz="900" dirty="0">
-                <a:solidFill>
-                  <a:srgbClr val="64748B"/>
-                </a:solidFill>
-                <a:latin typeface="Calibri" pitchFamily="34" charset="0"/>
-                <a:ea typeface="Calibri" pitchFamily="34" charset="-122"/>
-                <a:cs typeface="Calibri" pitchFamily="34" charset="-120"/>
-              </a:rPr>
               <a:t>Software Security · Week 13</a:t>
             </a:r>
             <a:endParaRPr lang="en-US" sz="900" dirty="0"/>
@@ -6872,14 +7080,14 @@
       </p:sp>
       <p:pic>
         <p:nvPicPr>
-          <p:cNvPr id="8" name="Image 1" descr="/private/tmp/claude-501/-Users-pop7-Library-CloudStorage-OneDrive-MonsterConnectCo--Ltd-Lecture-KOSEN69---software-security/f63a82af-e1ad-40ed-89c4-03c6ca776e3f/scratchpad/vis-w13/slides/pptx/assets/logo-small.png">    </p:cNvPr>
+          <p:cNvPr id="7" name="Image 2" descr="/private/tmp/claude-501/-Users-pop7-Library-CloudStorage-OneDrive-MonsterConnectCo--Ltd-Lecture-KOSEN69---software-security/f63a82af-e1ad-40ed-89c4-03c6ca776e3f/scratchpad/lq-anim/slides/pptx/assets/logo-small.png">    </p:cNvPr>
           <p:cNvPicPr>
             <a:picLocks noChangeAspect="1"/>
           </p:cNvPicPr>
           <p:nvPr/>
         </p:nvPicPr>
         <p:blipFill>
-          <a:blip r:embed="rId2"/>
+          <a:blip r:embed="rId3"/>
           <a:stretch>
             <a:fillRect/>
           </a:stretch>
@@ -7010,15 +7218,170 @@
                 <a:ea typeface="Arial" pitchFamily="34" charset="-122"/>
                 <a:cs typeface="Arial" pitchFamily="34" charset="-120"/>
               </a:rPr>
-              <a:t>Whose job is it?</a:t>
+              <a:t>Shared responsibility</a:t>
             </a:r>
             <a:endParaRPr lang="en-US" sz="2600" dirty="0"/>
+          </a:p>
+        </p:txBody>
+      </p:sp>
+      <p:sp>
+        <p:nvSpPr>
+          <p:cNvPr id="5" name="Shape 2"/>
+          <p:cNvSpPr/>
+          <p:nvPr/>
+        </p:nvSpPr>
+        <p:spPr>
+          <a:xfrm>
+            <a:off x="457200" y="1325880"/>
+            <a:ext cx="8229600" cy="1207008"/>
+          </a:xfrm>
+          <a:prstGeom prst="roundRect">
+            <a:avLst>
+              <a:gd name="adj" fmla="val 6061"/>
+            </a:avLst>
+          </a:prstGeom>
+          <a:solidFill>
+            <a:srgbClr val="F1F5F9"/>
+          </a:solidFill>
+          <a:ln/>
+          <a:effectLst>
+            <a:outerShdw sx="100000" sy="100000" kx="0" ky="0" algn="bl" rotWithShape="0" blurRad="76200" dist="25400" dir="5400000">
+              <a:srgbClr val="000000">
+                <a:alpha val="12000"/>
+              </a:srgbClr>
+            </a:outerShdw>
+          </a:effectLst>
+        </p:spPr>
+      </p:sp>
+      <p:sp>
+        <p:nvSpPr>
+          <p:cNvPr id="6" name="Text 3"/>
+          <p:cNvSpPr/>
+          <p:nvPr/>
+        </p:nvSpPr>
+        <p:spPr>
+          <a:xfrm>
+            <a:off x="731520" y="1435608"/>
+            <a:ext cx="7680960" cy="987552"/>
+          </a:xfrm>
+          <a:prstGeom prst="rect">
+            <a:avLst/>
+          </a:prstGeom>
+          <a:noFill/>
+          <a:ln/>
+        </p:spPr>
+        <p:txBody>
+          <a:bodyPr wrap="square" lIns="0" tIns="0" rIns="0" bIns="0" rtlCol="0" anchor="t">
+            <a:normAutofit/>
+          </a:bodyPr>
+          <a:lstStyle/>
+          <a:p>
+            <a:pPr marL="342900" indent="-342900">
+              <a:spcAft>
+                <a:spcPts val="600"/>
+              </a:spcAft>
+              <a:buSzPct val="100000"/>
+              <a:buChar char="•"/>
+            </a:pPr>
+            <a:r>
+              <a:rPr lang="en-US" sz="1400" dirty="0">
+                <a:solidFill>
+                  <a:srgbClr val="1F2937"/>
+                </a:solidFill>
+                <a:latin typeface="Calibri" pitchFamily="34" charset="0"/>
+                <a:ea typeface="Calibri" pitchFamily="34" charset="-122"/>
+                <a:cs typeface="Calibri" pitchFamily="34" charset="-120"/>
+              </a:rPr>
+              <a:t>Cloud secures of the cloud; you secure in the cloud</a:t>
+            </a:r>
+            <a:endParaRPr lang="en-US" sz="1400" dirty="0"/>
+          </a:p>
+          <a:p>
+            <a:pPr marL="342900" indent="-342900">
+              <a:spcAft>
+                <a:spcPts val="600"/>
+              </a:spcAft>
+              <a:buSzPct val="100000"/>
+              <a:buChar char="•"/>
+            </a:pPr>
+            <a:r>
+              <a:rPr lang="en-US" sz="1400" dirty="0">
+                <a:solidFill>
+                  <a:srgbClr val="1F2937"/>
+                </a:solidFill>
+                <a:latin typeface="Calibri" pitchFamily="34" charset="0"/>
+                <a:ea typeface="Calibri" pitchFamily="34" charset="-122"/>
+                <a:cs typeface="Calibri" pitchFamily="34" charset="-120"/>
+              </a:rPr>
+              <a:t>Misconfig — not provider bugs — causes most breaches</a:t>
+            </a:r>
+            <a:endParaRPr lang="en-US" sz="1400" dirty="0"/>
+          </a:p>
+          <a:p>
+            <a:pPr marL="342900" indent="-342900">
+              <a:spcAft>
+                <a:spcPts val="600"/>
+              </a:spcAft>
+              <a:buSzPct val="100000"/>
+              <a:buChar char="•"/>
+            </a:pPr>
+            <a:r>
+              <a:rPr lang="en-US" sz="1400" dirty="0">
+                <a:solidFill>
+                  <a:srgbClr val="1F2937"/>
+                </a:solidFill>
+                <a:latin typeface="Calibri" pitchFamily="34" charset="0"/>
+                <a:ea typeface="Calibri" pitchFamily="34" charset="-122"/>
+                <a:cs typeface="Calibri" pitchFamily="34" charset="-120"/>
+              </a:rPr>
+              <a:t>Defaults are rarely safe</a:t>
+            </a:r>
+            <a:endParaRPr lang="en-US" sz="1400" dirty="0"/>
+          </a:p>
+        </p:txBody>
+      </p:sp>
+      <p:sp>
+        <p:nvSpPr>
+          <p:cNvPr id="7" name="Text 4"/>
+          <p:cNvSpPr/>
+          <p:nvPr/>
+        </p:nvSpPr>
+        <p:spPr>
+          <a:xfrm>
+            <a:off x="457200" y="4800600"/>
+            <a:ext cx="6949440" cy="274320"/>
+          </a:xfrm>
+          <a:prstGeom prst="rect">
+            <a:avLst/>
+          </a:prstGeom>
+          <a:noFill/>
+          <a:ln/>
+        </p:spPr>
+        <p:txBody>
+          <a:bodyPr wrap="square" lIns="0" tIns="0" rIns="0" bIns="0" rtlCol="0" anchor="ctr"/>
+          <a:lstStyle/>
+          <a:p>
+            <a:pPr indent="0" marL="0">
+              <a:buNone/>
+            </a:pPr>
+            <a:r>
+              <a:rPr lang="en-US" sz="900" dirty="0">
+                <a:solidFill>
+                  <a:srgbClr val="64748B"/>
+                </a:solidFill>
+                <a:latin typeface="Calibri" pitchFamily="34" charset="0"/>
+                <a:ea typeface="Calibri" pitchFamily="34" charset="-122"/>
+                <a:cs typeface="Calibri" pitchFamily="34" charset="-120"/>
+              </a:rPr>
+              <a:t>Software Security · Week 13</a:t>
+            </a:r>
+            <a:endParaRPr lang="en-US" sz="900" dirty="0"/>
           </a:p>
         </p:txBody>
       </p:sp>
       <p:pic>
         <p:nvPicPr>
-          <p:cNvPr id="5" name="Image 1" descr="Shared responsibility for this lab's S3-backed app as two panels split by a line. AWS secures OF the cloud: data centres and hardware, the hypervisor and host OS, the S3 and IAM services themselves, the global network. You secure what you put IN it: the IAM policy (iam-policy-insecure.json, 3 flags), the container image (Dockerfile.insecure, 6 flags including the ENV secret), bucket access and encryption, and network rules such as 0.0.0.0/0 on a database port. Conclusion: all 9 Misconfig Hunt flags sit in your half; none is a provider bug.">    </p:cNvPr>
+          <p:cNvPr id="8" name="Image 1" descr="/private/tmp/claude-501/-Users-pop7-Library-CloudStorage-OneDrive-MonsterConnectCo--Ltd-Lecture-KOSEN69---software-security/f63a82af-e1ad-40ed-89c4-03c6ca776e3f/scratchpad/lq-anim/slides/pptx/assets/logo-small.png">    </p:cNvPr>
           <p:cNvPicPr>
             <a:picLocks noChangeAspect="1"/>
           </p:cNvPicPr>
@@ -7026,69 +7389,6 @@
         </p:nvPicPr>
         <p:blipFill>
           <a:blip r:embed="rId2"/>
-          <a:stretch>
-            <a:fillRect/>
-          </a:stretch>
-        </p:blipFill>
-        <p:spPr>
-          <a:xfrm>
-            <a:off x="559443" y="1097280"/>
-            <a:ext cx="8025114" cy="3566160"/>
-          </a:xfrm>
-          <a:prstGeom prst="rect">
-            <a:avLst/>
-          </a:prstGeom>
-        </p:spPr>
-      </p:pic>
-      <p:sp>
-        <p:nvSpPr>
-          <p:cNvPr id="6" name="Text 2"/>
-          <p:cNvSpPr/>
-          <p:nvPr/>
-        </p:nvSpPr>
-        <p:spPr>
-          <a:xfrm>
-            <a:off x="457200" y="4800600"/>
-            <a:ext cx="6949440" cy="274320"/>
-          </a:xfrm>
-          <a:prstGeom prst="rect">
-            <a:avLst/>
-          </a:prstGeom>
-          <a:noFill/>
-          <a:ln/>
-        </p:spPr>
-        <p:txBody>
-          <a:bodyPr wrap="square" lIns="0" tIns="0" rIns="0" bIns="0" rtlCol="0" anchor="ctr"/>
-          <a:lstStyle/>
-          <a:p>
-            <a:pPr indent="0" marL="0">
-              <a:buNone/>
-            </a:pPr>
-            <a:r>
-              <a:rPr lang="en-US" sz="900" dirty="0">
-                <a:solidFill>
-                  <a:srgbClr val="64748B"/>
-                </a:solidFill>
-                <a:latin typeface="Calibri" pitchFamily="34" charset="0"/>
-                <a:ea typeface="Calibri" pitchFamily="34" charset="-122"/>
-                <a:cs typeface="Calibri" pitchFamily="34" charset="-120"/>
-              </a:rPr>
-              <a:t>Software Security · Week 13</a:t>
-            </a:r>
-            <a:endParaRPr lang="en-US" sz="900" dirty="0"/>
-          </a:p>
-        </p:txBody>
-      </p:sp>
-      <p:pic>
-        <p:nvPicPr>
-          <p:cNvPr id="7" name="Image 2" descr="/private/tmp/claude-501/-Users-pop7-Library-CloudStorage-OneDrive-MonsterConnectCo--Ltd-Lecture-KOSEN69---software-security/f63a82af-e1ad-40ed-89c4-03c6ca776e3f/scratchpad/vis-w13/slides/pptx/assets/logo-small.png">    </p:cNvPr>
-          <p:cNvPicPr>
-            <a:picLocks noChangeAspect="1"/>
-          </p:cNvPicPr>
-          <p:nvPr/>
-        </p:nvPicPr>
-        <p:blipFill>
-          <a:blip r:embed="rId3"/>
           <a:stretch>
             <a:fillRect/>
           </a:stretch>
@@ -7219,49 +7519,46 @@
                 <a:ea typeface="Arial" pitchFamily="34" charset="-122"/>
                 <a:cs typeface="Arial" pitchFamily="34" charset="-120"/>
               </a:rPr>
-              <a:t>IAM &amp; least privilege</a:t>
+              <a:t>Whose job is it?</a:t>
             </a:r>
             <a:endParaRPr lang="en-US" sz="2600" dirty="0"/>
           </a:p>
         </p:txBody>
       </p:sp>
-      <p:sp>
-        <p:nvSpPr>
-          <p:cNvPr id="5" name="Shape 2"/>
-          <p:cNvSpPr/>
-          <p:nvPr/>
-        </p:nvSpPr>
-        <p:spPr>
-          <a:xfrm>
-            <a:off x="457200" y="1325880"/>
-            <a:ext cx="8229600" cy="493776"/>
-          </a:xfrm>
-          <a:prstGeom prst="roundRect">
-            <a:avLst>
-              <a:gd name="adj" fmla="val 11111"/>
-            </a:avLst>
-          </a:prstGeom>
-          <a:solidFill>
-            <a:srgbClr val="0A1020"/>
-          </a:solidFill>
-          <a:ln w="12700">
-            <a:solidFill>
-              <a:srgbClr val="E8EDF3"/>
-            </a:solidFill>
-            <a:prstDash val="solid"/>
-          </a:ln>
-        </p:spPr>
-      </p:sp>
-      <p:sp>
-        <p:nvSpPr>
-          <p:cNvPr id="6" name="Text 3"/>
-          <p:cNvSpPr/>
-          <p:nvPr/>
-        </p:nvSpPr>
-        <p:spPr>
-          <a:xfrm>
-            <a:off x="640080" y="1399032"/>
-            <a:ext cx="7863840" cy="347472"/>
+      <p:pic>
+        <p:nvPicPr>
+          <p:cNvPr id="5" name="Image 1" descr="Shared responsibility for this lab's S3-backed app as two panels split by a line. AWS secures OF the cloud: data centres and hardware, the hypervisor and host OS, the S3 and IAM services themselves, the global network. You secure what you put IN it: the IAM policy (iam-policy-insecure.json, 3 flags), the container image (Dockerfile.insecure, 6 flags including the ENV secret), bucket access and encryption, and network rules such as 0.0.0.0/0 on a database port. Conclusion: all 9 Misconfig Hunt flags sit in your half; none is a provider bug.">    </p:cNvPr>
+          <p:cNvPicPr>
+            <a:picLocks noChangeAspect="1"/>
+          </p:cNvPicPr>
+          <p:nvPr/>
+        </p:nvPicPr>
+        <p:blipFill>
+          <a:blip r:embed="rId2"/>
+          <a:stretch>
+            <a:fillRect/>
+          </a:stretch>
+        </p:blipFill>
+        <p:spPr>
+          <a:xfrm>
+            <a:off x="559443" y="1097280"/>
+            <a:ext cx="8025114" cy="3566160"/>
+          </a:xfrm>
+          <a:prstGeom prst="rect">
+            <a:avLst/>
+          </a:prstGeom>
+        </p:spPr>
+      </p:pic>
+      <p:sp>
+        <p:nvSpPr>
+          <p:cNvPr id="6" name="Text 2"/>
+          <p:cNvSpPr/>
+          <p:nvPr/>
+        </p:nvSpPr>
+        <p:spPr>
+          <a:xfrm>
+            <a:off x="457200" y="4800600"/>
+            <a:ext cx="6949440" cy="274320"/>
           </a:xfrm>
           <a:prstGeom prst="rect">
             <a:avLst/>
@@ -7270,219 +7567,21 @@
           <a:ln/>
         </p:spPr>
         <p:txBody>
-          <a:bodyPr wrap="square" lIns="0" tIns="0" rIns="0" bIns="0" rtlCol="0" anchor="t">
-            <a:normAutofit/>
-          </a:bodyPr>
+          <a:bodyPr wrap="square" lIns="0" tIns="0" rIns="0" bIns="0" rtlCol="0" anchor="ctr"/>
           <a:lstStyle/>
           <a:p>
             <a:pPr indent="0" marL="0">
               <a:buNone/>
             </a:pPr>
             <a:r>
-              <a:rPr lang="en-US" sz="1150" dirty="0">
-                <a:solidFill>
-                  <a:srgbClr val="9FE7D6"/>
-                </a:solidFill>
-                <a:latin typeface="Courier New" pitchFamily="34" charset="0"/>
-                <a:ea typeface="Courier New" pitchFamily="34" charset="-122"/>
-                <a:cs typeface="Courier New" pitchFamily="34" charset="-120"/>
-              </a:rPr>
-              <a:t>{ "Effect":"Allow", "Action":"*", "Resource":"*" }   // 🚩</a:t>
-            </a:r>
-            <a:endParaRPr lang="en-US" sz="1150" dirty="0"/>
-          </a:p>
-        </p:txBody>
-      </p:sp>
-      <p:sp>
-        <p:nvSpPr>
-          <p:cNvPr id="7" name="Shape 4"/>
-          <p:cNvSpPr/>
-          <p:nvPr/>
-        </p:nvSpPr>
-        <p:spPr>
-          <a:xfrm>
-            <a:off x="457200" y="1984248"/>
-            <a:ext cx="8229600" cy="1810512"/>
-          </a:xfrm>
-          <a:prstGeom prst="roundRect">
-            <a:avLst>
-              <a:gd name="adj" fmla="val 4040"/>
-            </a:avLst>
-          </a:prstGeom>
-          <a:solidFill>
-            <a:srgbClr val="F1F5F9"/>
-          </a:solidFill>
-          <a:ln/>
-          <a:effectLst>
-            <a:outerShdw sx="100000" sy="100000" kx="0" ky="0" algn="bl" rotWithShape="0" blurRad="76200" dist="25400" dir="5400000">
-              <a:srgbClr val="000000">
-                <a:alpha val="12000"/>
-              </a:srgbClr>
-            </a:outerShdw>
-          </a:effectLst>
-        </p:spPr>
-      </p:sp>
-      <p:sp>
-        <p:nvSpPr>
-          <p:cNvPr id="8" name="Text 5"/>
-          <p:cNvSpPr/>
-          <p:nvPr/>
-        </p:nvSpPr>
-        <p:spPr>
-          <a:xfrm>
-            <a:off x="731520" y="2093976"/>
-            <a:ext cx="7680960" cy="1591056"/>
-          </a:xfrm>
-          <a:prstGeom prst="rect">
-            <a:avLst/>
-          </a:prstGeom>
-          <a:noFill/>
-          <a:ln/>
-        </p:spPr>
-        <p:txBody>
-          <a:bodyPr wrap="square" lIns="0" tIns="0" rIns="0" bIns="0" rtlCol="0" anchor="t">
-            <a:normAutofit/>
-          </a:bodyPr>
-          <a:lstStyle/>
-          <a:p>
-            <a:pPr marL="342900" indent="-342900">
-              <a:spcAft>
-                <a:spcPts val="600"/>
-              </a:spcAft>
-              <a:buSzPct val="100000"/>
-              <a:buChar char="•"/>
-            </a:pPr>
-            <a:r>
-              <a:rPr lang="en-US" sz="1400" dirty="0">
-                <a:solidFill>
-                  <a:srgbClr val="1F2937"/>
+              <a:rPr lang="en-US" sz="900" dirty="0">
+                <a:solidFill>
+                  <a:srgbClr val="64748B"/>
                 </a:solidFill>
                 <a:latin typeface="Calibri" pitchFamily="34" charset="0"/>
                 <a:ea typeface="Calibri" pitchFamily="34" charset="-122"/>
                 <a:cs typeface="Calibri" pitchFamily="34" charset="-120"/>
               </a:rPr>
-              <a:t>Over-broad policies = blast radius</a:t>
-            </a:r>
-            <a:endParaRPr lang="en-US" sz="1400" dirty="0"/>
-          </a:p>
-          <a:p>
-            <a:pPr marL="342900" indent="-342900">
-              <a:spcAft>
-                <a:spcPts val="600"/>
-              </a:spcAft>
-              <a:buSzPct val="100000"/>
-              <a:buChar char="•"/>
-            </a:pPr>
-            <a:r>
-              <a:rPr lang="en-US" sz="1400" dirty="0">
-                <a:solidFill>
-                  <a:srgbClr val="1F2937"/>
-                </a:solidFill>
-                <a:latin typeface="Calibri" pitchFamily="34" charset="0"/>
-                <a:ea typeface="Calibri" pitchFamily="34" charset="-122"/>
-                <a:cs typeface="Calibri" pitchFamily="34" charset="-120"/>
-              </a:rPr>
-              <a:t>Resource:"*" → CWE-732 (incorrect permission assignment); Action:"*" → CWE-269 (improper privilege management) — they're graded as two distinct findings on the same policy, not one</a:t>
-            </a:r>
-            <a:endParaRPr lang="en-US" sz="1400" dirty="0"/>
-          </a:p>
-          <a:p>
-            <a:pPr marL="342900" indent="-342900">
-              <a:spcAft>
-                <a:spcPts val="600"/>
-              </a:spcAft>
-              <a:buSzPct val="100000"/>
-              <a:buChar char="•"/>
-            </a:pPr>
-            <a:r>
-              <a:rPr lang="en-US" sz="1400" dirty="0">
-                <a:solidFill>
-                  <a:srgbClr val="1F2937"/>
-                </a:solidFill>
-                <a:latin typeface="Calibri" pitchFamily="34" charset="0"/>
-                <a:ea typeface="Calibri" pitchFamily="34" charset="-122"/>
-                <a:cs typeface="Calibri" pitchFamily="34" charset="-120"/>
-              </a:rPr>
-              <a:t>Fix: scope to one bucket + one action, add a Condition (e.g. s3:prefix) — not just a narrower ARN</a:t>
-            </a:r>
-            <a:endParaRPr lang="en-US" sz="1400" dirty="0"/>
-          </a:p>
-        </p:txBody>
-      </p:sp>
-      <p:sp>
-        <p:nvSpPr>
-          <p:cNvPr id="9" name="Text 6"/>
-          <p:cNvSpPr/>
-          <p:nvPr/>
-        </p:nvSpPr>
-        <p:spPr>
-          <a:xfrm>
-            <a:off x="548640" y="3959352"/>
-            <a:ext cx="8046720" cy="548640"/>
-          </a:xfrm>
-          <a:prstGeom prst="rect">
-            <a:avLst/>
-          </a:prstGeom>
-          <a:noFill/>
-          <a:ln/>
-        </p:spPr>
-        <p:txBody>
-          <a:bodyPr wrap="square" lIns="0" tIns="0" rIns="0" bIns="0" rtlCol="0" anchor="t">
-            <a:normAutofit/>
-          </a:bodyPr>
-          <a:lstStyle/>
-          <a:p>
-            <a:pPr indent="0" marL="0">
-              <a:buNone/>
-            </a:pPr>
-            <a:r>
-              <a:rPr lang="en-US" sz="1400" dirty="0">
-                <a:solidFill>
-                  <a:srgbClr val="1F2937"/>
-                </a:solidFill>
-                <a:latin typeface="Calibri" pitchFamily="34" charset="0"/>
-                <a:ea typeface="Calibri" pitchFamily="34" charset="-122"/>
-                <a:cs typeface="Calibri" pitchFamily="34" charset="-120"/>
-              </a:rPr>
-              <a:t>Try it live: /sim/iam-scope (interactive simulation, web only)</a:t>
-            </a:r>
-            <a:endParaRPr lang="en-US" sz="1400" dirty="0"/>
-          </a:p>
-        </p:txBody>
-      </p:sp>
-      <p:sp>
-        <p:nvSpPr>
-          <p:cNvPr id="10" name="Text 7"/>
-          <p:cNvSpPr/>
-          <p:nvPr/>
-        </p:nvSpPr>
-        <p:spPr>
-          <a:xfrm>
-            <a:off x="457200" y="4800600"/>
-            <a:ext cx="6949440" cy="274320"/>
-          </a:xfrm>
-          <a:prstGeom prst="rect">
-            <a:avLst/>
-          </a:prstGeom>
-          <a:noFill/>
-          <a:ln/>
-        </p:spPr>
-        <p:txBody>
-          <a:bodyPr wrap="square" lIns="0" tIns="0" rIns="0" bIns="0" rtlCol="0" anchor="ctr"/>
-          <a:lstStyle/>
-          <a:p>
-            <a:pPr indent="0" marL="0">
-              <a:buNone/>
-            </a:pPr>
-            <a:r>
-              <a:rPr lang="en-US" sz="900" dirty="0">
-                <a:solidFill>
-                  <a:srgbClr val="64748B"/>
-                </a:solidFill>
-                <a:latin typeface="Calibri" pitchFamily="34" charset="0"/>
-                <a:ea typeface="Calibri" pitchFamily="34" charset="-122"/>
-                <a:cs typeface="Calibri" pitchFamily="34" charset="-120"/>
-              </a:rPr>
               <a:t>Software Security · Week 13</a:t>
             </a:r>
             <a:endParaRPr lang="en-US" sz="900" dirty="0"/>
@@ -7491,14 +7590,14 @@
       </p:sp>
       <p:pic>
         <p:nvPicPr>
-          <p:cNvPr id="11" name="Image 1" descr="/private/tmp/claude-501/-Users-pop7-Library-CloudStorage-OneDrive-MonsterConnectCo--Ltd-Lecture-KOSEN69---software-security/f63a82af-e1ad-40ed-89c4-03c6ca776e3f/scratchpad/vis-w13/slides/pptx/assets/logo-small.png">    </p:cNvPr>
+          <p:cNvPr id="7" name="Image 2" descr="/private/tmp/claude-501/-Users-pop7-Library-CloudStorage-OneDrive-MonsterConnectCo--Ltd-Lecture-KOSEN69---software-security/f63a82af-e1ad-40ed-89c4-03c6ca776e3f/scratchpad/lq-anim/slides/pptx/assets/logo-small.png">    </p:cNvPr>
           <p:cNvPicPr>
             <a:picLocks noChangeAspect="1"/>
           </p:cNvPicPr>
           <p:nvPr/>
         </p:nvPicPr>
         <p:blipFill>
-          <a:blip r:embed="rId2"/>
+          <a:blip r:embed="rId3"/>
           <a:stretch>
             <a:fillRect/>
           </a:stretch>
@@ -7629,15 +7728,279 @@
                 <a:ea typeface="Arial" pitchFamily="34" charset="-122"/>
                 <a:cs typeface="Arial" pitchFamily="34" charset="-120"/>
               </a:rPr>
-              <a:t>If the key leaks — blast radius</a:t>
+              <a:t>IAM &amp; least privilege</a:t>
             </a:r>
             <a:endParaRPr lang="en-US" sz="2600" dirty="0"/>
+          </a:p>
+        </p:txBody>
+      </p:sp>
+      <p:sp>
+        <p:nvSpPr>
+          <p:cNvPr id="5" name="Shape 2"/>
+          <p:cNvSpPr/>
+          <p:nvPr/>
+        </p:nvSpPr>
+        <p:spPr>
+          <a:xfrm>
+            <a:off x="457200" y="1325880"/>
+            <a:ext cx="8229600" cy="493776"/>
+          </a:xfrm>
+          <a:prstGeom prst="roundRect">
+            <a:avLst>
+              <a:gd name="adj" fmla="val 11111"/>
+            </a:avLst>
+          </a:prstGeom>
+          <a:solidFill>
+            <a:srgbClr val="0A1020"/>
+          </a:solidFill>
+          <a:ln w="12700">
+            <a:solidFill>
+              <a:srgbClr val="E8EDF3"/>
+            </a:solidFill>
+            <a:prstDash val="solid"/>
+          </a:ln>
+        </p:spPr>
+      </p:sp>
+      <p:sp>
+        <p:nvSpPr>
+          <p:cNvPr id="6" name="Text 3"/>
+          <p:cNvSpPr/>
+          <p:nvPr/>
+        </p:nvSpPr>
+        <p:spPr>
+          <a:xfrm>
+            <a:off x="640080" y="1399032"/>
+            <a:ext cx="7863840" cy="347472"/>
+          </a:xfrm>
+          <a:prstGeom prst="rect">
+            <a:avLst/>
+          </a:prstGeom>
+          <a:noFill/>
+          <a:ln/>
+        </p:spPr>
+        <p:txBody>
+          <a:bodyPr wrap="square" lIns="0" tIns="0" rIns="0" bIns="0" rtlCol="0" anchor="t">
+            <a:normAutofit/>
+          </a:bodyPr>
+          <a:lstStyle/>
+          <a:p>
+            <a:pPr indent="0" marL="0">
+              <a:buNone/>
+            </a:pPr>
+            <a:r>
+              <a:rPr lang="en-US" sz="1150" dirty="0">
+                <a:solidFill>
+                  <a:srgbClr val="9FE7D6"/>
+                </a:solidFill>
+                <a:latin typeface="Courier New" pitchFamily="34" charset="0"/>
+                <a:ea typeface="Courier New" pitchFamily="34" charset="-122"/>
+                <a:cs typeface="Courier New" pitchFamily="34" charset="-120"/>
+              </a:rPr>
+              <a:t>{ "Effect":"Allow", "Action":"*", "Resource":"*" }   // 🚩</a:t>
+            </a:r>
+            <a:endParaRPr lang="en-US" sz="1150" dirty="0"/>
+          </a:p>
+        </p:txBody>
+      </p:sp>
+      <p:sp>
+        <p:nvSpPr>
+          <p:cNvPr id="7" name="Shape 4"/>
+          <p:cNvSpPr/>
+          <p:nvPr/>
+        </p:nvSpPr>
+        <p:spPr>
+          <a:xfrm>
+            <a:off x="457200" y="1984248"/>
+            <a:ext cx="8229600" cy="1810512"/>
+          </a:xfrm>
+          <a:prstGeom prst="roundRect">
+            <a:avLst>
+              <a:gd name="adj" fmla="val 4040"/>
+            </a:avLst>
+          </a:prstGeom>
+          <a:solidFill>
+            <a:srgbClr val="F1F5F9"/>
+          </a:solidFill>
+          <a:ln/>
+          <a:effectLst>
+            <a:outerShdw sx="100000" sy="100000" kx="0" ky="0" algn="bl" rotWithShape="0" blurRad="76200" dist="25400" dir="5400000">
+              <a:srgbClr val="000000">
+                <a:alpha val="12000"/>
+              </a:srgbClr>
+            </a:outerShdw>
+          </a:effectLst>
+        </p:spPr>
+      </p:sp>
+      <p:sp>
+        <p:nvSpPr>
+          <p:cNvPr id="8" name="Text 5"/>
+          <p:cNvSpPr/>
+          <p:nvPr/>
+        </p:nvSpPr>
+        <p:spPr>
+          <a:xfrm>
+            <a:off x="731520" y="2093976"/>
+            <a:ext cx="7680960" cy="1591056"/>
+          </a:xfrm>
+          <a:prstGeom prst="rect">
+            <a:avLst/>
+          </a:prstGeom>
+          <a:noFill/>
+          <a:ln/>
+        </p:spPr>
+        <p:txBody>
+          <a:bodyPr wrap="square" lIns="0" tIns="0" rIns="0" bIns="0" rtlCol="0" anchor="t">
+            <a:normAutofit/>
+          </a:bodyPr>
+          <a:lstStyle/>
+          <a:p>
+            <a:pPr marL="342900" indent="-342900">
+              <a:spcAft>
+                <a:spcPts val="600"/>
+              </a:spcAft>
+              <a:buSzPct val="100000"/>
+              <a:buChar char="•"/>
+            </a:pPr>
+            <a:r>
+              <a:rPr lang="en-US" sz="1400" dirty="0">
+                <a:solidFill>
+                  <a:srgbClr val="1F2937"/>
+                </a:solidFill>
+                <a:latin typeface="Calibri" pitchFamily="34" charset="0"/>
+                <a:ea typeface="Calibri" pitchFamily="34" charset="-122"/>
+                <a:cs typeface="Calibri" pitchFamily="34" charset="-120"/>
+              </a:rPr>
+              <a:t>Over-broad policies = blast radius</a:t>
+            </a:r>
+            <a:endParaRPr lang="en-US" sz="1400" dirty="0"/>
+          </a:p>
+          <a:p>
+            <a:pPr marL="342900" indent="-342900">
+              <a:spcAft>
+                <a:spcPts val="600"/>
+              </a:spcAft>
+              <a:buSzPct val="100000"/>
+              <a:buChar char="•"/>
+            </a:pPr>
+            <a:r>
+              <a:rPr lang="en-US" sz="1400" dirty="0">
+                <a:solidFill>
+                  <a:srgbClr val="1F2937"/>
+                </a:solidFill>
+                <a:latin typeface="Calibri" pitchFamily="34" charset="0"/>
+                <a:ea typeface="Calibri" pitchFamily="34" charset="-122"/>
+                <a:cs typeface="Calibri" pitchFamily="34" charset="-120"/>
+              </a:rPr>
+              <a:t>Resource:"*" → CWE-732 (incorrect permission assignment); Action:"*" → CWE-269 (improper privilege management) — they're graded as two distinct findings on the same policy, not one</a:t>
+            </a:r>
+            <a:endParaRPr lang="en-US" sz="1400" dirty="0"/>
+          </a:p>
+          <a:p>
+            <a:pPr marL="342900" indent="-342900">
+              <a:spcAft>
+                <a:spcPts val="600"/>
+              </a:spcAft>
+              <a:buSzPct val="100000"/>
+              <a:buChar char="•"/>
+            </a:pPr>
+            <a:r>
+              <a:rPr lang="en-US" sz="1400" dirty="0">
+                <a:solidFill>
+                  <a:srgbClr val="1F2937"/>
+                </a:solidFill>
+                <a:latin typeface="Calibri" pitchFamily="34" charset="0"/>
+                <a:ea typeface="Calibri" pitchFamily="34" charset="-122"/>
+                <a:cs typeface="Calibri" pitchFamily="34" charset="-120"/>
+              </a:rPr>
+              <a:t>Fix: two narrow statements on one bucket — s3:GetObject on app/* objects, plus s3:ListBucket limited by an s3:prefix Condition — not just a narrower ARN</a:t>
+            </a:r>
+            <a:endParaRPr lang="en-US" sz="1400" dirty="0"/>
+          </a:p>
+        </p:txBody>
+      </p:sp>
+      <p:sp>
+        <p:nvSpPr>
+          <p:cNvPr id="9" name="Text 6"/>
+          <p:cNvSpPr/>
+          <p:nvPr/>
+        </p:nvSpPr>
+        <p:spPr>
+          <a:xfrm>
+            <a:off x="548640" y="3959352"/>
+            <a:ext cx="8046720" cy="548640"/>
+          </a:xfrm>
+          <a:prstGeom prst="rect">
+            <a:avLst/>
+          </a:prstGeom>
+          <a:noFill/>
+          <a:ln/>
+        </p:spPr>
+        <p:txBody>
+          <a:bodyPr wrap="square" lIns="0" tIns="0" rIns="0" bIns="0" rtlCol="0" anchor="t">
+            <a:normAutofit/>
+          </a:bodyPr>
+          <a:lstStyle/>
+          <a:p>
+            <a:pPr indent="0" marL="0">
+              <a:buNone/>
+            </a:pPr>
+            <a:r>
+              <a:rPr lang="en-US" sz="1400" dirty="0">
+                <a:solidFill>
+                  <a:srgbClr val="1F2937"/>
+                </a:solidFill>
+                <a:latin typeface="Calibri" pitchFamily="34" charset="0"/>
+                <a:ea typeface="Calibri" pitchFamily="34" charset="-122"/>
+                <a:cs typeface="Calibri" pitchFamily="34" charset="-120"/>
+              </a:rPr>
+              <a:t>Try it live: /sim/iam-scope (interactive simulation, web only)</a:t>
+            </a:r>
+            <a:endParaRPr lang="en-US" sz="1400" dirty="0"/>
+          </a:p>
+        </p:txBody>
+      </p:sp>
+      <p:sp>
+        <p:nvSpPr>
+          <p:cNvPr id="10" name="Text 7"/>
+          <p:cNvSpPr/>
+          <p:nvPr/>
+        </p:nvSpPr>
+        <p:spPr>
+          <a:xfrm>
+            <a:off x="457200" y="4800600"/>
+            <a:ext cx="6949440" cy="274320"/>
+          </a:xfrm>
+          <a:prstGeom prst="rect">
+            <a:avLst/>
+          </a:prstGeom>
+          <a:noFill/>
+          <a:ln/>
+        </p:spPr>
+        <p:txBody>
+          <a:bodyPr wrap="square" lIns="0" tIns="0" rIns="0" bIns="0" rtlCol="0" anchor="ctr"/>
+          <a:lstStyle/>
+          <a:p>
+            <a:pPr indent="0" marL="0">
+              <a:buNone/>
+            </a:pPr>
+            <a:r>
+              <a:rPr lang="en-US" sz="900" dirty="0">
+                <a:solidFill>
+                  <a:srgbClr val="64748B"/>
+                </a:solidFill>
+                <a:latin typeface="Calibri" pitchFamily="34" charset="0"/>
+                <a:ea typeface="Calibri" pitchFamily="34" charset="-122"/>
+                <a:cs typeface="Calibri" pitchFamily="34" charset="-120"/>
+              </a:rPr>
+              <a:t>Software Security · Week 13</a:t>
+            </a:r>
+            <a:endParaRPr lang="en-US" sz="900" dirty="0"/>
           </a:p>
         </p:txBody>
       </p:sp>
       <p:pic>
         <p:nvPicPr>
-          <p:cNvPr id="5" name="Image 1" descr="The same AWS account drawn twice at the same scale. Left, iam-policy-insecure.json (Action star, Resource star, no Condition): the whole account is allowed, with example actions a leaked key can now run — s3 star on any bucket, iam:CreateAccessKey to mint new keys that survive rotation, ec2:RunInstances on your bill, kms:Decrypt, cloudtrail:StopLogging to turn off the audit trail — equals full admin; Action star is CWE-269, Resource star is CWE-732. Right, iam-policy-leastpriv.json: everything is implicitly denied except a small app/* square inside lab-app-bucket, readable via s3:GetObject on app/* objects, plus s3:ListBucket only under the Condition s3:prefix = app/*. Trivy parses neither file; Task 2 is manual review.">    </p:cNvPr>
+          <p:cNvPr id="11" name="Image 1" descr="/private/tmp/claude-501/-Users-pop7-Library-CloudStorage-OneDrive-MonsterConnectCo--Ltd-Lecture-KOSEN69---software-security/f63a82af-e1ad-40ed-89c4-03c6ca776e3f/scratchpad/lq-anim/slides/pptx/assets/logo-small.png">    </p:cNvPr>
           <p:cNvPicPr>
             <a:picLocks noChangeAspect="1"/>
           </p:cNvPicPr>
@@ -7645,69 +8008,6 @@
         </p:nvPicPr>
         <p:blipFill>
           <a:blip r:embed="rId2"/>
-          <a:stretch>
-            <a:fillRect/>
-          </a:stretch>
-        </p:blipFill>
-        <p:spPr>
-          <a:xfrm>
-            <a:off x="559443" y="1097280"/>
-            <a:ext cx="8025114" cy="3566160"/>
-          </a:xfrm>
-          <a:prstGeom prst="rect">
-            <a:avLst/>
-          </a:prstGeom>
-        </p:spPr>
-      </p:pic>
-      <p:sp>
-        <p:nvSpPr>
-          <p:cNvPr id="6" name="Text 2"/>
-          <p:cNvSpPr/>
-          <p:nvPr/>
-        </p:nvSpPr>
-        <p:spPr>
-          <a:xfrm>
-            <a:off x="457200" y="4800600"/>
-            <a:ext cx="6949440" cy="274320"/>
-          </a:xfrm>
-          <a:prstGeom prst="rect">
-            <a:avLst/>
-          </a:prstGeom>
-          <a:noFill/>
-          <a:ln/>
-        </p:spPr>
-        <p:txBody>
-          <a:bodyPr wrap="square" lIns="0" tIns="0" rIns="0" bIns="0" rtlCol="0" anchor="ctr"/>
-          <a:lstStyle/>
-          <a:p>
-            <a:pPr indent="0" marL="0">
-              <a:buNone/>
-            </a:pPr>
-            <a:r>
-              <a:rPr lang="en-US" sz="900" dirty="0">
-                <a:solidFill>
-                  <a:srgbClr val="64748B"/>
-                </a:solidFill>
-                <a:latin typeface="Calibri" pitchFamily="34" charset="0"/>
-                <a:ea typeface="Calibri" pitchFamily="34" charset="-122"/>
-                <a:cs typeface="Calibri" pitchFamily="34" charset="-120"/>
-              </a:rPr>
-              <a:t>Software Security · Week 13</a:t>
-            </a:r>
-            <a:endParaRPr lang="en-US" sz="900" dirty="0"/>
-          </a:p>
-        </p:txBody>
-      </p:sp>
-      <p:pic>
-        <p:nvPicPr>
-          <p:cNvPr id="7" name="Image 2" descr="/private/tmp/claude-501/-Users-pop7-Library-CloudStorage-OneDrive-MonsterConnectCo--Ltd-Lecture-KOSEN69---software-security/f63a82af-e1ad-40ed-89c4-03c6ca776e3f/scratchpad/vis-w13/slides/pptx/assets/logo-small.png">    </p:cNvPr>
-          <p:cNvPicPr>
-            <a:picLocks noChangeAspect="1"/>
-          </p:cNvPicPr>
-          <p:nvPr/>
-        </p:nvPicPr>
-        <p:blipFill>
-          <a:blip r:embed="rId3"/>
           <a:stretch>
             <a:fillRect/>
           </a:stretch>
@@ -7838,51 +8138,46 @@
                 <a:ea typeface="Arial" pitchFamily="34" charset="-122"/>
                 <a:cs typeface="Arial" pitchFamily="34" charset="-120"/>
               </a:rPr>
-              <a:t>Secrets management</a:t>
+              <a:t>If the key leaks — blast radius</a:t>
             </a:r>
             <a:endParaRPr lang="en-US" sz="2600" dirty="0"/>
           </a:p>
         </p:txBody>
       </p:sp>
-      <p:sp>
-        <p:nvSpPr>
-          <p:cNvPr id="5" name="Shape 2"/>
-          <p:cNvSpPr/>
-          <p:nvPr/>
-        </p:nvSpPr>
-        <p:spPr>
-          <a:xfrm>
-            <a:off x="457200" y="1325880"/>
-            <a:ext cx="8229600" cy="1207008"/>
-          </a:xfrm>
-          <a:prstGeom prst="roundRect">
-            <a:avLst>
-              <a:gd name="adj" fmla="val 6061"/>
-            </a:avLst>
-          </a:prstGeom>
-          <a:solidFill>
-            <a:srgbClr val="F1F5F9"/>
-          </a:solidFill>
-          <a:ln/>
-          <a:effectLst>
-            <a:outerShdw sx="100000" sy="100000" kx="0" ky="0" algn="bl" rotWithShape="0" blurRad="76200" dist="25400" dir="5400000">
-              <a:srgbClr val="000000">
-                <a:alpha val="12000"/>
-              </a:srgbClr>
-            </a:outerShdw>
-          </a:effectLst>
-        </p:spPr>
-      </p:sp>
-      <p:sp>
-        <p:nvSpPr>
-          <p:cNvPr id="6" name="Text 3"/>
-          <p:cNvSpPr/>
-          <p:nvPr/>
-        </p:nvSpPr>
-        <p:spPr>
-          <a:xfrm>
-            <a:off x="731520" y="1435608"/>
-            <a:ext cx="7680960" cy="987552"/>
+      <p:pic>
+        <p:nvPicPr>
+          <p:cNvPr id="5" name="Image 1" descr="The same AWS account drawn twice at the same scale. Left, iam-policy-insecure.json (Action star, Resource star, no Condition): the whole account is allowed, with example actions a leaked key can now run — s3 star on any bucket, iam:CreateAccessKey to mint new keys that survive rotation, ec2:RunInstances on your bill, kms:Decrypt, cloudtrail:StopLogging to turn off the audit trail — equals full admin; Action star is CWE-269, Resource star is CWE-732. Right, iam-policy-leastpriv.json: everything is implicitly denied except a small app/* square inside lab-app-bucket, readable via s3:GetObject on app/* objects, plus s3:ListBucket only under the Condition s3:prefix = app/*. Trivy parses neither file; Task 2 is manual review.">    </p:cNvPr>
+          <p:cNvPicPr>
+            <a:picLocks noChangeAspect="1"/>
+          </p:cNvPicPr>
+          <p:nvPr/>
+        </p:nvPicPr>
+        <p:blipFill>
+          <a:blip r:embed="rId2"/>
+          <a:stretch>
+            <a:fillRect/>
+          </a:stretch>
+        </p:blipFill>
+        <p:spPr>
+          <a:xfrm>
+            <a:off x="559443" y="1097280"/>
+            <a:ext cx="8025114" cy="3566160"/>
+          </a:xfrm>
+          <a:prstGeom prst="rect">
+            <a:avLst/>
+          </a:prstGeom>
+        </p:spPr>
+      </p:pic>
+      <p:sp>
+        <p:nvSpPr>
+          <p:cNvPr id="6" name="Text 2"/>
+          <p:cNvSpPr/>
+          <p:nvPr/>
+        </p:nvSpPr>
+        <p:spPr>
+          <a:xfrm>
+            <a:off x="457200" y="4800600"/>
+            <a:ext cx="6949440" cy="274320"/>
           </a:xfrm>
           <a:prstGeom prst="rect">
             <a:avLst/>
@@ -7891,108 +8186,21 @@
           <a:ln/>
         </p:spPr>
         <p:txBody>
-          <a:bodyPr wrap="square" lIns="0" tIns="0" rIns="0" bIns="0" rtlCol="0" anchor="t">
-            <a:normAutofit/>
-          </a:bodyPr>
-          <a:lstStyle/>
-          <a:p>
-            <a:pPr marL="342900" indent="-342900">
-              <a:spcAft>
-                <a:spcPts val="600"/>
-              </a:spcAft>
-              <a:buSzPct val="100000"/>
-              <a:buChar char="•"/>
-            </a:pPr>
-            <a:r>
-              <a:rPr lang="en-US" sz="1400" dirty="0">
-                <a:solidFill>
-                  <a:srgbClr val="1F2937"/>
+          <a:bodyPr wrap="square" lIns="0" tIns="0" rIns="0" bIns="0" rtlCol="0" anchor="ctr"/>
+          <a:lstStyle/>
+          <a:p>
+            <a:pPr indent="0" marL="0">
+              <a:buNone/>
+            </a:pPr>
+            <a:r>
+              <a:rPr lang="en-US" sz="900" dirty="0">
+                <a:solidFill>
+                  <a:srgbClr val="64748B"/>
                 </a:solidFill>
                 <a:latin typeface="Calibri" pitchFamily="34" charset="0"/>
                 <a:ea typeface="Calibri" pitchFamily="34" charset="-122"/>
                 <a:cs typeface="Calibri" pitchFamily="34" charset="-120"/>
               </a:rPr>
-              <a:t>Secrets in env vars / Dockerfile / git = leaked</a:t>
-            </a:r>
-            <a:endParaRPr lang="en-US" sz="1400" dirty="0"/>
-          </a:p>
-          <a:p>
-            <a:pPr marL="342900" indent="-342900">
-              <a:spcAft>
-                <a:spcPts val="600"/>
-              </a:spcAft>
-              <a:buSzPct val="100000"/>
-              <a:buChar char="•"/>
-            </a:pPr>
-            <a:r>
-              <a:rPr lang="en-US" sz="1400" dirty="0">
-                <a:solidFill>
-                  <a:srgbClr val="1F2937"/>
-                </a:solidFill>
-                <a:latin typeface="Calibri" pitchFamily="34" charset="0"/>
-                <a:ea typeface="Calibri" pitchFamily="34" charset="-122"/>
-                <a:cs typeface="Calibri" pitchFamily="34" charset="-120"/>
-              </a:rPr>
-              <a:t>Use a secrets manager / vault; rotate</a:t>
-            </a:r>
-            <a:endParaRPr lang="en-US" sz="1400" dirty="0"/>
-          </a:p>
-          <a:p>
-            <a:pPr marL="342900" indent="-342900">
-              <a:spcAft>
-                <a:spcPts val="600"/>
-              </a:spcAft>
-              <a:buSzPct val="100000"/>
-              <a:buChar char="•"/>
-            </a:pPr>
-            <a:r>
-              <a:rPr lang="en-US" sz="1400" dirty="0">
-                <a:solidFill>
-                  <a:srgbClr val="1F2937"/>
-                </a:solidFill>
-                <a:latin typeface="Calibri" pitchFamily="34" charset="0"/>
-                <a:ea typeface="Calibri" pitchFamily="34" charset="-122"/>
-                <a:cs typeface="Calibri" pitchFamily="34" charset="-120"/>
-              </a:rPr>
-              <a:t>Scan history (Gitleaks) — recall Week 2</a:t>
-            </a:r>
-            <a:endParaRPr lang="en-US" sz="1400" dirty="0"/>
-          </a:p>
-        </p:txBody>
-      </p:sp>
-      <p:sp>
-        <p:nvSpPr>
-          <p:cNvPr id="7" name="Text 4"/>
-          <p:cNvSpPr/>
-          <p:nvPr/>
-        </p:nvSpPr>
-        <p:spPr>
-          <a:xfrm>
-            <a:off x="457200" y="4800600"/>
-            <a:ext cx="6949440" cy="274320"/>
-          </a:xfrm>
-          <a:prstGeom prst="rect">
-            <a:avLst/>
-          </a:prstGeom>
-          <a:noFill/>
-          <a:ln/>
-        </p:spPr>
-        <p:txBody>
-          <a:bodyPr wrap="square" lIns="0" tIns="0" rIns="0" bIns="0" rtlCol="0" anchor="ctr"/>
-          <a:lstStyle/>
-          <a:p>
-            <a:pPr indent="0" marL="0">
-              <a:buNone/>
-            </a:pPr>
-            <a:r>
-              <a:rPr lang="en-US" sz="900" dirty="0">
-                <a:solidFill>
-                  <a:srgbClr val="64748B"/>
-                </a:solidFill>
-                <a:latin typeface="Calibri" pitchFamily="34" charset="0"/>
-                <a:ea typeface="Calibri" pitchFamily="34" charset="-122"/>
-                <a:cs typeface="Calibri" pitchFamily="34" charset="-120"/>
-              </a:rPr>
               <a:t>Software Security · Week 13</a:t>
             </a:r>
             <a:endParaRPr lang="en-US" sz="900" dirty="0"/>
@@ -8001,14 +8209,14 @@
       </p:sp>
       <p:pic>
         <p:nvPicPr>
-          <p:cNvPr id="8" name="Image 1" descr="/private/tmp/claude-501/-Users-pop7-Library-CloudStorage-OneDrive-MonsterConnectCo--Ltd-Lecture-KOSEN69---software-security/f63a82af-e1ad-40ed-89c4-03c6ca776e3f/scratchpad/vis-w13/slides/pptx/assets/logo-small.png">    </p:cNvPr>
+          <p:cNvPr id="7" name="Image 2" descr="/private/tmp/claude-501/-Users-pop7-Library-CloudStorage-OneDrive-MonsterConnectCo--Ltd-Lecture-KOSEN69---software-security/f63a82af-e1ad-40ed-89c4-03c6ca776e3f/scratchpad/lq-anim/slides/pptx/assets/logo-small.png">    </p:cNvPr>
           <p:cNvPicPr>
             <a:picLocks noChangeAspect="1"/>
           </p:cNvPicPr>
           <p:nvPr/>
         </p:nvPicPr>
         <p:blipFill>
-          <a:blip r:embed="rId2"/>
+          <a:blip r:embed="rId3"/>
           <a:stretch>
             <a:fillRect/>
           </a:stretch>
@@ -8139,15 +8347,170 @@
                 <a:ea typeface="Arial" pitchFamily="34" charset="-122"/>
                 <a:cs typeface="Arial" pitchFamily="34" charset="-120"/>
               </a:rPr>
-              <a:t>Where the ENV secret ends up</a:t>
+              <a:t>Secrets management</a:t>
             </a:r>
             <a:endParaRPr lang="en-US" sz="2600" dirty="0"/>
+          </a:p>
+        </p:txBody>
+      </p:sp>
+      <p:sp>
+        <p:nvSpPr>
+          <p:cNvPr id="5" name="Shape 2"/>
+          <p:cNvSpPr/>
+          <p:nvPr/>
+        </p:nvSpPr>
+        <p:spPr>
+          <a:xfrm>
+            <a:off x="457200" y="1325880"/>
+            <a:ext cx="8229600" cy="1207008"/>
+          </a:xfrm>
+          <a:prstGeom prst="roundRect">
+            <a:avLst>
+              <a:gd name="adj" fmla="val 6061"/>
+            </a:avLst>
+          </a:prstGeom>
+          <a:solidFill>
+            <a:srgbClr val="F1F5F9"/>
+          </a:solidFill>
+          <a:ln/>
+          <a:effectLst>
+            <a:outerShdw sx="100000" sy="100000" kx="0" ky="0" algn="bl" rotWithShape="0" blurRad="76200" dist="25400" dir="5400000">
+              <a:srgbClr val="000000">
+                <a:alpha val="12000"/>
+              </a:srgbClr>
+            </a:outerShdw>
+          </a:effectLst>
+        </p:spPr>
+      </p:sp>
+      <p:sp>
+        <p:nvSpPr>
+          <p:cNvPr id="6" name="Text 3"/>
+          <p:cNvSpPr/>
+          <p:nvPr/>
+        </p:nvSpPr>
+        <p:spPr>
+          <a:xfrm>
+            <a:off x="731520" y="1435608"/>
+            <a:ext cx="7680960" cy="987552"/>
+          </a:xfrm>
+          <a:prstGeom prst="rect">
+            <a:avLst/>
+          </a:prstGeom>
+          <a:noFill/>
+          <a:ln/>
+        </p:spPr>
+        <p:txBody>
+          <a:bodyPr wrap="square" lIns="0" tIns="0" rIns="0" bIns="0" rtlCol="0" anchor="t">
+            <a:normAutofit/>
+          </a:bodyPr>
+          <a:lstStyle/>
+          <a:p>
+            <a:pPr marL="342900" indent="-342900">
+              <a:spcAft>
+                <a:spcPts val="600"/>
+              </a:spcAft>
+              <a:buSzPct val="100000"/>
+              <a:buChar char="•"/>
+            </a:pPr>
+            <a:r>
+              <a:rPr lang="en-US" sz="1400" dirty="0">
+                <a:solidFill>
+                  <a:srgbClr val="1F2937"/>
+                </a:solidFill>
+                <a:latin typeface="Calibri" pitchFamily="34" charset="0"/>
+                <a:ea typeface="Calibri" pitchFamily="34" charset="-122"/>
+                <a:cs typeface="Calibri" pitchFamily="34" charset="-120"/>
+              </a:rPr>
+              <a:t>Secrets in env vars / Dockerfile / git = leaked</a:t>
+            </a:r>
+            <a:endParaRPr lang="en-US" sz="1400" dirty="0"/>
+          </a:p>
+          <a:p>
+            <a:pPr marL="342900" indent="-342900">
+              <a:spcAft>
+                <a:spcPts val="600"/>
+              </a:spcAft>
+              <a:buSzPct val="100000"/>
+              <a:buChar char="•"/>
+            </a:pPr>
+            <a:r>
+              <a:rPr lang="en-US" sz="1400" dirty="0">
+                <a:solidFill>
+                  <a:srgbClr val="1F2937"/>
+                </a:solidFill>
+                <a:latin typeface="Calibri" pitchFamily="34" charset="0"/>
+                <a:ea typeface="Calibri" pitchFamily="34" charset="-122"/>
+                <a:cs typeface="Calibri" pitchFamily="34" charset="-120"/>
+              </a:rPr>
+              <a:t>Use a secrets manager / vault; rotate</a:t>
+            </a:r>
+            <a:endParaRPr lang="en-US" sz="1400" dirty="0"/>
+          </a:p>
+          <a:p>
+            <a:pPr marL="342900" indent="-342900">
+              <a:spcAft>
+                <a:spcPts val="600"/>
+              </a:spcAft>
+              <a:buSzPct val="100000"/>
+              <a:buChar char="•"/>
+            </a:pPr>
+            <a:r>
+              <a:rPr lang="en-US" sz="1400" dirty="0">
+                <a:solidFill>
+                  <a:srgbClr val="1F2937"/>
+                </a:solidFill>
+                <a:latin typeface="Calibri" pitchFamily="34" charset="0"/>
+                <a:ea typeface="Calibri" pitchFamily="34" charset="-122"/>
+                <a:cs typeface="Calibri" pitchFamily="34" charset="-120"/>
+              </a:rPr>
+              <a:t>Scan history (Gitleaks) — recall Week 2</a:t>
+            </a:r>
+            <a:endParaRPr lang="en-US" sz="1400" dirty="0"/>
+          </a:p>
+        </p:txBody>
+      </p:sp>
+      <p:sp>
+        <p:nvSpPr>
+          <p:cNvPr id="7" name="Text 4"/>
+          <p:cNvSpPr/>
+          <p:nvPr/>
+        </p:nvSpPr>
+        <p:spPr>
+          <a:xfrm>
+            <a:off x="457200" y="4800600"/>
+            <a:ext cx="6949440" cy="274320"/>
+          </a:xfrm>
+          <a:prstGeom prst="rect">
+            <a:avLst/>
+          </a:prstGeom>
+          <a:noFill/>
+          <a:ln/>
+        </p:spPr>
+        <p:txBody>
+          <a:bodyPr wrap="square" lIns="0" tIns="0" rIns="0" bIns="0" rtlCol="0" anchor="ctr"/>
+          <a:lstStyle/>
+          <a:p>
+            <a:pPr indent="0" marL="0">
+              <a:buNone/>
+            </a:pPr>
+            <a:r>
+              <a:rPr lang="en-US" sz="900" dirty="0">
+                <a:solidFill>
+                  <a:srgbClr val="64748B"/>
+                </a:solidFill>
+                <a:latin typeface="Calibri" pitchFamily="34" charset="0"/>
+                <a:ea typeface="Calibri" pitchFamily="34" charset="-122"/>
+                <a:cs typeface="Calibri" pitchFamily="34" charset="-120"/>
+              </a:rPr>
+              <a:t>Software Security · Week 13</a:t>
+            </a:r>
+            <a:endParaRPr lang="en-US" sz="900" dirty="0"/>
           </a:p>
         </p:txBody>
       </p:sp>
       <p:pic>
         <p:nvPicPr>
-          <p:cNvPr id="5" name="Image 1" descr="From a real build of week13-insecure:lab, the image history as a stack with the newest layer on top: CMD, EXPOSE, RUN chmod -R 777, RUN pip install, COPY dot dot, WORKDIR, then ENV AWS_SECRET_ACCESS_KEY and ENV API_TOKEN, both 0 bytes because the value lives in the image config, then the python:latest base layers. Arrows to three readouts: plain docker history still prints sk_live_supersecret_DO_NOT_DO_ (30 of 34 characters); docker history --no-trunc prints the whole token (the Task 3 command); docker inspect .Config.Env prints both keys in full. A fourth arrow: COPY dot dot copied Dockerfile.insecure itself into /app, so the secret is in a file too. Fix: never put the secret in the Dockerfile, inject it at run time, and rotate the key because every pushed image keeps the old value.">    </p:cNvPr>
+          <p:cNvPr id="8" name="Image 1" descr="/private/tmp/claude-501/-Users-pop7-Library-CloudStorage-OneDrive-MonsterConnectCo--Ltd-Lecture-KOSEN69---software-security/f63a82af-e1ad-40ed-89c4-03c6ca776e3f/scratchpad/lq-anim/slides/pptx/assets/logo-small.png">    </p:cNvPr>
           <p:cNvPicPr>
             <a:picLocks noChangeAspect="1"/>
           </p:cNvPicPr>
@@ -8155,69 +8518,6 @@
         </p:nvPicPr>
         <p:blipFill>
           <a:blip r:embed="rId2"/>
-          <a:stretch>
-            <a:fillRect/>
-          </a:stretch>
-        </p:blipFill>
-        <p:spPr>
-          <a:xfrm>
-            <a:off x="559443" y="1097280"/>
-            <a:ext cx="8025114" cy="3566160"/>
-          </a:xfrm>
-          <a:prstGeom prst="rect">
-            <a:avLst/>
-          </a:prstGeom>
-        </p:spPr>
-      </p:pic>
-      <p:sp>
-        <p:nvSpPr>
-          <p:cNvPr id="6" name="Text 2"/>
-          <p:cNvSpPr/>
-          <p:nvPr/>
-        </p:nvSpPr>
-        <p:spPr>
-          <a:xfrm>
-            <a:off x="457200" y="4800600"/>
-            <a:ext cx="6949440" cy="274320"/>
-          </a:xfrm>
-          <a:prstGeom prst="rect">
-            <a:avLst/>
-          </a:prstGeom>
-          <a:noFill/>
-          <a:ln/>
-        </p:spPr>
-        <p:txBody>
-          <a:bodyPr wrap="square" lIns="0" tIns="0" rIns="0" bIns="0" rtlCol="0" anchor="ctr"/>
-          <a:lstStyle/>
-          <a:p>
-            <a:pPr indent="0" marL="0">
-              <a:buNone/>
-            </a:pPr>
-            <a:r>
-              <a:rPr lang="en-US" sz="900" dirty="0">
-                <a:solidFill>
-                  <a:srgbClr val="64748B"/>
-                </a:solidFill>
-                <a:latin typeface="Calibri" pitchFamily="34" charset="0"/>
-                <a:ea typeface="Calibri" pitchFamily="34" charset="-122"/>
-                <a:cs typeface="Calibri" pitchFamily="34" charset="-120"/>
-              </a:rPr>
-              <a:t>Software Security · Week 13</a:t>
-            </a:r>
-            <a:endParaRPr lang="en-US" sz="900" dirty="0"/>
-          </a:p>
-        </p:txBody>
-      </p:sp>
-      <p:pic>
-        <p:nvPicPr>
-          <p:cNvPr id="7" name="Image 2" descr="/private/tmp/claude-501/-Users-pop7-Library-CloudStorage-OneDrive-MonsterConnectCo--Ltd-Lecture-KOSEN69---software-security/f63a82af-e1ad-40ed-89c4-03c6ca776e3f/scratchpad/vis-w13/slides/pptx/assets/logo-small.png">    </p:cNvPr>
-          <p:cNvPicPr>
-            <a:picLocks noChangeAspect="1"/>
-          </p:cNvPicPr>
-          <p:nvPr/>
-        </p:nvPicPr>
-        <p:blipFill>
-          <a:blip r:embed="rId3"/>
           <a:stretch>
             <a:fillRect/>
           </a:stretch>

--- a/slides/pptx/week13.pptx
+++ b/slides/pptx/week13.pptx
@@ -25,10 +25,9 @@
     <p:sldId id="273" r:id="rId19"/>
     <p:sldId id="274" r:id="rId20"/>
     <p:sldId id="275" r:id="rId21"/>
-    <p:sldId id="276" r:id="rId22"/>
   </p:sldIdLst>
   <p:notesMasterIdLst>
-    <p:notesMasterId r:id="rId23"/>
+    <p:notesMasterId r:id="rId22"/>
   </p:notesMasterIdLst>
   <p:sldSz cx="9144000" cy="5143500"/>
   <p:notesSz cx="5143500" cy="9144000"/>
@@ -963,7 +962,7 @@
           <a:p>
             <a:r>
               <a:rPr lang="en-US" dirty="0"/>
-              <a:t>Hands-on — this is the lab's insecure→hardened Dockerfile, always run dockerized (never a bare local trivy binary), against week13-hardened:lab (not a generic myapp:lab). The Trivy-blind-spot point is the actual lesson of this lab, not an aside — half the graded findings need a human, not a tool. Re-scan to prove improvement. ~5 min.</a:t>
+              <a:t>Press "fix only what Trivy flags": Failures 0, three defects still in the file — a clean scan is not a clean image. Then "a tag, not a digest": DS-0001 passes python:3.11-slim, but harden.md row 1 wants @sha256. Rules checked against real Trivy 0.76.1 on all 96 combinations: 4 → 0 matches scan.sh. ~4 min.</a:t>
             </a:r>
             <a:endParaRPr lang="en-US" dirty="0"/>
           </a:p>
@@ -1051,7 +1050,7 @@
           <a:p>
             <a:r>
               <a:rPr lang="en-US" dirty="0"/>
-              <a:t>Press "fix only what Trivy flags": Failures 0, three defects still in the file — a clean scan is not a clean image. Then "a tag, not a digest": DS-0001 passes python:3.11-slim, but harden.md row 1 wants @sha256. Rules checked against real Trivy 0.76.1 on all 96 combinations: 4 → 0 matches scan.sh. ~4 min.</a:t>
+              <a:t>Awareness only (K8s is its own course). Key takeaways: a privileged pod ≈ host root; mounted service-account tokens are a lateral-movement prize. Keep it brief. ~3 min.</a:t>
             </a:r>
             <a:endParaRPr lang="en-US" dirty="0"/>
           </a:p>
@@ -1139,7 +1138,8 @@
           <a:p>
             <a:r>
               <a:rPr lang="en-US" dirty="0"/>
-              <a:t>Awareness only (K8s is its own course). Key takeaways: a privileged pod ≈ host root; mounted service-account tokens are a lateral-movement prize. Keep it brief. ~3 min.</a:t>
+              <a:t>The whole lab's argument as one picture — walk it row by row once, landing on the Trivy split at the bottom: 3 rows have a rule ID to cite, 4 don't. That 3-of-7 (or "3 of 6" container-only, per the earlier slide) split is Task 1's actual grading rubric, not trivia. ~5 min.
+Diagram: The same app as two container images side by side, insecure vs hardened, six layers compared: mutable :latest tag vs a pinned digest, a baked-in secret vs runtime injection, root user vs distroless non-root, COPY-everything vs a minimal context, world-writable permissions vs read-only, and an unpinned pip install vs a discarded build stage. Below both, the same argument one layer up: the wildcard IAM policy vs the scoped one. The conclusion: Trivy flags only three of the seven defects shown here — the tag, the root user, and the secret. COPY .., chmod 777, the unpinned install, and the IAM JSON all need manual review; there is no rule for any of them.</a:t>
             </a:r>
             <a:endParaRPr lang="en-US" dirty="0"/>
           </a:p>
@@ -1227,8 +1227,7 @@
           <a:p>
             <a:r>
               <a:rPr lang="en-US" dirty="0"/>
-              <a:t>The whole lab's argument as one picture — walk it row by row once, landing on the Trivy split at the bottom: 3 rows have a rule ID to cite, 4 don't. That 3-of-7 (or "3 of 6" container-only, per the earlier slide) split is Task 1's actual grading rubric, not trivia. ~5 min.
-Diagram: The same app as two container images side by side, insecure vs hardened, six layers compared: mutable :latest tag vs a pinned digest, a baked-in secret vs runtime injection, root user vs distroless non-root, COPY-everything vs a minimal context, world-writable permissions vs read-only, and an unpinned pip install vs a discarded build stage. Below both, the same argument one layer up: the wildcard IAM policy vs the scoped one. The conclusion: Trivy flags only three of the seven defects shown here — the tag, the root user, and the secret. COPY .., chmod 777, the unpinned install, and the IAM JSON all need manual review; there is no rule for any of them.</a:t>
+              <a:t>Explain before lab: 9 flags total, two categories only — no separate bucket/storage flag, no IaC/localstack target exists in this lab. Find AND explain (why it's a finding, which fix applies) = the flag. Q6 of the quiz asks for one misconfig they explained + the principle it violated. ~3 min.</a:t>
             </a:r>
             <a:endParaRPr lang="en-US" dirty="0"/>
           </a:p>
@@ -1316,7 +1315,7 @@
           <a:p>
             <a:r>
               <a:rPr lang="en-US" dirty="0"/>
-              <a:t>Explain before lab: 9 flags total, two categories only — no separate bucket/storage flag, no IaC/localstack target exists in this lab. Find AND explain (why it's a finding, which fix applies) = the flag. Q6 of the quiz asks for one misconfig they explained + the principle it violated. ~3 min.</a:t>
+              <a:t>Before/after artifacts + the trivy delta prove the container-side fix; IAM has no scanner delta to show, it's reasoned/written. Don't let "trivy over Dockerfiles + IAM JSON" stand — that's the exact misconception this lab's own history already fixed once. AI-resilient tasks count.</a:t>
             </a:r>
             <a:endParaRPr lang="en-US" dirty="0"/>
           </a:p>
@@ -1404,7 +1403,7 @@
           <a:p>
             <a:r>
               <a:rPr lang="en-US" dirty="0"/>
-              <a:t>Before/after artifacts + the trivy delta prove the container-side fix; IAM has no scanner delta to show, it's reasoned/written. Don't let "trivy over Dockerfiles + IAM JSON" stand — that's the exact misconception this lab's own history already fixed once. AI-resilient tasks count.</a:t>
+              <a:t>Recap. Cold-call: "what does a `*:*` IAM policy cost you if the key leaks?" (everything — full blast radius). "Scan in CI" sets up W15. ~2 min.</a:t>
             </a:r>
             <a:endParaRPr lang="en-US" dirty="0"/>
           </a:p>
@@ -1580,7 +1579,7 @@
           <a:p>
             <a:r>
               <a:rPr lang="en-US" dirty="0"/>
-              <a:t>Recap. Cold-call: "what does a `*:*` IAM policy cost you if the key leaks?" (everything — full blast radius). "Scan in CI" sets up W15. ~2 min.</a:t>
+              <a:t>Cliffhanger: "Next week — the newest attack surface: make an AI assistant ignore its rules and leak secrets, with nothing but text."</a:t>
             </a:r>
             <a:endParaRPr lang="en-US" dirty="0"/>
           </a:p>
@@ -1604,94 +1603,6 @@
             <a:fld id="{F7021451-1387-4CA6-816F-3879F97B5CBC}" type="slidenum">
               <a:rPr lang="en-US"/>
               <a:t>20</a:t>
-            </a:fld>
-            <a:endParaRPr lang="en-US"/>
-          </a:p>
-        </p:txBody>
-      </p:sp>
-    </p:spTree>
-    <p:extLst>
-      <p:ext uri="{BB962C8B-B14F-4D97-AF65-F5344CB8AC3E}">
-        <p14:creationId xmlns:p14="http://schemas.microsoft.com/office/powerpoint/2010/main" val="1024086991"/>
-      </p:ext>
-    </p:extLst>
-  </p:cSld>
-  <p:clrMapOvr>
-    <a:masterClrMapping/>
-  </p:clrMapOvr>
-</p:notes>
-</file>
-
-<file path=ppt/notesSlides/notesSlide21.xml><?xml version="1.0" encoding="utf-8"?>
-<p:notes xmlns:a="http://schemas.openxmlformats.org/drawingml/2006/main" xmlns:r="http://schemas.openxmlformats.org/officeDocument/2006/relationships" xmlns:p="http://schemas.openxmlformats.org/presentationml/2006/main">
-  <p:cSld>
-    <p:spTree>
-      <p:nvGrpSpPr>
-        <p:cNvPr id="1" name=""/>
-        <p:cNvGrpSpPr/>
-        <p:nvPr/>
-      </p:nvGrpSpPr>
-      <p:grpSpPr>
-        <a:xfrm>
-          <a:off x="0" y="0"/>
-          <a:ext cx="0" cy="0"/>
-          <a:chOff x="0" y="0"/>
-          <a:chExt cx="0" cy="0"/>
-        </a:xfrm>
-      </p:grpSpPr>
-      <p:sp>
-        <p:nvSpPr>
-          <p:cNvPr id="2" name="Slide Image Placeholder 1"/>
-          <p:cNvSpPr>
-            <a:spLocks noGrp="1" noRot="1" noChangeAspect="1"/>
-          </p:cNvSpPr>
-          <p:nvPr>
-            <p:ph type="sldImg"/>
-          </p:nvPr>
-        </p:nvSpPr>
-        <p:spPr/>
-      </p:sp>
-      <p:sp>
-        <p:nvSpPr>
-          <p:cNvPr id="3" name="Notes Placeholder 2"/>
-          <p:cNvSpPr>
-            <a:spLocks noGrp="1"/>
-          </p:cNvSpPr>
-          <p:nvPr>
-            <p:ph type="body" idx="1"/>
-          </p:nvPr>
-        </p:nvSpPr>
-        <p:spPr/>
-        <p:txBody>
-          <a:bodyPr/>
-          <a:lstStyle/>
-          <a:p>
-            <a:r>
-              <a:rPr lang="en-US" dirty="0"/>
-              <a:t>Cliffhanger: "Next week — the newest attack surface: make an AI assistant ignore its rules and leak secrets, with nothing but text."</a:t>
-            </a:r>
-            <a:endParaRPr lang="en-US" dirty="0"/>
-          </a:p>
-        </p:txBody>
-      </p:sp>
-      <p:sp>
-        <p:nvSpPr>
-          <p:cNvPr id="4" name="Slide Number Placeholder 3"/>
-          <p:cNvSpPr>
-            <a:spLocks noGrp="1"/>
-          </p:cNvSpPr>
-          <p:nvPr>
-            <p:ph type="sldNum" sz="quarter" idx="10"/>
-          </p:nvPr>
-        </p:nvSpPr>
-        <p:spPr/>
-        <p:txBody>
-          <a:bodyPr/>
-          <a:lstStyle/>
-          <a:p>
-            <a:fld id="{F7021451-1387-4CA6-816F-3879F97B5CBC}" type="slidenum">
-              <a:rPr lang="en-US"/>
-              <a:t>21</a:t>
             </a:fld>
             <a:endParaRPr lang="en-US"/>
           </a:p>
@@ -2663,7 +2574,7 @@
       </p:grpSpPr>
       <p:pic>
         <p:nvPicPr>
-          <p:cNvPr id="2" name="Image 0" descr="/private/tmp/claude-501/-Users-pop7-Library-CloudStorage-OneDrive-MonsterConnectCo--Ltd-Lecture-KOSEN69---software-security/f63a82af-e1ad-40ed-89c4-03c6ca776e3f/scratchpad/lq-anim/slides/pptx/assets/logo-small.png">    </p:cNvPr>
+          <p:cNvPr id="2" name="Image 0" descr="/private/tmp/claude-501/-Users-pop7-Library-CloudStorage-OneDrive-MonsterConnectCo--Ltd-Lecture-KOSEN69---software-security/f63a82af-e1ad-40ed-89c4-03c6ca776e3f/scratchpad/lq-easy/slides/pptx/assets/logo-small.png">    </p:cNvPr>
           <p:cNvPicPr>
             <a:picLocks noChangeAspect="1"/>
           </p:cNvPicPr>
@@ -2992,7 +2903,7 @@
       </p:sp>
       <p:pic>
         <p:nvPicPr>
-          <p:cNvPr id="7" name="Image 2" descr="/private/tmp/claude-501/-Users-pop7-Library-CloudStorage-OneDrive-MonsterConnectCo--Ltd-Lecture-KOSEN69---software-security/f63a82af-e1ad-40ed-89c4-03c6ca776e3f/scratchpad/lq-anim/slides/pptx/assets/logo-small.png">    </p:cNvPr>
+          <p:cNvPr id="7" name="Image 2" descr="/private/tmp/claude-501/-Users-pop7-Library-CloudStorage-OneDrive-MonsterConnectCo--Ltd-Lecture-KOSEN69---software-security/f63a82af-e1ad-40ed-89c4-03c6ca776e3f/scratchpad/lq-easy/slides/pptx/assets/logo-small.png">    </p:cNvPr>
           <p:cNvPicPr>
             <a:picLocks noChangeAspect="1"/>
           </p:cNvPicPr>
@@ -3145,7 +3056,7 @@
         <p:spPr>
           <a:xfrm>
             <a:off x="548640" y="1325880"/>
-            <a:ext cx="8046720" cy="822960"/>
+            <a:ext cx="8046720" cy="1097280"/>
           </a:xfrm>
           <a:prstGeom prst="rect">
             <a:avLst/>
@@ -3171,7 +3082,7 @@
                 <a:ea typeface="Calibri" pitchFamily="34" charset="-122"/>
                 <a:cs typeface="Calibri" pitchFamily="34" charset="-120"/>
               </a:rPr>
-              <a:t>Real docker history / docker inspect output from both lab images. Pick a command.</a:t>
+              <a:t>Real docker history / docker inspect output from both lab images. Start with docker history --no-trunc and compare the ENV rows.</a:t>
             </a:r>
             <a:endParaRPr lang="en-US" sz="1400" dirty="0"/>
           </a:p>
@@ -3235,7 +3146,7 @@
       </p:sp>
       <p:pic>
         <p:nvPicPr>
-          <p:cNvPr id="7" name="Image 1" descr="/private/tmp/claude-501/-Users-pop7-Library-CloudStorage-OneDrive-MonsterConnectCo--Ltd-Lecture-KOSEN69---software-security/f63a82af-e1ad-40ed-89c4-03c6ca776e3f/scratchpad/lq-anim/slides/pptx/assets/logo-small.png">    </p:cNvPr>
+          <p:cNvPr id="7" name="Image 1" descr="/private/tmp/claude-501/-Users-pop7-Library-CloudStorage-OneDrive-MonsterConnectCo--Ltd-Lecture-KOSEN69---software-security/f63a82af-e1ad-40ed-89c4-03c6ca776e3f/scratchpad/lq-easy/slides/pptx/assets/logo-small.png">    </p:cNvPr>
           <p:cNvPicPr>
             <a:picLocks noChangeAspect="1"/>
           </p:cNvPicPr>
@@ -3536,7 +3447,7 @@
       </p:sp>
       <p:pic>
         <p:nvPicPr>
-          <p:cNvPr id="8" name="Image 1" descr="/private/tmp/claude-501/-Users-pop7-Library-CloudStorage-OneDrive-MonsterConnectCo--Ltd-Lecture-KOSEN69---software-security/f63a82af-e1ad-40ed-89c4-03c6ca776e3f/scratchpad/lq-anim/slides/pptx/assets/logo-small.png">    </p:cNvPr>
+          <p:cNvPr id="8" name="Image 1" descr="/private/tmp/claude-501/-Users-pop7-Library-CloudStorage-OneDrive-MonsterConnectCo--Ltd-Lecture-KOSEN69---software-security/f63a82af-e1ad-40ed-89c4-03c6ca776e3f/scratchpad/lq-easy/slides/pptx/assets/logo-small.png">    </p:cNvPr>
           <p:cNvPicPr>
             <a:picLocks noChangeAspect="1"/>
           </p:cNvPicPr>
@@ -3689,11 +3600,11 @@
         <p:spPr>
           <a:xfrm>
             <a:off x="457200" y="1325880"/>
-            <a:ext cx="8229600" cy="1591056"/>
+            <a:ext cx="8229600" cy="1371600"/>
           </a:xfrm>
           <a:prstGeom prst="roundRect">
             <a:avLst>
-              <a:gd name="adj" fmla="val 3448"/>
+              <a:gd name="adj" fmla="val 4000"/>
             </a:avLst>
           </a:prstGeom>
           <a:solidFill>
@@ -3716,7 +3627,7 @@
         <p:spPr>
           <a:xfrm>
             <a:off x="640080" y="1399032"/>
-            <a:ext cx="7863840" cy="1444752"/>
+            <a:ext cx="7863840" cy="1225296"/>
           </a:xfrm>
           <a:prstGeom prst="rect">
             <a:avLst/>
@@ -3742,7 +3653,7 @@
                 <a:ea typeface="Courier New" pitchFamily="34" charset="-122"/>
                 <a:cs typeface="Courier New" pitchFamily="34" charset="-120"/>
               </a:rPr>
-              <a:t># misconfig scan (Dockerfiles)</a:t>
+              <a:t># 1. Dockerfile misconfigs   2. known CVEs in the built image</a:t>
             </a:r>
             <a:endParaRPr lang="en-US" sz="1150" dirty="0"/>
           </a:p>
@@ -3793,7 +3704,7 @@
                 <a:ea typeface="Courier New" pitchFamily="34" charset="-122"/>
                 <a:cs typeface="Courier New" pitchFamily="34" charset="-120"/>
               </a:rPr>
-              <a:t># image CVE scan</a:t>
+              <a:t>docker run --rm -v /var/run/docker.sock:/var/run/docker.sock \</a:t>
             </a:r>
             <a:endParaRPr lang="en-US" sz="1150" dirty="0"/>
           </a:p>
@@ -3810,27 +3721,10 @@
                 <a:ea typeface="Courier New" pitchFamily="34" charset="-122"/>
                 <a:cs typeface="Courier New" pitchFamily="34" charset="-120"/>
               </a:rPr>
-              <a:t>docker run --rm -v /var/run/docker.sock:/var/run/docker.sock \</a:t>
+              <a:t>  aquasec/trivy:latest image --severity HIGH,CRITICAL week13-hardened:lab</a:t>
             </a:r>
             <a:endParaRPr lang="en-US" sz="1150" dirty="0"/>
           </a:p>
-          <a:p>
-            <a:pPr indent="0" marL="0">
-              <a:buNone/>
-            </a:pPr>
-            <a:r>
-              <a:rPr lang="en-US" sz="1150" dirty="0">
-                <a:solidFill>
-                  <a:srgbClr val="9FE7D6"/>
-                </a:solidFill>
-                <a:latin typeface="Courier New" pitchFamily="34" charset="0"/>
-                <a:ea typeface="Courier New" pitchFamily="34" charset="-122"/>
-                <a:cs typeface="Courier New" pitchFamily="34" charset="-120"/>
-              </a:rPr>
-              <a:t>  aquasec/trivy:latest image --severity HIGH,CRITICAL week13-hardened:lab</a:t>
-            </a:r>
-            <a:endParaRPr lang="en-US" sz="1150" dirty="0"/>
-          </a:p>
         </p:txBody>
       </p:sp>
       <p:sp>
@@ -3841,12 +3735,12 @@
         </p:nvSpPr>
         <p:spPr>
           <a:xfrm>
-            <a:off x="457200" y="3081528"/>
-            <a:ext cx="8229600" cy="987552"/>
+            <a:off x="457200" y="2862072"/>
+            <a:ext cx="8229600" cy="1609344"/>
           </a:xfrm>
           <a:prstGeom prst="roundRect">
             <a:avLst>
-              <a:gd name="adj" fmla="val 7407"/>
+              <a:gd name="adj" fmla="val 4545"/>
             </a:avLst>
           </a:prstGeom>
           <a:solidFill>
@@ -3870,8 +3764,8 @@
         </p:nvSpPr>
         <p:spPr>
           <a:xfrm>
-            <a:off x="731520" y="3191256"/>
-            <a:ext cx="7680960" cy="768096"/>
+            <a:off x="731520" y="2971800"/>
+            <a:ext cx="7680960" cy="1389888"/>
           </a:xfrm>
           <a:prstGeom prst="rect">
             <a:avLst/>
@@ -3901,45 +3795,87 @@
                 <a:ea typeface="Calibri" pitchFamily="34" charset="-122"/>
                 <a:cs typeface="Calibri" pitchFamily="34" charset="-120"/>
               </a:rPr>
-              <a:t>Multi-stage build: python:3.11-slim@sha256:... (compiles) → distroless gcr.io/distroless/python3-debian12@sha256:... (runs) — a smaller runtime image with no shell/package manager, USER 65532:65532 (non-root)</a:t>
+              <a:t>Two stages: build in python:3.11-slim, run in distroless (no shell, no package manager) as user 65532, not root</a:t>
             </a:r>
             <a:endParaRPr lang="en-US" sz="1400" dirty="0"/>
           </a:p>
-        </p:txBody>
-      </p:sp>
-      <p:sp>
-        <p:nvSpPr>
-          <p:cNvPr id="9" name="Text 6"/>
-          <p:cNvSpPr/>
-          <p:nvPr/>
-        </p:nvSpPr>
-        <p:spPr>
-          <a:xfrm>
-            <a:off x="457200" y="4800600"/>
-            <a:ext cx="6949440" cy="274320"/>
-          </a:xfrm>
-          <a:prstGeom prst="rect">
-            <a:avLst/>
-          </a:prstGeom>
-          <a:noFill/>
-          <a:ln/>
-        </p:spPr>
-        <p:txBody>
-          <a:bodyPr wrap="square" lIns="0" tIns="0" rIns="0" bIns="0" rtlCol="0" anchor="ctr"/>
-          <a:lstStyle/>
-          <a:p>
-            <a:pPr indent="0" marL="0">
-              <a:buNone/>
-            </a:pPr>
-            <a:r>
-              <a:rPr lang="en-US" sz="900" dirty="0">
-                <a:solidFill>
-                  <a:srgbClr val="64748B"/>
+          <a:p>
+            <a:pPr marL="342900" indent="-342900">
+              <a:spcAft>
+                <a:spcPts val="600"/>
+              </a:spcAft>
+              <a:buSzPct val="100000"/>
+              <a:buChar char="•"/>
+            </a:pPr>
+            <a:r>
+              <a:rPr lang="en-US" sz="1400" dirty="0">
+                <a:solidFill>
+                  <a:srgbClr val="1F2937"/>
                 </a:solidFill>
                 <a:latin typeface="Calibri" pitchFamily="34" charset="0"/>
                 <a:ea typeface="Calibri" pitchFamily="34" charset="-122"/>
                 <a:cs typeface="Calibri" pitchFamily="34" charset="-120"/>
               </a:rPr>
+              <a:t>Pin by digest (@sha256:...): a tag can be moved later, a digest cannot</a:t>
+            </a:r>
+            <a:endParaRPr lang="en-US" sz="1400" dirty="0"/>
+          </a:p>
+          <a:p>
+            <a:pPr marL="342900" indent="-342900">
+              <a:spcAft>
+                <a:spcPts val="600"/>
+              </a:spcAft>
+              <a:buSzPct val="100000"/>
+              <a:buChar char="•"/>
+            </a:pPr>
+            <a:r>
+              <a:rPr lang="en-US" sz="1400" dirty="0">
+                <a:solidFill>
+                  <a:srgbClr val="1F2937"/>
+                </a:solidFill>
+                <a:latin typeface="Calibri" pitchFamily="34" charset="0"/>
+                <a:ea typeface="Calibri" pitchFamily="34" charset="-122"/>
+                <a:cs typeface="Calibri" pitchFamily="34" charset="-120"/>
+              </a:rPr>
+              <a:t>Trivy finds only 3 of the 6 defects. COPY . ., chmod -R 777 and unpinned pip install: read the file</a:t>
+            </a:r>
+            <a:endParaRPr lang="en-US" sz="1400" dirty="0"/>
+          </a:p>
+        </p:txBody>
+      </p:sp>
+      <p:sp>
+        <p:nvSpPr>
+          <p:cNvPr id="9" name="Text 6"/>
+          <p:cNvSpPr/>
+          <p:nvPr/>
+        </p:nvSpPr>
+        <p:spPr>
+          <a:xfrm>
+            <a:off x="457200" y="4800600"/>
+            <a:ext cx="6949440" cy="274320"/>
+          </a:xfrm>
+          <a:prstGeom prst="rect">
+            <a:avLst/>
+          </a:prstGeom>
+          <a:noFill/>
+          <a:ln/>
+        </p:spPr>
+        <p:txBody>
+          <a:bodyPr wrap="square" lIns="0" tIns="0" rIns="0" bIns="0" rtlCol="0" anchor="ctr"/>
+          <a:lstStyle/>
+          <a:p>
+            <a:pPr indent="0" marL="0">
+              <a:buNone/>
+            </a:pPr>
+            <a:r>
+              <a:rPr lang="en-US" sz="900" dirty="0">
+                <a:solidFill>
+                  <a:srgbClr val="64748B"/>
+                </a:solidFill>
+                <a:latin typeface="Calibri" pitchFamily="34" charset="0"/>
+                <a:ea typeface="Calibri" pitchFamily="34" charset="-122"/>
+                <a:cs typeface="Calibri" pitchFamily="34" charset="-120"/>
+              </a:rPr>
               <a:t>Software Security · Week 13</a:t>
             </a:r>
             <a:endParaRPr lang="en-US" sz="900" dirty="0"/>
@@ -3948,7 +3884,7 @@
       </p:sp>
       <p:pic>
         <p:nvPicPr>
-          <p:cNvPr id="10" name="Image 1" descr="/private/tmp/claude-501/-Users-pop7-Library-CloudStorage-OneDrive-MonsterConnectCo--Ltd-Lecture-KOSEN69---software-security/f63a82af-e1ad-40ed-89c4-03c6ca776e3f/scratchpad/lq-anim/slides/pptx/assets/logo-small.png">    </p:cNvPr>
+          <p:cNvPr id="10" name="Image 1" descr="/private/tmp/claude-501/-Users-pop7-Library-CloudStorage-OneDrive-MonsterConnectCo--Ltd-Lecture-KOSEN69---software-security/f63a82af-e1ad-40ed-89c4-03c6ca776e3f/scratchpad/lq-easy/slides/pptx/assets/logo-small.png">    </p:cNvPr>
           <p:cNvPicPr>
             <a:picLocks noChangeAspect="1"/>
           </p:cNvPicPr>
@@ -4086,7 +4022,7 @@
                 <a:ea typeface="Arial" pitchFamily="34" charset="-122"/>
                 <a:cs typeface="Arial" pitchFamily="34" charset="-120"/>
               </a:rPr>
-              <a:t>Container image hardening (cont.)</a:t>
+              <a:t>Does Trivy see it?</a:t>
             </a:r>
             <a:endParaRPr lang="en-US" sz="2600" dirty="0"/>
           </a:p>
@@ -4094,43 +4030,14 @@
       </p:sp>
       <p:sp>
         <p:nvSpPr>
-          <p:cNvPr id="5" name="Shape 2"/>
-          <p:cNvSpPr/>
-          <p:nvPr/>
-        </p:nvSpPr>
-        <p:spPr>
-          <a:xfrm>
-            <a:off x="457200" y="1325880"/>
-            <a:ext cx="8229600" cy="1810512"/>
-          </a:xfrm>
-          <a:prstGeom prst="roundRect">
-            <a:avLst>
-              <a:gd name="adj" fmla="val 4040"/>
-            </a:avLst>
-          </a:prstGeom>
-          <a:solidFill>
-            <a:srgbClr val="F1F5F9"/>
-          </a:solidFill>
-          <a:ln/>
-          <a:effectLst>
-            <a:outerShdw sx="100000" sy="100000" kx="0" ky="0" algn="bl" rotWithShape="0" blurRad="76200" dist="25400" dir="5400000">
-              <a:srgbClr val="000000">
-                <a:alpha val="12000"/>
-              </a:srgbClr>
-            </a:outerShdw>
-          </a:effectLst>
-        </p:spPr>
-      </p:sp>
-      <p:sp>
-        <p:nvSpPr>
-          <p:cNvPr id="6" name="Text 3"/>
-          <p:cNvSpPr/>
-          <p:nvPr/>
-        </p:nvSpPr>
-        <p:spPr>
-          <a:xfrm>
-            <a:off x="731520" y="1435608"/>
-            <a:ext cx="7680960" cy="1591056"/>
+          <p:cNvPr id="5" name="Text 2"/>
+          <p:cNvSpPr/>
+          <p:nvPr/>
+        </p:nvSpPr>
+        <p:spPr>
+          <a:xfrm>
+            <a:off x="548640" y="1325880"/>
+            <a:ext cx="8046720" cy="1097280"/>
           </a:xfrm>
           <a:prstGeom prst="rect">
             <a:avLst/>
@@ -4144,12 +4051,8 @@
           </a:bodyPr>
           <a:lstStyle/>
           <a:p>
-            <a:pPr marL="342900" indent="-342900">
-              <a:spcAft>
-                <a:spcPts val="600"/>
-              </a:spcAft>
-              <a:buSzPct val="100000"/>
-              <a:buChar char="•"/>
+            <a:pPr indent="0" marL="0">
+              <a:buNone/>
             </a:pPr>
             <a:r>
               <a:rPr lang="en-US" sz="1400" dirty="0">
@@ -4160,17 +4063,13 @@
                 <a:ea typeface="Calibri" pitchFamily="34" charset="-122"/>
                 <a:cs typeface="Calibri" pitchFamily="34" charset="-120"/>
               </a:rPr>
-              <a:t>@sha256:... digest pins, not just a version tag — a tag can be repointed later, a digest can't</a:t>
+              <a:t>Start with fix only what Trivy flags: Trivy says 0, but 3 defects are still in the file. Then fix the rest one at a time.</a:t>
             </a:r>
             <a:endParaRPr lang="en-US" sz="1400" dirty="0"/>
           </a:p>
           <a:p>
-            <a:pPr marL="342900" indent="-342900">
-              <a:spcAft>
-                <a:spcPts val="600"/>
-              </a:spcAft>
-              <a:buSzPct val="100000"/>
-              <a:buChar char="•"/>
+            <a:pPr indent="0" marL="0">
+              <a:buNone/>
             </a:pPr>
             <a:r>
               <a:rPr lang="en-US" sz="1400" dirty="0">
@@ -4181,66 +4080,45 @@
                 <a:ea typeface="Calibri" pitchFamily="34" charset="-122"/>
                 <a:cs typeface="Calibri" pitchFamily="34" charset="-120"/>
               </a:rPr>
-              <a:t>Re-scan to prove reduced findings</a:t>
+              <a:t>Try it live: /sim/trivy-blindspot (interactive simulation, web only)</a:t>
             </a:r>
             <a:endParaRPr lang="en-US" sz="1400" dirty="0"/>
           </a:p>
-          <a:p>
-            <a:pPr marL="342900" indent="-342900">
-              <a:spcAft>
-                <a:spcPts val="600"/>
-              </a:spcAft>
-              <a:buSzPct val="100000"/>
-              <a:buChar char="•"/>
-            </a:pPr>
-            <a:r>
-              <a:rPr lang="en-US" sz="1400" dirty="0">
-                <a:solidFill>
-                  <a:srgbClr val="1F2937"/>
+        </p:txBody>
+      </p:sp>
+      <p:sp>
+        <p:nvSpPr>
+          <p:cNvPr id="6" name="Text 3"/>
+          <p:cNvSpPr/>
+          <p:nvPr/>
+        </p:nvSpPr>
+        <p:spPr>
+          <a:xfrm>
+            <a:off x="457200" y="4800600"/>
+            <a:ext cx="6949440" cy="274320"/>
+          </a:xfrm>
+          <a:prstGeom prst="rect">
+            <a:avLst/>
+          </a:prstGeom>
+          <a:noFill/>
+          <a:ln/>
+        </p:spPr>
+        <p:txBody>
+          <a:bodyPr wrap="square" lIns="0" tIns="0" rIns="0" bIns="0" rtlCol="0" anchor="ctr"/>
+          <a:lstStyle/>
+          <a:p>
+            <a:pPr indent="0" marL="0">
+              <a:buNone/>
+            </a:pPr>
+            <a:r>
+              <a:rPr lang="en-US" sz="900" dirty="0">
+                <a:solidFill>
+                  <a:srgbClr val="64748B"/>
                 </a:solidFill>
                 <a:latin typeface="Calibri" pitchFamily="34" charset="0"/>
                 <a:ea typeface="Calibri" pitchFamily="34" charset="-122"/>
                 <a:cs typeface="Calibri" pitchFamily="34" charset="-120"/>
               </a:rPr>
-              <a:t>Trivy only catches 3 of 6 planted defects (:latest, root user, secret-in-ENV) — COPY . ., chmod -R 777, and unpinned pip install need manual review, no rule fires</a:t>
-            </a:r>
-            <a:endParaRPr lang="en-US" sz="1400" dirty="0"/>
-          </a:p>
-        </p:txBody>
-      </p:sp>
-      <p:sp>
-        <p:nvSpPr>
-          <p:cNvPr id="7" name="Text 4"/>
-          <p:cNvSpPr/>
-          <p:nvPr/>
-        </p:nvSpPr>
-        <p:spPr>
-          <a:xfrm>
-            <a:off x="457200" y="4800600"/>
-            <a:ext cx="6949440" cy="274320"/>
-          </a:xfrm>
-          <a:prstGeom prst="rect">
-            <a:avLst/>
-          </a:prstGeom>
-          <a:noFill/>
-          <a:ln/>
-        </p:spPr>
-        <p:txBody>
-          <a:bodyPr wrap="square" lIns="0" tIns="0" rIns="0" bIns="0" rtlCol="0" anchor="ctr"/>
-          <a:lstStyle/>
-          <a:p>
-            <a:pPr indent="0" marL="0">
-              <a:buNone/>
-            </a:pPr>
-            <a:r>
-              <a:rPr lang="en-US" sz="900" dirty="0">
-                <a:solidFill>
-                  <a:srgbClr val="64748B"/>
-                </a:solidFill>
-                <a:latin typeface="Calibri" pitchFamily="34" charset="0"/>
-                <a:ea typeface="Calibri" pitchFamily="34" charset="-122"/>
-                <a:cs typeface="Calibri" pitchFamily="34" charset="-120"/>
-              </a:rPr>
               <a:t>Software Security · Week 13</a:t>
             </a:r>
             <a:endParaRPr lang="en-US" sz="900" dirty="0"/>
@@ -4249,7 +4127,7 @@
       </p:sp>
       <p:pic>
         <p:nvPicPr>
-          <p:cNvPr id="8" name="Image 1" descr="/private/tmp/claude-501/-Users-pop7-Library-CloudStorage-OneDrive-MonsterConnectCo--Ltd-Lecture-KOSEN69---software-security/f63a82af-e1ad-40ed-89c4-03c6ca776e3f/scratchpad/lq-anim/slides/pptx/assets/logo-small.png">    </p:cNvPr>
+          <p:cNvPr id="7" name="Image 1" descr="/private/tmp/claude-501/-Users-pop7-Library-CloudStorage-OneDrive-MonsterConnectCo--Ltd-Lecture-KOSEN69---software-security/f63a82af-e1ad-40ed-89c4-03c6ca776e3f/scratchpad/lq-easy/slides/pptx/assets/logo-small.png">    </p:cNvPr>
           <p:cNvPicPr>
             <a:picLocks noChangeAspect="1"/>
           </p:cNvPicPr>
@@ -4387,7 +4265,7 @@
                 <a:ea typeface="Arial" pitchFamily="34" charset="-122"/>
                 <a:cs typeface="Arial" pitchFamily="34" charset="-120"/>
               </a:rPr>
-              <a:t>Does Trivy see it?</a:t>
+              <a:t>Kubernetes basics (awareness)</a:t>
             </a:r>
             <a:endParaRPr lang="en-US" sz="2600" dirty="0"/>
           </a:p>
@@ -4395,14 +4273,43 @@
       </p:sp>
       <p:sp>
         <p:nvSpPr>
-          <p:cNvPr id="5" name="Text 2"/>
-          <p:cNvSpPr/>
-          <p:nvPr/>
-        </p:nvSpPr>
-        <p:spPr>
-          <a:xfrm>
-            <a:off x="548640" y="1325880"/>
-            <a:ext cx="8046720" cy="822960"/>
+          <p:cNvPr id="5" name="Shape 2"/>
+          <p:cNvSpPr/>
+          <p:nvPr/>
+        </p:nvSpPr>
+        <p:spPr>
+          <a:xfrm>
+            <a:off x="457200" y="1325880"/>
+            <a:ext cx="8229600" cy="1097280"/>
+          </a:xfrm>
+          <a:prstGeom prst="roundRect">
+            <a:avLst>
+              <a:gd name="adj" fmla="val 6667"/>
+            </a:avLst>
+          </a:prstGeom>
+          <a:solidFill>
+            <a:srgbClr val="F1F5F9"/>
+          </a:solidFill>
+          <a:ln/>
+          <a:effectLst>
+            <a:outerShdw sx="100000" sy="100000" kx="0" ky="0" algn="bl" rotWithShape="0" blurRad="76200" dist="25400" dir="5400000">
+              <a:srgbClr val="000000">
+                <a:alpha val="12000"/>
+              </a:srgbClr>
+            </a:outerShdw>
+          </a:effectLst>
+        </p:spPr>
+      </p:sp>
+      <p:sp>
+        <p:nvSpPr>
+          <p:cNvPr id="6" name="Text 3"/>
+          <p:cNvSpPr/>
+          <p:nvPr/>
+        </p:nvSpPr>
+        <p:spPr>
+          <a:xfrm>
+            <a:off x="731520" y="1435608"/>
+            <a:ext cx="7680960" cy="877824"/>
           </a:xfrm>
           <a:prstGeom prst="rect">
             <a:avLst/>
@@ -4416,8 +4323,12 @@
           </a:bodyPr>
           <a:lstStyle/>
           <a:p>
-            <a:pPr indent="0" marL="0">
-              <a:buNone/>
+            <a:pPr marL="342900" indent="-342900">
+              <a:spcAft>
+                <a:spcPts val="600"/>
+              </a:spcAft>
+              <a:buSzPct val="100000"/>
+              <a:buChar char="•"/>
             </a:pPr>
             <a:r>
               <a:rPr lang="en-US" sz="1400" dirty="0">
@@ -4428,13 +4339,17 @@
                 <a:ea typeface="Calibri" pitchFamily="34" charset="-122"/>
                 <a:cs typeface="Calibri" pitchFamily="34" charset="-120"/>
               </a:rPr>
-              <a:t>Fix the six defects one at a time and watch trivy config re-score the file.</a:t>
+              <a:t>Pod security (a pod = one or more containers run together), network policies, RBAC (role-based access control)</a:t>
             </a:r>
             <a:endParaRPr lang="en-US" sz="1400" dirty="0"/>
           </a:p>
           <a:p>
-            <a:pPr indent="0" marL="0">
-              <a:buNone/>
+            <a:pPr marL="342900" indent="-342900">
+              <a:spcAft>
+                <a:spcPts val="600"/>
+              </a:spcAft>
+              <a:buSzPct val="100000"/>
+              <a:buChar char="•"/>
             </a:pPr>
             <a:r>
               <a:rPr lang="en-US" sz="1400" dirty="0">
@@ -4445,7 +4360,7 @@
                 <a:ea typeface="Calibri" pitchFamily="34" charset="-122"/>
                 <a:cs typeface="Calibri" pitchFamily="34" charset="-120"/>
               </a:rPr>
-              <a:t>Try it live: /sim/trivy-blindspot (interactive simulation, web only)</a:t>
+              <a:t>Don't run privileged; limit service-account tokens</a:t>
             </a:r>
             <a:endParaRPr lang="en-US" sz="1400" dirty="0"/>
           </a:p>
@@ -4453,7 +4368,7 @@
       </p:sp>
       <p:sp>
         <p:nvSpPr>
-          <p:cNvPr id="6" name="Text 3"/>
+          <p:cNvPr id="7" name="Text 4"/>
           <p:cNvSpPr/>
           <p:nvPr/>
         </p:nvSpPr>
@@ -4492,7 +4407,7 @@
       </p:sp>
       <p:pic>
         <p:nvPicPr>
-          <p:cNvPr id="7" name="Image 1" descr="/private/tmp/claude-501/-Users-pop7-Library-CloudStorage-OneDrive-MonsterConnectCo--Ltd-Lecture-KOSEN69---software-security/f63a82af-e1ad-40ed-89c4-03c6ca776e3f/scratchpad/lq-anim/slides/pptx/assets/logo-small.png">    </p:cNvPr>
+          <p:cNvPr id="8" name="Image 1" descr="/private/tmp/claude-501/-Users-pop7-Library-CloudStorage-OneDrive-MonsterConnectCo--Ltd-Lecture-KOSEN69---software-security/f63a82af-e1ad-40ed-89c4-03c6ca776e3f/scratchpad/lq-easy/slides/pptx/assets/logo-small.png">    </p:cNvPr>
           <p:cNvPicPr>
             <a:picLocks noChangeAspect="1"/>
           </p:cNvPicPr>
@@ -4630,51 +4545,46 @@
                 <a:ea typeface="Arial" pitchFamily="34" charset="-122"/>
                 <a:cs typeface="Arial" pitchFamily="34" charset="-120"/>
               </a:rPr>
-              <a:t>Kubernetes basics (awareness)</a:t>
+              <a:t>Same app, shipped twice</a:t>
             </a:r>
             <a:endParaRPr lang="en-US" sz="2600" dirty="0"/>
           </a:p>
         </p:txBody>
       </p:sp>
-      <p:sp>
-        <p:nvSpPr>
-          <p:cNvPr id="5" name="Shape 2"/>
-          <p:cNvSpPr/>
-          <p:nvPr/>
-        </p:nvSpPr>
-        <p:spPr>
-          <a:xfrm>
-            <a:off x="457200" y="1325880"/>
-            <a:ext cx="8229600" cy="896112"/>
-          </a:xfrm>
-          <a:prstGeom prst="roundRect">
-            <a:avLst>
-              <a:gd name="adj" fmla="val 8163"/>
-            </a:avLst>
-          </a:prstGeom>
-          <a:solidFill>
-            <a:srgbClr val="F1F5F9"/>
-          </a:solidFill>
-          <a:ln/>
-          <a:effectLst>
-            <a:outerShdw sx="100000" sy="100000" kx="0" ky="0" algn="bl" rotWithShape="0" blurRad="76200" dist="25400" dir="5400000">
-              <a:srgbClr val="000000">
-                <a:alpha val="12000"/>
-              </a:srgbClr>
-            </a:outerShdw>
-          </a:effectLst>
-        </p:spPr>
-      </p:sp>
-      <p:sp>
-        <p:nvSpPr>
-          <p:cNvPr id="6" name="Text 3"/>
-          <p:cNvSpPr/>
-          <p:nvPr/>
-        </p:nvSpPr>
-        <p:spPr>
-          <a:xfrm>
-            <a:off x="731520" y="1435608"/>
-            <a:ext cx="7680960" cy="676656"/>
+      <p:pic>
+        <p:nvPicPr>
+          <p:cNvPr id="5" name="Image 1" descr="The same app as two container images side by side, insecure vs hardened, six layers compared: mutable :latest tag vs a pinned digest, a baked-in secret vs runtime injection, root user vs distroless non-root, COPY-everything vs a minimal context, world-writable permissions vs read-only, and an unpinned pip install vs a discarded build stage. Below both, the same argument one layer up: the wildcard IAM policy vs the scoped one. The conclusion: Trivy flags only three of the seven defects shown here — the tag, the root user, and the secret. COPY .., chmod 777, the unpinned install, and the IAM JSON all need manual review; there is no rule for any of them.">    </p:cNvPr>
+          <p:cNvPicPr>
+            <a:picLocks noChangeAspect="1"/>
+          </p:cNvPicPr>
+          <p:nvPr/>
+        </p:nvPicPr>
+        <p:blipFill>
+          <a:blip r:embed="rId2"/>
+          <a:stretch>
+            <a:fillRect/>
+          </a:stretch>
+        </p:blipFill>
+        <p:spPr>
+          <a:xfrm>
+            <a:off x="3036517" y="1097280"/>
+            <a:ext cx="3070967" cy="3566160"/>
+          </a:xfrm>
+          <a:prstGeom prst="rect">
+            <a:avLst/>
+          </a:prstGeom>
+        </p:spPr>
+      </p:pic>
+      <p:sp>
+        <p:nvSpPr>
+          <p:cNvPr id="6" name="Text 2"/>
+          <p:cNvSpPr/>
+          <p:nvPr/>
+        </p:nvSpPr>
+        <p:spPr>
+          <a:xfrm>
+            <a:off x="457200" y="4800600"/>
+            <a:ext cx="6949440" cy="274320"/>
           </a:xfrm>
           <a:prstGeom prst="rect">
             <a:avLst/>
@@ -4683,87 +4593,21 @@
           <a:ln/>
         </p:spPr>
         <p:txBody>
-          <a:bodyPr wrap="square" lIns="0" tIns="0" rIns="0" bIns="0" rtlCol="0" anchor="t">
-            <a:normAutofit/>
-          </a:bodyPr>
-          <a:lstStyle/>
-          <a:p>
-            <a:pPr marL="342900" indent="-342900">
-              <a:spcAft>
-                <a:spcPts val="600"/>
-              </a:spcAft>
-              <a:buSzPct val="100000"/>
-              <a:buChar char="•"/>
-            </a:pPr>
-            <a:r>
-              <a:rPr lang="en-US" sz="1400" dirty="0">
-                <a:solidFill>
-                  <a:srgbClr val="1F2937"/>
+          <a:bodyPr wrap="square" lIns="0" tIns="0" rIns="0" bIns="0" rtlCol="0" anchor="ctr"/>
+          <a:lstStyle/>
+          <a:p>
+            <a:pPr indent="0" marL="0">
+              <a:buNone/>
+            </a:pPr>
+            <a:r>
+              <a:rPr lang="en-US" sz="900" dirty="0">
+                <a:solidFill>
+                  <a:srgbClr val="64748B"/>
                 </a:solidFill>
                 <a:latin typeface="Calibri" pitchFamily="34" charset="0"/>
                 <a:ea typeface="Calibri" pitchFamily="34" charset="-122"/>
                 <a:cs typeface="Calibri" pitchFamily="34" charset="-120"/>
               </a:rPr>
-              <a:t>Pod security, network policies, RBAC</a:t>
-            </a:r>
-            <a:endParaRPr lang="en-US" sz="1400" dirty="0"/>
-          </a:p>
-          <a:p>
-            <a:pPr marL="342900" indent="-342900">
-              <a:spcAft>
-                <a:spcPts val="600"/>
-              </a:spcAft>
-              <a:buSzPct val="100000"/>
-              <a:buChar char="•"/>
-            </a:pPr>
-            <a:r>
-              <a:rPr lang="en-US" sz="1400" dirty="0">
-                <a:solidFill>
-                  <a:srgbClr val="1F2937"/>
-                </a:solidFill>
-                <a:latin typeface="Calibri" pitchFamily="34" charset="0"/>
-                <a:ea typeface="Calibri" pitchFamily="34" charset="-122"/>
-                <a:cs typeface="Calibri" pitchFamily="34" charset="-120"/>
-              </a:rPr>
-              <a:t>Don't run privileged; limit service-account tokens</a:t>
-            </a:r>
-            <a:endParaRPr lang="en-US" sz="1400" dirty="0"/>
-          </a:p>
-        </p:txBody>
-      </p:sp>
-      <p:sp>
-        <p:nvSpPr>
-          <p:cNvPr id="7" name="Text 4"/>
-          <p:cNvSpPr/>
-          <p:nvPr/>
-        </p:nvSpPr>
-        <p:spPr>
-          <a:xfrm>
-            <a:off x="457200" y="4800600"/>
-            <a:ext cx="6949440" cy="274320"/>
-          </a:xfrm>
-          <a:prstGeom prst="rect">
-            <a:avLst/>
-          </a:prstGeom>
-          <a:noFill/>
-          <a:ln/>
-        </p:spPr>
-        <p:txBody>
-          <a:bodyPr wrap="square" lIns="0" tIns="0" rIns="0" bIns="0" rtlCol="0" anchor="ctr"/>
-          <a:lstStyle/>
-          <a:p>
-            <a:pPr indent="0" marL="0">
-              <a:buNone/>
-            </a:pPr>
-            <a:r>
-              <a:rPr lang="en-US" sz="900" dirty="0">
-                <a:solidFill>
-                  <a:srgbClr val="64748B"/>
-                </a:solidFill>
-                <a:latin typeface="Calibri" pitchFamily="34" charset="0"/>
-                <a:ea typeface="Calibri" pitchFamily="34" charset="-122"/>
-                <a:cs typeface="Calibri" pitchFamily="34" charset="-120"/>
-              </a:rPr>
               <a:t>Software Security · Week 13</a:t>
             </a:r>
             <a:endParaRPr lang="en-US" sz="900" dirty="0"/>
@@ -4772,14 +4616,14 @@
       </p:sp>
       <p:pic>
         <p:nvPicPr>
-          <p:cNvPr id="8" name="Image 1" descr="/private/tmp/claude-501/-Users-pop7-Library-CloudStorage-OneDrive-MonsterConnectCo--Ltd-Lecture-KOSEN69---software-security/f63a82af-e1ad-40ed-89c4-03c6ca776e3f/scratchpad/lq-anim/slides/pptx/assets/logo-small.png">    </p:cNvPr>
+          <p:cNvPr id="7" name="Image 2" descr="/private/tmp/claude-501/-Users-pop7-Library-CloudStorage-OneDrive-MonsterConnectCo--Ltd-Lecture-KOSEN69---software-security/f63a82af-e1ad-40ed-89c4-03c6ca776e3f/scratchpad/lq-easy/slides/pptx/assets/logo-small.png">    </p:cNvPr>
           <p:cNvPicPr>
             <a:picLocks noChangeAspect="1"/>
           </p:cNvPicPr>
           <p:nvPr/>
         </p:nvPicPr>
         <p:blipFill>
-          <a:blip r:embed="rId2"/>
+          <a:blip r:embed="rId3"/>
           <a:stretch>
             <a:fillRect/>
           </a:stretch>
@@ -4910,15 +4754,295 @@
                 <a:ea typeface="Arial" pitchFamily="34" charset="-122"/>
                 <a:cs typeface="Arial" pitchFamily="34" charset="-120"/>
               </a:rPr>
-              <a:t>Same app, shipped twice</a:t>
+              <a:t>🔍 Game — Misconfig Hunt</a:t>
             </a:r>
             <a:endParaRPr lang="en-US" sz="2600" dirty="0"/>
+          </a:p>
+        </p:txBody>
+      </p:sp>
+      <p:sp>
+        <p:nvSpPr>
+          <p:cNvPr id="5" name="Text 2"/>
+          <p:cNvSpPr/>
+          <p:nvPr/>
+        </p:nvSpPr>
+        <p:spPr>
+          <a:xfrm>
+            <a:off x="548640" y="1325880"/>
+            <a:ext cx="8046720" cy="548640"/>
+          </a:xfrm>
+          <a:prstGeom prst="rect">
+            <a:avLst/>
+          </a:prstGeom>
+          <a:noFill/>
+          <a:ln/>
+        </p:spPr>
+        <p:txBody>
+          <a:bodyPr wrap="square" lIns="0" tIns="0" rIns="0" bIns="0" rtlCol="0" anchor="t">
+            <a:normAutofit/>
+          </a:bodyPr>
+          <a:lstStyle/>
+          <a:p>
+            <a:pPr indent="0" marL="0">
+              <a:buNone/>
+            </a:pPr>
+            <a:r>
+              <a:rPr lang="en-US" sz="1400" dirty="0">
+                <a:solidFill>
+                  <a:srgbClr val="1F2937"/>
+                </a:solidFill>
+                <a:latin typeface="Calibri" pitchFamily="34" charset="0"/>
+                <a:ea typeface="Calibri" pitchFamily="34" charset="-122"/>
+                <a:cs typeface="Calibri" pitchFamily="34" charset="-120"/>
+              </a:rPr>
+              <a:t>9 flags — each misconfiguration found + explained = a flag:</a:t>
+            </a:r>
+            <a:endParaRPr lang="en-US" sz="1400" dirty="0"/>
+          </a:p>
+        </p:txBody>
+      </p:sp>
+      <p:sp>
+        <p:nvSpPr>
+          <p:cNvPr id="6" name="Shape 3"/>
+          <p:cNvSpPr/>
+          <p:nvPr/>
+        </p:nvSpPr>
+        <p:spPr>
+          <a:xfrm>
+            <a:off x="502920" y="1965960"/>
+            <a:ext cx="384048" cy="384048"/>
+          </a:xfrm>
+          <a:prstGeom prst="ellipse">
+            <a:avLst/>
+          </a:prstGeom>
+          <a:solidFill>
+            <a:srgbClr val="E35205"/>
+          </a:solidFill>
+          <a:ln/>
+        </p:spPr>
+      </p:sp>
+      <p:sp>
+        <p:nvSpPr>
+          <p:cNvPr id="7" name="Text 4"/>
+          <p:cNvSpPr/>
+          <p:nvPr/>
+        </p:nvSpPr>
+        <p:spPr>
+          <a:xfrm>
+            <a:off x="502920" y="1965960"/>
+            <a:ext cx="384048" cy="384048"/>
+          </a:xfrm>
+          <a:prstGeom prst="rect">
+            <a:avLst/>
+          </a:prstGeom>
+          <a:noFill/>
+          <a:ln/>
+        </p:spPr>
+        <p:txBody>
+          <a:bodyPr wrap="square" lIns="0" tIns="0" rIns="0" bIns="0" rtlCol="0" anchor="ctr"/>
+          <a:lstStyle/>
+          <a:p>
+            <a:pPr algn="ctr" indent="0" marL="0">
+              <a:buNone/>
+            </a:pPr>
+            <a:r>
+              <a:rPr lang="en-US" sz="1500" b="1" dirty="0">
+                <a:solidFill>
+                  <a:srgbClr val="0E1726"/>
+                </a:solidFill>
+                <a:latin typeface="Arial" pitchFamily="34" charset="0"/>
+                <a:ea typeface="Arial" pitchFamily="34" charset="-122"/>
+                <a:cs typeface="Arial" pitchFamily="34" charset="-120"/>
+              </a:rPr>
+              <a:t>1</a:t>
+            </a:r>
+            <a:endParaRPr lang="en-US" sz="1500" dirty="0"/>
+          </a:p>
+        </p:txBody>
+      </p:sp>
+      <p:sp>
+        <p:nvSpPr>
+          <p:cNvPr id="8" name="Text 5"/>
+          <p:cNvSpPr/>
+          <p:nvPr/>
+        </p:nvSpPr>
+        <p:spPr>
+          <a:xfrm>
+            <a:off x="1051560" y="1965960"/>
+            <a:ext cx="7589520" cy="658368"/>
+          </a:xfrm>
+          <a:prstGeom prst="rect">
+            <a:avLst/>
+          </a:prstGeom>
+          <a:noFill/>
+          <a:ln/>
+        </p:spPr>
+        <p:txBody>
+          <a:bodyPr wrap="square" lIns="0" tIns="0" rIns="0" bIns="0" rtlCol="0" anchor="ctr">
+            <a:normAutofit/>
+          </a:bodyPr>
+          <a:lstStyle/>
+          <a:p>
+            <a:pPr indent="0" marL="0">
+              <a:buNone/>
+            </a:pPr>
+            <a:r>
+              <a:rPr lang="en-US" sz="1350" dirty="0">
+                <a:solidFill>
+                  <a:srgbClr val="1F2937"/>
+                </a:solidFill>
+                <a:latin typeface="Calibri" pitchFamily="34" charset="0"/>
+                <a:ea typeface="Calibri" pitchFamily="34" charset="-122"/>
+                <a:cs typeface="Calibri" pitchFamily="34" charset="-120"/>
+              </a:rPr>
+              <a:t>Container (6): :latest tag, root user, secret-in-ENV, COPY . ., chmod -R 777, unpinned pip install</a:t>
+            </a:r>
+            <a:endParaRPr lang="en-US" sz="1350" dirty="0"/>
+          </a:p>
+        </p:txBody>
+      </p:sp>
+      <p:sp>
+        <p:nvSpPr>
+          <p:cNvPr id="9" name="Shape 6"/>
+          <p:cNvSpPr/>
+          <p:nvPr/>
+        </p:nvSpPr>
+        <p:spPr>
+          <a:xfrm>
+            <a:off x="502920" y="2697480"/>
+            <a:ext cx="384048" cy="384048"/>
+          </a:xfrm>
+          <a:prstGeom prst="ellipse">
+            <a:avLst/>
+          </a:prstGeom>
+          <a:solidFill>
+            <a:srgbClr val="E35205"/>
+          </a:solidFill>
+          <a:ln/>
+        </p:spPr>
+      </p:sp>
+      <p:sp>
+        <p:nvSpPr>
+          <p:cNvPr id="10" name="Text 7"/>
+          <p:cNvSpPr/>
+          <p:nvPr/>
+        </p:nvSpPr>
+        <p:spPr>
+          <a:xfrm>
+            <a:off x="502920" y="2697480"/>
+            <a:ext cx="384048" cy="384048"/>
+          </a:xfrm>
+          <a:prstGeom prst="rect">
+            <a:avLst/>
+          </a:prstGeom>
+          <a:noFill/>
+          <a:ln/>
+        </p:spPr>
+        <p:txBody>
+          <a:bodyPr wrap="square" lIns="0" tIns="0" rIns="0" bIns="0" rtlCol="0" anchor="ctr"/>
+          <a:lstStyle/>
+          <a:p>
+            <a:pPr algn="ctr" indent="0" marL="0">
+              <a:buNone/>
+            </a:pPr>
+            <a:r>
+              <a:rPr lang="en-US" sz="1500" b="1" dirty="0">
+                <a:solidFill>
+                  <a:srgbClr val="0E1726"/>
+                </a:solidFill>
+                <a:latin typeface="Arial" pitchFamily="34" charset="0"/>
+                <a:ea typeface="Arial" pitchFamily="34" charset="-122"/>
+                <a:cs typeface="Arial" pitchFamily="34" charset="-120"/>
+              </a:rPr>
+              <a:t>2</a:t>
+            </a:r>
+            <a:endParaRPr lang="en-US" sz="1500" dirty="0"/>
+          </a:p>
+        </p:txBody>
+      </p:sp>
+      <p:sp>
+        <p:nvSpPr>
+          <p:cNvPr id="11" name="Text 8"/>
+          <p:cNvSpPr/>
+          <p:nvPr/>
+        </p:nvSpPr>
+        <p:spPr>
+          <a:xfrm>
+            <a:off x="1051560" y="2697480"/>
+            <a:ext cx="7589520" cy="402336"/>
+          </a:xfrm>
+          <a:prstGeom prst="rect">
+            <a:avLst/>
+          </a:prstGeom>
+          <a:noFill/>
+          <a:ln/>
+        </p:spPr>
+        <p:txBody>
+          <a:bodyPr wrap="square" lIns="0" tIns="0" rIns="0" bIns="0" rtlCol="0" anchor="ctr">
+            <a:normAutofit/>
+          </a:bodyPr>
+          <a:lstStyle/>
+          <a:p>
+            <a:pPr indent="0" marL="0">
+              <a:buNone/>
+            </a:pPr>
+            <a:r>
+              <a:rPr lang="en-US" sz="1350" dirty="0">
+                <a:solidFill>
+                  <a:srgbClr val="1F2937"/>
+                </a:solidFill>
+                <a:latin typeface="Calibri" pitchFamily="34" charset="0"/>
+                <a:ea typeface="Calibri" pitchFamily="34" charset="-122"/>
+                <a:cs typeface="Calibri" pitchFamily="34" charset="-120"/>
+              </a:rPr>
+              <a:t>IAM (3): Resource:"*" (CWE-732), Action:"*" (CWE-269), missing Condition scoping</a:t>
+            </a:r>
+            <a:endParaRPr lang="en-US" sz="1350" dirty="0"/>
+          </a:p>
+        </p:txBody>
+      </p:sp>
+      <p:sp>
+        <p:nvSpPr>
+          <p:cNvPr id="12" name="Text 9"/>
+          <p:cNvSpPr/>
+          <p:nvPr/>
+        </p:nvSpPr>
+        <p:spPr>
+          <a:xfrm>
+            <a:off x="457200" y="4800600"/>
+            <a:ext cx="6949440" cy="274320"/>
+          </a:xfrm>
+          <a:prstGeom prst="rect">
+            <a:avLst/>
+          </a:prstGeom>
+          <a:noFill/>
+          <a:ln/>
+        </p:spPr>
+        <p:txBody>
+          <a:bodyPr wrap="square" lIns="0" tIns="0" rIns="0" bIns="0" rtlCol="0" anchor="ctr"/>
+          <a:lstStyle/>
+          <a:p>
+            <a:pPr indent="0" marL="0">
+              <a:buNone/>
+            </a:pPr>
+            <a:r>
+              <a:rPr lang="en-US" sz="900" dirty="0">
+                <a:solidFill>
+                  <a:srgbClr val="64748B"/>
+                </a:solidFill>
+                <a:latin typeface="Calibri" pitchFamily="34" charset="0"/>
+                <a:ea typeface="Calibri" pitchFamily="34" charset="-122"/>
+                <a:cs typeface="Calibri" pitchFamily="34" charset="-120"/>
+              </a:rPr>
+              <a:t>Software Security · Week 13</a:t>
+            </a:r>
+            <a:endParaRPr lang="en-US" sz="900" dirty="0"/>
           </a:p>
         </p:txBody>
       </p:sp>
       <p:pic>
         <p:nvPicPr>
-          <p:cNvPr id="5" name="Image 1" descr="The same app as two container images side by side, insecure vs hardened, six layers compared: mutable :latest tag vs a pinned digest, a baked-in secret vs runtime injection, root user vs distroless non-root, COPY-everything vs a minimal context, world-writable permissions vs read-only, and an unpinned pip install vs a discarded build stage. Below both, the same argument one layer up: the wildcard IAM policy vs the scoped one. The conclusion: Trivy flags only three of the seven defects shown here — the tag, the root user, and the secret. COPY .., chmod 777, the unpinned install, and the IAM JSON all need manual review; there is no rule for any of them.">    </p:cNvPr>
+          <p:cNvPr id="13" name="Image 1" descr="/private/tmp/claude-501/-Users-pop7-Library-CloudStorage-OneDrive-MonsterConnectCo--Ltd-Lecture-KOSEN69---software-security/f63a82af-e1ad-40ed-89c4-03c6ca776e3f/scratchpad/lq-easy/slides/pptx/assets/logo-small.png">    </p:cNvPr>
           <p:cNvPicPr>
             <a:picLocks noChangeAspect="1"/>
           </p:cNvPicPr>
@@ -4926,69 +5050,6 @@
         </p:nvPicPr>
         <p:blipFill>
           <a:blip r:embed="rId2"/>
-          <a:stretch>
-            <a:fillRect/>
-          </a:stretch>
-        </p:blipFill>
-        <p:spPr>
-          <a:xfrm>
-            <a:off x="3036517" y="1097280"/>
-            <a:ext cx="3070967" cy="3566160"/>
-          </a:xfrm>
-          <a:prstGeom prst="rect">
-            <a:avLst/>
-          </a:prstGeom>
-        </p:spPr>
-      </p:pic>
-      <p:sp>
-        <p:nvSpPr>
-          <p:cNvPr id="6" name="Text 2"/>
-          <p:cNvSpPr/>
-          <p:nvPr/>
-        </p:nvSpPr>
-        <p:spPr>
-          <a:xfrm>
-            <a:off x="457200" y="4800600"/>
-            <a:ext cx="6949440" cy="274320"/>
-          </a:xfrm>
-          <a:prstGeom prst="rect">
-            <a:avLst/>
-          </a:prstGeom>
-          <a:noFill/>
-          <a:ln/>
-        </p:spPr>
-        <p:txBody>
-          <a:bodyPr wrap="square" lIns="0" tIns="0" rIns="0" bIns="0" rtlCol="0" anchor="ctr"/>
-          <a:lstStyle/>
-          <a:p>
-            <a:pPr indent="0" marL="0">
-              <a:buNone/>
-            </a:pPr>
-            <a:r>
-              <a:rPr lang="en-US" sz="900" dirty="0">
-                <a:solidFill>
-                  <a:srgbClr val="64748B"/>
-                </a:solidFill>
-                <a:latin typeface="Calibri" pitchFamily="34" charset="0"/>
-                <a:ea typeface="Calibri" pitchFamily="34" charset="-122"/>
-                <a:cs typeface="Calibri" pitchFamily="34" charset="-120"/>
-              </a:rPr>
-              <a:t>Software Security · Week 13</a:t>
-            </a:r>
-            <a:endParaRPr lang="en-US" sz="900" dirty="0"/>
-          </a:p>
-        </p:txBody>
-      </p:sp>
-      <p:pic>
-        <p:nvPicPr>
-          <p:cNvPr id="7" name="Image 2" descr="/private/tmp/claude-501/-Users-pop7-Library-CloudStorage-OneDrive-MonsterConnectCo--Ltd-Lecture-KOSEN69---software-security/f63a82af-e1ad-40ed-89c4-03c6ca776e3f/scratchpad/lq-anim/slides/pptx/assets/logo-small.png">    </p:cNvPr>
-          <p:cNvPicPr>
-            <a:picLocks noChangeAspect="1"/>
-          </p:cNvPicPr>
-          <p:nvPr/>
-        </p:nvPicPr>
-        <p:blipFill>
-          <a:blip r:embed="rId3"/>
           <a:stretch>
             <a:fillRect/>
           </a:stretch>
@@ -5119,7 +5180,7 @@
                 <a:ea typeface="Arial" pitchFamily="34" charset="-122"/>
                 <a:cs typeface="Arial" pitchFamily="34" charset="-120"/>
               </a:rPr>
-              <a:t>🔍 Game — Misconfig Hunt</a:t>
+              <a:t>Deliverable</a:t>
             </a:r>
             <a:endParaRPr lang="en-US" sz="2600" dirty="0"/>
           </a:p>
@@ -5127,14 +5188,106 @@
       </p:sp>
       <p:sp>
         <p:nvSpPr>
-          <p:cNvPr id="5" name="Text 2"/>
-          <p:cNvSpPr/>
-          <p:nvPr/>
-        </p:nvSpPr>
-        <p:spPr>
-          <a:xfrm>
-            <a:off x="548640" y="1325880"/>
-            <a:ext cx="8046720" cy="548640"/>
+          <p:cNvPr id="5" name="Shape 2"/>
+          <p:cNvSpPr/>
+          <p:nvPr/>
+        </p:nvSpPr>
+        <p:spPr>
+          <a:xfrm>
+            <a:off x="457200" y="1325880"/>
+            <a:ext cx="8229600" cy="822960"/>
+          </a:xfrm>
+          <a:prstGeom prst="roundRect">
+            <a:avLst>
+              <a:gd name="adj" fmla="val 8889"/>
+            </a:avLst>
+          </a:prstGeom>
+          <a:solidFill>
+            <a:srgbClr val="E8EDF3"/>
+          </a:solidFill>
+          <a:ln/>
+        </p:spPr>
+      </p:sp>
+      <p:sp>
+        <p:nvSpPr>
+          <p:cNvPr id="6" name="Text 3"/>
+          <p:cNvSpPr/>
+          <p:nvPr/>
+        </p:nvSpPr>
+        <p:spPr>
+          <a:xfrm>
+            <a:off x="731520" y="1325880"/>
+            <a:ext cx="7680960" cy="822960"/>
+          </a:xfrm>
+          <a:prstGeom prst="rect">
+            <a:avLst/>
+          </a:prstGeom>
+          <a:noFill/>
+          <a:ln/>
+        </p:spPr>
+        <p:txBody>
+          <a:bodyPr wrap="square" lIns="0" tIns="0" rIns="0" bIns="0" rtlCol="0" anchor="ctr">
+            <a:normAutofit/>
+          </a:bodyPr>
+          <a:lstStyle/>
+          <a:p>
+            <a:pPr indent="0" marL="0">
+              <a:buNone/>
+            </a:pPr>
+            <a:r>
+              <a:rPr lang="en-US" sz="1400" i="1" dirty="0">
+                <a:solidFill>
+                  <a:srgbClr val="E35205"/>
+                </a:solidFill>
+                <a:latin typeface="Calibri" pitchFamily="34" charset="0"/>
+                <a:ea typeface="Calibri" pitchFamily="34" charset="-122"/>
+                <a:cs typeface="Calibri" pitchFamily="34" charset="-120"/>
+              </a:rPr>
+              <a:t>📋 Worksheet 13 — labs/week13-cloud-container/worksheet.md (Parts 1–4) · start: bash scan.sh (it scans the Dockerfiles only — read the IAM JSON yourself)</a:t>
+            </a:r>
+            <a:endParaRPr lang="en-US" sz="1400" dirty="0"/>
+          </a:p>
+        </p:txBody>
+      </p:sp>
+      <p:sp>
+        <p:nvSpPr>
+          <p:cNvPr id="7" name="Shape 4"/>
+          <p:cNvSpPr/>
+          <p:nvPr/>
+        </p:nvSpPr>
+        <p:spPr>
+          <a:xfrm>
+            <a:off x="457200" y="2313432"/>
+            <a:ext cx="8229600" cy="1517904"/>
+          </a:xfrm>
+          <a:prstGeom prst="roundRect">
+            <a:avLst>
+              <a:gd name="adj" fmla="val 4819"/>
+            </a:avLst>
+          </a:prstGeom>
+          <a:solidFill>
+            <a:srgbClr val="F1F5F9"/>
+          </a:solidFill>
+          <a:ln/>
+          <a:effectLst>
+            <a:outerShdw sx="100000" sy="100000" kx="0" ky="0" algn="bl" rotWithShape="0" blurRad="76200" dist="25400" dir="5400000">
+              <a:srgbClr val="000000">
+                <a:alpha val="12000"/>
+              </a:srgbClr>
+            </a:outerShdw>
+          </a:effectLst>
+        </p:spPr>
+      </p:sp>
+      <p:sp>
+        <p:nvSpPr>
+          <p:cNvPr id="8" name="Text 5"/>
+          <p:cNvSpPr/>
+          <p:nvPr/>
+        </p:nvSpPr>
+        <p:spPr>
+          <a:xfrm>
+            <a:off x="731520" y="2423160"/>
+            <a:ext cx="7680960" cy="1298448"/>
           </a:xfrm>
           <a:prstGeom prst="rect">
             <a:avLst/>
@@ -5148,8 +5301,12 @@
           </a:bodyPr>
           <a:lstStyle/>
           <a:p>
-            <a:pPr indent="0" marL="0">
-              <a:buNone/>
+            <a:pPr marL="342900" indent="-342900">
+              <a:spcAft>
+                <a:spcPts val="600"/>
+              </a:spcAft>
+              <a:buSzPct val="100000"/>
+              <a:buChar char="•"/>
             </a:pPr>
             <a:r>
               <a:rPr lang="en-US" sz="1400" dirty="0">
@@ -5160,99 +5317,20 @@
                 <a:ea typeface="Calibri" pitchFamily="34" charset="-122"/>
                 <a:cs typeface="Calibri" pitchFamily="34" charset="-120"/>
               </a:rPr>
-              <a:t>9 flags — each misconfiguration found + explained = a flag:</a:t>
+              <a:t>Before/after IAM policy + Dockerfile, all 9 flags explained</a:t>
             </a:r>
             <a:endParaRPr lang="en-US" sz="1400" dirty="0"/>
           </a:p>
-        </p:txBody>
-      </p:sp>
-      <p:sp>
-        <p:nvSpPr>
-          <p:cNvPr id="6" name="Shape 3"/>
-          <p:cNvSpPr/>
-          <p:nvPr/>
-        </p:nvSpPr>
-        <p:spPr>
-          <a:xfrm>
-            <a:off x="502920" y="1965960"/>
-            <a:ext cx="384048" cy="384048"/>
-          </a:xfrm>
-          <a:prstGeom prst="ellipse">
-            <a:avLst/>
-          </a:prstGeom>
-          <a:solidFill>
-            <a:srgbClr val="E35205"/>
-          </a:solidFill>
-          <a:ln/>
-        </p:spPr>
-      </p:sp>
-      <p:sp>
-        <p:nvSpPr>
-          <p:cNvPr id="7" name="Text 4"/>
-          <p:cNvSpPr/>
-          <p:nvPr/>
-        </p:nvSpPr>
-        <p:spPr>
-          <a:xfrm>
-            <a:off x="502920" y="1965960"/>
-            <a:ext cx="384048" cy="384048"/>
-          </a:xfrm>
-          <a:prstGeom prst="rect">
-            <a:avLst/>
-          </a:prstGeom>
-          <a:noFill/>
-          <a:ln/>
-        </p:spPr>
-        <p:txBody>
-          <a:bodyPr wrap="square" lIns="0" tIns="0" rIns="0" bIns="0" rtlCol="0" anchor="ctr"/>
-          <a:lstStyle/>
-          <a:p>
-            <a:pPr algn="ctr" indent="0" marL="0">
-              <a:buNone/>
-            </a:pPr>
-            <a:r>
-              <a:rPr lang="en-US" sz="1500" b="1" dirty="0">
-                <a:solidFill>
-                  <a:srgbClr val="0E1726"/>
-                </a:solidFill>
-                <a:latin typeface="Arial" pitchFamily="34" charset="0"/>
-                <a:ea typeface="Arial" pitchFamily="34" charset="-122"/>
-                <a:cs typeface="Arial" pitchFamily="34" charset="-120"/>
-              </a:rPr>
-              <a:t>1</a:t>
-            </a:r>
-            <a:endParaRPr lang="en-US" sz="1500" dirty="0"/>
-          </a:p>
-        </p:txBody>
-      </p:sp>
-      <p:sp>
-        <p:nvSpPr>
-          <p:cNvPr id="8" name="Text 5"/>
-          <p:cNvSpPr/>
-          <p:nvPr/>
-        </p:nvSpPr>
-        <p:spPr>
-          <a:xfrm>
-            <a:off x="1051560" y="1965960"/>
-            <a:ext cx="7589520" cy="658368"/>
-          </a:xfrm>
-          <a:prstGeom prst="rect">
-            <a:avLst/>
-          </a:prstGeom>
-          <a:noFill/>
-          <a:ln/>
-        </p:spPr>
-        <p:txBody>
-          <a:bodyPr wrap="square" lIns="0" tIns="0" rIns="0" bIns="0" rtlCol="0" anchor="ctr">
-            <a:normAutofit/>
-          </a:bodyPr>
-          <a:lstStyle/>
-          <a:p>
-            <a:pPr indent="0" marL="0">
-              <a:buNone/>
-            </a:pPr>
-            <a:r>
-              <a:rPr lang="en-US" sz="1350" dirty="0">
+          <a:p>
+            <a:pPr marL="342900" indent="-342900">
+              <a:spcAft>
+                <a:spcPts val="600"/>
+              </a:spcAft>
+              <a:buSzPct val="100000"/>
+              <a:buChar char="•"/>
+            </a:pPr>
+            <a:r>
+              <a:rPr lang="en-US" sz="1400" dirty="0">
                 <a:solidFill>
                   <a:srgbClr val="1F2937"/>
                 </a:solidFill>
@@ -5260,99 +5338,20 @@
                 <a:ea typeface="Calibri" pitchFamily="34" charset="-122"/>
                 <a:cs typeface="Calibri" pitchFamily="34" charset="-120"/>
               </a:rPr>
-              <a:t>Container (6): :latest tag, root user, secret-in-ENV, COPY . ., chmod -R 777, unpinned pip install</a:t>
-            </a:r>
-            <a:endParaRPr lang="en-US" sz="1350" dirty="0"/>
-          </a:p>
-        </p:txBody>
-      </p:sp>
-      <p:sp>
-        <p:nvSpPr>
-          <p:cNvPr id="9" name="Shape 6"/>
-          <p:cNvSpPr/>
-          <p:nvPr/>
-        </p:nvSpPr>
-        <p:spPr>
-          <a:xfrm>
-            <a:off x="502920" y="2697480"/>
-            <a:ext cx="384048" cy="384048"/>
-          </a:xfrm>
-          <a:prstGeom prst="ellipse">
-            <a:avLst/>
-          </a:prstGeom>
-          <a:solidFill>
-            <a:srgbClr val="E35205"/>
-          </a:solidFill>
-          <a:ln/>
-        </p:spPr>
-      </p:sp>
-      <p:sp>
-        <p:nvSpPr>
-          <p:cNvPr id="10" name="Text 7"/>
-          <p:cNvSpPr/>
-          <p:nvPr/>
-        </p:nvSpPr>
-        <p:spPr>
-          <a:xfrm>
-            <a:off x="502920" y="2697480"/>
-            <a:ext cx="384048" cy="384048"/>
-          </a:xfrm>
-          <a:prstGeom prst="rect">
-            <a:avLst/>
-          </a:prstGeom>
-          <a:noFill/>
-          <a:ln/>
-        </p:spPr>
-        <p:txBody>
-          <a:bodyPr wrap="square" lIns="0" tIns="0" rIns="0" bIns="0" rtlCol="0" anchor="ctr"/>
-          <a:lstStyle/>
-          <a:p>
-            <a:pPr algn="ctr" indent="0" marL="0">
-              <a:buNone/>
-            </a:pPr>
-            <a:r>
-              <a:rPr lang="en-US" sz="1500" b="1" dirty="0">
-                <a:solidFill>
-                  <a:srgbClr val="0E1726"/>
-                </a:solidFill>
-                <a:latin typeface="Arial" pitchFamily="34" charset="0"/>
-                <a:ea typeface="Arial" pitchFamily="34" charset="-122"/>
-                <a:cs typeface="Arial" pitchFamily="34" charset="-120"/>
-              </a:rPr>
-              <a:t>2</a:t>
-            </a:r>
-            <a:endParaRPr lang="en-US" sz="1500" dirty="0"/>
-          </a:p>
-        </p:txBody>
-      </p:sp>
-      <p:sp>
-        <p:nvSpPr>
-          <p:cNvPr id="11" name="Text 8"/>
-          <p:cNvSpPr/>
-          <p:nvPr/>
-        </p:nvSpPr>
-        <p:spPr>
-          <a:xfrm>
-            <a:off x="1051560" y="2697480"/>
-            <a:ext cx="7589520" cy="402336"/>
-          </a:xfrm>
-          <a:prstGeom prst="rect">
-            <a:avLst/>
-          </a:prstGeom>
-          <a:noFill/>
-          <a:ln/>
-        </p:spPr>
-        <p:txBody>
-          <a:bodyPr wrap="square" lIns="0" tIns="0" rIns="0" bIns="0" rtlCol="0" anchor="ctr">
-            <a:normAutofit/>
-          </a:bodyPr>
-          <a:lstStyle/>
-          <a:p>
-            <a:pPr indent="0" marL="0">
-              <a:buNone/>
-            </a:pPr>
-            <a:r>
-              <a:rPr lang="en-US" sz="1350" dirty="0">
+              <a:t>Trivy results before/after (container part only)</a:t>
+            </a:r>
+            <a:endParaRPr lang="en-US" sz="1400" dirty="0"/>
+          </a:p>
+          <a:p>
+            <a:pPr marL="342900" indent="-342900">
+              <a:spcAft>
+                <a:spcPts val="600"/>
+              </a:spcAft>
+              <a:buSzPct val="100000"/>
+              <a:buChar char="•"/>
+            </a:pPr>
+            <a:r>
+              <a:rPr lang="en-US" sz="1400" dirty="0">
                 <a:solidFill>
                   <a:srgbClr val="1F2937"/>
                 </a:solidFill>
@@ -5360,45 +5359,66 @@
                 <a:ea typeface="Calibri" pitchFamily="34" charset="-122"/>
                 <a:cs typeface="Calibri" pitchFamily="34" charset="-120"/>
               </a:rPr>
-              <a:t>IAM (3): Resource:"*" (CWE-732), Action:"*" (CWE-269), missing Condition scoping</a:t>
-            </a:r>
-            <a:endParaRPr lang="en-US" sz="1350" dirty="0"/>
-          </a:p>
-        </p:txBody>
-      </p:sp>
-      <p:sp>
-        <p:nvSpPr>
-          <p:cNvPr id="12" name="Text 9"/>
-          <p:cNvSpPr/>
-          <p:nvPr/>
-        </p:nvSpPr>
-        <p:spPr>
-          <a:xfrm>
-            <a:off x="457200" y="4800600"/>
-            <a:ext cx="6949440" cy="274320"/>
-          </a:xfrm>
-          <a:prstGeom prst="rect">
-            <a:avLst/>
-          </a:prstGeom>
-          <a:noFill/>
-          <a:ln/>
-        </p:spPr>
-        <p:txBody>
-          <a:bodyPr wrap="square" lIns="0" tIns="0" rIns="0" bIns="0" rtlCol="0" anchor="ctr"/>
-          <a:lstStyle/>
-          <a:p>
-            <a:pPr indent="0" marL="0">
-              <a:buNone/>
-            </a:pPr>
-            <a:r>
-              <a:rPr lang="en-US" sz="900" dirty="0">
-                <a:solidFill>
-                  <a:srgbClr val="64748B"/>
+              <a:t>A short note: how to remove and rotate the leaked secret</a:t>
+            </a:r>
+            <a:endParaRPr lang="en-US" sz="1400" dirty="0"/>
+          </a:p>
+          <a:p>
+            <a:pPr marL="342900" indent="-342900">
+              <a:spcAft>
+                <a:spcPts val="600"/>
+              </a:spcAft>
+              <a:buSzPct val="100000"/>
+              <a:buChar char="•"/>
+            </a:pPr>
+            <a:r>
+              <a:rPr lang="en-US" sz="1400" dirty="0">
+                <a:solidFill>
+                  <a:srgbClr val="1F2937"/>
                 </a:solidFill>
                 <a:latin typeface="Calibri" pitchFamily="34" charset="0"/>
                 <a:ea typeface="Calibri" pitchFamily="34" charset="-122"/>
                 <a:cs typeface="Calibri" pitchFamily="34" charset="-120"/>
               </a:rPr>
+              <a:t>+ Audit the AI / EiPE / Prompt Problem (see worksheet)</a:t>
+            </a:r>
+            <a:endParaRPr lang="en-US" sz="1400" dirty="0"/>
+          </a:p>
+        </p:txBody>
+      </p:sp>
+      <p:sp>
+        <p:nvSpPr>
+          <p:cNvPr id="9" name="Text 6"/>
+          <p:cNvSpPr/>
+          <p:nvPr/>
+        </p:nvSpPr>
+        <p:spPr>
+          <a:xfrm>
+            <a:off x="457200" y="4800600"/>
+            <a:ext cx="6949440" cy="274320"/>
+          </a:xfrm>
+          <a:prstGeom prst="rect">
+            <a:avLst/>
+          </a:prstGeom>
+          <a:noFill/>
+          <a:ln/>
+        </p:spPr>
+        <p:txBody>
+          <a:bodyPr wrap="square" lIns="0" tIns="0" rIns="0" bIns="0" rtlCol="0" anchor="ctr"/>
+          <a:lstStyle/>
+          <a:p>
+            <a:pPr indent="0" marL="0">
+              <a:buNone/>
+            </a:pPr>
+            <a:r>
+              <a:rPr lang="en-US" sz="900" dirty="0">
+                <a:solidFill>
+                  <a:srgbClr val="64748B"/>
+                </a:solidFill>
+                <a:latin typeface="Calibri" pitchFamily="34" charset="0"/>
+                <a:ea typeface="Calibri" pitchFamily="34" charset="-122"/>
+                <a:cs typeface="Calibri" pitchFamily="34" charset="-120"/>
+              </a:rPr>
               <a:t>Software Security · Week 13</a:t>
             </a:r>
             <a:endParaRPr lang="en-US" sz="900" dirty="0"/>
@@ -5407,7 +5427,7 @@
       </p:sp>
       <p:pic>
         <p:nvPicPr>
-          <p:cNvPr id="13" name="Image 1" descr="/private/tmp/claude-501/-Users-pop7-Library-CloudStorage-OneDrive-MonsterConnectCo--Ltd-Lecture-KOSEN69---software-security/f63a82af-e1ad-40ed-89c4-03c6ca776e3f/scratchpad/lq-anim/slides/pptx/assets/logo-small.png">    </p:cNvPr>
+          <p:cNvPr id="10" name="Image 1" descr="/private/tmp/claude-501/-Users-pop7-Library-CloudStorage-OneDrive-MonsterConnectCo--Ltd-Lecture-KOSEN69---software-security/f63a82af-e1ad-40ed-89c4-03c6ca776e3f/scratchpad/lq-easy/slides/pptx/assets/logo-small.png">    </p:cNvPr>
           <p:cNvPicPr>
             <a:picLocks noChangeAspect="1"/>
           </p:cNvPicPr>
@@ -5545,7 +5565,7 @@
                 <a:ea typeface="Arial" pitchFamily="34" charset="-122"/>
                 <a:cs typeface="Arial" pitchFamily="34" charset="-120"/>
               </a:rPr>
-              <a:t>Deliverable</a:t>
+              <a:t>Key takeaways</a:t>
             </a:r>
             <a:endParaRPr lang="en-US" sz="2600" dirty="0"/>
           </a:p>
@@ -5560,74 +5580,11 @@
         <p:spPr>
           <a:xfrm>
             <a:off x="457200" y="1325880"/>
-            <a:ext cx="8229600" cy="1097280"/>
+            <a:ext cx="8229600" cy="1207008"/>
           </a:xfrm>
           <a:prstGeom prst="roundRect">
             <a:avLst>
-              <a:gd name="adj" fmla="val 6667"/>
-            </a:avLst>
-          </a:prstGeom>
-          <a:solidFill>
-            <a:srgbClr val="E8EDF3"/>
-          </a:solidFill>
-          <a:ln/>
-        </p:spPr>
-      </p:sp>
-      <p:sp>
-        <p:nvSpPr>
-          <p:cNvPr id="6" name="Text 3"/>
-          <p:cNvSpPr/>
-          <p:nvPr/>
-        </p:nvSpPr>
-        <p:spPr>
-          <a:xfrm>
-            <a:off x="731520" y="1325880"/>
-            <a:ext cx="7680960" cy="1097280"/>
-          </a:xfrm>
-          <a:prstGeom prst="rect">
-            <a:avLst/>
-          </a:prstGeom>
-          <a:noFill/>
-          <a:ln/>
-        </p:spPr>
-        <p:txBody>
-          <a:bodyPr wrap="square" lIns="0" tIns="0" rIns="0" bIns="0" rtlCol="0" anchor="ctr">
-            <a:normAutofit/>
-          </a:bodyPr>
-          <a:lstStyle/>
-          <a:p>
-            <a:pPr indent="0" marL="0">
-              <a:buNone/>
-            </a:pPr>
-            <a:r>
-              <a:rPr lang="en-US" sz="1400" i="1" dirty="0">
-                <a:solidFill>
-                  <a:srgbClr val="E35205"/>
-                </a:solidFill>
-                <a:latin typeface="Calibri" pitchFamily="34" charset="0"/>
-                <a:ea typeface="Calibri" pitchFamily="34" charset="-122"/>
-                <a:cs typeface="Calibri" pitchFamily="34" charset="-120"/>
-              </a:rPr>
-              <a:t>📋 Worksheet 13 — labs/week13-cloud-container/worksheet.md (Parts 1–4) · kickoff: bash scan.sh (trivy config over the Dockerfiles only — IAM JSON is manual review, Trivy doesn't parse it)</a:t>
-            </a:r>
-            <a:endParaRPr lang="en-US" sz="1400" dirty="0"/>
-          </a:p>
-        </p:txBody>
-      </p:sp>
-      <p:sp>
-        <p:nvSpPr>
-          <p:cNvPr id="7" name="Shape 4"/>
-          <p:cNvSpPr/>
-          <p:nvPr/>
-        </p:nvSpPr>
-        <p:spPr>
-          <a:xfrm>
-            <a:off x="457200" y="2587752"/>
-            <a:ext cx="8229600" cy="1517904"/>
-          </a:xfrm>
-          <a:prstGeom prst="roundRect">
-            <a:avLst>
-              <a:gd name="adj" fmla="val 4819"/>
+              <a:gd name="adj" fmla="val 6061"/>
             </a:avLst>
           </a:prstGeom>
           <a:solidFill>
@@ -5645,14 +5602,14 @@
       </p:sp>
       <p:sp>
         <p:nvSpPr>
-          <p:cNvPr id="8" name="Text 5"/>
-          <p:cNvSpPr/>
-          <p:nvPr/>
-        </p:nvSpPr>
-        <p:spPr>
-          <a:xfrm>
-            <a:off x="731520" y="2697480"/>
-            <a:ext cx="7680960" cy="1298448"/>
+          <p:cNvPr id="6" name="Text 3"/>
+          <p:cNvSpPr/>
+          <p:nvPr/>
+        </p:nvSpPr>
+        <p:spPr>
+          <a:xfrm>
+            <a:off x="731520" y="1435608"/>
+            <a:ext cx="7680960" cy="987552"/>
           </a:xfrm>
           <a:prstGeom prst="rect">
             <a:avLst/>
@@ -5682,7 +5639,7 @@
                 <a:ea typeface="Calibri" pitchFamily="34" charset="-122"/>
                 <a:cs typeface="Calibri" pitchFamily="34" charset="-120"/>
               </a:rPr>
-              <a:t>Before/after IAM policy + Dockerfile, all 9 flags explained</a:t>
+              <a:t>Misconfiguration &gt; zero-days as a breach cause</a:t>
             </a:r>
             <a:endParaRPr lang="en-US" sz="1400" dirty="0"/>
           </a:p>
@@ -5703,7 +5660,7 @@
                 <a:ea typeface="Calibri" pitchFamily="34" charset="-122"/>
                 <a:cs typeface="Calibri" pitchFamily="34" charset="-120"/>
               </a:rPr>
-              <a:t>Trivy reports showing reduced risk (container half only)</a:t>
+              <a:t>Least privilege, private-by-default, no secrets in code</a:t>
             </a:r>
             <a:endParaRPr lang="en-US" sz="1400" dirty="0"/>
           </a:p>
@@ -5724,66 +5681,45 @@
                 <a:ea typeface="Calibri" pitchFamily="34" charset="-122"/>
                 <a:cs typeface="Calibri" pitchFamily="34" charset="-120"/>
               </a:rPr>
-              <a:t>Note on secrets remediation</a:t>
+              <a:t>Scan infrastructure-as-code (IaC) files and images in CI</a:t>
             </a:r>
             <a:endParaRPr lang="en-US" sz="1400" dirty="0"/>
           </a:p>
-          <a:p>
-            <a:pPr marL="342900" indent="-342900">
-              <a:spcAft>
-                <a:spcPts val="600"/>
-              </a:spcAft>
-              <a:buSzPct val="100000"/>
-              <a:buChar char="•"/>
-            </a:pPr>
-            <a:r>
-              <a:rPr lang="en-US" sz="1400" dirty="0">
-                <a:solidFill>
-                  <a:srgbClr val="1F2937"/>
+        </p:txBody>
+      </p:sp>
+      <p:sp>
+        <p:nvSpPr>
+          <p:cNvPr id="7" name="Text 4"/>
+          <p:cNvSpPr/>
+          <p:nvPr/>
+        </p:nvSpPr>
+        <p:spPr>
+          <a:xfrm>
+            <a:off x="457200" y="4800600"/>
+            <a:ext cx="6949440" cy="274320"/>
+          </a:xfrm>
+          <a:prstGeom prst="rect">
+            <a:avLst/>
+          </a:prstGeom>
+          <a:noFill/>
+          <a:ln/>
+        </p:spPr>
+        <p:txBody>
+          <a:bodyPr wrap="square" lIns="0" tIns="0" rIns="0" bIns="0" rtlCol="0" anchor="ctr"/>
+          <a:lstStyle/>
+          <a:p>
+            <a:pPr indent="0" marL="0">
+              <a:buNone/>
+            </a:pPr>
+            <a:r>
+              <a:rPr lang="en-US" sz="900" dirty="0">
+                <a:solidFill>
+                  <a:srgbClr val="64748B"/>
                 </a:solidFill>
                 <a:latin typeface="Calibri" pitchFamily="34" charset="0"/>
                 <a:ea typeface="Calibri" pitchFamily="34" charset="-122"/>
                 <a:cs typeface="Calibri" pitchFamily="34" charset="-120"/>
               </a:rPr>
-              <a:t>+ Audit the AI / EiPE / Prompt Problem (see worksheet)</a:t>
-            </a:r>
-            <a:endParaRPr lang="en-US" sz="1400" dirty="0"/>
-          </a:p>
-        </p:txBody>
-      </p:sp>
-      <p:sp>
-        <p:nvSpPr>
-          <p:cNvPr id="9" name="Text 6"/>
-          <p:cNvSpPr/>
-          <p:nvPr/>
-        </p:nvSpPr>
-        <p:spPr>
-          <a:xfrm>
-            <a:off x="457200" y="4800600"/>
-            <a:ext cx="6949440" cy="274320"/>
-          </a:xfrm>
-          <a:prstGeom prst="rect">
-            <a:avLst/>
-          </a:prstGeom>
-          <a:noFill/>
-          <a:ln/>
-        </p:spPr>
-        <p:txBody>
-          <a:bodyPr wrap="square" lIns="0" tIns="0" rIns="0" bIns="0" rtlCol="0" anchor="ctr"/>
-          <a:lstStyle/>
-          <a:p>
-            <a:pPr indent="0" marL="0">
-              <a:buNone/>
-            </a:pPr>
-            <a:r>
-              <a:rPr lang="en-US" sz="900" dirty="0">
-                <a:solidFill>
-                  <a:srgbClr val="64748B"/>
-                </a:solidFill>
-                <a:latin typeface="Calibri" pitchFamily="34" charset="0"/>
-                <a:ea typeface="Calibri" pitchFamily="34" charset="-122"/>
-                <a:cs typeface="Calibri" pitchFamily="34" charset="-120"/>
-              </a:rPr>
               <a:t>Software Security · Week 13</a:t>
             </a:r>
             <a:endParaRPr lang="en-US" sz="900" dirty="0"/>
@@ -5792,7 +5728,7 @@
       </p:sp>
       <p:pic>
         <p:nvPicPr>
-          <p:cNvPr id="10" name="Image 1" descr="/private/tmp/claude-501/-Users-pop7-Library-CloudStorage-OneDrive-MonsterConnectCo--Ltd-Lecture-KOSEN69---software-security/f63a82af-e1ad-40ed-89c4-03c6ca776e3f/scratchpad/lq-anim/slides/pptx/assets/logo-small.png">    </p:cNvPr>
+          <p:cNvPr id="8" name="Image 1" descr="/private/tmp/claude-501/-Users-pop7-Library-CloudStorage-OneDrive-MonsterConnectCo--Ltd-Lecture-KOSEN69---software-security/f63a82af-e1ad-40ed-89c4-03c6ca776e3f/scratchpad/lq-easy/slides/pptx/assets/logo-small.png">    </p:cNvPr>
           <p:cNvPicPr>
             <a:picLocks noChangeAspect="1"/>
           </p:cNvPicPr>
@@ -6025,7 +5961,7 @@
                 <a:ea typeface="Calibri" pitchFamily="34" charset="-122"/>
                 <a:cs typeface="Calibri" pitchFamily="34" charset="-120"/>
               </a:rPr>
-              <a:t>IAM &amp; least privilege</a:t>
+              <a:t>IAM (who can do what) &amp; least privilege</a:t>
             </a:r>
             <a:endParaRPr lang="en-US" sz="1400" dirty="0"/>
           </a:p>
@@ -6135,7 +6071,7 @@
       </p:sp>
       <p:pic>
         <p:nvPicPr>
-          <p:cNvPr id="8" name="Image 1" descr="/private/tmp/claude-501/-Users-pop7-Library-CloudStorage-OneDrive-MonsterConnectCo--Ltd-Lecture-KOSEN69---software-security/f63a82af-e1ad-40ed-89c4-03c6ca776e3f/scratchpad/lq-anim/slides/pptx/assets/logo-small.png">    </p:cNvPr>
+          <p:cNvPr id="8" name="Image 1" descr="/private/tmp/claude-501/-Users-pop7-Library-CloudStorage-OneDrive-MonsterConnectCo--Ltd-Lecture-KOSEN69---software-security/f63a82af-e1ad-40ed-89c4-03c6ca776e3f/scratchpad/lq-easy/slides/pptx/assets/logo-small.png">    </p:cNvPr>
           <p:cNvPicPr>
             <a:picLocks noChangeAspect="1"/>
           </p:cNvPicPr>
@@ -6191,65 +6127,14 @@
       </p:grpSpPr>
       <p:sp>
         <p:nvSpPr>
-          <p:cNvPr id="2" name="Shape 0"/>
-          <p:cNvSpPr/>
-          <p:nvPr/>
-        </p:nvSpPr>
-        <p:spPr>
-          <a:xfrm>
-            <a:off x="457200" y="384048"/>
-            <a:ext cx="530352" cy="530352"/>
-          </a:xfrm>
-          <a:prstGeom prst="ellipse">
-            <a:avLst/>
-          </a:prstGeom>
-          <a:solidFill>
-            <a:srgbClr val="E35205"/>
-          </a:solidFill>
-          <a:ln/>
-          <a:effectLst>
-            <a:outerShdw sx="100000" sy="100000" kx="0" ky="0" algn="bl" rotWithShape="0" blurRad="76200" dist="25400" dir="5400000">
-              <a:srgbClr val="000000">
-                <a:alpha val="12000"/>
-              </a:srgbClr>
-            </a:outerShdw>
-          </a:effectLst>
-        </p:spPr>
-      </p:sp>
-      <p:pic>
-        <p:nvPicPr>
-          <p:cNvPr id="3" name="Image 0" descr="preencoded.png">    </p:cNvPr>
-          <p:cNvPicPr>
-            <a:picLocks noChangeAspect="1"/>
-          </p:cNvPicPr>
-          <p:nvPr/>
-        </p:nvPicPr>
-        <p:blipFill>
-          <a:blip r:embed="rId1"/>
-          <a:stretch>
-            <a:fillRect/>
-          </a:stretch>
-        </p:blipFill>
-        <p:spPr>
-          <a:xfrm>
-            <a:off x="594360" y="521208"/>
-            <a:ext cx="256032" cy="256032"/>
-          </a:xfrm>
-          <a:prstGeom prst="rect">
-            <a:avLst/>
-          </a:prstGeom>
-        </p:spPr>
-      </p:pic>
-      <p:sp>
-        <p:nvSpPr>
-          <p:cNvPr id="4" name="Text 1"/>
-          <p:cNvSpPr/>
-          <p:nvPr/>
-        </p:nvSpPr>
-        <p:spPr>
-          <a:xfrm>
-            <a:off x="1143000" y="329184"/>
-            <a:ext cx="7498080" cy="603504"/>
+          <p:cNvPr id="2" name="Text 0"/>
+          <p:cNvSpPr/>
+          <p:nvPr/>
+        </p:nvSpPr>
+        <p:spPr>
+          <a:xfrm>
+            <a:off x="640080" y="1737360"/>
+            <a:ext cx="7863840" cy="1097280"/>
           </a:xfrm>
           <a:prstGeom prst="rect">
             <a:avLst/>
@@ -6265,7 +6150,7 @@
               <a:buNone/>
             </a:pPr>
             <a:r>
-              <a:rPr lang="en-US" sz="2600" b="1" dirty="0">
+              <a:rPr lang="en-US" sz="4600" b="1" dirty="0">
                 <a:solidFill>
                   <a:srgbClr val="1F2937"/>
                 </a:solidFill>
@@ -6273,51 +6158,22 @@
                 <a:ea typeface="Arial" pitchFamily="34" charset="-122"/>
                 <a:cs typeface="Arial" pitchFamily="34" charset="-120"/>
               </a:rPr>
-              <a:t>Key takeaways</a:t>
-            </a:r>
-            <a:endParaRPr lang="en-US" sz="2600" dirty="0"/>
-          </a:p>
-        </p:txBody>
-      </p:sp>
-      <p:sp>
-        <p:nvSpPr>
-          <p:cNvPr id="5" name="Shape 2"/>
-          <p:cNvSpPr/>
-          <p:nvPr/>
-        </p:nvSpPr>
-        <p:spPr>
-          <a:xfrm>
-            <a:off x="457200" y="1325880"/>
-            <a:ext cx="8229600" cy="1207008"/>
-          </a:xfrm>
-          <a:prstGeom prst="roundRect">
-            <a:avLst>
-              <a:gd name="adj" fmla="val 6061"/>
-            </a:avLst>
-          </a:prstGeom>
-          <a:solidFill>
-            <a:srgbClr val="F1F5F9"/>
-          </a:solidFill>
-          <a:ln/>
-          <a:effectLst>
-            <a:outerShdw sx="100000" sy="100000" kx="0" ky="0" algn="bl" rotWithShape="0" blurRad="76200" dist="25400" dir="5400000">
-              <a:srgbClr val="000000">
-                <a:alpha val="12000"/>
-              </a:srgbClr>
-            </a:outerShdw>
-          </a:effectLst>
-        </p:spPr>
-      </p:sp>
-      <p:sp>
-        <p:nvSpPr>
-          <p:cNvPr id="6" name="Text 3"/>
-          <p:cNvSpPr/>
-          <p:nvPr/>
-        </p:nvSpPr>
-        <p:spPr>
-          <a:xfrm>
-            <a:off x="731520" y="1435608"/>
-            <a:ext cx="7680960" cy="987552"/>
+              <a:t>Questions?</a:t>
+            </a:r>
+            <a:endParaRPr lang="en-US" sz="4600" dirty="0"/>
+          </a:p>
+        </p:txBody>
+      </p:sp>
+      <p:sp>
+        <p:nvSpPr>
+          <p:cNvPr id="3" name="Text 1"/>
+          <p:cNvSpPr/>
+          <p:nvPr/>
+        </p:nvSpPr>
+        <p:spPr>
+          <a:xfrm>
+            <a:off x="658368" y="2834640"/>
+            <a:ext cx="7863840" cy="731520"/>
           </a:xfrm>
           <a:prstGeom prst="rect">
             <a:avLst/>
@@ -6326,251 +6182,30 @@
           <a:ln/>
         </p:spPr>
         <p:txBody>
-          <a:bodyPr wrap="square" lIns="0" tIns="0" rIns="0" bIns="0" rtlCol="0" anchor="t">
-            <a:normAutofit/>
-          </a:bodyPr>
-          <a:lstStyle/>
-          <a:p>
-            <a:pPr marL="342900" indent="-342900">
-              <a:spcAft>
-                <a:spcPts val="600"/>
-              </a:spcAft>
-              <a:buSzPct val="100000"/>
-              <a:buChar char="•"/>
-            </a:pPr>
-            <a:r>
-              <a:rPr lang="en-US" sz="1400" dirty="0">
-                <a:solidFill>
-                  <a:srgbClr val="1F2937"/>
+          <a:bodyPr wrap="square" lIns="0" tIns="0" rIns="0" bIns="0" rtlCol="0" anchor="ctr"/>
+          <a:lstStyle/>
+          <a:p>
+            <a:pPr indent="0" marL="0">
+              <a:buNone/>
+            </a:pPr>
+            <a:r>
+              <a:rPr lang="en-US" sz="1800" dirty="0">
+                <a:solidFill>
+                  <a:srgbClr val="E35205"/>
                 </a:solidFill>
                 <a:latin typeface="Calibri" pitchFamily="34" charset="0"/>
                 <a:ea typeface="Calibri" pitchFamily="34" charset="-122"/>
                 <a:cs typeface="Calibri" pitchFamily="34" charset="-120"/>
               </a:rPr>
-              <a:t>Misconfiguration &gt; zero-days as a breach cause</a:t>
-            </a:r>
-            <a:endParaRPr lang="en-US" sz="1400" dirty="0"/>
-          </a:p>
-          <a:p>
-            <a:pPr marL="342900" indent="-342900">
-              <a:spcAft>
-                <a:spcPts val="600"/>
-              </a:spcAft>
-              <a:buSzPct val="100000"/>
-              <a:buChar char="•"/>
-            </a:pPr>
-            <a:r>
-              <a:rPr lang="en-US" sz="1400" dirty="0">
-                <a:solidFill>
-                  <a:srgbClr val="1F2937"/>
-                </a:solidFill>
-                <a:latin typeface="Calibri" pitchFamily="34" charset="0"/>
-                <a:ea typeface="Calibri" pitchFamily="34" charset="-122"/>
-                <a:cs typeface="Calibri" pitchFamily="34" charset="-120"/>
-              </a:rPr>
-              <a:t>Least privilege, private-by-default, no secrets in code</a:t>
-            </a:r>
-            <a:endParaRPr lang="en-US" sz="1400" dirty="0"/>
-          </a:p>
-          <a:p>
-            <a:pPr marL="342900" indent="-342900">
-              <a:spcAft>
-                <a:spcPts val="600"/>
-              </a:spcAft>
-              <a:buSzPct val="100000"/>
-              <a:buChar char="•"/>
-            </a:pPr>
-            <a:r>
-              <a:rPr lang="en-US" sz="1400" dirty="0">
-                <a:solidFill>
-                  <a:srgbClr val="1F2937"/>
-                </a:solidFill>
-                <a:latin typeface="Calibri" pitchFamily="34" charset="0"/>
-                <a:ea typeface="Calibri" pitchFamily="34" charset="-122"/>
-                <a:cs typeface="Calibri" pitchFamily="34" charset="-120"/>
-              </a:rPr>
-              <a:t>Scan IaC and images in CI</a:t>
-            </a:r>
-            <a:endParaRPr lang="en-US" sz="1400" dirty="0"/>
-          </a:p>
-        </p:txBody>
-      </p:sp>
-      <p:sp>
-        <p:nvSpPr>
-          <p:cNvPr id="7" name="Text 4"/>
-          <p:cNvSpPr/>
-          <p:nvPr/>
-        </p:nvSpPr>
-        <p:spPr>
-          <a:xfrm>
-            <a:off x="457200" y="4800600"/>
-            <a:ext cx="6949440" cy="274320"/>
-          </a:xfrm>
-          <a:prstGeom prst="rect">
-            <a:avLst/>
-          </a:prstGeom>
-          <a:noFill/>
-          <a:ln/>
-        </p:spPr>
-        <p:txBody>
-          <a:bodyPr wrap="square" lIns="0" tIns="0" rIns="0" bIns="0" rtlCol="0" anchor="ctr"/>
-          <a:lstStyle/>
-          <a:p>
-            <a:pPr indent="0" marL="0">
-              <a:buNone/>
-            </a:pPr>
-            <a:r>
-              <a:rPr lang="en-US" sz="900" dirty="0">
-                <a:solidFill>
-                  <a:srgbClr val="64748B"/>
-                </a:solidFill>
-                <a:latin typeface="Calibri" pitchFamily="34" charset="0"/>
-                <a:ea typeface="Calibri" pitchFamily="34" charset="-122"/>
-                <a:cs typeface="Calibri" pitchFamily="34" charset="-120"/>
-              </a:rPr>
-              <a:t>Software Security · Week 13</a:t>
-            </a:r>
-            <a:endParaRPr lang="en-US" sz="900" dirty="0"/>
+              <a:t>Next week: AI / LLM application security</a:t>
+            </a:r>
+            <a:endParaRPr lang="en-US" sz="1800" dirty="0"/>
           </a:p>
         </p:txBody>
       </p:sp>
       <p:pic>
         <p:nvPicPr>
-          <p:cNvPr id="8" name="Image 1" descr="/private/tmp/claude-501/-Users-pop7-Library-CloudStorage-OneDrive-MonsterConnectCo--Ltd-Lecture-KOSEN69---software-security/f63a82af-e1ad-40ed-89c4-03c6ca776e3f/scratchpad/lq-anim/slides/pptx/assets/logo-small.png">    </p:cNvPr>
-          <p:cNvPicPr>
-            <a:picLocks noChangeAspect="1"/>
-          </p:cNvPicPr>
-          <p:nvPr/>
-        </p:nvPicPr>
-        <p:blipFill>
-          <a:blip r:embed="rId2"/>
-          <a:stretch>
-            <a:fillRect/>
-          </a:stretch>
-        </p:blipFill>
-        <p:spPr>
-          <a:xfrm>
-            <a:off x="7882128" y="4700016"/>
-            <a:ext cx="768096" cy="356616"/>
-          </a:xfrm>
-          <a:prstGeom prst="rect">
-            <a:avLst/>
-          </a:prstGeom>
-        </p:spPr>
-      </p:pic>
-    </p:spTree>
-  </p:cSld>
-  <p:clrMapOvr>
-    <a:masterClrMapping/>
-  </p:clrMapOvr>
-</p:sld>
-</file>
-
-<file path=ppt/slides/slide21.xml><?xml version="1.0" encoding="utf-8"?>
-<p:sld xmlns:a="http://schemas.openxmlformats.org/drawingml/2006/main" xmlns:r="http://schemas.openxmlformats.org/officeDocument/2006/relationships" xmlns:p="http://schemas.openxmlformats.org/presentationml/2006/main">
-  <p:cSld name="Slide 21">
-    <p:bg>
-      <p:bgPr>
-        <a:solidFill>
-          <a:srgbClr val="FFFFFF"/>
-        </a:solidFill>
-      </p:bgPr>
-    </p:bg>
-    <p:spTree>
-      <p:nvGrpSpPr>
-        <p:cNvPr id="1" name=""/>
-        <p:cNvGrpSpPr/>
-        <p:nvPr/>
-      </p:nvGrpSpPr>
-      <p:grpSpPr>
-        <a:xfrm>
-          <a:off x="0" y="0"/>
-          <a:ext cx="0" cy="0"/>
-          <a:chOff x="0" y="0"/>
-          <a:chExt cx="0" cy="0"/>
-        </a:xfrm>
-      </p:grpSpPr>
-      <p:sp>
-        <p:nvSpPr>
-          <p:cNvPr id="2" name="Text 0"/>
-          <p:cNvSpPr/>
-          <p:nvPr/>
-        </p:nvSpPr>
-        <p:spPr>
-          <a:xfrm>
-            <a:off x="640080" y="1737360"/>
-            <a:ext cx="7863840" cy="1097280"/>
-          </a:xfrm>
-          <a:prstGeom prst="rect">
-            <a:avLst/>
-          </a:prstGeom>
-          <a:noFill/>
-          <a:ln/>
-        </p:spPr>
-        <p:txBody>
-          <a:bodyPr wrap="square" lIns="0" tIns="0" rIns="0" bIns="0" rtlCol="0" anchor="ctr"/>
-          <a:lstStyle/>
-          <a:p>
-            <a:pPr indent="0" marL="0">
-              <a:buNone/>
-            </a:pPr>
-            <a:r>
-              <a:rPr lang="en-US" sz="4600" b="1" dirty="0">
-                <a:solidFill>
-                  <a:srgbClr val="1F2937"/>
-                </a:solidFill>
-                <a:latin typeface="Arial" pitchFamily="34" charset="0"/>
-                <a:ea typeface="Arial" pitchFamily="34" charset="-122"/>
-                <a:cs typeface="Arial" pitchFamily="34" charset="-120"/>
-              </a:rPr>
-              <a:t>Questions?</a:t>
-            </a:r>
-            <a:endParaRPr lang="en-US" sz="4600" dirty="0"/>
-          </a:p>
-        </p:txBody>
-      </p:sp>
-      <p:sp>
-        <p:nvSpPr>
-          <p:cNvPr id="3" name="Text 1"/>
-          <p:cNvSpPr/>
-          <p:nvPr/>
-        </p:nvSpPr>
-        <p:spPr>
-          <a:xfrm>
-            <a:off x="658368" y="2834640"/>
-            <a:ext cx="7863840" cy="731520"/>
-          </a:xfrm>
-          <a:prstGeom prst="rect">
-            <a:avLst/>
-          </a:prstGeom>
-          <a:noFill/>
-          <a:ln/>
-        </p:spPr>
-        <p:txBody>
-          <a:bodyPr wrap="square" lIns="0" tIns="0" rIns="0" bIns="0" rtlCol="0" anchor="ctr"/>
-          <a:lstStyle/>
-          <a:p>
-            <a:pPr indent="0" marL="0">
-              <a:buNone/>
-            </a:pPr>
-            <a:r>
-              <a:rPr lang="en-US" sz="1800" dirty="0">
-                <a:solidFill>
-                  <a:srgbClr val="E35205"/>
-                </a:solidFill>
-                <a:latin typeface="Calibri" pitchFamily="34" charset="0"/>
-                <a:ea typeface="Calibri" pitchFamily="34" charset="-122"/>
-                <a:cs typeface="Calibri" pitchFamily="34" charset="-120"/>
-              </a:rPr>
-              <a:t>Next week: AI / LLM application security</a:t>
-            </a:r>
-            <a:endParaRPr lang="en-US" sz="1800" dirty="0"/>
-          </a:p>
-        </p:txBody>
-      </p:sp>
-      <p:pic>
-        <p:nvPicPr>
-          <p:cNvPr id="4" name="Image 0" descr="/private/tmp/claude-501/-Users-pop7-Library-CloudStorage-OneDrive-MonsterConnectCo--Ltd-Lecture-KOSEN69---software-security/f63a82af-e1ad-40ed-89c4-03c6ca776e3f/scratchpad/lq-anim/slides/pptx/assets/logo-small.png">    </p:cNvPr>
+          <p:cNvPr id="4" name="Image 0" descr="/private/tmp/claude-501/-Users-pop7-Library-CloudStorage-OneDrive-MonsterConnectCo--Ltd-Lecture-KOSEN69---software-security/f63a82af-e1ad-40ed-89c4-03c6ca776e3f/scratchpad/lq-easy/slides/pptx/assets/logo-small.png">    </p:cNvPr>
           <p:cNvPicPr>
             <a:picLocks noChangeAspect="1"/>
           </p:cNvPicPr>
@@ -6871,7 +6506,7 @@
       </p:sp>
       <p:pic>
         <p:nvPicPr>
-          <p:cNvPr id="8" name="Image 1" descr="/private/tmp/claude-501/-Users-pop7-Library-CloudStorage-OneDrive-MonsterConnectCo--Ltd-Lecture-KOSEN69---software-security/f63a82af-e1ad-40ed-89c4-03c6ca776e3f/scratchpad/lq-anim/slides/pptx/assets/logo-small.png">    </p:cNvPr>
+          <p:cNvPr id="8" name="Image 1" descr="/private/tmp/claude-501/-Users-pop7-Library-CloudStorage-OneDrive-MonsterConnectCo--Ltd-Lecture-KOSEN69---software-security/f63a82af-e1ad-40ed-89c4-03c6ca776e3f/scratchpad/lq-easy/slides/pptx/assets/logo-small.png">    </p:cNvPr>
           <p:cNvPicPr>
             <a:picLocks noChangeAspect="1"/>
           </p:cNvPicPr>
@@ -7080,7 +6715,7 @@
       </p:sp>
       <p:pic>
         <p:nvPicPr>
-          <p:cNvPr id="7" name="Image 2" descr="/private/tmp/claude-501/-Users-pop7-Library-CloudStorage-OneDrive-MonsterConnectCo--Ltd-Lecture-KOSEN69---software-security/f63a82af-e1ad-40ed-89c4-03c6ca776e3f/scratchpad/lq-anim/slides/pptx/assets/logo-small.png">    </p:cNvPr>
+          <p:cNvPr id="7" name="Image 2" descr="/private/tmp/claude-501/-Users-pop7-Library-CloudStorage-OneDrive-MonsterConnectCo--Ltd-Lecture-KOSEN69---software-security/f63a82af-e1ad-40ed-89c4-03c6ca776e3f/scratchpad/lq-easy/slides/pptx/assets/logo-small.png">    </p:cNvPr>
           <p:cNvPicPr>
             <a:picLocks noChangeAspect="1"/>
           </p:cNvPicPr>
@@ -7292,7 +6927,7 @@
                 <a:ea typeface="Calibri" pitchFamily="34" charset="-122"/>
                 <a:cs typeface="Calibri" pitchFamily="34" charset="-120"/>
               </a:rPr>
-              <a:t>Cloud secures of the cloud; you secure in the cloud</a:t>
+              <a:t>The provider secures the cloud itself; you secure what you put in it</a:t>
             </a:r>
             <a:endParaRPr lang="en-US" sz="1400" dirty="0"/>
           </a:p>
@@ -7381,7 +7016,7 @@
       </p:sp>
       <p:pic>
         <p:nvPicPr>
-          <p:cNvPr id="8" name="Image 1" descr="/private/tmp/claude-501/-Users-pop7-Library-CloudStorage-OneDrive-MonsterConnectCo--Ltd-Lecture-KOSEN69---software-security/f63a82af-e1ad-40ed-89c4-03c6ca776e3f/scratchpad/lq-anim/slides/pptx/assets/logo-small.png">    </p:cNvPr>
+          <p:cNvPr id="8" name="Image 1" descr="/private/tmp/claude-501/-Users-pop7-Library-CloudStorage-OneDrive-MonsterConnectCo--Ltd-Lecture-KOSEN69---software-security/f63a82af-e1ad-40ed-89c4-03c6ca776e3f/scratchpad/lq-easy/slides/pptx/assets/logo-small.png">    </p:cNvPr>
           <p:cNvPicPr>
             <a:picLocks noChangeAspect="1"/>
           </p:cNvPicPr>
@@ -7590,7 +7225,7 @@
       </p:sp>
       <p:pic>
         <p:nvPicPr>
-          <p:cNvPr id="7" name="Image 2" descr="/private/tmp/claude-501/-Users-pop7-Library-CloudStorage-OneDrive-MonsterConnectCo--Ltd-Lecture-KOSEN69---software-security/f63a82af-e1ad-40ed-89c4-03c6ca776e3f/scratchpad/lq-anim/slides/pptx/assets/logo-small.png">    </p:cNvPr>
+          <p:cNvPr id="7" name="Image 2" descr="/private/tmp/claude-501/-Users-pop7-Library-CloudStorage-OneDrive-MonsterConnectCo--Ltd-Lecture-KOSEN69---software-security/f63a82af-e1ad-40ed-89c4-03c6ca776e3f/scratchpad/lq-easy/slides/pptx/assets/logo-small.png">    </p:cNvPr>
           <p:cNvPicPr>
             <a:picLocks noChangeAspect="1"/>
           </p:cNvPicPr>
@@ -7870,7 +7505,7 @@
                 <a:ea typeface="Calibri" pitchFamily="34" charset="-122"/>
                 <a:cs typeface="Calibri" pitchFamily="34" charset="-120"/>
               </a:rPr>
-              <a:t>Over-broad policies = blast radius</a:t>
+              <a:t>Read a statement as: Effect (allow or deny) · Action (what) · Resource (on which thing) · Condition (only when …)</a:t>
             </a:r>
             <a:endParaRPr lang="en-US" sz="1400" dirty="0"/>
           </a:p>
@@ -7891,7 +7526,7 @@
                 <a:ea typeface="Calibri" pitchFamily="34" charset="-122"/>
                 <a:cs typeface="Calibri" pitchFamily="34" charset="-120"/>
               </a:rPr>
-              <a:t>Resource:"*" → CWE-732 (incorrect permission assignment); Action:"*" → CWE-269 (improper privilege management) — they're graded as two distinct findings on the same policy, not one</a:t>
+              <a:t>Resource:"*" → CWE-732, Action:"*" → CWE-269: graded as two findings on the same policy</a:t>
             </a:r>
             <a:endParaRPr lang="en-US" sz="1400" dirty="0"/>
           </a:p>
@@ -7912,7 +7547,7 @@
                 <a:ea typeface="Calibri" pitchFamily="34" charset="-122"/>
                 <a:cs typeface="Calibri" pitchFamily="34" charset="-120"/>
               </a:rPr>
-              <a:t>Fix: two narrow statements on one bucket — s3:GetObject on app/* objects, plus s3:ListBucket limited by an s3:prefix Condition — not just a narrower ARN</a:t>
+              <a:t>Fix: use two statements for one bucket. Allow s3:GetObject on app/*. Allow s3:ListBucket only when the s3:prefix Condition matches app/*</a:t>
             </a:r>
             <a:endParaRPr lang="en-US" sz="1400" dirty="0"/>
           </a:p>
@@ -8000,7 +7635,7 @@
       </p:sp>
       <p:pic>
         <p:nvPicPr>
-          <p:cNvPr id="11" name="Image 1" descr="/private/tmp/claude-501/-Users-pop7-Library-CloudStorage-OneDrive-MonsterConnectCo--Ltd-Lecture-KOSEN69---software-security/f63a82af-e1ad-40ed-89c4-03c6ca776e3f/scratchpad/lq-anim/slides/pptx/assets/logo-small.png">    </p:cNvPr>
+          <p:cNvPr id="11" name="Image 1" descr="/private/tmp/claude-501/-Users-pop7-Library-CloudStorage-OneDrive-MonsterConnectCo--Ltd-Lecture-KOSEN69---software-security/f63a82af-e1ad-40ed-89c4-03c6ca776e3f/scratchpad/lq-easy/slides/pptx/assets/logo-small.png">    </p:cNvPr>
           <p:cNvPicPr>
             <a:picLocks noChangeAspect="1"/>
           </p:cNvPicPr>
@@ -8209,7 +7844,7 @@
       </p:sp>
       <p:pic>
         <p:nvPicPr>
-          <p:cNvPr id="7" name="Image 2" descr="/private/tmp/claude-501/-Users-pop7-Library-CloudStorage-OneDrive-MonsterConnectCo--Ltd-Lecture-KOSEN69---software-security/f63a82af-e1ad-40ed-89c4-03c6ca776e3f/scratchpad/lq-anim/slides/pptx/assets/logo-small.png">    </p:cNvPr>
+          <p:cNvPr id="7" name="Image 2" descr="/private/tmp/claude-501/-Users-pop7-Library-CloudStorage-OneDrive-MonsterConnectCo--Ltd-Lecture-KOSEN69---software-security/f63a82af-e1ad-40ed-89c4-03c6ca776e3f/scratchpad/lq-easy/slides/pptx/assets/logo-small.png">    </p:cNvPr>
           <p:cNvPicPr>
             <a:picLocks noChangeAspect="1"/>
           </p:cNvPicPr>
@@ -8510,7 +8145,7 @@
       </p:sp>
       <p:pic>
         <p:nvPicPr>
-          <p:cNvPr id="8" name="Image 1" descr="/private/tmp/claude-501/-Users-pop7-Library-CloudStorage-OneDrive-MonsterConnectCo--Ltd-Lecture-KOSEN69---software-security/f63a82af-e1ad-40ed-89c4-03c6ca776e3f/scratchpad/lq-anim/slides/pptx/assets/logo-small.png">    </p:cNvPr>
+          <p:cNvPr id="8" name="Image 1" descr="/private/tmp/claude-501/-Users-pop7-Library-CloudStorage-OneDrive-MonsterConnectCo--Ltd-Lecture-KOSEN69---software-security/f63a82af-e1ad-40ed-89c4-03c6ca776e3f/scratchpad/lq-easy/slides/pptx/assets/logo-small.png">    </p:cNvPr>
           <p:cNvPicPr>
             <a:picLocks noChangeAspect="1"/>
           </p:cNvPicPr>
